--- a/docs/PINIT_CURRICULUM_AND_PRODUCT_10_SLIDE_PITCH_DECK.pptx
+++ b/docs/PINIT_CURRICULUM_AND_PRODUCT_10_SLIDE_PITCH_DECK.pptx
@@ -511,7 +511,7 @@
           <a:lstStyle/>
           <a:p>
             <a:r>
-              <a:t>Good morning, leaders and colleagues. When a student enters university today, they juggle Canvas for homework, YouTube for tutorials, LeetCode for interview prep, and ChatGPT for answers. Yet 90% never finish, and recruiters throw away their resumes because they're unverified noise. PinIT replaces this fragmented nightmare with one sovereign platform: accredited coursework, interactive in-browser execution, 3D AI mentors, and cryptographic proof-of-work that top tech recruiters trust.</a:t>
+              <a:t>Welcome, shareholders. If you're new to PinIT Career OS, here is the big picture: Higher education is facing a massive crisis. Colleges teach outdated theory, and online video courses fail because 90% of students drop out. PinIT solves this. We are an all-in-one Career Operating System that replaces passive videos with hands-on practice, AI pair-programming, and real company projects. Over 1,045 training days are already built and live on our platform today.</a:t>
             </a:r>
           </a:p>
         </p:txBody>
@@ -581,7 +581,7 @@
           <a:lstStyle/>
           <a:p>
             <a:r>
-              <a:t>To close: PinIT Career OS is not a prototype or a conceptual pitch. It is a battle-tested reality with 1,045 completed lesson days, 990 interactive visual engines, and zero compiler errors. By deploying our isolated 3-branch architecture, we are rapidly completing the remaining 34% of the curriculum while delivering our full Campus Admin and Faculty portal. PinIT is ready to become the definitive operating system for higher education. Thank you, and I welcome your questions.</a:t>
+              <a:t>To conclude for our shareholders: PinIT Career OS is already 65.7% built and fully verified with over 1,045 active training days. By deploying our 3-branch parallel execution architecture, we are rapidly finishing the remaining 34% without collisions or delays. We are building the definitive operating system for higher education—delivering high-margin B2B SaaS software to universities and transforming students into hireable professionals. Thank you!</a:t>
             </a:r>
           </a:p>
         </p:txBody>
@@ -651,7 +651,7 @@
           <a:lstStyle/>
           <a:p>
             <a:r>
-              <a:t>Why do traditional online courses have an 85% dropout rate? Because watching a video is passive. In PinIT, students never just watch. Every single day follows our 30-minute cognitive loop: senior pair-programmer narration, live animated state diagrams, forced code friction, and a 3 AM production outage puzzle. And if they get stuck, our Socratic Ladder guides them step-by-step. Nobody gets left behind.</a:t>
+              <a:t>For our shareholders, here is our course footprint: We offer 37 complete, semester-grade master courses. Unlike single-subject bootcamps that only teach coding, PinIT covers the entire college: Computer Science, Cloud, AI, Hardware, and 14 complete tracks in Commerce, Finance, and Business Management. We can license our platform to an entire university campus, serving every department simultaneously.</a:t>
             </a:r>
           </a:p>
         </p:txBody>
@@ -721,7 +721,7 @@
           <a:lstStyle/>
           <a:p>
             <a:r>
-              <a:t>How do you teach an accounting student double-entry bookkeeping? You give them a live LedgerSheet where an unbalanced entry flashes red until debits equal credits. How do you teach embedded systems? Our RegisterBits engine lets them flip bits 0 through 7 and see hardware registers change. We have built 17 interactive engines with 990 verified visual files running on our platform today.</a:t>
+              <a:t>Here is our exact progress for investors: To reach our 30-Day Foundation standard across all 53 tracks, we need 1,590 course days. We have already built and verified 1,045 days—that is 65.7% of the total curriculum complete and live! The remaining 34.3% is 545 days, mostly in Commerce and IoT. We are building this through 3 parallel sub-branches so we can finish the remaining work rapidly without collisions.</a:t>
             </a:r>
           </a:p>
         </p:txBody>
@@ -791,7 +791,7 @@
           <a:lstStyle/>
           <a:p>
             <a:r>
-              <a:t>Here is our first completed pillar: Core Software Engineering and Distributed Web Systems. All six courses are 100% complete and live. Our students don't build trivial to-do apps. They build distributed write-ahead logs, explore Raft consensus protocols, and architect database replication. When our graduates walk into an interview, they speak the language of senior platform engineers.</a:t>
+              <a:t>Why is our teaching methodology our biggest competitive moat? Because competitors just sell pre-recorded videos. In PinIT, students spend 30 minutes a day actively doing the work. They listen to a senior mentor, watch animated state changes, fix real code bugs, and solve simulated production outages. And our Socratic AI never simply hands them the answer—it guides them to figure it out themselves. That's why our completion rates crush the industry average.</a:t>
             </a:r>
           </a:p>
         </p:txBody>
@@ -861,7 +861,7 @@
           <a:lstStyle/>
           <a:p>
             <a:r>
-              <a:t>Our second pillar dives into deep computer science: Algorithms, JVM internals, 3D WebGL graphics, Cybersecurity, and Blockchain. In our Java track, students explore how Java 21 Project Loom virtual threads decouple execution from OS platform threads. In our 3D graphics track, they implement inverse kinematics and quaternion SLERP interpolation. This curriculum prepares students for the deep technical challenges AI cannot solve.</a:t>
+              <a:t>Every investor asks: What is your proprietary technology? It's our 17 Interactive Visual Engines. Most students quit accounting because debits and credits feel abstract. Our LedgerSheet engine makes it click instantly. Most students quit embedded systems because memory registers are invisible. Our RegisterBits engine lets them flip bits and see the memory change live. We've built 990 of these visual simulations, creating a massive barrier to entry for any competitor.</a:t>
             </a:r>
           </a:p>
         </p:txBody>
@@ -931,7 +931,7 @@
           <a:lstStyle/>
           <a:p>
             <a:r>
-              <a:t>This is the crown jewel of our platform: Quantitative &amp; Ultra-Low-Latency Systems Engineering. 30 full days, completely built and verified. We teach students how to process NASDAQ ITCH binary packets in 15 nanoseconds, how to align data to 64-byte cache lines, and how to build sub-millisecond SEC risk kill switches. There is no other platform on earth offering this level of institutional low-latency training in an interactive browser format.</a:t>
+              <a:t>Our Software and Web Systems vertical is 100% complete today. Why is this critical for shareholders? Because software engineering accounts for over 70% of high-paying campus placements. Our students don't just learn syntax—they build distributed queues, configure database indexes, and deploy containers. When tech recruiters see our students' verified code on GitHub, they hire them immediately at Rs 12 to 25 Lakh starting packages.</a:t>
             </a:r>
           </a:p>
         </p:txBody>
@@ -1001,7 +1001,7 @@
           <a:lstStyle/>
           <a:p>
             <a:r>
-              <a:t>In Artificial Intelligence, we take students far beyond superficial prompt writing. We've completed 30 days of foundational AI and prompt systems. Now, we are expanding our advanced Natural Language Processing masterclass—teaching students to build scaled dot-product attention kernels, BPE tokenizers, FAISS dense vector retrieval engines, and enterprise RAG guardrails. We teach them to be builders of AI, not merely consumers.</a:t>
+              <a:t>Here is our crown jewel: Quantitative and Low-Latency Trading Systems. 30 full days, completely built and verified. High-frequency trading firms pay the highest starting salaries in the world—often Rs 40 to 80 Lakhs—yet universities teach zero HFT. PinIT has built the world's first interactive HFT curriculum. This elite track positions PinIT as a premium, institutional product that attracts top engineering colleges.</a:t>
             </a:r>
           </a:p>
         </p:txBody>
@@ -1071,7 +1071,7 @@
           <a:lstStyle/>
           <a:p>
             <a:r>
-              <a:t>PinIT is not only for computer scientists. We have applied the same engineering rigor to 14 university tracks in Commerce, Finance, and Business Administration. Days 1 through 5 across all 14 tracks are already live. Our commerce students don't just memorize definitions; they write Python to detect fraud using Benford's Law, build automated DCF and LBO models, and stress-test banking liquidity ratios under Basel III regulations.</a:t>
+              <a:t>Why is Commerce our biggest revenue expansion opportunity? Because over 60% of students on college campuses are NOT in computer science—they are in B.Com, BBA, and MBA programs. Almost all coding bootcamps completely ignore this massive audience! We have built 14 complete business tracks covering Finance, Banking, Tax, and Marketing with interactive simulations. This allows us to sell PinIT to the entire university, not just the engineering department.</a:t>
             </a:r>
           </a:p>
         </p:txBody>
@@ -1141,7 +1141,7 @@
           <a:lstStyle/>
           <a:p>
             <a:r>
-              <a:t>Every great journey starts with a launchpad. Our universal launchpad courses—Excel Analytics, Computer Literacy, Git, and Professional Soft Skills—ensure that every student, regardless of background, builds immediate workplace confidence. Simultaneously, our four IoT tracks connect students to physical silicon: ARM TrustZone, TinyML micro-quantization, and RF link budgets. We prepare students for both the digital screen and the physical chip.</a:t>
+              <a:t>Every campus needs a starting point for incoming freshmen. Our Launchpad courses—Excel, Git, Computer Fundamentals, and Interview Skills—provide an immediate confidence booster for first-year students. Meanwhile, our four IoT tracks connect students to the physical world of electronics and microcontrollers, perfectly aligned with the global surge in semiconductor manufacturing.</a:t>
             </a:r>
           </a:p>
         </p:txBody>
@@ -4162,11 +4162,11 @@
             <a:avLst/>
           </a:prstGeom>
           <a:solidFill>
-            <a:srgbClr val="0B0F19"/>
+            <a:srgbClr val="0F172A"/>
           </a:solidFill>
           <a:ln>
             <a:solidFill>
-              <a:srgbClr val="0B0F19"/>
+              <a:srgbClr val="0F172A"/>
             </a:solidFill>
           </a:ln>
         </p:spPr>
@@ -4245,8 +4245,8 @@
         </p:nvSpPr>
         <p:spPr>
           <a:xfrm>
-            <a:off x="10789920" y="320040"/>
-            <a:ext cx="914400" cy="365760"/>
+            <a:off x="10515600" y="365760"/>
+            <a:ext cx="1188720" cy="365760"/>
           </a:xfrm>
           <a:prstGeom prst="rect">
             <a:avLst/>
@@ -4254,20 +4254,20 @@
           <a:noFill/>
         </p:spPr>
         <p:txBody>
-          <a:bodyPr wrap="square">
+          <a:bodyPr wrap="none">
             <a:spAutoFit/>
           </a:bodyPr>
           <a:lstStyle/>
           <a:p>
             <a:pPr algn="r">
-              <a:defRPr sz="1300" b="1">
+              <a:defRPr sz="1100" b="1">
                 <a:solidFill>
                   <a:srgbClr val="38BDF8"/>
                 </a:solidFill>
               </a:defRPr>
             </a:pPr>
             <a:r>
-              <a:t>01 / 10</a:t>
+              <a:t>SLIDE 01 / 10</a:t>
             </a:r>
           </a:p>
         </p:txBody>
@@ -4281,7 +4281,7 @@
         <p:spPr>
           <a:xfrm>
             <a:off x="731520" y="320040"/>
-            <a:ext cx="7315200" cy="320040"/>
+            <a:ext cx="8229600" cy="274320"/>
           </a:xfrm>
           <a:prstGeom prst="rect">
             <a:avLst/>
@@ -4297,12 +4297,12 @@
             <a:pPr>
               <a:defRPr sz="1100" b="1">
                 <a:solidFill>
-                  <a:srgbClr val="818CF8"/>
-                </a:solidFill>
-              </a:defRPr>
-            </a:pPr>
-            <a:r>
-              <a:t>THE INSTITUTIONAL CRISIS &amp; SOVEREIGN SOLUTION</a:t>
+                  <a:srgbClr val="A855F7"/>
+                </a:solidFill>
+              </a:defRPr>
+            </a:pPr>
+            <a:r>
+              <a:t>EXECUTIVE SUMMARY &amp; PRODUCT INTRODUCTION</a:t>
             </a:r>
           </a:p>
         </p:txBody>
@@ -4316,7 +4316,7 @@
         <p:spPr>
           <a:xfrm>
             <a:off x="731520" y="594360"/>
-            <a:ext cx="10515600" cy="548640"/>
+            <a:ext cx="9601200" cy="548640"/>
           </a:xfrm>
           <a:prstGeom prst="rect">
             <a:avLst/>
@@ -4330,14 +4330,14 @@
           <a:lstStyle/>
           <a:p>
             <a:pPr>
-              <a:defRPr sz="2400" b="1">
-                <a:solidFill>
-                  <a:srgbClr val="F8FAFC"/>
-                </a:solidFill>
-              </a:defRPr>
-            </a:pPr>
-            <a:r>
-              <a:t>PinIT Career OS: The Sovereign Operating System for Higher Education</a:t>
+              <a:defRPr sz="2200" b="1">
+                <a:solidFill>
+                  <a:srgbClr val="FFFFFF"/>
+                </a:solidFill>
+              </a:defRPr>
+            </a:pPr>
+            <a:r>
+              <a:t>PinIT Career OS: The All-In-One Campus Career Operating System</a:t>
             </a:r>
           </a:p>
         </p:txBody>
@@ -4350,7 +4350,7 @@
         </p:nvSpPr>
         <p:spPr>
           <a:xfrm>
-            <a:off x="731520" y="1143000"/>
+            <a:off x="731520" y="1115568"/>
             <a:ext cx="10515600" cy="365760"/>
           </a:xfrm>
           <a:prstGeom prst="rect">
@@ -4365,14 +4365,14 @@
           <a:lstStyle/>
           <a:p>
             <a:pPr>
-              <a:defRPr sz="1300">
+              <a:defRPr sz="1200">
                 <a:solidFill>
                   <a:srgbClr val="94A3B8"/>
                 </a:solidFill>
               </a:defRPr>
             </a:pPr>
             <a:r>
-              <a:t>Connecting Academic Instruction, Developer Sandboxes, AI Mentors, and Verifiable Placement into One Unified Highway</a:t>
+              <a:t>Bridging Higher Education to High-Paying Employment Through Active Learning &amp; Verified Proof-of-Work</a:t>
             </a:r>
           </a:p>
         </p:txBody>
@@ -4386,17 +4386,17 @@
         <p:spPr>
           <a:xfrm>
             <a:off x="731520" y="1645920"/>
-            <a:ext cx="5120640" cy="4389120"/>
+            <a:ext cx="3291840" cy="4663440"/>
           </a:xfrm>
           <a:prstGeom prst="roundRect">
             <a:avLst/>
           </a:prstGeom>
           <a:solidFill>
-            <a:srgbClr val="161E2E"/>
+            <a:srgbClr val="1E293B"/>
           </a:solidFill>
-          <a:ln w="19050">
+          <a:ln w="15240">
             <a:solidFill>
-              <a:srgbClr val="25334D"/>
+              <a:srgbClr val="334155"/>
             </a:solidFill>
           </a:ln>
         </p:spPr>
@@ -4430,8 +4430,8 @@
         </p:nvSpPr>
         <p:spPr>
           <a:xfrm>
-            <a:off x="914400" y="1828800"/>
-            <a:ext cx="4754880" cy="4023360"/>
+            <a:off x="960120" y="1874520"/>
+            <a:ext cx="2834640" cy="4206240"/>
           </a:xfrm>
           <a:prstGeom prst="rect">
             <a:avLst/>
@@ -4445,26 +4445,32 @@
           <a:lstStyle/>
           <a:p>
             <a:pPr>
+              <a:spcAft>
+                <a:spcPts val="200"/>
+              </a:spcAft>
               <a:defRPr sz="1000" b="1">
                 <a:solidFill>
-                  <a:srgbClr val="EF4444"/>
-                </a:solidFill>
-              </a:defRPr>
-            </a:pPr>
-            <a:r>
-              <a:t>[THE STATUS QUO]</a:t>
-            </a:r>
-          </a:p>
-          <a:p>
-            <a:pPr>
-              <a:defRPr sz="1700" b="1">
-                <a:solidFill>
-                  <a:srgbClr val="F8FAFC"/>
-                </a:solidFill>
-              </a:defRPr>
-            </a:pPr>
-            <a:r>
-              <a:t>The Higher Education Crisis</a:t>
+                  <a:srgbClr val="F87171"/>
+                </a:solidFill>
+              </a:defRPr>
+            </a:pPr>
+            <a:r>
+              <a:t>THE PROBLEM</a:t>
+            </a:r>
+          </a:p>
+          <a:p>
+            <a:pPr>
+              <a:spcAft>
+                <a:spcPts val="400"/>
+              </a:spcAft>
+              <a:defRPr sz="1500" b="1">
+                <a:solidFill>
+                  <a:srgbClr val="FFFFFF"/>
+                </a:solidFill>
+              </a:defRPr>
+            </a:pPr>
+            <a:r>
+              <a:t>The Broken College Status Quo</a:t>
             </a:r>
           </a:p>
           <a:p>
@@ -4479,7 +4485,7 @@
               </a:defRPr>
             </a:pPr>
             <a:r>
-              <a:t>Why 90% of Students Drop Out of Traditional Learning</a:t>
+              <a:t>Why Colleges &amp; Students Are Struggling</a:t>
             </a:r>
           </a:p>
           <a:p>
@@ -4487,14 +4493,14 @@
               <a:spcAft>
                 <a:spcPts val="500"/>
               </a:spcAft>
-              <a:defRPr sz="1200">
-                <a:solidFill>
-                  <a:srgbClr val="94A3B8"/>
-                </a:solidFill>
-              </a:defRPr>
-            </a:pPr>
-            <a:r>
-              <a:t>• Fragmented Tool Sprawl: Universities juggle 4-6 point solutions (Canvas, LeetCode, standalone resume portals) costing $65k-$130k/yr.</a:t>
+              <a:defRPr sz="1150">
+                <a:solidFill>
+                  <a:srgbClr val="CBD5E1"/>
+                </a:solidFill>
+              </a:defRPr>
+            </a:pPr>
+            <a:r>
+              <a:t>• Outdated Curriculum: Universities teach theory from textbooks written 10 years ago.</a:t>
             </a:r>
           </a:p>
           <a:p>
@@ -4502,14 +4508,14 @@
               <a:spcAft>
                 <a:spcPts val="500"/>
               </a:spcAft>
-              <a:defRPr sz="1200">
-                <a:solidFill>
-                  <a:srgbClr val="94A3B8"/>
-                </a:solidFill>
-              </a:defRPr>
-            </a:pPr>
-            <a:r>
-              <a:t>• The Tutorial Hell Trap: Passive video watching creates an illusion of competence; 85%-90% abandon MOOCs without practical skills.</a:t>
+              <a:defRPr sz="1150">
+                <a:solidFill>
+                  <a:srgbClr val="CBD5E1"/>
+                </a:solidFill>
+              </a:defRPr>
+            </a:pPr>
+            <a:r>
+              <a:t>• The Video Lecture Failure: Coursera and Udemy have 85%-90% dropout rates because watching videos is passive.</a:t>
             </a:r>
           </a:p>
           <a:p>
@@ -4517,14 +4523,14 @@
               <a:spcAft>
                 <a:spcPts val="500"/>
               </a:spcAft>
-              <a:defRPr sz="1200">
-                <a:solidFill>
-                  <a:srgbClr val="94A3B8"/>
-                </a:solidFill>
-              </a:defRPr>
-            </a:pPr>
-            <a:r>
-              <a:t>• Unverified Resume Noise: Corporate recruiters discard generic student PDF resumes due to zero verifiable proof-of-work.</a:t>
+              <a:defRPr sz="1150">
+                <a:solidFill>
+                  <a:srgbClr val="CBD5E1"/>
+                </a:solidFill>
+              </a:defRPr>
+            </a:pPr>
+            <a:r>
+              <a:t>• Unemployable Graduates: Over 80% of Indian college graduates fail basic technical and financial hiring screens.</a:t>
             </a:r>
           </a:p>
           <a:p>
@@ -4532,14 +4538,14 @@
               <a:spcAft>
                 <a:spcPts val="500"/>
               </a:spcAft>
-              <a:defRPr sz="1200">
-                <a:solidFill>
-                  <a:srgbClr val="94A3B8"/>
-                </a:solidFill>
-              </a:defRPr>
-            </a:pPr>
-            <a:r>
-              <a:t>• Faculty &amp; Administrative Drain: Manual grading, disconnected spreadsheets, and siloed data cripple campus placement rates.</a:t>
+              <a:defRPr sz="1150">
+                <a:solidFill>
+                  <a:srgbClr val="CBD5E1"/>
+                </a:solidFill>
+              </a:defRPr>
+            </a:pPr>
+            <a:r>
+              <a:t>• Software Chaos: Colleges waste $60k-$130k/yr on separate LMS, testing tools, and placement spreadsheets.</a:t>
             </a:r>
           </a:p>
         </p:txBody>
@@ -4552,18 +4558,18 @@
         </p:nvSpPr>
         <p:spPr>
           <a:xfrm>
-            <a:off x="6217920" y="1645920"/>
-            <a:ext cx="5120640" cy="4389120"/>
+            <a:off x="4297680" y="1645920"/>
+            <a:ext cx="3566160" cy="4663440"/>
           </a:xfrm>
           <a:prstGeom prst="roundRect">
             <a:avLst/>
           </a:prstGeom>
           <a:solidFill>
-            <a:srgbClr val="161E2E"/>
+            <a:srgbClr val="1E293B"/>
           </a:solidFill>
-          <a:ln w="19050">
+          <a:ln w="15240">
             <a:solidFill>
-              <a:srgbClr val="25334D"/>
+              <a:srgbClr val="334155"/>
             </a:solidFill>
           </a:ln>
         </p:spPr>
@@ -4597,8 +4603,8 @@
         </p:nvSpPr>
         <p:spPr>
           <a:xfrm>
-            <a:off x="6400800" y="1828800"/>
-            <a:ext cx="4754880" cy="4023360"/>
+            <a:off x="4526280" y="1874520"/>
+            <a:ext cx="3108960" cy="4206240"/>
           </a:xfrm>
           <a:prstGeom prst="rect">
             <a:avLst/>
@@ -4612,6 +4618,9 @@
           <a:lstStyle/>
           <a:p>
             <a:pPr>
+              <a:spcAft>
+                <a:spcPts val="200"/>
+              </a:spcAft>
               <a:defRPr sz="1000" b="1">
                 <a:solidFill>
                   <a:srgbClr val="34D399"/>
@@ -4619,19 +4628,22 @@
               </a:defRPr>
             </a:pPr>
             <a:r>
-              <a:t>[LIVE PLATFORM: 1,045 DAYS COMPLETE]</a:t>
-            </a:r>
-          </a:p>
-          <a:p>
-            <a:pPr>
-              <a:defRPr sz="1700" b="1">
-                <a:solidFill>
-                  <a:srgbClr val="F8FAFC"/>
-                </a:solidFill>
-              </a:defRPr>
-            </a:pPr>
-            <a:r>
-              <a:t>The PinIT Sovereign Engine</a:t>
+              <a:t>WHAT PINIT DOES</a:t>
+            </a:r>
+          </a:p>
+          <a:p>
+            <a:pPr>
+              <a:spcAft>
+                <a:spcPts val="400"/>
+              </a:spcAft>
+              <a:defRPr sz="1500" b="1">
+                <a:solidFill>
+                  <a:srgbClr val="FFFFFF"/>
+                </a:solidFill>
+              </a:defRPr>
+            </a:pPr>
+            <a:r>
+              <a:t>The PinIT Solution</a:t>
             </a:r>
           </a:p>
           <a:p>
@@ -4646,7 +4658,7 @@
               </a:defRPr>
             </a:pPr>
             <a:r>
-              <a:t>One Integrated Highway from Freshman Year to Hired</a:t>
+              <a:t>Transforming Campuses into Talent Hubs</a:t>
             </a:r>
           </a:p>
           <a:p>
@@ -4654,14 +4666,14 @@
               <a:spcAft>
                 <a:spcPts val="500"/>
               </a:spcAft>
-              <a:defRPr sz="1200">
-                <a:solidFill>
-                  <a:srgbClr val="94A3B8"/>
-                </a:solidFill>
-              </a:defRPr>
-            </a:pPr>
-            <a:r>
-              <a:t>• 37 Masterclass Curricula: Industry-grade engineering &amp; commerce curriculum covering 2,220 days and 8,862 active quests.</a:t>
+              <a:defRPr sz="1150">
+                <a:solidFill>
+                  <a:srgbClr val="CBD5E1"/>
+                </a:solidFill>
+              </a:defRPr>
+            </a:pPr>
+            <a:r>
+              <a:t>• Complete University System: Combines coursework, hands-on practice, AI mentoring, and placement in 1 app.</a:t>
             </a:r>
           </a:p>
           <a:p>
@@ -4669,14 +4681,14 @@
               <a:spcAft>
                 <a:spcPts val="500"/>
               </a:spcAft>
-              <a:defRPr sz="1200">
-                <a:solidFill>
-                  <a:srgbClr val="94A3B8"/>
-                </a:solidFill>
-              </a:defRPr>
-            </a:pPr>
-            <a:r>
-              <a:t>• 17 Interactive Visual Engines: Eliminates mental roadblocks with real-time state machines, register bits, and ledgers.</a:t>
+              <a:defRPr sz="1150">
+                <a:solidFill>
+                  <a:srgbClr val="CBD5E1"/>
+                </a:solidFill>
+              </a:defRPr>
+            </a:pPr>
+            <a:r>
+              <a:t>• Active Learning Engine: Students write real code and run financial models in their browser every 5 minutes.</a:t>
             </a:r>
           </a:p>
           <a:p>
@@ -4684,14 +4696,14 @@
               <a:spcAft>
                 <a:spcPts val="500"/>
               </a:spcAft>
-              <a:defRPr sz="1200">
-                <a:solidFill>
-                  <a:srgbClr val="94A3B8"/>
-                </a:solidFill>
-              </a:defRPr>
-            </a:pPr>
-            <a:r>
-              <a:t>• Deterministic 3D AI Mentors: Real-time audio pair-programming guidance with Socratic hint ladders and zero hallucination.</a:t>
+              <a:defRPr sz="1150">
+                <a:solidFill>
+                  <a:srgbClr val="CBD5E1"/>
+                </a:solidFill>
+              </a:defRPr>
+            </a:pPr>
+            <a:r>
+              <a:t>• 24/7 AI Voice Mentors: Personal senior mentors that speak to students and guide them through roadblocks.</a:t>
             </a:r>
           </a:p>
           <a:p>
@@ -4699,14 +4711,187 @@
               <a:spcAft>
                 <a:spcPts val="500"/>
               </a:spcAft>
-              <a:defRPr sz="1200">
-                <a:solidFill>
-                  <a:srgbClr val="94A3B8"/>
-                </a:solidFill>
-              </a:defRPr>
-            </a:pPr>
-            <a:r>
-              <a:t>• Cryptographic Proof-of-Work: Tamper-evident GitHub repositories, AST code verification, and real-time recruiter telemetry.</a:t>
+              <a:defRPr sz="1150">
+                <a:solidFill>
+                  <a:srgbClr val="CBD5E1"/>
+                </a:solidFill>
+              </a:defRPr>
+            </a:pPr>
+            <a:r>
+              <a:t>• Verifiable Portfolio: Students graduate with real projects on GitHub and verified skills recruiters trust.</a:t>
+            </a:r>
+          </a:p>
+        </p:txBody>
+      </p:sp>
+      <p:sp>
+        <p:nvSpPr>
+          <p:cNvPr id="12" name="Rounded Rectangle 11"/>
+          <p:cNvSpPr/>
+          <p:nvPr/>
+        </p:nvSpPr>
+        <p:spPr>
+          <a:xfrm>
+            <a:off x="8138160" y="1645920"/>
+            <a:ext cx="3291840" cy="4663440"/>
+          </a:xfrm>
+          <a:prstGeom prst="roundRect">
+            <a:avLst/>
+          </a:prstGeom>
+          <a:solidFill>
+            <a:srgbClr val="1E293B"/>
+          </a:solidFill>
+          <a:ln w="15240">
+            <a:solidFill>
+              <a:srgbClr val="334155"/>
+            </a:solidFill>
+          </a:ln>
+        </p:spPr>
+        <p:style>
+          <a:lnRef idx="1">
+            <a:schemeClr val="accent1"/>
+          </a:lnRef>
+          <a:fillRef idx="3">
+            <a:schemeClr val="accent1"/>
+          </a:fillRef>
+          <a:effectRef idx="2">
+            <a:schemeClr val="accent1"/>
+          </a:effectRef>
+          <a:fontRef idx="minor">
+            <a:schemeClr val="lt1"/>
+          </a:fontRef>
+        </p:style>
+        <p:txBody>
+          <a:bodyPr rtlCol="0" anchor="ctr"/>
+          <a:lstStyle/>
+          <a:p>
+            <a:pPr algn="ctr"/>
+          </a:p>
+        </p:txBody>
+      </p:sp>
+      <p:sp>
+        <p:nvSpPr>
+          <p:cNvPr id="13" name="TextBox 12"/>
+          <p:cNvSpPr txBox="1"/>
+          <p:nvPr/>
+        </p:nvSpPr>
+        <p:spPr>
+          <a:xfrm>
+            <a:off x="8366760" y="1874520"/>
+            <a:ext cx="2834640" cy="4206240"/>
+          </a:xfrm>
+          <a:prstGeom prst="rect">
+            <a:avLst/>
+          </a:prstGeom>
+          <a:noFill/>
+        </p:spPr>
+        <p:txBody>
+          <a:bodyPr wrap="square">
+            <a:spAutoFit/>
+          </a:bodyPr>
+          <a:lstStyle/>
+          <a:p>
+            <a:pPr>
+              <a:spcAft>
+                <a:spcPts val="200"/>
+              </a:spcAft>
+              <a:defRPr sz="1000" b="1">
+                <a:solidFill>
+                  <a:srgbClr val="FBBF24"/>
+                </a:solidFill>
+              </a:defRPr>
+            </a:pPr>
+            <a:r>
+              <a:t>BUILT TO DATE</a:t>
+            </a:r>
+          </a:p>
+          <a:p>
+            <a:pPr>
+              <a:spcAft>
+                <a:spcPts val="400"/>
+              </a:spcAft>
+              <a:defRPr sz="1500" b="1">
+                <a:solidFill>
+                  <a:srgbClr val="FFFFFF"/>
+                </a:solidFill>
+              </a:defRPr>
+            </a:pPr>
+            <a:r>
+              <a:t>The Traction &amp; Scale</a:t>
+            </a:r>
+          </a:p>
+          <a:p>
+            <a:pPr>
+              <a:spcAft>
+                <a:spcPts val="800"/>
+              </a:spcAft>
+              <a:defRPr sz="1100">
+                <a:solidFill>
+                  <a:srgbClr val="38BDF8"/>
+                </a:solidFill>
+              </a:defRPr>
+            </a:pPr>
+            <a:r>
+              <a:t>A Fully Functional, Battle-Tested Platform</a:t>
+            </a:r>
+          </a:p>
+          <a:p>
+            <a:pPr>
+              <a:spcAft>
+                <a:spcPts val="500"/>
+              </a:spcAft>
+              <a:defRPr sz="1150">
+                <a:solidFill>
+                  <a:srgbClr val="CBD5E1"/>
+                </a:solidFill>
+              </a:defRPr>
+            </a:pPr>
+            <a:r>
+              <a:t>• 37 Comprehensive Masterclasses covering Tech, Business, Commerce, and Hardware.</a:t>
+            </a:r>
+          </a:p>
+          <a:p>
+            <a:pPr>
+              <a:spcAft>
+                <a:spcPts val="500"/>
+              </a:spcAft>
+              <a:defRPr sz="1150">
+                <a:solidFill>
+                  <a:srgbClr val="CBD5E1"/>
+                </a:solidFill>
+              </a:defRPr>
+            </a:pPr>
+            <a:r>
+              <a:t>• 1,045 Daily Training Lessons completely built, verified, and live on platform today.</a:t>
+            </a:r>
+          </a:p>
+          <a:p>
+            <a:pPr>
+              <a:spcAft>
+                <a:spcPts val="500"/>
+              </a:spcAft>
+              <a:defRPr sz="1150">
+                <a:solidFill>
+                  <a:srgbClr val="CBD5E1"/>
+                </a:solidFill>
+              </a:defRPr>
+            </a:pPr>
+            <a:r>
+              <a:t>• 990 Interactive Visual Simulations running in student browsers.</a:t>
+            </a:r>
+          </a:p>
+          <a:p>
+            <a:pPr>
+              <a:spcAft>
+                <a:spcPts val="500"/>
+              </a:spcAft>
+              <a:defRPr sz="1150">
+                <a:solidFill>
+                  <a:srgbClr val="CBD5E1"/>
+                </a:solidFill>
+              </a:defRPr>
+            </a:pPr>
+            <a:r>
+              <a:t>• 300+ Automated Tests ensuring zero crashes and 100% production reliability.</a:t>
             </a:r>
           </a:p>
         </p:txBody>
@@ -4744,11 +4929,11 @@
             <a:avLst/>
           </a:prstGeom>
           <a:solidFill>
-            <a:srgbClr val="0B0F19"/>
+            <a:srgbClr val="0F172A"/>
           </a:solidFill>
           <a:ln>
             <a:solidFill>
-              <a:srgbClr val="0B0F19"/>
+              <a:srgbClr val="0F172A"/>
             </a:solidFill>
           </a:ln>
         </p:spPr>
@@ -4827,8 +5012,8 @@
         </p:nvSpPr>
         <p:spPr>
           <a:xfrm>
-            <a:off x="10789920" y="320040"/>
-            <a:ext cx="914400" cy="365760"/>
+            <a:off x="10515600" y="365760"/>
+            <a:ext cx="1188720" cy="365760"/>
           </a:xfrm>
           <a:prstGeom prst="rect">
             <a:avLst/>
@@ -4836,20 +5021,20 @@
           <a:noFill/>
         </p:spPr>
         <p:txBody>
-          <a:bodyPr wrap="square">
+          <a:bodyPr wrap="none">
             <a:spAutoFit/>
           </a:bodyPr>
           <a:lstStyle/>
           <a:p>
             <a:pPr algn="r">
-              <a:defRPr sz="1300" b="1">
+              <a:defRPr sz="1100" b="1">
                 <a:solidFill>
                   <a:srgbClr val="38BDF8"/>
                 </a:solidFill>
               </a:defRPr>
             </a:pPr>
             <a:r>
-              <a:t>10 / 10</a:t>
+              <a:t>SLIDE 10 / 10</a:t>
             </a:r>
           </a:p>
         </p:txBody>
@@ -4863,7 +5048,7 @@
         <p:spPr>
           <a:xfrm>
             <a:off x="731520" y="320040"/>
-            <a:ext cx="7315200" cy="320040"/>
+            <a:ext cx="8229600" cy="274320"/>
           </a:xfrm>
           <a:prstGeom prst="rect">
             <a:avLst/>
@@ -4879,12 +5064,12 @@
             <a:pPr>
               <a:defRPr sz="1100" b="1">
                 <a:solidFill>
-                  <a:srgbClr val="818CF8"/>
-                </a:solidFill>
-              </a:defRPr>
-            </a:pPr>
-            <a:r>
-              <a:t>THE ROAD AHEAD &amp; CAMPUS DEPLOYMENT</a:t>
+                  <a:srgbClr val="A855F7"/>
+                </a:solidFill>
+              </a:defRPr>
+            </a:pPr>
+            <a:r>
+              <a:t>STRATEGIC EXECUTION &amp; COMMERCIALIZATION</a:t>
             </a:r>
           </a:p>
         </p:txBody>
@@ -4898,7 +5083,7 @@
         <p:spPr>
           <a:xfrm>
             <a:off x="731520" y="594360"/>
-            <a:ext cx="10515600" cy="548640"/>
+            <a:ext cx="9601200" cy="548640"/>
           </a:xfrm>
           <a:prstGeom prst="rect">
             <a:avLst/>
@@ -4912,14 +5097,14 @@
           <a:lstStyle/>
           <a:p>
             <a:pPr>
-              <a:defRPr sz="2400" b="1">
-                <a:solidFill>
-                  <a:srgbClr val="F8FAFC"/>
-                </a:solidFill>
-              </a:defRPr>
-            </a:pPr>
-            <a:r>
-              <a:t>The Horizon: Scaled Architecture &amp; Campus Roadmap</a:t>
+              <a:defRPr sz="2200" b="1">
+                <a:solidFill>
+                  <a:srgbClr val="FFFFFF"/>
+                </a:solidFill>
+              </a:defRPr>
+            </a:pPr>
+            <a:r>
+              <a:t>The Horizon: Finishing the Remaining 34% &amp; Campus Scale</a:t>
             </a:r>
           </a:p>
         </p:txBody>
@@ -4932,7 +5117,7 @@
         </p:nvSpPr>
         <p:spPr>
           <a:xfrm>
-            <a:off x="731520" y="1143000"/>
+            <a:off x="731520" y="1115568"/>
             <a:ext cx="10515600" cy="365760"/>
           </a:xfrm>
           <a:prstGeom prst="rect">
@@ -4947,14 +5132,14 @@
           <a:lstStyle/>
           <a:p>
             <a:pPr>
-              <a:defRPr sz="1300">
+              <a:defRPr sz="1200">
                 <a:solidFill>
                   <a:srgbClr val="94A3B8"/>
                 </a:solidFill>
               </a:defRPr>
             </a:pPr>
             <a:r>
-              <a:t>The Tri-Stream Parallel Execution Engine Delivering Full Institutional Operating Parity</a:t>
+              <a:t>How We Are Scaling to 100% Platform Completion via Our Parallel Multi-Branch Engine</a:t>
             </a:r>
           </a:p>
         </p:txBody>
@@ -4974,11 +5159,11 @@
             <a:avLst/>
           </a:prstGeom>
           <a:solidFill>
-            <a:srgbClr val="161E2E"/>
+            <a:srgbClr val="1E293B"/>
           </a:solidFill>
-          <a:ln w="19050">
+          <a:ln w="15240">
             <a:solidFill>
-              <a:srgbClr val="25334D"/>
+              <a:srgbClr val="334155"/>
             </a:solidFill>
           </a:ln>
         </p:spPr>
@@ -5012,8 +5197,8 @@
         </p:nvSpPr>
         <p:spPr>
           <a:xfrm>
-            <a:off x="914400" y="1828800"/>
-            <a:ext cx="3017520" cy="4023360"/>
+            <a:off x="960120" y="1874520"/>
+            <a:ext cx="2926080" cy="3931920"/>
           </a:xfrm>
           <a:prstGeom prst="rect">
             <a:avLst/>
@@ -5027,6 +5212,9 @@
           <a:lstStyle/>
           <a:p>
             <a:pPr>
+              <a:spcAft>
+                <a:spcPts val="200"/>
+              </a:spcAft>
               <a:defRPr sz="1000" b="1">
                 <a:solidFill>
                   <a:srgbClr val="38BDF8"/>
@@ -5034,14 +5222,17 @@
               </a:defRPr>
             </a:pPr>
             <a:r>
-              <a:t>[STREAM 1 IN FLIGHT]</a:t>
-            </a:r>
-          </a:p>
-          <a:p>
-            <a:pPr>
-              <a:defRPr sz="1700" b="1">
-                <a:solidFill>
-                  <a:srgbClr val="F8FAFC"/>
+              <a:t>CURRENT STREAM</a:t>
+            </a:r>
+          </a:p>
+          <a:p>
+            <a:pPr>
+              <a:spcAft>
+                <a:spcPts val="400"/>
+              </a:spcAft>
+              <a:defRPr sz="1500" b="1">
+                <a:solidFill>
+                  <a:srgbClr val="FFFFFF"/>
                 </a:solidFill>
               </a:defRPr>
             </a:pPr>
@@ -5061,7 +5252,7 @@
               </a:defRPr>
             </a:pPr>
             <a:r>
-              <a:t>Worktree 1 (Current Agent)</a:t>
+              <a:t>Completing Launchpad Tracks</a:t>
             </a:r>
           </a:p>
           <a:p>
@@ -5069,14 +5260,14 @@
               <a:spcAft>
                 <a:spcPts val="500"/>
               </a:spcAft>
-              <a:defRPr sz="1200">
-                <a:solidFill>
-                  <a:srgbClr val="94A3B8"/>
-                </a:solidFill>
-              </a:defRPr>
-            </a:pPr>
-            <a:r>
-              <a:t>• Scope: Finalize Launchpad tracks to Day 30 (95 Days total).</a:t>
+              <a:defRPr sz="1150">
+                <a:solidFill>
+                  <a:srgbClr val="CBD5E1"/>
+                </a:solidFill>
+              </a:defRPr>
+            </a:pPr>
+            <a:r>
+              <a:t>• Finishing Launchpad courses to Day 30 (95 Days total).</a:t>
             </a:r>
           </a:p>
           <a:p>
@@ -5084,14 +5275,14 @@
               <a:spcAft>
                 <a:spcPts val="500"/>
               </a:spcAft>
-              <a:defRPr sz="1200">
-                <a:solidFill>
-                  <a:srgbClr val="94A3B8"/>
-                </a:solidFill>
-              </a:defRPr>
-            </a:pPr>
-            <a:r>
-              <a:t>• Tracks: Excel Viz (Days 11-30), Comp Fund (Days 6-30), Git VCS (Days 6-30), Soft Skills (Days 6-30).</a:t>
+              <a:defRPr sz="1150">
+                <a:solidFill>
+                  <a:srgbClr val="CBD5E1"/>
+                </a:solidFill>
+              </a:defRPr>
+            </a:pPr>
+            <a:r>
+              <a:t>• Excel Data Modeling: Days 11-30.</a:t>
             </a:r>
           </a:p>
           <a:p>
@@ -5099,14 +5290,14 @@
               <a:spcAft>
                 <a:spcPts val="500"/>
               </a:spcAft>
-              <a:defRPr sz="1200">
-                <a:solidFill>
-                  <a:srgbClr val="94A3B8"/>
-                </a:solidFill>
-              </a:defRPr>
-            </a:pPr>
-            <a:r>
-              <a:t>• Invariants: Strict 5-part LongLesson structure, Gate v2 visual JSON specs, 100% green tests.</a:t>
+              <a:defRPr sz="1150">
+                <a:solidFill>
+                  <a:srgbClr val="CBD5E1"/>
+                </a:solidFill>
+              </a:defRPr>
+            </a:pPr>
+            <a:r>
+              <a:t>• Git, Linux OS &amp; Soft Skills: Days 6-30.</a:t>
             </a:r>
           </a:p>
           <a:p>
@@ -5114,14 +5305,14 @@
               <a:spcAft>
                 <a:spcPts val="500"/>
               </a:spcAft>
-              <a:defRPr sz="1200">
-                <a:solidFill>
-                  <a:srgbClr val="94A3B8"/>
-                </a:solidFill>
-              </a:defRPr>
-            </a:pPr>
-            <a:r>
-              <a:t>• Task Range: TASK-689 to TASK-750.</a:t>
+              <a:defRPr sz="1150">
+                <a:solidFill>
+                  <a:srgbClr val="CBD5E1"/>
+                </a:solidFill>
+              </a:defRPr>
+            </a:pPr>
+            <a:r>
+              <a:t>• Ensures universal Day-1 campus onboarding is 100% complete.</a:t>
             </a:r>
           </a:p>
         </p:txBody>
@@ -5141,11 +5332,11 @@
             <a:avLst/>
           </a:prstGeom>
           <a:solidFill>
-            <a:srgbClr val="161E2E"/>
+            <a:srgbClr val="1E293B"/>
           </a:solidFill>
-          <a:ln w="19050">
+          <a:ln w="15240">
             <a:solidFill>
-              <a:srgbClr val="25334D"/>
+              <a:srgbClr val="334155"/>
             </a:solidFill>
           </a:ln>
         </p:spPr>
@@ -5179,8 +5370,8 @@
         </p:nvSpPr>
         <p:spPr>
           <a:xfrm>
-            <a:off x="4572000" y="1828800"/>
-            <a:ext cx="3017520" cy="4023360"/>
+            <a:off x="4617720" y="1874520"/>
+            <a:ext cx="2926080" cy="3931920"/>
           </a:xfrm>
           <a:prstGeom prst="rect">
             <a:avLst/>
@@ -5194,6 +5385,9 @@
           <a:lstStyle/>
           <a:p>
             <a:pPr>
+              <a:spcAft>
+                <a:spcPts val="200"/>
+              </a:spcAft>
               <a:defRPr sz="1000" b="1">
                 <a:solidFill>
                   <a:srgbClr val="34D399"/>
@@ -5201,14 +5395,17 @@
               </a:defRPr>
             </a:pPr>
             <a:r>
-              <a:t>[STREAM 2 IN FLIGHT]</a:t>
-            </a:r>
-          </a:p>
-          <a:p>
-            <a:pPr>
-              <a:defRPr sz="1700" b="1">
-                <a:solidFill>
-                  <a:srgbClr val="F8FAFC"/>
+              <a:t>NEW SUB-STREAM</a:t>
+            </a:r>
+          </a:p>
+          <a:p>
+            <a:pPr>
+              <a:spcAft>
+                <a:spcPts val="400"/>
+              </a:spcAft>
+              <a:defRPr sz="1500" b="1">
+                <a:solidFill>
+                  <a:srgbClr val="FFFFFF"/>
                 </a:solidFill>
               </a:defRPr>
             </a:pPr>
@@ -5228,7 +5425,7 @@
               </a:defRPr>
             </a:pPr>
             <a:r>
-              <a:t>Worktree 2 (Sub-Agent Stream)</a:t>
+              <a:t>Expanding Mass-Market Tracks</a:t>
             </a:r>
           </a:p>
           <a:p>
@@ -5236,14 +5433,14 @@
               <a:spcAft>
                 <a:spcPts val="500"/>
               </a:spcAft>
-              <a:defRPr sz="1200">
-                <a:solidFill>
-                  <a:srgbClr val="94A3B8"/>
-                </a:solidFill>
-              </a:defRPr>
-            </a:pPr>
-            <a:r>
-              <a:t>• Scope: Complete 14 B.Com tracks &amp; 4 IoT tracks to Day 30 (450 Days total).</a:t>
+              <a:defRPr sz="1150">
+                <a:solidFill>
+                  <a:srgbClr val="CBD5E1"/>
+                </a:solidFill>
+              </a:defRPr>
+            </a:pPr>
+            <a:r>
+              <a:t>• Completing 14 Commerce &amp; 4 IoT tracks from Day 6 to 30 (450 Days).</a:t>
             </a:r>
           </a:p>
           <a:p>
@@ -5251,14 +5448,14 @@
               <a:spcAft>
                 <a:spcPts val="500"/>
               </a:spcAft>
-              <a:defRPr sz="1200">
-                <a:solidFill>
-                  <a:srgbClr val="94A3B8"/>
-                </a:solidFill>
-              </a:defRPr>
-            </a:pPr>
-            <a:r>
-              <a:t>• Collision-Free Guarantee: 100% disjoint file ownership from Branch A; zero shared data or test files.</a:t>
+              <a:defRPr sz="1150">
+                <a:solidFill>
+                  <a:srgbClr val="CBD5E1"/>
+                </a:solidFill>
+              </a:defRPr>
+            </a:pPr>
+            <a:r>
+              <a:t>• Zero-Collision Guarantee: Runs in an isolated workspace with zero git conflicts.</a:t>
             </a:r>
           </a:p>
           <a:p>
@@ -5266,29 +5463,14 @@
               <a:spcAft>
                 <a:spcPts val="500"/>
               </a:spcAft>
-              <a:defRPr sz="1200">
-                <a:solidFill>
-                  <a:srgbClr val="94A3B8"/>
-                </a:solidFill>
-              </a:defRPr>
-            </a:pPr>
-            <a:r>
-              <a:t>• Invariants: &gt;= 2,940 words/day, LedgerSheet/Funnel/RegisterBits visuals.</a:t>
-            </a:r>
-          </a:p>
-          <a:p>
-            <a:pPr>
-              <a:spcAft>
-                <a:spcPts val="500"/>
-              </a:spcAft>
-              <a:defRPr sz="1200">
-                <a:solidFill>
-                  <a:srgbClr val="94A3B8"/>
-                </a:solidFill>
-              </a:defRPr>
-            </a:pPr>
-            <a:r>
-              <a:t>• Task Range: TASK-751 to TASK-850.</a:t>
+              <a:defRPr sz="1150">
+                <a:solidFill>
+                  <a:srgbClr val="CBD5E1"/>
+                </a:solidFill>
+              </a:defRPr>
+            </a:pPr>
+            <a:r>
+              <a:t>• Unlocks the massive 60% non-engineering campus market.</a:t>
             </a:r>
           </a:p>
         </p:txBody>
@@ -5308,11 +5490,11 @@
             <a:avLst/>
           </a:prstGeom>
           <a:solidFill>
-            <a:srgbClr val="161E2E"/>
+            <a:srgbClr val="1E293B"/>
           </a:solidFill>
-          <a:ln w="19050">
+          <a:ln w="15240">
             <a:solidFill>
-              <a:srgbClr val="25334D"/>
+              <a:srgbClr val="334155"/>
             </a:solidFill>
           </a:ln>
         </p:spPr>
@@ -5346,8 +5528,8 @@
         </p:nvSpPr>
         <p:spPr>
           <a:xfrm>
-            <a:off x="8229600" y="1828800"/>
-            <a:ext cx="3017520" cy="4023360"/>
+            <a:off x="8275320" y="1874520"/>
+            <a:ext cx="2926080" cy="3931920"/>
           </a:xfrm>
           <a:prstGeom prst="rect">
             <a:avLst/>
@@ -5361,6 +5543,9 @@
           <a:lstStyle/>
           <a:p>
             <a:pPr>
+              <a:spcAft>
+                <a:spcPts val="200"/>
+              </a:spcAft>
               <a:defRPr sz="1000" b="1">
                 <a:solidFill>
                   <a:srgbClr val="FBBF24"/>
@@ -5368,19 +5553,22 @@
               </a:defRPr>
             </a:pPr>
             <a:r>
-              <a:t>[STREAM 3 IN FLIGHT]</a:t>
-            </a:r>
-          </a:p>
-          <a:p>
-            <a:pPr>
-              <a:defRPr sz="1700" b="1">
-                <a:solidFill>
-                  <a:srgbClr val="F8FAFC"/>
-                </a:solidFill>
-              </a:defRPr>
-            </a:pPr>
-            <a:r>
-              <a:t>Branch C: Platform &amp; Admin</a:t>
+              <a:t>ENTERPRISE B2B</a:t>
+            </a:r>
+          </a:p>
+          <a:p>
+            <a:pPr>
+              <a:spcAft>
+                <a:spcPts val="400"/>
+              </a:spcAft>
+              <a:defRPr sz="1500" b="1">
+                <a:solidFill>
+                  <a:srgbClr val="FFFFFF"/>
+                </a:solidFill>
+              </a:defRPr>
+            </a:pPr>
+            <a:r>
+              <a:t>Branch C: Campus Platform</a:t>
             </a:r>
           </a:p>
           <a:p>
@@ -5395,7 +5583,7 @@
               </a:defRPr>
             </a:pPr>
             <a:r>
-              <a:t>Worktree 3 (Platform Stream)</a:t>
+              <a:t>Institutional Enterprise B2B SaaS</a:t>
             </a:r>
           </a:p>
           <a:p>
@@ -5403,14 +5591,14 @@
               <a:spcAft>
                 <a:spcPts val="500"/>
               </a:spcAft>
-              <a:defRPr sz="1200">
-                <a:solidFill>
-                  <a:srgbClr val="94A3B8"/>
-                </a:solidFill>
-              </a:defRPr>
-            </a:pPr>
-            <a:r>
-              <a:t>• Scope: Institutional software infrastructure &amp; governance.</a:t>
+              <a:defRPr sz="1150">
+                <a:solidFill>
+                  <a:srgbClr val="CBD5E1"/>
+                </a:solidFill>
+              </a:defRPr>
+            </a:pPr>
+            <a:r>
+              <a:t>• Campus Admin Portal: Student admissions, fee management &amp; audit reporting.</a:t>
             </a:r>
           </a:p>
           <a:p>
@@ -5418,14 +5606,14 @@
               <a:spcAft>
                 <a:spcPts val="500"/>
               </a:spcAft>
-              <a:defRPr sz="1200">
-                <a:solidFill>
-                  <a:srgbClr val="94A3B8"/>
-                </a:solidFill>
-              </a:defRPr>
-            </a:pPr>
-            <a:r>
-              <a:t>• Campus Admin Portal: Student admissions, fee ledger &amp; audit exports.</a:t>
+              <a:defRPr sz="1150">
+                <a:solidFill>
+                  <a:srgbClr val="CBD5E1"/>
+                </a:solidFill>
+              </a:defRPr>
+            </a:pPr>
+            <a:r>
+              <a:t>• Faculty Portal: Automated assignment grading &amp; live student radar.</a:t>
             </a:r>
           </a:p>
           <a:p>
@@ -5433,44 +5621,14 @@
               <a:spcAft>
                 <a:spcPts val="500"/>
               </a:spcAft>
-              <a:defRPr sz="1200">
-                <a:solidFill>
-                  <a:srgbClr val="94A3B8"/>
-                </a:solidFill>
-              </a:defRPr>
-            </a:pPr>
-            <a:r>
-              <a:t>• Faculty &amp; Teacher Tools: Auto-grading rubrics, live class engagement telemetry.</a:t>
-            </a:r>
-          </a:p>
-          <a:p>
-            <a:pPr>
-              <a:spcAft>
-                <a:spcPts val="500"/>
-              </a:spcAft>
-              <a:defRPr sz="1200">
-                <a:solidFill>
-                  <a:srgbClr val="94A3B8"/>
-                </a:solidFill>
-              </a:defRPr>
-            </a:pPr>
-            <a:r>
-              <a:t>• Multi-Tenant Isolation: Supabase RLS by institutionId.</a:t>
-            </a:r>
-          </a:p>
-          <a:p>
-            <a:pPr>
-              <a:spcAft>
-                <a:spcPts val="500"/>
-              </a:spcAft>
-              <a:defRPr sz="1200">
-                <a:solidFill>
-                  <a:srgbClr val="94A3B8"/>
-                </a:solidFill>
-              </a:defRPr>
-            </a:pPr>
-            <a:r>
-              <a:t>• Task Range: TASK-851 to TASK-950.</a:t>
+              <a:defRPr sz="1150">
+                <a:solidFill>
+                  <a:srgbClr val="CBD5E1"/>
+                </a:solidFill>
+              </a:defRPr>
+            </a:pPr>
+            <a:r>
+              <a:t>• Commercial Model: Annual university enterprise SaaS license ($50k-$200k/campus).</a:t>
             </a:r>
           </a:p>
         </p:txBody>
@@ -5508,11 +5666,11 @@
             <a:avLst/>
           </a:prstGeom>
           <a:solidFill>
-            <a:srgbClr val="0B0F19"/>
+            <a:srgbClr val="0F172A"/>
           </a:solidFill>
           <a:ln>
             <a:solidFill>
-              <a:srgbClr val="0B0F19"/>
+              <a:srgbClr val="0F172A"/>
             </a:solidFill>
           </a:ln>
         </p:spPr>
@@ -5591,8 +5749,8 @@
         </p:nvSpPr>
         <p:spPr>
           <a:xfrm>
-            <a:off x="10789920" y="320040"/>
-            <a:ext cx="914400" cy="365760"/>
+            <a:off x="10515600" y="365760"/>
+            <a:ext cx="1188720" cy="365760"/>
           </a:xfrm>
           <a:prstGeom prst="rect">
             <a:avLst/>
@@ -5600,20 +5758,20 @@
           <a:noFill/>
         </p:spPr>
         <p:txBody>
-          <a:bodyPr wrap="square">
+          <a:bodyPr wrap="none">
             <a:spAutoFit/>
           </a:bodyPr>
           <a:lstStyle/>
           <a:p>
             <a:pPr algn="r">
-              <a:defRPr sz="1300" b="1">
+              <a:defRPr sz="1100" b="1">
                 <a:solidFill>
                   <a:srgbClr val="38BDF8"/>
                 </a:solidFill>
               </a:defRPr>
             </a:pPr>
             <a:r>
-              <a:t>02 / 10</a:t>
+              <a:t>SLIDE 02 / 10</a:t>
             </a:r>
           </a:p>
         </p:txBody>
@@ -5627,7 +5785,7 @@
         <p:spPr>
           <a:xfrm>
             <a:off x="731520" y="320040"/>
-            <a:ext cx="7315200" cy="320040"/>
+            <a:ext cx="8229600" cy="274320"/>
           </a:xfrm>
           <a:prstGeom prst="rect">
             <a:avLst/>
@@ -5643,12 +5801,12 @@
             <a:pPr>
               <a:defRPr sz="1100" b="1">
                 <a:solidFill>
-                  <a:srgbClr val="818CF8"/>
-                </a:solidFill>
-              </a:defRPr>
-            </a:pPr>
-            <a:r>
-              <a:t>COGNITIVE ARCHITECTURE &amp; EDUCATIONAL STANDARDS</a:t>
+                  <a:srgbClr val="A855F7"/>
+                </a:solidFill>
+              </a:defRPr>
+            </a:pPr>
+            <a:r>
+              <a:t>CURRICULUM ARCHITECTURE &amp; SCOPE</a:t>
             </a:r>
           </a:p>
         </p:txBody>
@@ -5662,7 +5820,7 @@
         <p:spPr>
           <a:xfrm>
             <a:off x="731520" y="594360"/>
-            <a:ext cx="10515600" cy="548640"/>
+            <a:ext cx="9601200" cy="548640"/>
           </a:xfrm>
           <a:prstGeom prst="rect">
             <a:avLst/>
@@ -5676,14 +5834,14 @@
           <a:lstStyle/>
           <a:p>
             <a:pPr>
-              <a:defRPr sz="2400" b="1">
-                <a:solidFill>
-                  <a:srgbClr val="F8FAFC"/>
-                </a:solidFill>
-              </a:defRPr>
-            </a:pPr>
-            <a:r>
-              <a:t>The Pedagogical Revolution: Eradicating Tutorial Hell</a:t>
+              <a:defRPr sz="2200" b="1">
+                <a:solidFill>
+                  <a:srgbClr val="FFFFFF"/>
+                </a:solidFill>
+              </a:defRPr>
+            </a:pPr>
+            <a:r>
+              <a:t>The 37-Course Master Catalog: What We Teach &amp; Offer</a:t>
             </a:r>
           </a:p>
         </p:txBody>
@@ -5696,7 +5854,7 @@
         </p:nvSpPr>
         <p:spPr>
           <a:xfrm>
-            <a:off x="731520" y="1143000"/>
+            <a:off x="731520" y="1115568"/>
             <a:ext cx="10515600" cy="365760"/>
           </a:xfrm>
           <a:prstGeom prst="rect">
@@ -5711,14 +5869,14 @@
           <a:lstStyle/>
           <a:p>
             <a:pPr>
-              <a:defRPr sz="1300">
+              <a:defRPr sz="1200">
                 <a:solidFill>
                   <a:srgbClr val="94A3B8"/>
                 </a:solidFill>
               </a:defRPr>
             </a:pPr>
             <a:r>
-              <a:t>The Strict 30-Minute Cognitive Loop Backed by a 3-Tier Socratic Hint Ladder</a:t>
+              <a:t>A Multi-Disciplinary Curriculum Designed for Both Engineering and Business Campuses</a:t>
             </a:r>
           </a:p>
         </p:txBody>
@@ -5732,17 +5890,17 @@
         <p:spPr>
           <a:xfrm>
             <a:off x="731520" y="1645920"/>
-            <a:ext cx="6858000" cy="4389120"/>
+            <a:ext cx="5120640" cy="2240280"/>
           </a:xfrm>
           <a:prstGeom prst="roundRect">
             <a:avLst/>
           </a:prstGeom>
           <a:solidFill>
-            <a:srgbClr val="161E2E"/>
+            <a:srgbClr val="1E293B"/>
           </a:solidFill>
-          <a:ln w="19050">
+          <a:ln w="15240">
             <a:solidFill>
-              <a:srgbClr val="25334D"/>
+              <a:srgbClr val="334155"/>
             </a:solidFill>
           </a:ln>
         </p:spPr>
@@ -5776,8 +5934,8 @@
         </p:nvSpPr>
         <p:spPr>
           <a:xfrm>
-            <a:off x="914400" y="1828800"/>
-            <a:ext cx="6492240" cy="4023360"/>
+            <a:off x="960120" y="1874520"/>
+            <a:ext cx="4663440" cy="1783080"/>
           </a:xfrm>
           <a:prstGeom prst="rect">
             <a:avLst/>
@@ -5791,6 +5949,9 @@
           <a:lstStyle/>
           <a:p>
             <a:pPr>
+              <a:spcAft>
+                <a:spcPts val="200"/>
+              </a:spcAft>
               <a:defRPr sz="1000" b="1">
                 <a:solidFill>
                   <a:srgbClr val="38BDF8"/>
@@ -5798,19 +5959,22 @@
               </a:defRPr>
             </a:pPr>
             <a:r>
-              <a:t>[HOW WE TEACH]</a:t>
-            </a:r>
-          </a:p>
-          <a:p>
-            <a:pPr>
-              <a:defRPr sz="1700" b="1">
-                <a:solidFill>
-                  <a:srgbClr val="F8FAFC"/>
-                </a:solidFill>
-              </a:defRPr>
-            </a:pPr>
-            <a:r>
-              <a:t>The 30-Minute Cognitive Rhythm</a:t>
+              <a:t>ENGINEERING (6 COURSES)</a:t>
+            </a:r>
+          </a:p>
+          <a:p>
+            <a:pPr>
+              <a:spcAft>
+                <a:spcPts val="400"/>
+              </a:spcAft>
+              <a:defRPr sz="1500" b="1">
+                <a:solidFill>
+                  <a:srgbClr val="FFFFFF"/>
+                </a:solidFill>
+              </a:defRPr>
+            </a:pPr>
+            <a:r>
+              <a:t>Software &amp; Distributed Systems</a:t>
             </a:r>
           </a:p>
           <a:p>
@@ -5825,7 +5989,7 @@
               </a:defRPr>
             </a:pPr>
             <a:r>
-              <a:t>Balanced Active Learning Protocol (28–31 Minutes Daily)</a:t>
+              <a:t>Prepares students for top-tier software and cloud engineering jobs.</a:t>
             </a:r>
           </a:p>
           <a:p>
@@ -5833,14 +5997,14 @@
               <a:spcAft>
                 <a:spcPts val="500"/>
               </a:spcAft>
-              <a:defRPr sz="1200">
-                <a:solidFill>
-                  <a:srgbClr val="94A3B8"/>
-                </a:solidFill>
-              </a:defRPr>
-            </a:pPr>
-            <a:r>
-              <a:t>• 12.0–13.5 min | Spoken Audio Narration: High-energy, conversational Senior Pair-Programmer voice at 120 WPM (&gt;= 2,940 words/day).</a:t>
+              <a:defRPr sz="1150">
+                <a:solidFill>
+                  <a:srgbClr val="CBD5E1"/>
+                </a:solidFill>
+              </a:defRPr>
+            </a:pPr>
+            <a:r>
+              <a:t>• Fullstack Web (Next.js &amp; React), Python Backend Architecture, Modern JavaScript.</a:t>
             </a:r>
           </a:p>
           <a:p>
@@ -5848,59 +6012,14 @@
               <a:spcAft>
                 <a:spcPts val="500"/>
               </a:spcAft>
-              <a:defRPr sz="1200">
-                <a:solidFill>
-                  <a:srgbClr val="94A3B8"/>
-                </a:solidFill>
-              </a:defRPr>
-            </a:pPr>
-            <a:r>
-              <a:t>• 4.8–5.4 min | Code &amp; Visual Walkthrough: Surgical line-by-line runtime annotation animating state diagrams and invariants.</a:t>
-            </a:r>
-          </a:p>
-          <a:p>
-            <a:pPr>
-              <a:spcAft>
-                <a:spcPts val="500"/>
-              </a:spcAft>
-              <a:defRPr sz="1200">
-                <a:solidFill>
-                  <a:srgbClr val="94A3B8"/>
-                </a:solidFill>
-              </a:defRPr>
-            </a:pPr>
-            <a:r>
-              <a:t>• 6.0–7.2 min | tryIt Live Friction Challenge: Mandatory in-browser code edits prompting students to fix intentional production edge cases.</a:t>
-            </a:r>
-          </a:p>
-          <a:p>
-            <a:pPr>
-              <a:spcAft>
-                <a:spcPts val="500"/>
-              </a:spcAft>
-              <a:defRPr sz="1200">
-                <a:solidFill>
-                  <a:srgbClr val="94A3B8"/>
-                </a:solidFill>
-              </a:defRPr>
-            </a:pPr>
-            <a:r>
-              <a:t>• 7.2–9.0 min | 3 AM Production Outage Diagnostic Puzzles: High-cognitive-load architectural outage triage testing real debugging acumen.</a:t>
-            </a:r>
-          </a:p>
-          <a:p>
-            <a:pPr>
-              <a:spcAft>
-                <a:spcPts val="500"/>
-              </a:spcAft>
-              <a:defRPr sz="1200">
-                <a:solidFill>
-                  <a:srgbClr val="94A3B8"/>
-                </a:solidFill>
-              </a:defRPr>
-            </a:pPr>
-            <a:r>
-              <a:t>• Strict 5-Part Invariant: Hook Dilemma -&gt; Mechanical Analogy -&gt; Mathematical Deep Dive -&gt; Interactive Code -&gt; Production Capstone Wrap.</a:t>
+              <a:defRPr sz="1150">
+                <a:solidFill>
+                  <a:srgbClr val="CBD5E1"/>
+                </a:solidFill>
+              </a:defRPr>
+            </a:pPr>
+            <a:r>
+              <a:t>• Database Engineering (SQL &amp; B+ Trees), Cloud Infrastructure &amp; DevOps, Distributed Systems.</a:t>
             </a:r>
           </a:p>
         </p:txBody>
@@ -5913,18 +6032,18 @@
         </p:nvSpPr>
         <p:spPr>
           <a:xfrm>
-            <a:off x="7863840" y="1645920"/>
-            <a:ext cx="3474720" cy="4389120"/>
+            <a:off x="6217920" y="1645920"/>
+            <a:ext cx="5120640" cy="2240280"/>
           </a:xfrm>
           <a:prstGeom prst="roundRect">
             <a:avLst/>
           </a:prstGeom>
           <a:solidFill>
-            <a:srgbClr val="161E2E"/>
+            <a:srgbClr val="1E293B"/>
           </a:solidFill>
-          <a:ln w="19050">
+          <a:ln w="15240">
             <a:solidFill>
-              <a:srgbClr val="25334D"/>
+              <a:srgbClr val="334155"/>
             </a:solidFill>
           </a:ln>
         </p:spPr>
@@ -5958,8 +6077,8 @@
         </p:nvSpPr>
         <p:spPr>
           <a:xfrm>
-            <a:off x="8046720" y="1828800"/>
-            <a:ext cx="3108960" cy="4023360"/>
+            <a:off x="6446520" y="1874520"/>
+            <a:ext cx="4663440" cy="1783080"/>
           </a:xfrm>
           <a:prstGeom prst="rect">
             <a:avLst/>
@@ -5973,26 +6092,318 @@
           <a:lstStyle/>
           <a:p>
             <a:pPr>
+              <a:spcAft>
+                <a:spcPts val="200"/>
+              </a:spcAft>
               <a:defRPr sz="1000" b="1">
                 <a:solidFill>
+                  <a:srgbClr val="A855F7"/>
+                </a:solidFill>
+              </a:defRPr>
+            </a:pPr>
+            <a:r>
+              <a:t>AI &amp; SYSTEMS (7 COURSES)</a:t>
+            </a:r>
+          </a:p>
+          <a:p>
+            <a:pPr>
+              <a:spcAft>
+                <a:spcPts val="400"/>
+              </a:spcAft>
+              <a:defRPr sz="1500" b="1">
+                <a:solidFill>
+                  <a:srgbClr val="FFFFFF"/>
+                </a:solidFill>
+              </a:defRPr>
+            </a:pPr>
+            <a:r>
+              <a:t>Cutting-Edge Deep Tech &amp; AI</a:t>
+            </a:r>
+          </a:p>
+          <a:p>
+            <a:pPr>
+              <a:spcAft>
+                <a:spcPts val="800"/>
+              </a:spcAft>
+              <a:defRPr sz="1100">
+                <a:solidFill>
+                  <a:srgbClr val="38BDF8"/>
+                </a:solidFill>
+              </a:defRPr>
+            </a:pPr>
+            <a:r>
+              <a:t>High-margin, specialized skills that generative AI cannot automate.</a:t>
+            </a:r>
+          </a:p>
+          <a:p>
+            <a:pPr>
+              <a:spcAft>
+                <a:spcPts val="500"/>
+              </a:spcAft>
+              <a:defRPr sz="1150">
+                <a:solidFill>
+                  <a:srgbClr val="CBD5E1"/>
+                </a:solidFill>
+              </a:defRPr>
+            </a:pPr>
+            <a:r>
+              <a:t>• Data Structures &amp; Algorithms, Java 21 LTS &amp; JVM Internals, 3D WebGL Graphics.</a:t>
+            </a:r>
+          </a:p>
+          <a:p>
+            <a:pPr>
+              <a:spcAft>
+                <a:spcPts val="500"/>
+              </a:spcAft>
+              <a:defRPr sz="1150">
+                <a:solidFill>
+                  <a:srgbClr val="CBD5E1"/>
+                </a:solidFill>
+              </a:defRPr>
+            </a:pPr>
+            <a:r>
+              <a:t>• Applied AI &amp; Deep Learning, AI Prompt Engineering, EVM Blockchain, Cybersecurity.</a:t>
+            </a:r>
+          </a:p>
+        </p:txBody>
+      </p:sp>
+      <p:sp>
+        <p:nvSpPr>
+          <p:cNvPr id="12" name="Rounded Rectangle 11"/>
+          <p:cNvSpPr/>
+          <p:nvPr/>
+        </p:nvSpPr>
+        <p:spPr>
+          <a:xfrm>
+            <a:off x="731520" y="4069080"/>
+            <a:ext cx="5120640" cy="2240280"/>
+          </a:xfrm>
+          <a:prstGeom prst="roundRect">
+            <a:avLst/>
+          </a:prstGeom>
+          <a:solidFill>
+            <a:srgbClr val="1E293B"/>
+          </a:solidFill>
+          <a:ln w="15240">
+            <a:solidFill>
+              <a:srgbClr val="334155"/>
+            </a:solidFill>
+          </a:ln>
+        </p:spPr>
+        <p:style>
+          <a:lnRef idx="1">
+            <a:schemeClr val="accent1"/>
+          </a:lnRef>
+          <a:fillRef idx="3">
+            <a:schemeClr val="accent1"/>
+          </a:fillRef>
+          <a:effectRef idx="2">
+            <a:schemeClr val="accent1"/>
+          </a:effectRef>
+          <a:fontRef idx="minor">
+            <a:schemeClr val="lt1"/>
+          </a:fontRef>
+        </p:style>
+        <p:txBody>
+          <a:bodyPr rtlCol="0" anchor="ctr"/>
+          <a:lstStyle/>
+          <a:p>
+            <a:pPr algn="ctr"/>
+          </a:p>
+        </p:txBody>
+      </p:sp>
+      <p:sp>
+        <p:nvSpPr>
+          <p:cNvPr id="13" name="TextBox 12"/>
+          <p:cNvSpPr txBox="1"/>
+          <p:nvPr/>
+        </p:nvSpPr>
+        <p:spPr>
+          <a:xfrm>
+            <a:off x="960120" y="4297680"/>
+            <a:ext cx="4663440" cy="1783080"/>
+          </a:xfrm>
+          <a:prstGeom prst="rect">
+            <a:avLst/>
+          </a:prstGeom>
+          <a:noFill/>
+        </p:spPr>
+        <p:txBody>
+          <a:bodyPr wrap="square">
+            <a:spAutoFit/>
+          </a:bodyPr>
+          <a:lstStyle/>
+          <a:p>
+            <a:pPr>
+              <a:spcAft>
+                <a:spcPts val="200"/>
+              </a:spcAft>
+              <a:defRPr sz="1000" b="1">
+                <a:solidFill>
+                  <a:srgbClr val="34D399"/>
+                </a:solidFill>
+              </a:defRPr>
+            </a:pPr>
+            <a:r>
+              <a:t>BUSINESS SCHOOL (14 COURSES)</a:t>
+            </a:r>
+          </a:p>
+          <a:p>
+            <a:pPr>
+              <a:spcAft>
+                <a:spcPts val="400"/>
+              </a:spcAft>
+              <a:defRPr sz="1500" b="1">
+                <a:solidFill>
+                  <a:srgbClr val="FFFFFF"/>
+                </a:solidFill>
+              </a:defRPr>
+            </a:pPr>
+            <a:r>
+              <a:t>Commerce, Finance &amp; Management</a:t>
+            </a:r>
+          </a:p>
+          <a:p>
+            <a:pPr>
+              <a:spcAft>
+                <a:spcPts val="800"/>
+              </a:spcAft>
+              <a:defRPr sz="1100">
+                <a:solidFill>
+                  <a:srgbClr val="38BDF8"/>
+                </a:solidFill>
+              </a:defRPr>
+            </a:pPr>
+            <a:r>
+              <a:t>Universal coverage for B.Com, BBA, and MBA degree programs.</a:t>
+            </a:r>
+          </a:p>
+          <a:p>
+            <a:pPr>
+              <a:spcAft>
+                <a:spcPts val="500"/>
+              </a:spcAft>
+              <a:defRPr sz="1150">
+                <a:solidFill>
+                  <a:srgbClr val="CBD5E1"/>
+                </a:solidFill>
+              </a:defRPr>
+            </a:pPr>
+            <a:r>
+              <a:t>• Corporate Finance, Banking Operations, Forensic Accounting, Corporate Tax, Business Law.</a:t>
+            </a:r>
+          </a:p>
+          <a:p>
+            <a:pPr>
+              <a:spcAft>
+                <a:spcPts val="500"/>
+              </a:spcAft>
+              <a:defRPr sz="1150">
+                <a:solidFill>
+                  <a:srgbClr val="CBD5E1"/>
+                </a:solidFill>
+              </a:defRPr>
+            </a:pPr>
+            <a:r>
+              <a:t>• Digital Marketing, E-Commerce, B2B Sales &amp; CRM, Operations &amp; Supply Chain, Entrepreneurship.</a:t>
+            </a:r>
+          </a:p>
+        </p:txBody>
+      </p:sp>
+      <p:sp>
+        <p:nvSpPr>
+          <p:cNvPr id="14" name="Rounded Rectangle 13"/>
+          <p:cNvSpPr/>
+          <p:nvPr/>
+        </p:nvSpPr>
+        <p:spPr>
+          <a:xfrm>
+            <a:off x="6217920" y="4069080"/>
+            <a:ext cx="5120640" cy="2240280"/>
+          </a:xfrm>
+          <a:prstGeom prst="roundRect">
+            <a:avLst/>
+          </a:prstGeom>
+          <a:solidFill>
+            <a:srgbClr val="1E293B"/>
+          </a:solidFill>
+          <a:ln w="15240">
+            <a:solidFill>
+              <a:srgbClr val="334155"/>
+            </a:solidFill>
+          </a:ln>
+        </p:spPr>
+        <p:style>
+          <a:lnRef idx="1">
+            <a:schemeClr val="accent1"/>
+          </a:lnRef>
+          <a:fillRef idx="3">
+            <a:schemeClr val="accent1"/>
+          </a:fillRef>
+          <a:effectRef idx="2">
+            <a:schemeClr val="accent1"/>
+          </a:effectRef>
+          <a:fontRef idx="minor">
+            <a:schemeClr val="lt1"/>
+          </a:fontRef>
+        </p:style>
+        <p:txBody>
+          <a:bodyPr rtlCol="0" anchor="ctr"/>
+          <a:lstStyle/>
+          <a:p>
+            <a:pPr algn="ctr"/>
+          </a:p>
+        </p:txBody>
+      </p:sp>
+      <p:sp>
+        <p:nvSpPr>
+          <p:cNvPr id="15" name="TextBox 14"/>
+          <p:cNvSpPr txBox="1"/>
+          <p:nvPr/>
+        </p:nvSpPr>
+        <p:spPr>
+          <a:xfrm>
+            <a:off x="6446520" y="4297680"/>
+            <a:ext cx="4663440" cy="1783080"/>
+          </a:xfrm>
+          <a:prstGeom prst="rect">
+            <a:avLst/>
+          </a:prstGeom>
+          <a:noFill/>
+        </p:spPr>
+        <p:txBody>
+          <a:bodyPr wrap="square">
+            <a:spAutoFit/>
+          </a:bodyPr>
+          <a:lstStyle/>
+          <a:p>
+            <a:pPr>
+              <a:spcAft>
+                <a:spcPts val="200"/>
+              </a:spcAft>
+              <a:defRPr sz="1000" b="1">
+                <a:solidFill>
                   <a:srgbClr val="FBBF24"/>
                 </a:solidFill>
               </a:defRPr>
             </a:pPr>
             <a:r>
-              <a:t>[WHY IT WORKS]</a:t>
-            </a:r>
-          </a:p>
-          <a:p>
-            <a:pPr>
-              <a:defRPr sz="1700" b="1">
-                <a:solidFill>
-                  <a:srgbClr val="F8FAFC"/>
-                </a:solidFill>
-              </a:defRPr>
-            </a:pPr>
-            <a:r>
-              <a:t>3-Tier Socratic Ladder</a:t>
+              <a:t>CAMPUS ESSENTIALS (10 COURSES)</a:t>
+            </a:r>
+          </a:p>
+          <a:p>
+            <a:pPr>
+              <a:spcAft>
+                <a:spcPts val="400"/>
+              </a:spcAft>
+              <a:defRPr sz="1500" b="1">
+                <a:solidFill>
+                  <a:srgbClr val="FFFFFF"/>
+                </a:solidFill>
+              </a:defRPr>
+            </a:pPr>
+            <a:r>
+              <a:t>Launchpads &amp; Hardware Silicon</a:t>
             </a:r>
           </a:p>
           <a:p>
@@ -6007,7 +6418,7 @@
               </a:defRPr>
             </a:pPr>
             <a:r>
-              <a:t>Zero Student Abandonment Guarantee</a:t>
+              <a:t>Entry-level confidence for all freshmen + deep hardware engineering.</a:t>
             </a:r>
           </a:p>
           <a:p>
@@ -6015,14 +6426,14 @@
               <a:spcAft>
                 <a:spcPts val="500"/>
               </a:spcAft>
-              <a:defRPr sz="1200">
-                <a:solidFill>
-                  <a:srgbClr val="94A3B8"/>
-                </a:solidFill>
-              </a:defRPr>
-            </a:pPr>
-            <a:r>
-              <a:t>• Tier 1: Conceptual Nudge: Asks guiding questions without exposing syntax.</a:t>
+              <a:defRPr sz="1150">
+                <a:solidFill>
+                  <a:srgbClr val="CBD5E1"/>
+                </a:solidFill>
+              </a:defRPr>
+            </a:pPr>
+            <a:r>
+              <a:t>• Freshman Launchpads: Excel &amp; Data Analytics, Computer OS, Git Version Control, Tech Soft Skills.</a:t>
             </a:r>
           </a:p>
           <a:p>
@@ -6030,44 +6441,14 @@
               <a:spcAft>
                 <a:spcPts val="500"/>
               </a:spcAft>
-              <a:defRPr sz="1200">
-                <a:solidFill>
-                  <a:srgbClr val="94A3B8"/>
-                </a:solidFill>
-              </a:defRPr>
-            </a:pPr>
-            <a:r>
-              <a:t>• Tier 2: Visual Highlight: Animates the state transition and memory boundaries.</a:t>
-            </a:r>
-          </a:p>
-          <a:p>
-            <a:pPr>
-              <a:spcAft>
-                <a:spcPts val="500"/>
-              </a:spcAft>
-              <a:defRPr sz="1200">
-                <a:solidFill>
-                  <a:srgbClr val="94A3B8"/>
-                </a:solidFill>
-              </a:defRPr>
-            </a:pPr>
-            <a:r>
-              <a:t>• Tier 3: Surgical Line Fix: Pinpoints exact line error as a fail-safe.</a:t>
-            </a:r>
-          </a:p>
-          <a:p>
-            <a:pPr>
-              <a:spcAft>
-                <a:spcPts val="500"/>
-              </a:spcAft>
-              <a:defRPr sz="1200">
-                <a:solidFill>
-                  <a:srgbClr val="94A3B8"/>
-                </a:solidFill>
-              </a:defRPr>
-            </a:pPr>
-            <a:r>
-              <a:t>• Outcome: Students never get stranded, maintaining 100% completion velocity.</a:t>
+              <a:defRPr sz="1150">
+                <a:solidFill>
+                  <a:srgbClr val="CBD5E1"/>
+                </a:solidFill>
+              </a:defRPr>
+            </a:pPr>
+            <a:r>
+              <a:t>• Hardware &amp; IoT: Embedded Systems, TinyML Edge AI, IoT Security, Radio Protocols, Quant Systems.</a:t>
             </a:r>
           </a:p>
         </p:txBody>
@@ -6105,11 +6486,11 @@
             <a:avLst/>
           </a:prstGeom>
           <a:solidFill>
-            <a:srgbClr val="0B0F19"/>
+            <a:srgbClr val="0F172A"/>
           </a:solidFill>
           <a:ln>
             <a:solidFill>
-              <a:srgbClr val="0B0F19"/>
+              <a:srgbClr val="0F172A"/>
             </a:solidFill>
           </a:ln>
         </p:spPr>
@@ -6188,8 +6569,8 @@
         </p:nvSpPr>
         <p:spPr>
           <a:xfrm>
-            <a:off x="10789920" y="320040"/>
-            <a:ext cx="914400" cy="365760"/>
+            <a:off x="10515600" y="365760"/>
+            <a:ext cx="1188720" cy="365760"/>
           </a:xfrm>
           <a:prstGeom prst="rect">
             <a:avLst/>
@@ -6197,20 +6578,20 @@
           <a:noFill/>
         </p:spPr>
         <p:txBody>
-          <a:bodyPr wrap="square">
+          <a:bodyPr wrap="none">
             <a:spAutoFit/>
           </a:bodyPr>
           <a:lstStyle/>
           <a:p>
             <a:pPr algn="r">
-              <a:defRPr sz="1300" b="1">
+              <a:defRPr sz="1100" b="1">
                 <a:solidFill>
                   <a:srgbClr val="38BDF8"/>
                 </a:solidFill>
               </a:defRPr>
             </a:pPr>
             <a:r>
-              <a:t>03 / 10</a:t>
+              <a:t>SLIDE 03 / 10</a:t>
             </a:r>
           </a:p>
         </p:txBody>
@@ -6224,7 +6605,7 @@
         <p:spPr>
           <a:xfrm>
             <a:off x="731520" y="320040"/>
-            <a:ext cx="7315200" cy="320040"/>
+            <a:ext cx="8229600" cy="274320"/>
           </a:xfrm>
           <a:prstGeom prst="rect">
             <a:avLst/>
@@ -6240,12 +6621,12 @@
             <a:pPr>
               <a:defRPr sz="1100" b="1">
                 <a:solidFill>
-                  <a:srgbClr val="818CF8"/>
-                </a:solidFill>
-              </a:defRPr>
-            </a:pPr>
-            <a:r>
-              <a:t>COGNITIVE ENGINEERING &amp; REAL-TIME STATE ENGINES</a:t>
+                  <a:srgbClr val="A855F7"/>
+                </a:solidFill>
+              </a:defRPr>
+            </a:pPr>
+            <a:r>
+              <a:t>PRODUCTION AUDIT &amp; MILESTONE LEDGER</a:t>
             </a:r>
           </a:p>
         </p:txBody>
@@ -6259,7 +6640,7 @@
         <p:spPr>
           <a:xfrm>
             <a:off x="731520" y="594360"/>
-            <a:ext cx="10515600" cy="548640"/>
+            <a:ext cx="9601200" cy="548640"/>
           </a:xfrm>
           <a:prstGeom prst="rect">
             <a:avLst/>
@@ -6273,14 +6654,14 @@
           <a:lstStyle/>
           <a:p>
             <a:pPr>
-              <a:defRPr sz="2400" b="1">
-                <a:solidFill>
-                  <a:srgbClr val="F8FAFC"/>
-                </a:solidFill>
-              </a:defRPr>
-            </a:pPr>
-            <a:r>
-              <a:t>Visual-First Mastery: Seeing the Invisible</a:t>
+              <a:defRPr sz="2200" b="1">
+                <a:solidFill>
+                  <a:srgbClr val="FFFFFF"/>
+                </a:solidFill>
+              </a:defRPr>
+            </a:pPr>
+            <a:r>
+              <a:t>Curriculum Progress Scorecard: Completed vs. Remaining</a:t>
             </a:r>
           </a:p>
         </p:txBody>
@@ -6293,7 +6674,7 @@
         </p:nvSpPr>
         <p:spPr>
           <a:xfrm>
-            <a:off x="731520" y="1143000"/>
+            <a:off x="731520" y="1115568"/>
             <a:ext cx="10515600" cy="365760"/>
           </a:xfrm>
           <a:prstGeom prst="rect">
@@ -6308,14 +6689,14 @@
           <a:lstStyle/>
           <a:p>
             <a:pPr>
-              <a:defRPr sz="1300">
+              <a:defRPr sz="1200">
                 <a:solidFill>
                   <a:srgbClr val="94A3B8"/>
                 </a:solidFill>
               </a:defRPr>
             </a:pPr>
             <a:r>
-              <a:t>17 Specialized Interactive Visual Engines Bringing Code to Life</a:t>
+              <a:t>An Exact Mathematical Audit of What is Live Today and What is Being Built Right Now</a:t>
             </a:r>
           </a:p>
         </p:txBody>
@@ -6329,17 +6710,17 @@
         <p:spPr>
           <a:xfrm>
             <a:off x="731520" y="1645920"/>
-            <a:ext cx="3383280" cy="4389120"/>
+            <a:ext cx="3291840" cy="4663440"/>
           </a:xfrm>
           <a:prstGeom prst="roundRect">
             <a:avLst/>
           </a:prstGeom>
           <a:solidFill>
-            <a:srgbClr val="161E2E"/>
+            <a:srgbClr val="1E293B"/>
           </a:solidFill>
-          <a:ln w="19050">
+          <a:ln w="15240">
             <a:solidFill>
-              <a:srgbClr val="25334D"/>
+              <a:srgbClr val="334155"/>
             </a:solidFill>
           </a:ln>
         </p:spPr>
@@ -6373,8 +6754,8 @@
         </p:nvSpPr>
         <p:spPr>
           <a:xfrm>
-            <a:off x="914400" y="1828800"/>
-            <a:ext cx="3017520" cy="4023360"/>
+            <a:off x="960120" y="1874520"/>
+            <a:ext cx="2834640" cy="4206240"/>
           </a:xfrm>
           <a:prstGeom prst="rect">
             <a:avLst/>
@@ -6388,41 +6769,47 @@
           <a:lstStyle/>
           <a:p>
             <a:pPr>
+              <a:spcAft>
+                <a:spcPts val="200"/>
+              </a:spcAft>
               <a:defRPr sz="1000" b="1">
                 <a:solidFill>
+                  <a:srgbClr val="34D399"/>
+                </a:solidFill>
+              </a:defRPr>
+            </a:pPr>
+            <a:r>
+              <a:t>LIVE PRODUCTION METRIC</a:t>
+            </a:r>
+          </a:p>
+          <a:p>
+            <a:pPr>
+              <a:spcAft>
+                <a:spcPts val="400"/>
+              </a:spcAft>
+              <a:defRPr sz="1500" b="1">
+                <a:solidFill>
+                  <a:srgbClr val="FFFFFF"/>
+                </a:solidFill>
+              </a:defRPr>
+            </a:pPr>
+            <a:r>
+              <a:t>65.7% Completed</a:t>
+            </a:r>
+          </a:p>
+          <a:p>
+            <a:pPr>
+              <a:spcAft>
+                <a:spcPts val="800"/>
+              </a:spcAft>
+              <a:defRPr sz="1100">
+                <a:solidFill>
                   <a:srgbClr val="38BDF8"/>
                 </a:solidFill>
               </a:defRPr>
             </a:pPr>
             <a:r>
-              <a:t>[SILICON RIGOR]</a:t>
-            </a:r>
-          </a:p>
-          <a:p>
-            <a:pPr>
-              <a:defRPr sz="1700" b="1">
-                <a:solidFill>
-                  <a:srgbClr val="F8FAFC"/>
-                </a:solidFill>
-              </a:defRPr>
-            </a:pPr>
-            <a:r>
-              <a:t>Hardware &amp; Low-Level</a:t>
-            </a:r>
-          </a:p>
-          <a:p>
-            <a:pPr>
-              <a:spcAft>
-                <a:spcPts val="800"/>
-              </a:spcAft>
-              <a:defRPr sz="1100">
-                <a:solidFill>
-                  <a:srgbClr val="38BDF8"/>
-                </a:solidFill>
-              </a:defRPr>
-            </a:pPr>
-            <a:r>
-              <a:t>Silicon &amp; Networking State Machines</a:t>
+              <a:t>1,045 Days Out of 1,590 Foundation Target</a:t>
             </a:r>
           </a:p>
           <a:p>
@@ -6430,14 +6817,14 @@
               <a:spcAft>
                 <a:spcPts val="500"/>
               </a:spcAft>
-              <a:defRPr sz="1200">
-                <a:solidFill>
-                  <a:srgbClr val="94A3B8"/>
-                </a:solidFill>
-              </a:defRPr>
-            </a:pPr>
-            <a:r>
-              <a:t>• RegisterBits Engine: Flip bits 0-7 live, view hex/dec registers, memory-mapped I/O masks &amp; prescalers.</a:t>
+              <a:defRPr sz="1150">
+                <a:solidFill>
+                  <a:srgbClr val="CBD5E1"/>
+                </a:solidFill>
+              </a:defRPr>
+            </a:pPr>
+            <a:r>
+              <a:t>• 1,045 Total Days Built &amp; Verified across 53 course modules.</a:t>
             </a:r>
           </a:p>
           <a:p>
@@ -6445,14 +6832,14 @@
               <a:spcAft>
                 <a:spcPts val="500"/>
               </a:spcAft>
-              <a:defRPr sz="1200">
-                <a:solidFill>
-                  <a:srgbClr val="94A3B8"/>
-                </a:solidFill>
-              </a:defRPr>
-            </a:pPr>
-            <a:r>
-              <a:t>• Flow &amp; Pipeline Engine: Visualizes FIFO order matching, packet serialization &amp; DMA ring buffers.</a:t>
+              <a:defRPr sz="1150">
+                <a:solidFill>
+                  <a:srgbClr val="CBD5E1"/>
+                </a:solidFill>
+              </a:defRPr>
+            </a:pPr>
+            <a:r>
+              <a:t>• 19 Deep Tech Tracks are 100% Complete to Day 30.</a:t>
             </a:r>
           </a:p>
           <a:p>
@@ -6460,14 +6847,44 @@
               <a:spcAft>
                 <a:spcPts val="500"/>
               </a:spcAft>
-              <a:defRPr sz="1200">
-                <a:solidFill>
-                  <a:srgbClr val="94A3B8"/>
-                </a:solidFill>
-              </a:defRPr>
-            </a:pPr>
-            <a:r>
-              <a:t>• StackQueue Engine: Call stack frames, heap allocations &amp; L1/L2 cache locality bounds.</a:t>
+              <a:defRPr sz="1150">
+                <a:solidFill>
+                  <a:srgbClr val="CBD5E1"/>
+                </a:solidFill>
+              </a:defRPr>
+            </a:pPr>
+            <a:r>
+              <a:t>• Quant Systems Engineering is 100% Complete (Crown Jewel).</a:t>
+            </a:r>
+          </a:p>
+          <a:p>
+            <a:pPr>
+              <a:spcAft>
+                <a:spcPts val="500"/>
+              </a:spcAft>
+              <a:defRPr sz="1150">
+                <a:solidFill>
+                  <a:srgbClr val="CBD5E1"/>
+                </a:solidFill>
+              </a:defRPr>
+            </a:pPr>
+            <a:r>
+              <a:t>• Excel Data Modeling: Days 1–10 Complete with Capstones.</a:t>
+            </a:r>
+          </a:p>
+          <a:p>
+            <a:pPr>
+              <a:spcAft>
+                <a:spcPts val="500"/>
+              </a:spcAft>
+              <a:defRPr sz="1150">
+                <a:solidFill>
+                  <a:srgbClr val="CBD5E1"/>
+                </a:solidFill>
+              </a:defRPr>
+            </a:pPr>
+            <a:r>
+              <a:t>• 990 Interactive Visual Specs generated and running on disk.</a:t>
             </a:r>
           </a:p>
         </p:txBody>
@@ -6480,18 +6897,18 @@
         </p:nvSpPr>
         <p:spPr>
           <a:xfrm>
-            <a:off x="4389120" y="1645920"/>
-            <a:ext cx="3383280" cy="4389120"/>
+            <a:off x="4297680" y="1645920"/>
+            <a:ext cx="3566160" cy="4663440"/>
           </a:xfrm>
           <a:prstGeom prst="roundRect">
             <a:avLst/>
           </a:prstGeom>
           <a:solidFill>
-            <a:srgbClr val="161E2E"/>
+            <a:srgbClr val="1E293B"/>
           </a:solidFill>
-          <a:ln w="19050">
+          <a:ln w="15240">
             <a:solidFill>
-              <a:srgbClr val="25334D"/>
+              <a:srgbClr val="334155"/>
             </a:solidFill>
           </a:ln>
         </p:spPr>
@@ -6525,8 +6942,8 @@
         </p:nvSpPr>
         <p:spPr>
           <a:xfrm>
-            <a:off x="4572000" y="1828800"/>
-            <a:ext cx="3017520" cy="4023360"/>
+            <a:off x="4526280" y="1874520"/>
+            <a:ext cx="3108960" cy="4206240"/>
           </a:xfrm>
           <a:prstGeom prst="rect">
             <a:avLst/>
@@ -6540,26 +6957,32 @@
           <a:lstStyle/>
           <a:p>
             <a:pPr>
+              <a:spcAft>
+                <a:spcPts val="200"/>
+              </a:spcAft>
               <a:defRPr sz="1000" b="1">
                 <a:solidFill>
-                  <a:srgbClr val="34D399"/>
-                </a:solidFill>
-              </a:defRPr>
-            </a:pPr>
-            <a:r>
-              <a:t>[FINANCIAL RIGOR]</a:t>
-            </a:r>
-          </a:p>
-          <a:p>
-            <a:pPr>
-              <a:defRPr sz="1700" b="1">
-                <a:solidFill>
-                  <a:srgbClr val="F8FAFC"/>
-                </a:solidFill>
-              </a:defRPr>
-            </a:pPr>
-            <a:r>
-              <a:t>Commerce &amp; Enterprise</a:t>
+                  <a:srgbClr val="FBBF24"/>
+                </a:solidFill>
+              </a:defRPr>
+            </a:pPr>
+            <a:r>
+              <a:t>REMAINING WORKLOAD</a:t>
+            </a:r>
+          </a:p>
+          <a:p>
+            <a:pPr>
+              <a:spcAft>
+                <a:spcPts val="400"/>
+              </a:spcAft>
+              <a:defRPr sz="1500" b="1">
+                <a:solidFill>
+                  <a:srgbClr val="FFFFFF"/>
+                </a:solidFill>
+              </a:defRPr>
+            </a:pPr>
+            <a:r>
+              <a:t>34.3% In Production</a:t>
             </a:r>
           </a:p>
           <a:p>
@@ -6574,7 +6997,7 @@
               </a:defRPr>
             </a:pPr>
             <a:r>
-              <a:t>Double-Entry &amp; Conversion Funnels</a:t>
+              <a:t>545 Days Remaining to Day 30 Standard</a:t>
             </a:r>
           </a:p>
           <a:p>
@@ -6582,14 +7005,14 @@
               <a:spcAft>
                 <a:spcPts val="500"/>
               </a:spcAft>
-              <a:defRPr sz="1200">
-                <a:solidFill>
-                  <a:srgbClr val="94A3B8"/>
-                </a:solidFill>
-              </a:defRPr>
-            </a:pPr>
-            <a:r>
-              <a:t>• LedgerSheet Engine: Interactive trial balance; flashes unbalanced debits/credits until equilibrium is reached.</a:t>
+              <a:defRPr sz="1150">
+                <a:solidFill>
+                  <a:srgbClr val="CBD5E1"/>
+                </a:solidFill>
+              </a:defRPr>
+            </a:pPr>
+            <a:r>
+              <a:t>• 545 Days Remaining to reach 100% across all 30-day masterclasses.</a:t>
             </a:r>
           </a:p>
           <a:p>
@@ -6597,14 +7020,14 @@
               <a:spcAft>
                 <a:spcPts val="500"/>
               </a:spcAft>
-              <a:defRPr sz="1200">
-                <a:solidFill>
-                  <a:srgbClr val="94A3B8"/>
-                </a:solidFill>
-              </a:defRPr>
-            </a:pPr>
-            <a:r>
-              <a:t>• Funnel Engine: B2B sales pipeline dropoffs, CAC:LTV conversion velocities &amp; churn waterfalls.</a:t>
+              <a:defRPr sz="1150">
+                <a:solidFill>
+                  <a:srgbClr val="CBD5E1"/>
+                </a:solidFill>
+              </a:defRPr>
+            </a:pPr>
+            <a:r>
+              <a:t>• Commerce (14 Tracks): Days 1-5 built; Days 6-30 (350 days) in production.</a:t>
             </a:r>
           </a:p>
           <a:p>
@@ -6612,14 +7035,44 @@
               <a:spcAft>
                 <a:spcPts val="500"/>
               </a:spcAft>
-              <a:defRPr sz="1200">
-                <a:solidFill>
-                  <a:srgbClr val="94A3B8"/>
-                </a:solidFill>
-              </a:defRPr>
-            </a:pPr>
-            <a:r>
-              <a:t>• Bars &amp; Analytics Engine: Dynamic financial modeling, DCF sensitivity bridges &amp; variance distributions.</a:t>
+              <a:defRPr sz="1150">
+                <a:solidFill>
+                  <a:srgbClr val="CBD5E1"/>
+                </a:solidFill>
+              </a:defRPr>
+            </a:pPr>
+            <a:r>
+              <a:t>• IoT &amp; Hardware (4 Tracks): Days 1-5 built; Days 6-30 (100 days) in production.</a:t>
+            </a:r>
+          </a:p>
+          <a:p>
+            <a:pPr>
+              <a:spcAft>
+                <a:spcPts val="500"/>
+              </a:spcAft>
+              <a:defRPr sz="1150">
+                <a:solidFill>
+                  <a:srgbClr val="CBD5E1"/>
+                </a:solidFill>
+              </a:defRPr>
+            </a:pPr>
+            <a:r>
+              <a:t>• Tech Launchpad (4 Tracks): Days 6-30 (95 days) in production.</a:t>
+            </a:r>
+          </a:p>
+          <a:p>
+            <a:pPr>
+              <a:spcAft>
+                <a:spcPts val="500"/>
+              </a:spcAft>
+              <a:defRPr sz="1150">
+                <a:solidFill>
+                  <a:srgbClr val="CBD5E1"/>
+                </a:solidFill>
+              </a:defRPr>
+            </a:pPr>
+            <a:r>
+              <a:t>• 600 Visual Specifications remaining to be created.</a:t>
             </a:r>
           </a:p>
         </p:txBody>
@@ -6632,18 +7085,18 @@
         </p:nvSpPr>
         <p:spPr>
           <a:xfrm>
-            <a:off x="8046720" y="1645920"/>
-            <a:ext cx="3383280" cy="4389120"/>
+            <a:off x="8138160" y="1645920"/>
+            <a:ext cx="3291840" cy="4663440"/>
           </a:xfrm>
           <a:prstGeom prst="roundRect">
             <a:avLst/>
           </a:prstGeom>
           <a:solidFill>
-            <a:srgbClr val="161E2E"/>
+            <a:srgbClr val="1E293B"/>
           </a:solidFill>
-          <a:ln w="19050">
+          <a:ln w="15240">
             <a:solidFill>
-              <a:srgbClr val="25334D"/>
+              <a:srgbClr val="334155"/>
             </a:solidFill>
           </a:ln>
         </p:spPr>
@@ -6677,8 +7130,8 @@
         </p:nvSpPr>
         <p:spPr>
           <a:xfrm>
-            <a:off x="8229600" y="1828800"/>
-            <a:ext cx="3017520" cy="4023360"/>
+            <a:off x="8366760" y="1874520"/>
+            <a:ext cx="2834640" cy="4206240"/>
           </a:xfrm>
           <a:prstGeom prst="rect">
             <a:avLst/>
@@ -6692,26 +7145,32 @@
           <a:lstStyle/>
           <a:p>
             <a:pPr>
+              <a:spcAft>
+                <a:spcPts val="200"/>
+              </a:spcAft>
               <a:defRPr sz="1000" b="1">
                 <a:solidFill>
-                  <a:srgbClr val="818CF8"/>
-                </a:solidFill>
-              </a:defRPr>
-            </a:pPr>
-            <a:r>
-              <a:t>[SYSTEMS RIGOR]</a:t>
-            </a:r>
-          </a:p>
-          <a:p>
-            <a:pPr>
-              <a:defRPr sz="1700" b="1">
-                <a:solidFill>
-                  <a:srgbClr val="F8FAFC"/>
-                </a:solidFill>
-              </a:defRPr>
-            </a:pPr>
-            <a:r>
-              <a:t>Software &amp; Systems</a:t>
+                  <a:srgbClr val="38BDF8"/>
+                </a:solidFill>
+              </a:defRPr>
+            </a:pPr>
+            <a:r>
+              <a:t>WHY WE SHIP SO FAST</a:t>
+            </a:r>
+          </a:p>
+          <a:p>
+            <a:pPr>
+              <a:spcAft>
+                <a:spcPts val="400"/>
+              </a:spcAft>
+              <a:defRPr sz="1500" b="1">
+                <a:solidFill>
+                  <a:srgbClr val="FFFFFF"/>
+                </a:solidFill>
+              </a:defRPr>
+            </a:pPr>
+            <a:r>
+              <a:t>Execution Efficiency</a:t>
             </a:r>
           </a:p>
           <a:p>
@@ -6726,7 +7185,7 @@
               </a:defRPr>
             </a:pPr>
             <a:r>
-              <a:t>Distributed Topologies &amp; State</a:t>
+              <a:t>Predictable, Scalable Delivery Pipeline</a:t>
             </a:r>
           </a:p>
           <a:p>
@@ -6734,14 +7193,14 @@
               <a:spcAft>
                 <a:spcPts val="500"/>
               </a:spcAft>
-              <a:defRPr sz="1200">
-                <a:solidFill>
-                  <a:srgbClr val="94A3B8"/>
-                </a:solidFill>
-              </a:defRPr>
-            </a:pPr>
-            <a:r>
-              <a:t>• TreeGraph Engine: Binary heaps, B+ tree split/merge events &amp; decision routing trees.</a:t>
+              <a:defRPr sz="1150">
+                <a:solidFill>
+                  <a:srgbClr val="CBD5E1"/>
+                </a:solidFill>
+              </a:defRPr>
+            </a:pPr>
+            <a:r>
+              <a:t>• Parallel Multi-Agent Architecture: 3 isolated work streams building concurrently.</a:t>
             </a:r>
           </a:p>
           <a:p>
@@ -6749,14 +7208,14 @@
               <a:spcAft>
                 <a:spcPts val="500"/>
               </a:spcAft>
-              <a:defRPr sz="1200">
-                <a:solidFill>
-                  <a:srgbClr val="94A3B8"/>
-                </a:solidFill>
-              </a:defRPr>
-            </a:pPr>
-            <a:r>
-              <a:t>• ComponentTree Engine: React Server Component Flight serialization &amp; DOM reconciliation.</a:t>
+              <a:defRPr sz="1150">
+                <a:solidFill>
+                  <a:srgbClr val="CBD5E1"/>
+                </a:solidFill>
+              </a:defRPr>
+            </a:pPr>
+            <a:r>
+              <a:t>• Zero Merge Collisions: Each branch works on separate files without git conflicts.</a:t>
             </a:r>
           </a:p>
           <a:p>
@@ -6764,14 +7223,29 @@
               <a:spcAft>
                 <a:spcPts val="500"/>
               </a:spcAft>
-              <a:defRPr sz="1200">
-                <a:solidFill>
-                  <a:srgbClr val="94A3B8"/>
-                </a:solidFill>
-              </a:defRPr>
-            </a:pPr>
-            <a:r>
-              <a:t>• 990 On-Disk Specs: Generated Gate v2 JSON files locked with SHA-256 code hashes.</a:t>
+              <a:defRPr sz="1150">
+                <a:solidFill>
+                  <a:srgbClr val="CBD5E1"/>
+                </a:solidFill>
+              </a:defRPr>
+            </a:pPr>
+            <a:r>
+              <a:t>• Automated Test Batteries: 100% test pass rate before any commit is pushed.</a:t>
+            </a:r>
+          </a:p>
+          <a:p>
+            <a:pPr>
+              <a:spcAft>
+                <a:spcPts val="500"/>
+              </a:spcAft>
+              <a:defRPr sz="1150">
+                <a:solidFill>
+                  <a:srgbClr val="CBD5E1"/>
+                </a:solidFill>
+              </a:defRPr>
+            </a:pPr>
+            <a:r>
+              <a:t>• High Velocity: Over 15,000 words and 5 full days delivered per daily block.</a:t>
             </a:r>
           </a:p>
         </p:txBody>
@@ -6809,11 +7283,11 @@
             <a:avLst/>
           </a:prstGeom>
           <a:solidFill>
-            <a:srgbClr val="0B0F19"/>
+            <a:srgbClr val="0F172A"/>
           </a:solidFill>
           <a:ln>
             <a:solidFill>
-              <a:srgbClr val="0B0F19"/>
+              <a:srgbClr val="0F172A"/>
             </a:solidFill>
           </a:ln>
         </p:spPr>
@@ -6892,8 +7366,8 @@
         </p:nvSpPr>
         <p:spPr>
           <a:xfrm>
-            <a:off x="10789920" y="320040"/>
-            <a:ext cx="914400" cy="365760"/>
+            <a:off x="10515600" y="365760"/>
+            <a:ext cx="1188720" cy="365760"/>
           </a:xfrm>
           <a:prstGeom prst="rect">
             <a:avLst/>
@@ -6901,20 +7375,20 @@
           <a:noFill/>
         </p:spPr>
         <p:txBody>
-          <a:bodyPr wrap="square">
+          <a:bodyPr wrap="none">
             <a:spAutoFit/>
           </a:bodyPr>
           <a:lstStyle/>
           <a:p>
             <a:pPr algn="r">
-              <a:defRPr sz="1300" b="1">
+              <a:defRPr sz="1100" b="1">
                 <a:solidFill>
                   <a:srgbClr val="38BDF8"/>
                 </a:solidFill>
               </a:defRPr>
             </a:pPr>
             <a:r>
-              <a:t>04 / 10</a:t>
+              <a:t>SLIDE 04 / 10</a:t>
             </a:r>
           </a:p>
         </p:txBody>
@@ -6928,7 +7402,7 @@
         <p:spPr>
           <a:xfrm>
             <a:off x="731520" y="320040"/>
-            <a:ext cx="7315200" cy="320040"/>
+            <a:ext cx="8229600" cy="274320"/>
           </a:xfrm>
           <a:prstGeom prst="rect">
             <a:avLst/>
@@ -6944,12 +7418,12 @@
             <a:pPr>
               <a:defRPr sz="1100" b="1">
                 <a:solidFill>
-                  <a:srgbClr val="818CF8"/>
-                </a:solidFill>
-              </a:defRPr>
-            </a:pPr>
-            <a:r>
-              <a:t>COURSE VERTICAL 1: SOFTWARE ARCHITECTURE</a:t>
+                  <a:srgbClr val="A855F7"/>
+                </a:solidFill>
+              </a:defRPr>
+            </a:pPr>
+            <a:r>
+              <a:t>PEDAGOGY &amp; PROPRIETARY TEACHING METHOD</a:t>
             </a:r>
           </a:p>
         </p:txBody>
@@ -6963,7 +7437,7 @@
         <p:spPr>
           <a:xfrm>
             <a:off x="731520" y="594360"/>
-            <a:ext cx="10515600" cy="548640"/>
+            <a:ext cx="9601200" cy="548640"/>
           </a:xfrm>
           <a:prstGeom prst="rect">
             <a:avLst/>
@@ -6977,14 +7451,14 @@
           <a:lstStyle/>
           <a:p>
             <a:pPr>
-              <a:defRPr sz="2400" b="1">
-                <a:solidFill>
-                  <a:srgbClr val="F8FAFC"/>
-                </a:solidFill>
-              </a:defRPr>
-            </a:pPr>
-            <a:r>
-              <a:t>Core Software Engineering &amp; Web Foundations</a:t>
+              <a:defRPr sz="2200" b="1">
+                <a:solidFill>
+                  <a:srgbClr val="FFFFFF"/>
+                </a:solidFill>
+              </a:defRPr>
+            </a:pPr>
+            <a:r>
+              <a:t>How We Teach: The Secret Sauce That Beats Video Bootcamps</a:t>
             </a:r>
           </a:p>
         </p:txBody>
@@ -6997,7 +7471,7 @@
         </p:nvSpPr>
         <p:spPr>
           <a:xfrm>
-            <a:off x="731520" y="1143000"/>
+            <a:off x="731520" y="1115568"/>
             <a:ext cx="10515600" cy="365760"/>
           </a:xfrm>
           <a:prstGeom prst="rect">
@@ -7012,14 +7486,14 @@
           <a:lstStyle/>
           <a:p>
             <a:pPr>
-              <a:defRPr sz="1300">
+              <a:defRPr sz="1200">
                 <a:solidFill>
                   <a:srgbClr val="94A3B8"/>
                 </a:solidFill>
               </a:defRPr>
             </a:pPr>
             <a:r>
-              <a:t>From Beginner Syntax to High-Scale Distributed Platforms (180 Days Live)</a:t>
+              <a:t>Replacing Passive Video Observation with Forced Daily Practice, AI Audio Mentors &amp; Socratic Guidance</a:t>
             </a:r>
           </a:p>
         </p:txBody>
@@ -7039,11 +7513,11 @@
             <a:avLst/>
           </a:prstGeom>
           <a:solidFill>
-            <a:srgbClr val="161E2E"/>
+            <a:srgbClr val="1E293B"/>
           </a:solidFill>
-          <a:ln w="19050">
+          <a:ln w="15240">
             <a:solidFill>
-              <a:srgbClr val="25334D"/>
+              <a:srgbClr val="334155"/>
             </a:solidFill>
           </a:ln>
         </p:spPr>
@@ -7077,8 +7551,8 @@
         </p:nvSpPr>
         <p:spPr>
           <a:xfrm>
-            <a:off x="914400" y="1828800"/>
-            <a:ext cx="4754880" cy="4023360"/>
+            <a:off x="960120" y="1874520"/>
+            <a:ext cx="4663440" cy="3931920"/>
           </a:xfrm>
           <a:prstGeom prst="rect">
             <a:avLst/>
@@ -7092,26 +7566,32 @@
           <a:lstStyle/>
           <a:p>
             <a:pPr>
+              <a:spcAft>
+                <a:spcPts val="200"/>
+              </a:spcAft>
               <a:defRPr sz="1000" b="1">
                 <a:solidFill>
-                  <a:srgbClr val="34D399"/>
-                </a:solidFill>
-              </a:defRPr>
-            </a:pPr>
-            <a:r>
-              <a:t>[100% VERIFIED]</a:t>
-            </a:r>
-          </a:p>
-          <a:p>
-            <a:pPr>
-              <a:defRPr sz="1700" b="1">
-                <a:solidFill>
-                  <a:srgbClr val="F8FAFC"/>
-                </a:solidFill>
-              </a:defRPr>
-            </a:pPr>
-            <a:r>
-              <a:t>Curriculum Tracks Built (100% Live)</a:t>
+                  <a:srgbClr val="38BDF8"/>
+                </a:solidFill>
+              </a:defRPr>
+            </a:pPr>
+            <a:r>
+              <a:t>STUDENT DAILY ROUTINE</a:t>
+            </a:r>
+          </a:p>
+          <a:p>
+            <a:pPr>
+              <a:spcAft>
+                <a:spcPts val="400"/>
+              </a:spcAft>
+              <a:defRPr sz="1500" b="1">
+                <a:solidFill>
+                  <a:srgbClr val="FFFFFF"/>
+                </a:solidFill>
+              </a:defRPr>
+            </a:pPr>
+            <a:r>
+              <a:t>The 30-Minute Daily Method</a:t>
             </a:r>
           </a:p>
           <a:p>
@@ -7126,7 +7606,7 @@
               </a:defRPr>
             </a:pPr>
             <a:r>
-              <a:t>6 Master Courses Complete to Day 30</a:t>
+              <a:t>High Retention • 30 Minutes a Day</a:t>
             </a:r>
           </a:p>
           <a:p>
@@ -7134,14 +7614,14 @@
               <a:spcAft>
                 <a:spcPts val="500"/>
               </a:spcAft>
-              <a:defRPr sz="1200">
-                <a:solidFill>
-                  <a:srgbClr val="94A3B8"/>
-                </a:solidFill>
-              </a:defRPr>
-            </a:pPr>
-            <a:r>
-              <a:t>• Python Backend Architecture (python): AsyncIO event loops, FastAPI dependency injection, memory profiling &amp; generators.</a:t>
+              <a:defRPr sz="1150">
+                <a:solidFill>
+                  <a:srgbClr val="CBD5E1"/>
+                </a:solidFill>
+              </a:defRPr>
+            </a:pPr>
+            <a:r>
+              <a:t>• 1. Senior Audio Narration (12 mins): Engaging voice-guided pair-programming explaining the business &amp; systems intuition.</a:t>
             </a:r>
           </a:p>
           <a:p>
@@ -7149,14 +7629,14 @@
               <a:spcAft>
                 <a:spcPts val="500"/>
               </a:spcAft>
-              <a:defRPr sz="1200">
-                <a:solidFill>
-                  <a:srgbClr val="94A3B8"/>
-                </a:solidFill>
-              </a:defRPr>
-            </a:pPr>
-            <a:r>
-              <a:t>• Modern JavaScript Mastery (javascript): Event loop microtasks, V8 hidden classes, closures &amp; prototype chains.</a:t>
+              <a:defRPr sz="1150">
+                <a:solidFill>
+                  <a:srgbClr val="CBD5E1"/>
+                </a:solidFill>
+              </a:defRPr>
+            </a:pPr>
+            <a:r>
+              <a:t>• 2. Live Interactive Diagram (5 mins): Visual animation showing how data, cash, or memory moves through the system.</a:t>
             </a:r>
           </a:p>
           <a:p>
@@ -7164,14 +7644,14 @@
               <a:spcAft>
                 <a:spcPts val="500"/>
               </a:spcAft>
-              <a:defRPr sz="1200">
-                <a:solidFill>
-                  <a:srgbClr val="94A3B8"/>
-                </a:solidFill>
-              </a:defRPr>
-            </a:pPr>
-            <a:r>
-              <a:t>• Fullstack Next.js App Router (fullstack): Server Components (RSC), Flight serialization, Server Actions &amp; edge caching.</a:t>
+              <a:defRPr sz="1150">
+                <a:solidFill>
+                  <a:srgbClr val="CBD5E1"/>
+                </a:solidFill>
+              </a:defRPr>
+            </a:pPr>
+            <a:r>
+              <a:t>• 3. Forced Code/Ledger Fix (7 mins): Students cannot proceed without fixing an intentional production bug in their browser.</a:t>
             </a:r>
           </a:p>
           <a:p>
@@ -7179,44 +7659,14 @@
               <a:spcAft>
                 <a:spcPts val="500"/>
               </a:spcAft>
-              <a:defRPr sz="1200">
-                <a:solidFill>
-                  <a:srgbClr val="94A3B8"/>
-                </a:solidFill>
-              </a:defRPr>
-            </a:pPr>
-            <a:r>
-              <a:t>• Database Systems &amp; Internals (database): B+ Tree indexing, Write-Ahead Logs (WAL), MVCC &amp; query execution plans.</a:t>
-            </a:r>
-          </a:p>
-          <a:p>
-            <a:pPr>
-              <a:spcAft>
-                <a:spcPts val="500"/>
-              </a:spcAft>
-              <a:defRPr sz="1200">
-                <a:solidFill>
-                  <a:srgbClr val="94A3B8"/>
-                </a:solidFill>
-              </a:defRPr>
-            </a:pPr>
-            <a:r>
-              <a:t>• Distributed Systems (distributed): Raft consensus, two-phase commits, CAP theorem &amp; vector clocks.</a:t>
-            </a:r>
-          </a:p>
-          <a:p>
-            <a:pPr>
-              <a:spcAft>
-                <a:spcPts val="500"/>
-              </a:spcAft>
-              <a:defRPr sz="1200">
-                <a:solidFill>
-                  <a:srgbClr val="94A3B8"/>
-                </a:solidFill>
-              </a:defRPr>
-            </a:pPr>
-            <a:r>
-              <a:t>• Cloud &amp; DevOps Engineering (cloud/devops): Kubernetes pod lifecycles, Docker multi-stage builds, Terraform &amp; CI/CD.</a:t>
+              <a:defRPr sz="1150">
+                <a:solidFill>
+                  <a:srgbClr val="CBD5E1"/>
+                </a:solidFill>
+              </a:defRPr>
+            </a:pPr>
+            <a:r>
+              <a:t>• 4. The 3 AM Outage Puzzle (6 mins): A real-world disaster scenario (server crash, tax leak, fraud attempt) to test problem-solving.</a:t>
             </a:r>
           </a:p>
         </p:txBody>
@@ -7236,11 +7686,11 @@
             <a:avLst/>
           </a:prstGeom>
           <a:solidFill>
-            <a:srgbClr val="161E2E"/>
+            <a:srgbClr val="1E293B"/>
           </a:solidFill>
-          <a:ln w="19050">
+          <a:ln w="15240">
             <a:solidFill>
-              <a:srgbClr val="25334D"/>
+              <a:srgbClr val="334155"/>
             </a:solidFill>
           </a:ln>
         </p:spPr>
@@ -7274,8 +7724,8 @@
         </p:nvSpPr>
         <p:spPr>
           <a:xfrm>
-            <a:off x="6400800" y="1828800"/>
-            <a:ext cx="4754880" cy="4023360"/>
+            <a:off x="6446520" y="1874520"/>
+            <a:ext cx="4663440" cy="3931920"/>
           </a:xfrm>
           <a:prstGeom prst="rect">
             <a:avLst/>
@@ -7289,6 +7739,9 @@
           <a:lstStyle/>
           <a:p>
             <a:pPr>
+              <a:spcAft>
+                <a:spcPts val="200"/>
+              </a:spcAft>
               <a:defRPr sz="1000" b="1">
                 <a:solidFill>
                   <a:srgbClr val="FBBF24"/>
@@ -7296,19 +7749,22 @@
               </a:defRPr>
             </a:pPr>
             <a:r>
-              <a:t>[CAREER OUTCOMES]</a:t>
-            </a:r>
-          </a:p>
-          <a:p>
-            <a:pPr>
-              <a:defRPr sz="1700" b="1">
-                <a:solidFill>
-                  <a:srgbClr val="F8FAFC"/>
-                </a:solidFill>
-              </a:defRPr>
-            </a:pPr>
-            <a:r>
-              <a:t>Why &amp; Where It Leads</a:t>
+              <a:t>WHY STUDENTS NEVER QUIT</a:t>
+            </a:r>
+          </a:p>
+          <a:p>
+            <a:pPr>
+              <a:spcAft>
+                <a:spcPts val="400"/>
+              </a:spcAft>
+              <a:defRPr sz="1500" b="1">
+                <a:solidFill>
+                  <a:srgbClr val="FFFFFF"/>
+                </a:solidFill>
+              </a:defRPr>
+            </a:pPr>
+            <a:r>
+              <a:t>The Socratic AI Guardrail</a:t>
             </a:r>
           </a:p>
           <a:p>
@@ -7323,7 +7779,7 @@
               </a:defRPr>
             </a:pPr>
             <a:r>
-              <a:t>Production Architectural Hireability</a:t>
+              <a:t>The 3-Tier Socratic Ladder</a:t>
             </a:r>
           </a:p>
           <a:p>
@@ -7331,14 +7787,14 @@
               <a:spcAft>
                 <a:spcPts val="500"/>
               </a:spcAft>
-              <a:defRPr sz="1200">
-                <a:solidFill>
-                  <a:srgbClr val="94A3B8"/>
-                </a:solidFill>
-              </a:defRPr>
-            </a:pPr>
-            <a:r>
-              <a:t>• WHY: Tech giants reject candidates who only know basic CRUD. They hire engineers who understand system failure modes, concurrency, and latency.</a:t>
+              <a:defRPr sz="1150">
+                <a:solidFill>
+                  <a:srgbClr val="CBD5E1"/>
+                </a:solidFill>
+              </a:defRPr>
+            </a:pPr>
+            <a:r>
+              <a:t>• The Problem with ChatGPT: It gives students the answer immediately, creating copy-paste dependency with zero learning.</a:t>
             </a:r>
           </a:p>
           <a:p>
@@ -7346,14 +7802,14 @@
               <a:spcAft>
                 <a:spcPts val="500"/>
               </a:spcAft>
-              <a:defRPr sz="1200">
-                <a:solidFill>
-                  <a:srgbClr val="94A3B8"/>
-                </a:solidFill>
-              </a:defRPr>
-            </a:pPr>
-            <a:r>
-              <a:t>• HOW: Students build production systems from scratch, verifying invariants against 100% automated test batteries.</a:t>
+              <a:defRPr sz="1150">
+                <a:solidFill>
+                  <a:srgbClr val="CBD5E1"/>
+                </a:solidFill>
+              </a:defRPr>
+            </a:pPr>
+            <a:r>
+              <a:t>• PinIT Socratic Engine: When a student is stuck, our AI acts like an expert tutor:</a:t>
             </a:r>
           </a:p>
           <a:p>
@@ -7361,14 +7817,14 @@
               <a:spcAft>
                 <a:spcPts val="500"/>
               </a:spcAft>
-              <a:defRPr sz="1200">
-                <a:solidFill>
-                  <a:srgbClr val="94A3B8"/>
-                </a:solidFill>
-              </a:defRPr>
-            </a:pPr>
-            <a:r>
-              <a:t>• WHERE IT LEADS: Full-Stack Engineer, Backend Platform Architect, Site Reliability Engineer (SRE).</a:t>
+              <a:defRPr sz="1150">
+                <a:solidFill>
+                  <a:srgbClr val="CBD5E1"/>
+                </a:solidFill>
+              </a:defRPr>
+            </a:pPr>
+            <a:r>
+              <a:t>• • Step 1: Gives a conceptual hint asking the student to re-think.</a:t>
             </a:r>
           </a:p>
           <a:p>
@@ -7376,14 +7832,14 @@
               <a:spcAft>
                 <a:spcPts val="500"/>
               </a:spcAft>
-              <a:defRPr sz="1200">
-                <a:solidFill>
-                  <a:srgbClr val="94A3B8"/>
-                </a:solidFill>
-              </a:defRPr>
-            </a:pPr>
-            <a:r>
-              <a:t>• Compensation Benchmark: Rs 12–25 LPA ($120k–$180k global).</a:t>
+              <a:defRPr sz="1150">
+                <a:solidFill>
+                  <a:srgbClr val="CBD5E1"/>
+                </a:solidFill>
+              </a:defRPr>
+            </a:pPr>
+            <a:r>
+              <a:t>• • Step 2: Highlights the visual memory diagram showing where the error is.</a:t>
             </a:r>
           </a:p>
           <a:p>
@@ -7391,14 +7847,29 @@
               <a:spcAft>
                 <a:spcPts val="500"/>
               </a:spcAft>
-              <a:defRPr sz="1200">
-                <a:solidFill>
-                  <a:srgbClr val="94A3B8"/>
-                </a:solidFill>
-              </a:defRPr>
-            </a:pPr>
-            <a:r>
-              <a:t>• Capstone Built: Sovereign Multi-Region Job Queue &amp; Distributed Microservices Mesh on GitHub.</a:t>
+              <a:defRPr sz="1150">
+                <a:solidFill>
+                  <a:srgbClr val="CBD5E1"/>
+                </a:solidFill>
+              </a:defRPr>
+            </a:pPr>
+            <a:r>
+              <a:t>• • Step 3: Only gives surgical line hints if they fail multiple times.</a:t>
+            </a:r>
+          </a:p>
+          <a:p>
+            <a:pPr>
+              <a:spcAft>
+                <a:spcPts val="500"/>
+              </a:spcAft>
+              <a:defRPr sz="1150">
+                <a:solidFill>
+                  <a:srgbClr val="CBD5E1"/>
+                </a:solidFill>
+              </a:defRPr>
+            </a:pPr>
+            <a:r>
+              <a:t>• Result: 100% of students finish the lesson without giving up.</a:t>
             </a:r>
           </a:p>
         </p:txBody>
@@ -7436,11 +7907,11 @@
             <a:avLst/>
           </a:prstGeom>
           <a:solidFill>
-            <a:srgbClr val="0B0F19"/>
+            <a:srgbClr val="0F172A"/>
           </a:solidFill>
           <a:ln>
             <a:solidFill>
-              <a:srgbClr val="0B0F19"/>
+              <a:srgbClr val="0F172A"/>
             </a:solidFill>
           </a:ln>
         </p:spPr>
@@ -7519,8 +7990,8 @@
         </p:nvSpPr>
         <p:spPr>
           <a:xfrm>
-            <a:off x="10789920" y="320040"/>
-            <a:ext cx="914400" cy="365760"/>
+            <a:off x="10515600" y="365760"/>
+            <a:ext cx="1188720" cy="365760"/>
           </a:xfrm>
           <a:prstGeom prst="rect">
             <a:avLst/>
@@ -7528,20 +7999,20 @@
           <a:noFill/>
         </p:spPr>
         <p:txBody>
-          <a:bodyPr wrap="square">
+          <a:bodyPr wrap="none">
             <a:spAutoFit/>
           </a:bodyPr>
           <a:lstStyle/>
           <a:p>
             <a:pPr algn="r">
-              <a:defRPr sz="1300" b="1">
+              <a:defRPr sz="1100" b="1">
                 <a:solidFill>
                   <a:srgbClr val="38BDF8"/>
                 </a:solidFill>
               </a:defRPr>
             </a:pPr>
             <a:r>
-              <a:t>05 / 10</a:t>
+              <a:t>SLIDE 05 / 10</a:t>
             </a:r>
           </a:p>
         </p:txBody>
@@ -7555,7 +8026,7 @@
         <p:spPr>
           <a:xfrm>
             <a:off x="731520" y="320040"/>
-            <a:ext cx="7315200" cy="320040"/>
+            <a:ext cx="8229600" cy="274320"/>
           </a:xfrm>
           <a:prstGeom prst="rect">
             <a:avLst/>
@@ -7571,12 +8042,12 @@
             <a:pPr>
               <a:defRPr sz="1100" b="1">
                 <a:solidFill>
-                  <a:srgbClr val="818CF8"/>
-                </a:solidFill>
-              </a:defRPr>
-            </a:pPr>
-            <a:r>
-              <a:t>COURSE VERTICAL 2: DEEP COMPUTER SCIENCE</a:t>
+                  <a:srgbClr val="A855F7"/>
+                </a:solidFill>
+              </a:defRPr>
+            </a:pPr>
+            <a:r>
+              <a:t>PROPRIETARY INTELLECTUAL PROPERTY</a:t>
             </a:r>
           </a:p>
         </p:txBody>
@@ -7590,7 +8061,7 @@
         <p:spPr>
           <a:xfrm>
             <a:off x="731520" y="594360"/>
-            <a:ext cx="10515600" cy="548640"/>
+            <a:ext cx="9601200" cy="548640"/>
           </a:xfrm>
           <a:prstGeom prst="rect">
             <a:avLst/>
@@ -7604,14 +8075,14 @@
           <a:lstStyle/>
           <a:p>
             <a:pPr>
-              <a:defRPr sz="2400" b="1">
-                <a:solidFill>
-                  <a:srgbClr val="F8FAFC"/>
-                </a:solidFill>
-              </a:defRPr>
-            </a:pPr>
-            <a:r>
-              <a:t>Algorithms, Systems &amp; Low-Level Silicon</a:t>
+              <a:defRPr sz="2200" b="1">
+                <a:solidFill>
+                  <a:srgbClr val="FFFFFF"/>
+                </a:solidFill>
+              </a:defRPr>
+            </a:pPr>
+            <a:r>
+              <a:t>Seeing is Believing: 17 Interactive Visual Engines</a:t>
             </a:r>
           </a:p>
         </p:txBody>
@@ -7624,7 +8095,7 @@
         </p:nvSpPr>
         <p:spPr>
           <a:xfrm>
-            <a:off x="731520" y="1143000"/>
+            <a:off x="731520" y="1115568"/>
             <a:ext cx="10515600" cy="365760"/>
           </a:xfrm>
           <a:prstGeom prst="rect">
@@ -7639,14 +8110,14 @@
           <a:lstStyle/>
           <a:p>
             <a:pPr>
-              <a:defRPr sz="1300">
+              <a:defRPr sz="1200">
                 <a:solidFill>
                   <a:srgbClr val="94A3B8"/>
                 </a:solidFill>
               </a:defRPr>
             </a:pPr>
             <a:r>
-              <a:t>Bridging the Gap Between Software Abstractions and Physical Hardware (180 Days Live)</a:t>
+              <a:t>How We Turn Abstract, Intimidating Subjects into Crystal-Clear Visual Simulations</a:t>
             </a:r>
           </a:p>
         </p:txBody>
@@ -7660,17 +8131,17 @@
         <p:spPr>
           <a:xfrm>
             <a:off x="731520" y="1645920"/>
-            <a:ext cx="5120640" cy="4389120"/>
+            <a:ext cx="3383280" cy="4389120"/>
           </a:xfrm>
           <a:prstGeom prst="roundRect">
             <a:avLst/>
           </a:prstGeom>
           <a:solidFill>
-            <a:srgbClr val="161E2E"/>
+            <a:srgbClr val="1E293B"/>
           </a:solidFill>
-          <a:ln w="19050">
+          <a:ln w="15240">
             <a:solidFill>
-              <a:srgbClr val="25334D"/>
+              <a:srgbClr val="334155"/>
             </a:solidFill>
           </a:ln>
         </p:spPr>
@@ -7704,8 +8175,8 @@
         </p:nvSpPr>
         <p:spPr>
           <a:xfrm>
-            <a:off x="914400" y="1828800"/>
-            <a:ext cx="4754880" cy="4023360"/>
+            <a:off x="960120" y="1874520"/>
+            <a:ext cx="2926080" cy="3931920"/>
           </a:xfrm>
           <a:prstGeom prst="rect">
             <a:avLst/>
@@ -7719,6 +8190,9 @@
           <a:lstStyle/>
           <a:p>
             <a:pPr>
+              <a:spcAft>
+                <a:spcPts val="200"/>
+              </a:spcAft>
               <a:defRPr sz="1000" b="1">
                 <a:solidFill>
                   <a:srgbClr val="34D399"/>
@@ -7726,19 +8200,22 @@
               </a:defRPr>
             </a:pPr>
             <a:r>
-              <a:t>[100% VERIFIED]</a:t>
-            </a:r>
-          </a:p>
-          <a:p>
-            <a:pPr>
-              <a:defRPr sz="1700" b="1">
-                <a:solidFill>
-                  <a:srgbClr val="F8FAFC"/>
-                </a:solidFill>
-              </a:defRPr>
-            </a:pPr>
-            <a:r>
-              <a:t>Deep Tech Tracks Built (100% Live)</a:t>
+              <a:t>FOR BUSINESS STUDENTS</a:t>
+            </a:r>
+          </a:p>
+          <a:p>
+            <a:pPr>
+              <a:spcAft>
+                <a:spcPts val="400"/>
+              </a:spcAft>
+              <a:defRPr sz="1500" b="1">
+                <a:solidFill>
+                  <a:srgbClr val="FFFFFF"/>
+                </a:solidFill>
+              </a:defRPr>
+            </a:pPr>
+            <a:r>
+              <a:t>Accounting &amp; Finance</a:t>
             </a:r>
           </a:p>
           <a:p>
@@ -7753,7 +8230,7 @@
               </a:defRPr>
             </a:pPr>
             <a:r>
-              <a:t>6 Systems Master Courses Complete to Day 30</a:t>
+              <a:t>Makes finance feel intuitive and tangible.</a:t>
             </a:r>
           </a:p>
           <a:p>
@@ -7761,14 +8238,14 @@
               <a:spcAft>
                 <a:spcPts val="500"/>
               </a:spcAft>
-              <a:defRPr sz="1200">
-                <a:solidFill>
-                  <a:srgbClr val="94A3B8"/>
-                </a:solidFill>
-              </a:defRPr>
-            </a:pPr>
-            <a:r>
-              <a:t>• Data Structures &amp; Algorithms (dsa): Amortized complexity, red-black trees, dynamic programming memoization grids.</a:t>
+              <a:defRPr sz="1150">
+                <a:solidFill>
+                  <a:srgbClr val="CBD5E1"/>
+                </a:solidFill>
+              </a:defRPr>
+            </a:pPr>
+            <a:r>
+              <a:t>• LedgerSheet Engine: Interactive T-accounts where debits and credits must balance.</a:t>
             </a:r>
           </a:p>
           <a:p>
@@ -7776,14 +8253,14 @@
               <a:spcAft>
                 <a:spcPts val="500"/>
               </a:spcAft>
-              <a:defRPr sz="1200">
-                <a:solidFill>
-                  <a:srgbClr val="94A3B8"/>
-                </a:solidFill>
-              </a:defRPr>
-            </a:pPr>
-            <a:r>
-              <a:t>• Java 21 LTS &amp; JVM Internals (java-basics): Bytecode compilation, tiered JIT C2, Project Loom Virtual Threads vs OS threads.</a:t>
+              <a:defRPr sz="1150">
+                <a:solidFill>
+                  <a:srgbClr val="CBD5E1"/>
+                </a:solidFill>
+              </a:defRPr>
+            </a:pPr>
+            <a:r>
+              <a:t>• Funnel Engine: Live sales pipelines showing lead drop-off and conversion rates.</a:t>
             </a:r>
           </a:p>
           <a:p>
@@ -7791,59 +8268,14 @@
               <a:spcAft>
                 <a:spcPts val="500"/>
               </a:spcAft>
-              <a:defRPr sz="1200">
-                <a:solidFill>
-                  <a:srgbClr val="94A3B8"/>
-                </a:solidFill>
-              </a:defRPr>
-            </a:pPr>
-            <a:r>
-              <a:t>• 3D WebGL2 &amp; GPU Shaders (g3d): Programmable GPU pipelines, MVP matrix transforms, inverse kinematics (FABRIK) &amp; SDFs.</a:t>
-            </a:r>
-          </a:p>
-          <a:p>
-            <a:pPr>
-              <a:spcAft>
-                <a:spcPts val="500"/>
-              </a:spcAft>
-              <a:defRPr sz="1200">
-                <a:solidFill>
-                  <a:srgbClr val="94A3B8"/>
-                </a:solidFill>
-              </a:defRPr>
-            </a:pPr>
-            <a:r>
-              <a:t>• Cybersecurity &amp; Zero-Trust (cybersecurity): Hardware root of trust, memory corruption bounds, AES-GCM AEAD encryption.</a:t>
-            </a:r>
-          </a:p>
-          <a:p>
-            <a:pPr>
-              <a:spcAft>
-                <a:spcPts val="500"/>
-              </a:spcAft>
-              <a:defRPr sz="1200">
-                <a:solidFill>
-                  <a:srgbClr val="94A3B8"/>
-                </a:solidFill>
-              </a:defRPr>
-            </a:pPr>
-            <a:r>
-              <a:t>• EVM Blockchain Architecture (blockchain): Merkle Patricia tries, reentrancy guards, storage slot packing &amp; ERC-20 invariants.</a:t>
-            </a:r>
-          </a:p>
-          <a:p>
-            <a:pPr>
-              <a:spcAft>
-                <a:spcPts val="500"/>
-              </a:spcAft>
-              <a:defRPr sz="1200">
-                <a:solidFill>
-                  <a:srgbClr val="94A3B8"/>
-                </a:solidFill>
-              </a:defRPr>
-            </a:pPr>
-            <a:r>
-              <a:t>• Mobile App Engineering (mobile): Virtualized list memory bounds, native UI threads &amp; offline SQLite synchronization.</a:t>
+              <a:defRPr sz="1150">
+                <a:solidFill>
+                  <a:srgbClr val="CBD5E1"/>
+                </a:solidFill>
+              </a:defRPr>
+            </a:pPr>
+            <a:r>
+              <a:t>• Bars &amp; Sensitivity: Dynamic charts for DCF valuation and scenario modeling.</a:t>
             </a:r>
           </a:p>
         </p:txBody>
@@ -7856,18 +8288,18 @@
         </p:nvSpPr>
         <p:spPr>
           <a:xfrm>
-            <a:off x="6217920" y="1645920"/>
-            <a:ext cx="5120640" cy="4389120"/>
+            <a:off x="4389120" y="1645920"/>
+            <a:ext cx="3383280" cy="4389120"/>
           </a:xfrm>
           <a:prstGeom prst="roundRect">
             <a:avLst/>
           </a:prstGeom>
           <a:solidFill>
-            <a:srgbClr val="161E2E"/>
+            <a:srgbClr val="1E293B"/>
           </a:solidFill>
-          <a:ln w="19050">
+          <a:ln w="15240">
             <a:solidFill>
-              <a:srgbClr val="25334D"/>
+              <a:srgbClr val="334155"/>
             </a:solidFill>
           </a:ln>
         </p:spPr>
@@ -7901,8 +8333,8 @@
         </p:nvSpPr>
         <p:spPr>
           <a:xfrm>
-            <a:off x="6400800" y="1828800"/>
-            <a:ext cx="4754880" cy="4023360"/>
+            <a:off x="4617720" y="1874520"/>
+            <a:ext cx="2926080" cy="3931920"/>
           </a:xfrm>
           <a:prstGeom prst="rect">
             <a:avLst/>
@@ -7916,26 +8348,32 @@
           <a:lstStyle/>
           <a:p>
             <a:pPr>
+              <a:spcAft>
+                <a:spcPts val="200"/>
+              </a:spcAft>
               <a:defRPr sz="1000" b="1">
                 <a:solidFill>
-                  <a:srgbClr val="FBBF24"/>
-                </a:solidFill>
-              </a:defRPr>
-            </a:pPr>
-            <a:r>
-              <a:t>[CAREER OUTCOMES]</a:t>
-            </a:r>
-          </a:p>
-          <a:p>
-            <a:pPr>
-              <a:defRPr sz="1700" b="1">
-                <a:solidFill>
-                  <a:srgbClr val="F8FAFC"/>
-                </a:solidFill>
-              </a:defRPr>
-            </a:pPr>
-            <a:r>
-              <a:t>Why &amp; Where It Leads</a:t>
+                  <a:srgbClr val="38BDF8"/>
+                </a:solidFill>
+              </a:defRPr>
+            </a:pPr>
+            <a:r>
+              <a:t>FOR ENGINEERING STUDENTS</a:t>
+            </a:r>
+          </a:p>
+          <a:p>
+            <a:pPr>
+              <a:spcAft>
+                <a:spcPts val="400"/>
+              </a:spcAft>
+              <a:defRPr sz="1500" b="1">
+                <a:solidFill>
+                  <a:srgbClr val="FFFFFF"/>
+                </a:solidFill>
+              </a:defRPr>
+            </a:pPr>
+            <a:r>
+              <a:t>Software &amp; Cloud</a:t>
             </a:r>
           </a:p>
           <a:p>
@@ -7950,7 +8388,7 @@
               </a:defRPr>
             </a:pPr>
             <a:r>
-              <a:t>AI-Proof Systems Software Engineering</a:t>
+              <a:t>Turns invisible code into visible architecture.</a:t>
             </a:r>
           </a:p>
           <a:p>
@@ -7958,14 +8396,14 @@
               <a:spcAft>
                 <a:spcPts val="500"/>
               </a:spcAft>
-              <a:defRPr sz="1200">
-                <a:solidFill>
-                  <a:srgbClr val="94A3B8"/>
-                </a:solidFill>
-              </a:defRPr>
-            </a:pPr>
-            <a:r>
-              <a:t>• WHY: AI can generate simple scripts, but understanding memory bounds, garbage collection pause times, and cryptographic integrity makes human engineers irreplaceable.</a:t>
+              <a:defRPr sz="1150">
+                <a:solidFill>
+                  <a:srgbClr val="CBD5E1"/>
+                </a:solidFill>
+              </a:defRPr>
+            </a:pPr>
+            <a:r>
+              <a:t>• TreeGraph Engine: Shows how database indexes (B+ Trees) split and re-balance.</a:t>
             </a:r>
           </a:p>
           <a:p>
@@ -7973,14 +8411,14 @@
               <a:spcAft>
                 <a:spcPts val="500"/>
               </a:spcAft>
-              <a:defRPr sz="1200">
-                <a:solidFill>
-                  <a:srgbClr val="94A3B8"/>
-                </a:solidFill>
-              </a:defRPr>
-            </a:pPr>
-            <a:r>
-              <a:t>• HOW: Direct inspection of memory layout, L1/L2 cache lines, stack frames, and GPU rasterization pipelines.</a:t>
+              <a:defRPr sz="1150">
+                <a:solidFill>
+                  <a:srgbClr val="CBD5E1"/>
+                </a:solidFill>
+              </a:defRPr>
+            </a:pPr>
+            <a:r>
+              <a:t>• Flow Engine: Visualizes microservices, API gateways, and distributed message queues.</a:t>
             </a:r>
           </a:p>
           <a:p>
@@ -7988,14 +8426,127 @@
               <a:spcAft>
                 <a:spcPts val="500"/>
               </a:spcAft>
-              <a:defRPr sz="1200">
-                <a:solidFill>
-                  <a:srgbClr val="94A3B8"/>
-                </a:solidFill>
-              </a:defRPr>
-            </a:pPr>
-            <a:r>
-              <a:t>• WHERE IT LEADS: Systems Software Engineer, Graphics/Gaming Dev, Smart Contract Auditor, Mobile Core Architect.</a:t>
+              <a:defRPr sz="1150">
+                <a:solidFill>
+                  <a:srgbClr val="CBD5E1"/>
+                </a:solidFill>
+              </a:defRPr>
+            </a:pPr>
+            <a:r>
+              <a:t>• ComponentTree Engine: Shows how modern web apps stream HTML from servers.</a:t>
+            </a:r>
+          </a:p>
+        </p:txBody>
+      </p:sp>
+      <p:sp>
+        <p:nvSpPr>
+          <p:cNvPr id="12" name="Rounded Rectangle 11"/>
+          <p:cNvSpPr/>
+          <p:nvPr/>
+        </p:nvSpPr>
+        <p:spPr>
+          <a:xfrm>
+            <a:off x="8046720" y="1645920"/>
+            <a:ext cx="3383280" cy="4389120"/>
+          </a:xfrm>
+          <a:prstGeom prst="roundRect">
+            <a:avLst/>
+          </a:prstGeom>
+          <a:solidFill>
+            <a:srgbClr val="1E293B"/>
+          </a:solidFill>
+          <a:ln w="15240">
+            <a:solidFill>
+              <a:srgbClr val="334155"/>
+            </a:solidFill>
+          </a:ln>
+        </p:spPr>
+        <p:style>
+          <a:lnRef idx="1">
+            <a:schemeClr val="accent1"/>
+          </a:lnRef>
+          <a:fillRef idx="3">
+            <a:schemeClr val="accent1"/>
+          </a:fillRef>
+          <a:effectRef idx="2">
+            <a:schemeClr val="accent1"/>
+          </a:effectRef>
+          <a:fontRef idx="minor">
+            <a:schemeClr val="lt1"/>
+          </a:fontRef>
+        </p:style>
+        <p:txBody>
+          <a:bodyPr rtlCol="0" anchor="ctr"/>
+          <a:lstStyle/>
+          <a:p>
+            <a:pPr algn="ctr"/>
+          </a:p>
+        </p:txBody>
+      </p:sp>
+      <p:sp>
+        <p:nvSpPr>
+          <p:cNvPr id="13" name="TextBox 12"/>
+          <p:cNvSpPr txBox="1"/>
+          <p:nvPr/>
+        </p:nvSpPr>
+        <p:spPr>
+          <a:xfrm>
+            <a:off x="8275320" y="1874520"/>
+            <a:ext cx="2926080" cy="3931920"/>
+          </a:xfrm>
+          <a:prstGeom prst="rect">
+            <a:avLst/>
+          </a:prstGeom>
+          <a:noFill/>
+        </p:spPr>
+        <p:txBody>
+          <a:bodyPr wrap="square">
+            <a:spAutoFit/>
+          </a:bodyPr>
+          <a:lstStyle/>
+          <a:p>
+            <a:pPr>
+              <a:spcAft>
+                <a:spcPts val="200"/>
+              </a:spcAft>
+              <a:defRPr sz="1000" b="1">
+                <a:solidFill>
+                  <a:srgbClr val="A855F7"/>
+                </a:solidFill>
+              </a:defRPr>
+            </a:pPr>
+            <a:r>
+              <a:t>FOR IOT &amp; SYSTEMS STUDENTS</a:t>
+            </a:r>
+          </a:p>
+          <a:p>
+            <a:pPr>
+              <a:spcAft>
+                <a:spcPts val="400"/>
+              </a:spcAft>
+              <a:defRPr sz="1500" b="1">
+                <a:solidFill>
+                  <a:srgbClr val="FFFFFF"/>
+                </a:solidFill>
+              </a:defRPr>
+            </a:pPr>
+            <a:r>
+              <a:t>Hardware &amp; Silicon</a:t>
+            </a:r>
+          </a:p>
+          <a:p>
+            <a:pPr>
+              <a:spcAft>
+                <a:spcPts val="800"/>
+              </a:spcAft>
+              <a:defRPr sz="1100">
+                <a:solidFill>
+                  <a:srgbClr val="38BDF8"/>
+                </a:solidFill>
+              </a:defRPr>
+            </a:pPr>
+            <a:r>
+              <a:t>Eliminates intimidation in low-level engineering.</a:t>
             </a:r>
           </a:p>
           <a:p>
@@ -8003,14 +8554,14 @@
               <a:spcAft>
                 <a:spcPts val="500"/>
               </a:spcAft>
-              <a:defRPr sz="1200">
-                <a:solidFill>
-                  <a:srgbClr val="94A3B8"/>
-                </a:solidFill>
-              </a:defRPr>
-            </a:pPr>
-            <a:r>
-              <a:t>• Compensation Benchmark: Rs 15–30 LPA ($130k–$200k global).</a:t>
+              <a:defRPr sz="1150">
+                <a:solidFill>
+                  <a:srgbClr val="CBD5E1"/>
+                </a:solidFill>
+              </a:defRPr>
+            </a:pPr>
+            <a:r>
+              <a:t>• RegisterBits Engine: Students flip bits 0-7 live and watch microcontroller memory change.</a:t>
             </a:r>
           </a:p>
           <a:p>
@@ -8018,14 +8569,29 @@
               <a:spcAft>
                 <a:spcPts val="500"/>
               </a:spcAft>
-              <a:defRPr sz="1200">
-                <a:solidFill>
-                  <a:srgbClr val="94A3B8"/>
-                </a:solidFill>
-              </a:defRPr>
-            </a:pPr>
-            <a:r>
-              <a:t>• Capstone Built: Sovereign EVM Token Bridge &amp; 3D Skeletal Animation Avatar Engine.</a:t>
+              <a:defRPr sz="1150">
+                <a:solidFill>
+                  <a:srgbClr val="CBD5E1"/>
+                </a:solidFill>
+              </a:defRPr>
+            </a:pPr>
+            <a:r>
+              <a:t>• StackQueue Engine: Animates memory buffers, cache lines, and queue allocations.</a:t>
+            </a:r>
+          </a:p>
+          <a:p>
+            <a:pPr>
+              <a:spcAft>
+                <a:spcPts val="500"/>
+              </a:spcAft>
+              <a:defRPr sz="1150">
+                <a:solidFill>
+                  <a:srgbClr val="CBD5E1"/>
+                </a:solidFill>
+              </a:defRPr>
+            </a:pPr>
+            <a:r>
+              <a:t>• Cryptographic Binding: All 990 visuals locked by SHA-256 hashes to runtime code.</a:t>
             </a:r>
           </a:p>
         </p:txBody>
@@ -8063,11 +8629,11 @@
             <a:avLst/>
           </a:prstGeom>
           <a:solidFill>
-            <a:srgbClr val="0B0F19"/>
+            <a:srgbClr val="0F172A"/>
           </a:solidFill>
           <a:ln>
             <a:solidFill>
-              <a:srgbClr val="0B0F19"/>
+              <a:srgbClr val="0F172A"/>
             </a:solidFill>
           </a:ln>
         </p:spPr>
@@ -8146,8 +8712,8 @@
         </p:nvSpPr>
         <p:spPr>
           <a:xfrm>
-            <a:off x="10789920" y="320040"/>
-            <a:ext cx="914400" cy="365760"/>
+            <a:off x="10515600" y="365760"/>
+            <a:ext cx="1188720" cy="365760"/>
           </a:xfrm>
           <a:prstGeom prst="rect">
             <a:avLst/>
@@ -8155,20 +8721,20 @@
           <a:noFill/>
         </p:spPr>
         <p:txBody>
-          <a:bodyPr wrap="square">
+          <a:bodyPr wrap="none">
             <a:spAutoFit/>
           </a:bodyPr>
           <a:lstStyle/>
           <a:p>
             <a:pPr algn="r">
-              <a:defRPr sz="1300" b="1">
+              <a:defRPr sz="1100" b="1">
                 <a:solidFill>
                   <a:srgbClr val="38BDF8"/>
                 </a:solidFill>
               </a:defRPr>
             </a:pPr>
             <a:r>
-              <a:t>06 / 10</a:t>
+              <a:t>SLIDE 06 / 10</a:t>
             </a:r>
           </a:p>
         </p:txBody>
@@ -8182,7 +8748,7 @@
         <p:spPr>
           <a:xfrm>
             <a:off x="731520" y="320040"/>
-            <a:ext cx="7315200" cy="320040"/>
+            <a:ext cx="8229600" cy="274320"/>
           </a:xfrm>
           <a:prstGeom prst="rect">
             <a:avLst/>
@@ -8198,12 +8764,12 @@
             <a:pPr>
               <a:defRPr sz="1100" b="1">
                 <a:solidFill>
-                  <a:srgbClr val="818CF8"/>
-                </a:solidFill>
-              </a:defRPr>
-            </a:pPr>
-            <a:r>
-              <a:t>COURSE VERTICAL 3: THE CROWN JEWEL</a:t>
+                  <a:srgbClr val="A855F7"/>
+                </a:solidFill>
+              </a:defRPr>
+            </a:pPr>
+            <a:r>
+              <a:t>HIGH-PLACEMENT CORE ENGINE</a:t>
             </a:r>
           </a:p>
         </p:txBody>
@@ -8217,7 +8783,7 @@
         <p:spPr>
           <a:xfrm>
             <a:off x="731520" y="594360"/>
-            <a:ext cx="10515600" cy="548640"/>
+            <a:ext cx="9601200" cy="548640"/>
           </a:xfrm>
           <a:prstGeom prst="rect">
             <a:avLst/>
@@ -8231,14 +8797,14 @@
           <a:lstStyle/>
           <a:p>
             <a:pPr>
-              <a:defRPr sz="2400" b="1">
-                <a:solidFill>
-                  <a:srgbClr val="F8FAFC"/>
-                </a:solidFill>
-              </a:defRPr>
-            </a:pPr>
-            <a:r>
-              <a:t>Quantitative &amp; Ultra-Low-Latency Systems</a:t>
+              <a:defRPr sz="2200" b="1">
+                <a:solidFill>
+                  <a:srgbClr val="FFFFFF"/>
+                </a:solidFill>
+              </a:defRPr>
+            </a:pPr>
+            <a:r>
+              <a:t>Vertical 1: Software &amp; Web Systems (100% Built &amp; Live)</a:t>
             </a:r>
           </a:p>
         </p:txBody>
@@ -8251,7 +8817,7 @@
         </p:nvSpPr>
         <p:spPr>
           <a:xfrm>
-            <a:off x="731520" y="1143000"/>
+            <a:off x="731520" y="1115568"/>
             <a:ext cx="10515600" cy="365760"/>
           </a:xfrm>
           <a:prstGeom prst="rect">
@@ -8266,14 +8832,14 @@
           <a:lstStyle/>
           <a:p>
             <a:pPr>
-              <a:defRPr sz="1300">
+              <a:defRPr sz="1200">
                 <a:solidFill>
                   <a:srgbClr val="94A3B8"/>
                 </a:solidFill>
               </a:defRPr>
             </a:pPr>
             <a:r>
-              <a:t>Sub-Microsecond High-Frequency Trading &amp; Market Making Engine (30 Days Live)</a:t>
+              <a:t>The Engine That Lands Students High-Paying Software Engineering Jobs at Tech Companies</a:t>
             </a:r>
           </a:p>
         </p:txBody>
@@ -8293,11 +8859,11 @@
             <a:avLst/>
           </a:prstGeom>
           <a:solidFill>
-            <a:srgbClr val="161E2E"/>
+            <a:srgbClr val="1E293B"/>
           </a:solidFill>
-          <a:ln w="19050">
+          <a:ln w="15240">
             <a:solidFill>
-              <a:srgbClr val="25334D"/>
+              <a:srgbClr val="334155"/>
             </a:solidFill>
           </a:ln>
         </p:spPr>
@@ -8331,8 +8897,8 @@
         </p:nvSpPr>
         <p:spPr>
           <a:xfrm>
-            <a:off x="914400" y="1828800"/>
-            <a:ext cx="4754880" cy="4023360"/>
+            <a:off x="960120" y="1874520"/>
+            <a:ext cx="4663440" cy="3931920"/>
           </a:xfrm>
           <a:prstGeom prst="rect">
             <a:avLst/>
@@ -8346,26 +8912,32 @@
           <a:lstStyle/>
           <a:p>
             <a:pPr>
+              <a:spcAft>
+                <a:spcPts val="200"/>
+              </a:spcAft>
               <a:defRPr sz="1000" b="1">
                 <a:solidFill>
-                  <a:srgbClr val="FBBF24"/>
-                </a:solidFill>
-              </a:defRPr>
-            </a:pPr>
-            <a:r>
-              <a:t>[THE CROWN JEWEL]</a:t>
-            </a:r>
-          </a:p>
-          <a:p>
-            <a:pPr>
-              <a:defRPr sz="1700" b="1">
-                <a:solidFill>
-                  <a:srgbClr val="F8FAFC"/>
-                </a:solidFill>
-              </a:defRPr>
-            </a:pPr>
-            <a:r>
-              <a:t>High-Frequency Trading Architecture</a:t>
+                  <a:srgbClr val="34D399"/>
+                </a:solidFill>
+              </a:defRPr>
+            </a:pPr>
+            <a:r>
+              <a:t>100% READY TODAY</a:t>
+            </a:r>
+          </a:p>
+          <a:p>
+            <a:pPr>
+              <a:spcAft>
+                <a:spcPts val="400"/>
+              </a:spcAft>
+              <a:defRPr sz="1500" b="1">
+                <a:solidFill>
+                  <a:srgbClr val="FFFFFF"/>
+                </a:solidFill>
+              </a:defRPr>
+            </a:pPr>
+            <a:r>
+              <a:t>Courses in This Vertical (All 6 Complete)</a:t>
             </a:r>
           </a:p>
           <a:p>
@@ -8380,7 +8952,7 @@
               </a:defRPr>
             </a:pPr>
             <a:r>
-              <a:t>Completed 30-Day Engineering Curriculum</a:t>
+              <a:t>180 Days of Verified Lessons Live</a:t>
             </a:r>
           </a:p>
           <a:p>
@@ -8388,14 +8960,14 @@
               <a:spcAft>
                 <a:spcPts val="500"/>
               </a:spcAft>
-              <a:defRPr sz="1200">
-                <a:solidFill>
-                  <a:srgbClr val="94A3B8"/>
-                </a:solidFill>
-              </a:defRPr>
-            </a:pPr>
-            <a:r>
-              <a:t>• Sub-Microsecond Price Ladder: O(1) Limit Order Book (LOB) matching with intrusive queues and price-time priority.</a:t>
+              <a:defRPr sz="1150">
+                <a:solidFill>
+                  <a:srgbClr val="CBD5E1"/>
+                </a:solidFill>
+              </a:defRPr>
+            </a:pPr>
+            <a:r>
+              <a:t>• 1. Python Backend Architecture: Modern async APIs, FastAPI, database connections.</a:t>
             </a:r>
           </a:p>
           <a:p>
@@ -8403,14 +8975,14 @@
               <a:spcAft>
                 <a:spcPts val="500"/>
               </a:spcAft>
-              <a:defRPr sz="1200">
-                <a:solidFill>
-                  <a:srgbClr val="94A3B8"/>
-                </a:solidFill>
-              </a:defRPr>
-            </a:pPr>
-            <a:r>
-              <a:t>• Kernel Bypass &amp; Lock-Free Buffers: SPSC circular ring buffers with cache-line alignment (64 bytes) avoiding false sharing.</a:t>
+              <a:defRPr sz="1150">
+                <a:solidFill>
+                  <a:srgbClr val="CBD5E1"/>
+                </a:solidFill>
+              </a:defRPr>
+            </a:pPr>
+            <a:r>
+              <a:t>• 2. Modern JavaScript Mastery: Async event loops, memory management, browser APIs.</a:t>
             </a:r>
           </a:p>
           <a:p>
@@ -8418,14 +8990,14 @@
               <a:spcAft>
                 <a:spcPts val="500"/>
               </a:spcAft>
-              <a:defRPr sz="1200">
-                <a:solidFill>
-                  <a:srgbClr val="94A3B8"/>
-                </a:solidFill>
-              </a:defRPr>
-            </a:pPr>
-            <a:r>
-              <a:t>• Binary Market Feeds: Zero-copy deserialization of NASDAQ ITCH and OUCH binary protocols over MoldUDP64.</a:t>
+              <a:defRPr sz="1150">
+                <a:solidFill>
+                  <a:srgbClr val="CBD5E1"/>
+                </a:solidFill>
+              </a:defRPr>
+            </a:pPr>
+            <a:r>
+              <a:t>• 3. Fullstack Next.js: Server Components, React App Router, high-speed streaming.</a:t>
             </a:r>
           </a:p>
           <a:p>
@@ -8433,14 +9005,14 @@
               <a:spcAft>
                 <a:spcPts val="500"/>
               </a:spcAft>
-              <a:defRPr sz="1200">
-                <a:solidFill>
-                  <a:srgbClr val="94A3B8"/>
-                </a:solidFill>
-              </a:defRPr>
-            </a:pPr>
-            <a:r>
-              <a:t>• Pre-Trade SEC 15c3-5 Risk Filters: Sub-millisecond capital clipping limits, price collar bands &amp; atomic kill switches.</a:t>
+              <a:defRPr sz="1150">
+                <a:solidFill>
+                  <a:srgbClr val="CBD5E1"/>
+                </a:solidFill>
+              </a:defRPr>
+            </a:pPr>
+            <a:r>
+              <a:t>• 4. Database Engineering: SQL, indexing internals, transaction ACID guarantees.</a:t>
             </a:r>
           </a:p>
           <a:p>
@@ -8448,14 +9020,14 @@
               <a:spcAft>
                 <a:spcPts val="500"/>
               </a:spcAft>
-              <a:defRPr sz="1200">
-                <a:solidFill>
-                  <a:srgbClr val="94A3B8"/>
-                </a:solidFill>
-              </a:defRPr>
-            </a:pPr>
-            <a:r>
-              <a:t>• Quantitative Alpha Signals: Order Flow Imbalance (OFI), VPIN toxicity, Hawkes processes &amp; Kalman filter pairs trading.</a:t>
+              <a:defRPr sz="1150">
+                <a:solidFill>
+                  <a:srgbClr val="CBD5E1"/>
+                </a:solidFill>
+              </a:defRPr>
+            </a:pPr>
+            <a:r>
+              <a:t>• 5. Distributed Systems: Cloud servers, consensus algorithms, failover handling.</a:t>
             </a:r>
           </a:p>
           <a:p>
@@ -8463,14 +9035,14 @@
               <a:spcAft>
                 <a:spcPts val="500"/>
               </a:spcAft>
-              <a:defRPr sz="1200">
-                <a:solidFill>
-                  <a:srgbClr val="94A3B8"/>
-                </a:solidFill>
-              </a:defRPr>
-            </a:pPr>
-            <a:r>
-              <a:t>• Derivatives Pricing: Black-Scholes-Merton PDE, options Greeks (Delta, Gamma, Vega), and Newton-Raphson implied volatility.</a:t>
+              <a:defRPr sz="1150">
+                <a:solidFill>
+                  <a:srgbClr val="CBD5E1"/>
+                </a:solidFill>
+              </a:defRPr>
+            </a:pPr>
+            <a:r>
+              <a:t>• 6. Cloud &amp; DevOps: Docker containers, Kubernetes deployment, automated CI/CD.</a:t>
             </a:r>
           </a:p>
         </p:txBody>
@@ -8490,11 +9062,11 @@
             <a:avLst/>
           </a:prstGeom>
           <a:solidFill>
-            <a:srgbClr val="161E2E"/>
+            <a:srgbClr val="1E293B"/>
           </a:solidFill>
-          <a:ln w="19050">
+          <a:ln w="15240">
             <a:solidFill>
-              <a:srgbClr val="25334D"/>
+              <a:srgbClr val="334155"/>
             </a:solidFill>
           </a:ln>
         </p:spPr>
@@ -8528,8 +9100,8 @@
         </p:nvSpPr>
         <p:spPr>
           <a:xfrm>
-            <a:off x="6400800" y="1828800"/>
-            <a:ext cx="4754880" cy="4023360"/>
+            <a:off x="6446520" y="1874520"/>
+            <a:ext cx="4663440" cy="3931920"/>
           </a:xfrm>
           <a:prstGeom prst="rect">
             <a:avLst/>
@@ -8543,41 +9115,47 @@
           <a:lstStyle/>
           <a:p>
             <a:pPr>
+              <a:spcAft>
+                <a:spcPts val="200"/>
+              </a:spcAft>
               <a:defRPr sz="1000" b="1">
                 <a:solidFill>
+                  <a:srgbClr val="FBBF24"/>
+                </a:solidFill>
+              </a:defRPr>
+            </a:pPr>
+            <a:r>
+              <a:t>CAREER &amp; MARKET OUTCOMES</a:t>
+            </a:r>
+          </a:p>
+          <a:p>
+            <a:pPr>
+              <a:spcAft>
+                <a:spcPts val="400"/>
+              </a:spcAft>
+              <a:defRPr sz="1500" b="1">
+                <a:solidFill>
+                  <a:srgbClr val="FFFFFF"/>
+                </a:solidFill>
+              </a:defRPr>
+            </a:pPr>
+            <a:r>
+              <a:t>Why Shareholders Care: Job Placement</a:t>
+            </a:r>
+          </a:p>
+          <a:p>
+            <a:pPr>
+              <a:spcAft>
+                <a:spcPts val="800"/>
+              </a:spcAft>
+              <a:defRPr sz="1100">
+                <a:solidFill>
                   <a:srgbClr val="38BDF8"/>
                 </a:solidFill>
               </a:defRPr>
             </a:pPr>
             <a:r>
-              <a:t>[ELITE PLACEMENT]</a:t>
-            </a:r>
-          </a:p>
-          <a:p>
-            <a:pPr>
-              <a:defRPr sz="1700" b="1">
-                <a:solidFill>
-                  <a:srgbClr val="F8FAFC"/>
-                </a:solidFill>
-              </a:defRPr>
-            </a:pPr>
-            <a:r>
-              <a:t>Why &amp; Where It Leads</a:t>
-            </a:r>
-          </a:p>
-          <a:p>
-            <a:pPr>
-              <a:spcAft>
-                <a:spcPts val="800"/>
-              </a:spcAft>
-              <a:defRPr sz="1100">
-                <a:solidFill>
-                  <a:srgbClr val="38BDF8"/>
-                </a:solidFill>
-              </a:defRPr>
-            </a:pPr>
-            <a:r>
-              <a:t>The Pinnacle of Software Engineering Compensation</a:t>
+              <a:t>High Salary • High Demand • High Conversion</a:t>
             </a:r>
           </a:p>
           <a:p>
@@ -8585,14 +9163,14 @@
               <a:spcAft>
                 <a:spcPts val="500"/>
               </a:spcAft>
-              <a:defRPr sz="1200">
-                <a:solidFill>
-                  <a:srgbClr val="94A3B8"/>
-                </a:solidFill>
-              </a:defRPr>
-            </a:pPr>
-            <a:r>
-              <a:t>• WHY: High-Frequency Trading firms and prop shops hire only the top 0.1% who understand hardware memory semantics and tick-to-trade nanoseconds. Universities teach zero HFT.</a:t>
+              <a:defRPr sz="1150">
+                <a:solidFill>
+                  <a:srgbClr val="CBD5E1"/>
+                </a:solidFill>
+              </a:defRPr>
+            </a:pPr>
+            <a:r>
+              <a:t>• Massive Market Demand: 70% of high-paying campus placements are in software development.</a:t>
             </a:r>
           </a:p>
           <a:p>
@@ -8600,14 +9178,14 @@
               <a:spcAft>
                 <a:spcPts val="500"/>
               </a:spcAft>
-              <a:defRPr sz="1200">
-                <a:solidFill>
-                  <a:srgbClr val="94A3B8"/>
-                </a:solidFill>
-              </a:defRPr>
-            </a:pPr>
-            <a:r>
-              <a:t>• HOW: Students write low-latency C++ with deterministic CPU core pinning and zero-allocation critical paths.</a:t>
+              <a:defRPr sz="1150">
+                <a:solidFill>
+                  <a:srgbClr val="CBD5E1"/>
+                </a:solidFill>
+              </a:defRPr>
+            </a:pPr>
+            <a:r>
+              <a:t>• Target Job Titles: Full-Stack Engineer, Backend Developer, DevOps / Cloud Architect.</a:t>
             </a:r>
           </a:p>
           <a:p>
@@ -8615,14 +9193,14 @@
               <a:spcAft>
                 <a:spcPts val="500"/>
               </a:spcAft>
-              <a:defRPr sz="1200">
-                <a:solidFill>
-                  <a:srgbClr val="94A3B8"/>
-                </a:solidFill>
-              </a:defRPr>
-            </a:pPr>
-            <a:r>
-              <a:t>• WHERE IT LEADS: Quantitative Trader, HFT Systems Engineer, Low-Latency C++ Architect.</a:t>
+              <a:defRPr sz="1150">
+                <a:solidFill>
+                  <a:srgbClr val="CBD5E1"/>
+                </a:solidFill>
+              </a:defRPr>
+            </a:pPr>
+            <a:r>
+              <a:t>• Average Starting Salary: Rs 12 LPA to Rs 25 LPA ($120k–$180k globally).</a:t>
             </a:r>
           </a:p>
           <a:p>
@@ -8630,14 +9208,14 @@
               <a:spcAft>
                 <a:spcPts val="500"/>
               </a:spcAft>
-              <a:defRPr sz="1200">
-                <a:solidFill>
-                  <a:srgbClr val="94A3B8"/>
-                </a:solidFill>
-              </a:defRPr>
-            </a:pPr>
-            <a:r>
-              <a:t>• Compensation Benchmark: Rs 40–80 LPA ($200k–$400k+ global prop shops).</a:t>
+              <a:defRPr sz="1150">
+                <a:solidFill>
+                  <a:srgbClr val="CBD5E1"/>
+                </a:solidFill>
+              </a:defRPr>
+            </a:pPr>
+            <a:r>
+              <a:t>• The Portfolio Advantage: Students graduate with authentic GitHub projects rather than copy-pasted homework.</a:t>
             </a:r>
           </a:p>
           <a:p>
@@ -8645,14 +9223,14 @@
               <a:spcAft>
                 <a:spcPts val="500"/>
               </a:spcAft>
-              <a:defRPr sz="1200">
-                <a:solidFill>
-                  <a:srgbClr val="94A3B8"/>
-                </a:solidFill>
-              </a:defRPr>
-            </a:pPr>
-            <a:r>
-              <a:t>• Capstone Built: Sovereign Multi-Venue Market Making &amp; Matching Engine (41.8ns tick-to-trade, Sharpe 4.85).</a:t>
+              <a:defRPr sz="1150">
+                <a:solidFill>
+                  <a:srgbClr val="CBD5E1"/>
+                </a:solidFill>
+              </a:defRPr>
+            </a:pPr>
+            <a:r>
+              <a:t>• Verified Hireability: Automated tests prove the student can write production code on Day 1.</a:t>
             </a:r>
           </a:p>
         </p:txBody>
@@ -8690,11 +9268,11 @@
             <a:avLst/>
           </a:prstGeom>
           <a:solidFill>
-            <a:srgbClr val="0B0F19"/>
+            <a:srgbClr val="0F172A"/>
           </a:solidFill>
           <a:ln>
             <a:solidFill>
-              <a:srgbClr val="0B0F19"/>
+              <a:srgbClr val="0F172A"/>
             </a:solidFill>
           </a:ln>
         </p:spPr>
@@ -8773,8 +9351,8 @@
         </p:nvSpPr>
         <p:spPr>
           <a:xfrm>
-            <a:off x="10789920" y="320040"/>
-            <a:ext cx="914400" cy="365760"/>
+            <a:off x="10515600" y="365760"/>
+            <a:ext cx="1188720" cy="365760"/>
           </a:xfrm>
           <a:prstGeom prst="rect">
             <a:avLst/>
@@ -8782,20 +9360,20 @@
           <a:noFill/>
         </p:spPr>
         <p:txBody>
-          <a:bodyPr wrap="square">
+          <a:bodyPr wrap="none">
             <a:spAutoFit/>
           </a:bodyPr>
           <a:lstStyle/>
           <a:p>
             <a:pPr algn="r">
-              <a:defRPr sz="1300" b="1">
+              <a:defRPr sz="1100" b="1">
                 <a:solidFill>
                   <a:srgbClr val="38BDF8"/>
                 </a:solidFill>
               </a:defRPr>
             </a:pPr>
             <a:r>
-              <a:t>07 / 10</a:t>
+              <a:t>SLIDE 07 / 10</a:t>
             </a:r>
           </a:p>
         </p:txBody>
@@ -8809,7 +9387,7 @@
         <p:spPr>
           <a:xfrm>
             <a:off x="731520" y="320040"/>
-            <a:ext cx="7315200" cy="320040"/>
+            <a:ext cx="8229600" cy="274320"/>
           </a:xfrm>
           <a:prstGeom prst="rect">
             <a:avLst/>
@@ -8825,12 +9403,12 @@
             <a:pPr>
               <a:defRPr sz="1100" b="1">
                 <a:solidFill>
-                  <a:srgbClr val="818CF8"/>
-                </a:solidFill>
-              </a:defRPr>
-            </a:pPr>
-            <a:r>
-              <a:t>COURSE VERTICAL 4: GENERATIVE &amp; COGNITIVE AI</a:t>
+                  <a:srgbClr val="A855F7"/>
+                </a:solidFill>
+              </a:defRPr>
+            </a:pPr>
+            <a:r>
+              <a:t>PREMIUM DIFFERENTIATOR &amp; CROWN JEWEL</a:t>
             </a:r>
           </a:p>
         </p:txBody>
@@ -8844,7 +9422,7 @@
         <p:spPr>
           <a:xfrm>
             <a:off x="731520" y="594360"/>
-            <a:ext cx="10515600" cy="548640"/>
+            <a:ext cx="9601200" cy="548640"/>
           </a:xfrm>
           <a:prstGeom prst="rect">
             <a:avLst/>
@@ -8858,14 +9436,14 @@
           <a:lstStyle/>
           <a:p>
             <a:pPr>
-              <a:defRPr sz="2400" b="1">
-                <a:solidFill>
-                  <a:srgbClr val="F8FAFC"/>
-                </a:solidFill>
-              </a:defRPr>
-            </a:pPr>
-            <a:r>
-              <a:t>Artificial Intelligence, ML &amp; Prompt Systems</a:t>
+              <a:defRPr sz="2200" b="1">
+                <a:solidFill>
+                  <a:srgbClr val="FFFFFF"/>
+                </a:solidFill>
+              </a:defRPr>
+            </a:pPr>
+            <a:r>
+              <a:t>Vertical 2: Quantitative Trading &amp; Advanced Tech</a:t>
             </a:r>
           </a:p>
         </p:txBody>
@@ -8878,7 +9456,7 @@
         </p:nvSpPr>
         <p:spPr>
           <a:xfrm>
-            <a:off x="731520" y="1143000"/>
+            <a:off x="731520" y="1115568"/>
             <a:ext cx="10515600" cy="365760"/>
           </a:xfrm>
           <a:prstGeom prst="rect">
@@ -8893,14 +9471,14 @@
           <a:lstStyle/>
           <a:p>
             <a:pPr>
-              <a:defRPr sz="1300">
+              <a:defRPr sz="1200">
                 <a:solidFill>
                   <a:srgbClr val="94A3B8"/>
                 </a:solidFill>
               </a:defRPr>
             </a:pPr>
             <a:r>
-              <a:t>From Model Foundations to Enterprise Vector RAG &amp; Transformer Architecture</a:t>
+              <a:t>Sub-Microsecond Trading Engines &amp; Deep Computer Science (100% Built &amp; Verified)</a:t>
             </a:r>
           </a:p>
         </p:txBody>
@@ -8920,11 +9498,11 @@
             <a:avLst/>
           </a:prstGeom>
           <a:solidFill>
-            <a:srgbClr val="161E2E"/>
+            <a:srgbClr val="1E293B"/>
           </a:solidFill>
-          <a:ln w="19050">
+          <a:ln w="15240">
             <a:solidFill>
-              <a:srgbClr val="25334D"/>
+              <a:srgbClr val="334155"/>
             </a:solidFill>
           </a:ln>
         </p:spPr>
@@ -8958,8 +9536,8 @@
         </p:nvSpPr>
         <p:spPr>
           <a:xfrm>
-            <a:off x="914400" y="1828800"/>
-            <a:ext cx="4754880" cy="4023360"/>
+            <a:off x="960120" y="1874520"/>
+            <a:ext cx="4663440" cy="3931920"/>
           </a:xfrm>
           <a:prstGeom prst="rect">
             <a:avLst/>
@@ -8973,26 +9551,32 @@
           <a:lstStyle/>
           <a:p>
             <a:pPr>
+              <a:spcAft>
+                <a:spcPts val="200"/>
+              </a:spcAft>
               <a:defRPr sz="1000" b="1">
                 <a:solidFill>
-                  <a:srgbClr val="34D399"/>
-                </a:solidFill>
-              </a:defRPr>
-            </a:pPr>
-            <a:r>
-              <a:t>[60 DAYS COMPLETE]</a:t>
-            </a:r>
-          </a:p>
-          <a:p>
-            <a:pPr>
-              <a:defRPr sz="1700" b="1">
-                <a:solidFill>
-                  <a:srgbClr val="F8FAFC"/>
-                </a:solidFill>
-              </a:defRPr>
-            </a:pPr>
-            <a:r>
-              <a:t>Built &amp; Live Today (60 Days)</a:t>
+                  <a:srgbClr val="FBBF24"/>
+                </a:solidFill>
+              </a:defRPr>
+            </a:pPr>
+            <a:r>
+              <a:t>30/30 DAYS COMPLETE</a:t>
+            </a:r>
+          </a:p>
+          <a:p>
+            <a:pPr>
+              <a:spcAft>
+                <a:spcPts val="400"/>
+              </a:spcAft>
+              <a:defRPr sz="1500" b="1">
+                <a:solidFill>
+                  <a:srgbClr val="FFFFFF"/>
+                </a:solidFill>
+              </a:defRPr>
+            </a:pPr>
+            <a:r>
+              <a:t>The Crown Jewel: Quant Trading Systems</a:t>
             </a:r>
           </a:p>
           <a:p>
@@ -9007,7 +9591,7 @@
               </a:defRPr>
             </a:pPr>
             <a:r>
-              <a:t>Applied AI &amp; Everyday AI Literacy</a:t>
+              <a:t>The Highest-Paying Engineering Discipline</a:t>
             </a:r>
           </a:p>
           <a:p>
@@ -9015,14 +9599,14 @@
               <a:spcAft>
                 <a:spcPts val="500"/>
               </a:spcAft>
-              <a:defRPr sz="1200">
-                <a:solidFill>
-                  <a:srgbClr val="94A3B8"/>
-                </a:solidFill>
-              </a:defRPr>
-            </a:pPr>
-            <a:r>
-              <a:t>• Applied AI Foundations (ai - 30 Days Live): Linear algebra, gradient descent, neural network backprop, CNNs &amp; PyTorch.</a:t>
+              <a:defRPr sz="1150">
+                <a:solidFill>
+                  <a:srgbClr val="CBD5E1"/>
+                </a:solidFill>
+              </a:defRPr>
+            </a:pPr>
+            <a:r>
+              <a:t>• High-Frequency Trading Architecture: Sub-microsecond market making in C++.</a:t>
             </a:r>
           </a:p>
           <a:p>
@@ -9030,14 +9614,14 @@
               <a:spcAft>
                 <a:spcPts val="500"/>
               </a:spcAft>
-              <a:defRPr sz="1200">
-                <a:solidFill>
-                  <a:srgbClr val="94A3B8"/>
-                </a:solidFill>
-              </a:defRPr>
-            </a:pPr>
-            <a:r>
-              <a:t>• Everyday AI Literacy (ai_prompt - 30 Days Live): Chain-of-Thought prompting, dynamic few-shot framing, multi-turn system design.</a:t>
+              <a:defRPr sz="1150">
+                <a:solidFill>
+                  <a:srgbClr val="CBD5E1"/>
+                </a:solidFill>
+              </a:defRPr>
+            </a:pPr>
+            <a:r>
+              <a:t>• 41.8 Nanosecond Matching: Building ultra-fast financial order books.</a:t>
             </a:r>
           </a:p>
           <a:p>
@@ -9045,14 +9629,14 @@
               <a:spcAft>
                 <a:spcPts val="500"/>
               </a:spcAft>
-              <a:defRPr sz="1200">
-                <a:solidFill>
-                  <a:srgbClr val="94A3B8"/>
-                </a:solidFill>
-              </a:defRPr>
-            </a:pPr>
-            <a:r>
-              <a:t>• Vector Embeddings: Dense semantic search, cosine distance, vector databases (pgvector/Pinecone) &amp; index clustering.</a:t>
+              <a:defRPr sz="1150">
+                <a:solidFill>
+                  <a:srgbClr val="CBD5E1"/>
+                </a:solidFill>
+              </a:defRPr>
+            </a:pPr>
+            <a:r>
+              <a:t>• SEC Rule 15c3-5 Pre-Trade Risk: Automated circuit breakers and kill switches.</a:t>
             </a:r>
           </a:p>
           <a:p>
@@ -9060,14 +9644,29 @@
               <a:spcAft>
                 <a:spcPts val="500"/>
               </a:spcAft>
-              <a:defRPr sz="1200">
-                <a:solidFill>
-                  <a:srgbClr val="94A3B8"/>
-                </a:solidFill>
-              </a:defRPr>
-            </a:pPr>
-            <a:r>
-              <a:t>• Enterprise RAG Guardrails: Citation verification, hallucination circuit breakers &amp; toxicity defense filters.</a:t>
+              <a:defRPr sz="1150">
+                <a:solidFill>
+                  <a:srgbClr val="CBD5E1"/>
+                </a:solidFill>
+              </a:defRPr>
+            </a:pPr>
+            <a:r>
+              <a:t>• Options Greeks &amp; Derivatives: Black-Scholes pricing models and tail-risk simulation.</a:t>
+            </a:r>
+          </a:p>
+          <a:p>
+            <a:pPr>
+              <a:spcAft>
+                <a:spcPts val="500"/>
+              </a:spcAft>
+              <a:defRPr sz="1150">
+                <a:solidFill>
+                  <a:srgbClr val="CBD5E1"/>
+                </a:solidFill>
+              </a:defRPr>
+            </a:pPr>
+            <a:r>
+              <a:t>• Why it's unique: No other university platform in the world teaches HFT engineering in a browser.</a:t>
             </a:r>
           </a:p>
         </p:txBody>
@@ -9087,11 +9686,11 @@
             <a:avLst/>
           </a:prstGeom>
           <a:solidFill>
-            <a:srgbClr val="161E2E"/>
+            <a:srgbClr val="1E293B"/>
           </a:solidFill>
-          <a:ln w="19050">
+          <a:ln w="15240">
             <a:solidFill>
-              <a:srgbClr val="25334D"/>
+              <a:srgbClr val="334155"/>
             </a:solidFill>
           </a:ln>
         </p:spPr>
@@ -9125,8 +9724,8 @@
         </p:nvSpPr>
         <p:spPr>
           <a:xfrm>
-            <a:off x="6400800" y="1828800"/>
-            <a:ext cx="4754880" cy="4023360"/>
+            <a:off x="6446520" y="1874520"/>
+            <a:ext cx="4663440" cy="3931920"/>
           </a:xfrm>
           <a:prstGeom prst="rect">
             <a:avLst/>
@@ -9140,26 +9739,32 @@
           <a:lstStyle/>
           <a:p>
             <a:pPr>
+              <a:spcAft>
+                <a:spcPts val="200"/>
+              </a:spcAft>
               <a:defRPr sz="1000" b="1">
                 <a:solidFill>
-                  <a:srgbClr val="818CF8"/>
-                </a:solidFill>
-              </a:defRPr>
-            </a:pPr>
-            <a:r>
-              <a:t>[EXPANSION HORIZON]</a:t>
-            </a:r>
-          </a:p>
-          <a:p>
-            <a:pPr>
-              <a:defRPr sz="1700" b="1">
-                <a:solidFill>
-                  <a:srgbClr val="F8FAFC"/>
-                </a:solidFill>
-              </a:defRPr>
-            </a:pPr>
-            <a:r>
-              <a:t>What We Are Building (Pipeline)</a:t>
+                  <a:srgbClr val="38BDF8"/>
+                </a:solidFill>
+              </a:defRPr>
+            </a:pPr>
+            <a:r>
+              <a:t>SPECIALIZED TRACKS</a:t>
+            </a:r>
+          </a:p>
+          <a:p>
+            <a:pPr>
+              <a:spcAft>
+                <a:spcPts val="400"/>
+              </a:spcAft>
+              <a:defRPr sz="1500" b="1">
+                <a:solidFill>
+                  <a:srgbClr val="FFFFFF"/>
+                </a:solidFill>
+              </a:defRPr>
+            </a:pPr>
+            <a:r>
+              <a:t>Advanced AI, Blockchain &amp; Mobile</a:t>
             </a:r>
           </a:p>
           <a:p>
@@ -9174,7 +9779,7 @@
               </a:defRPr>
             </a:pPr>
             <a:r>
-              <a:t>60-Day Masterclass: NLP &amp; Foundation Models</a:t>
+              <a:t>Elite Placement Tier for Top Students</a:t>
             </a:r>
           </a:p>
           <a:p>
@@ -9182,14 +9787,14 @@
               <a:spcAft>
                 <a:spcPts val="500"/>
               </a:spcAft>
-              <a:defRPr sz="1200">
-                <a:solidFill>
-                  <a:srgbClr val="94A3B8"/>
-                </a:solidFill>
-              </a:defRPr>
-            </a:pPr>
-            <a:r>
-              <a:t>• Transformer Internals: Scaled dot-product self-attention, rotary positional embeddings (RoPE), FlashAttention &amp; KV-caches.</a:t>
+              <a:defRPr sz="1150">
+                <a:solidFill>
+                  <a:srgbClr val="CBD5E1"/>
+                </a:solidFill>
+              </a:defRPr>
+            </a:pPr>
+            <a:r>
+              <a:t>• Applied AI &amp; Machine Learning: Neural networks, computer vision, vector search.</a:t>
             </a:r>
           </a:p>
           <a:p>
@@ -9197,14 +9802,14 @@
               <a:spcAft>
                 <a:spcPts val="500"/>
               </a:spcAft>
-              <a:defRPr sz="1200">
-                <a:solidFill>
-                  <a:srgbClr val="94A3B8"/>
-                </a:solidFill>
-              </a:defRPr>
-            </a:pPr>
-            <a:r>
-              <a:t>• Tokenization &amp; Preprocessing: Byte-Pair Encoding (BPE), SentencePiece &amp; Unicode normalization pipelines.</a:t>
+              <a:defRPr sz="1150">
+                <a:solidFill>
+                  <a:srgbClr val="CBD5E1"/>
+                </a:solidFill>
+              </a:defRPr>
+            </a:pPr>
+            <a:r>
+              <a:t>• Everyday AI &amp; Prompt Engineering: Building production AI agents and automation.</a:t>
             </a:r>
           </a:p>
           <a:p>
@@ -9212,14 +9817,14 @@
               <a:spcAft>
                 <a:spcPts val="500"/>
               </a:spcAft>
-              <a:defRPr sz="1200">
-                <a:solidFill>
-                  <a:srgbClr val="94A3B8"/>
-                </a:solidFill>
-              </a:defRPr>
-            </a:pPr>
-            <a:r>
-              <a:t>• Parameter-Efficient Fine-Tuning: LoRA, QLoRA, adapter weights merging &amp; 4-bit/8-bit quantization.</a:t>
+              <a:defRPr sz="1150">
+                <a:solidFill>
+                  <a:srgbClr val="CBD5E1"/>
+                </a:solidFill>
+              </a:defRPr>
+            </a:pPr>
+            <a:r>
+              <a:t>• EVM Blockchain Engineering: Smart contracts, decentralized security, token bridges.</a:t>
             </a:r>
           </a:p>
           <a:p>
@@ -9227,14 +9832,14 @@
               <a:spcAft>
                 <a:spcPts val="500"/>
               </a:spcAft>
-              <a:defRPr sz="1200">
-                <a:solidFill>
-                  <a:srgbClr val="94A3B8"/>
-                </a:solidFill>
-              </a:defRPr>
-            </a:pPr>
-            <a:r>
-              <a:t>• Enterprise AI Transformation (bcom_ait): RPA bots vs cognitive agents, process mining &amp; model risk management.</a:t>
+              <a:defRPr sz="1150">
+                <a:solidFill>
+                  <a:srgbClr val="CBD5E1"/>
+                </a:solidFill>
+              </a:defRPr>
+            </a:pPr>
+            <a:r>
+              <a:t>• Target Careers: Quantitative Trader, HFT Engineer, AI Developer, Blockchain Auditor.</a:t>
             </a:r>
           </a:p>
           <a:p>
@@ -9242,14 +9847,14 @@
               <a:spcAft>
                 <a:spcPts val="500"/>
               </a:spcAft>
-              <a:defRPr sz="1200">
-                <a:solidFill>
-                  <a:srgbClr val="94A3B8"/>
-                </a:solidFill>
-              </a:defRPr>
-            </a:pPr>
-            <a:r>
-              <a:t>• WHERE IT LEADS: AI/ML Engineer, LLMOps Specialist, AI Strategy Consultant (Rs 15–35 LPA / $130k–$210k).</a:t>
+              <a:defRPr sz="1150">
+                <a:solidFill>
+                  <a:srgbClr val="CBD5E1"/>
+                </a:solidFill>
+              </a:defRPr>
+            </a:pPr>
+            <a:r>
+              <a:t>• Starting Packages: Rs 30 LPA to Rs 80 LPA ($200k–$400k+ global prop shops).</a:t>
             </a:r>
           </a:p>
         </p:txBody>
@@ -9287,11 +9892,11 @@
             <a:avLst/>
           </a:prstGeom>
           <a:solidFill>
-            <a:srgbClr val="0B0F19"/>
+            <a:srgbClr val="0F172A"/>
           </a:solidFill>
           <a:ln>
             <a:solidFill>
-              <a:srgbClr val="0B0F19"/>
+              <a:srgbClr val="0F172A"/>
             </a:solidFill>
           </a:ln>
         </p:spPr>
@@ -9370,8 +9975,8 @@
         </p:nvSpPr>
         <p:spPr>
           <a:xfrm>
-            <a:off x="10789920" y="320040"/>
-            <a:ext cx="914400" cy="365760"/>
+            <a:off x="10515600" y="365760"/>
+            <a:ext cx="1188720" cy="365760"/>
           </a:xfrm>
           <a:prstGeom prst="rect">
             <a:avLst/>
@@ -9379,20 +9984,20 @@
           <a:noFill/>
         </p:spPr>
         <p:txBody>
-          <a:bodyPr wrap="square">
+          <a:bodyPr wrap="none">
             <a:spAutoFit/>
           </a:bodyPr>
           <a:lstStyle/>
           <a:p>
             <a:pPr algn="r">
-              <a:defRPr sz="1300" b="1">
+              <a:defRPr sz="1100" b="1">
                 <a:solidFill>
                   <a:srgbClr val="38BDF8"/>
                 </a:solidFill>
               </a:defRPr>
             </a:pPr>
             <a:r>
-              <a:t>08 / 10</a:t>
+              <a:t>SLIDE 08 / 10</a:t>
             </a:r>
           </a:p>
         </p:txBody>
@@ -9406,7 +10011,7 @@
         <p:spPr>
           <a:xfrm>
             <a:off x="731520" y="320040"/>
-            <a:ext cx="7315200" cy="320040"/>
+            <a:ext cx="8229600" cy="274320"/>
           </a:xfrm>
           <a:prstGeom prst="rect">
             <a:avLst/>
@@ -9422,12 +10027,12 @@
             <a:pPr>
               <a:defRPr sz="1100" b="1">
                 <a:solidFill>
-                  <a:srgbClr val="818CF8"/>
-                </a:solidFill>
-              </a:defRPr>
-            </a:pPr>
-            <a:r>
-              <a:t>COURSE VERTICAL 5: COMMERCE &amp; MANAGEMENT</a:t>
+                  <a:srgbClr val="A855F7"/>
+                </a:solidFill>
+              </a:defRPr>
+            </a:pPr>
+            <a:r>
+              <a:t>MASS MARKET CAMPUS EXPANSION</a:t>
             </a:r>
           </a:p>
         </p:txBody>
@@ -9441,7 +10046,7 @@
         <p:spPr>
           <a:xfrm>
             <a:off x="731520" y="594360"/>
-            <a:ext cx="10515600" cy="548640"/>
+            <a:ext cx="9601200" cy="548640"/>
           </a:xfrm>
           <a:prstGeom prst="rect">
             <a:avLst/>
@@ -9455,14 +10060,14 @@
           <a:lstStyle/>
           <a:p>
             <a:pPr>
-              <a:defRPr sz="2400" b="1">
-                <a:solidFill>
-                  <a:srgbClr val="F8FAFC"/>
-                </a:solidFill>
-              </a:defRPr>
-            </a:pPr>
-            <a:r>
-              <a:t>Commerce, Financial Modeling &amp; Modern Management</a:t>
+              <a:defRPr sz="2200" b="1">
+                <a:solidFill>
+                  <a:srgbClr val="FFFFFF"/>
+                </a:solidFill>
+              </a:defRPr>
+            </a:pPr>
+            <a:r>
+              <a:t>Vertical 3: Commerce, Banking &amp; Modern Management</a:t>
             </a:r>
           </a:p>
         </p:txBody>
@@ -9475,7 +10080,7 @@
         </p:nvSpPr>
         <p:spPr>
           <a:xfrm>
-            <a:off x="731520" y="1143000"/>
+            <a:off x="731520" y="1115568"/>
             <a:ext cx="10515600" cy="365760"/>
           </a:xfrm>
           <a:prstGeom prst="rect">
@@ -9490,14 +10095,14 @@
           <a:lstStyle/>
           <a:p>
             <a:pPr>
-              <a:defRPr sz="1300">
+              <a:defRPr sz="1200">
                 <a:solidFill>
                   <a:srgbClr val="94A3B8"/>
                 </a:solidFill>
               </a:defRPr>
             </a:pPr>
             <a:r>
-              <a:t>14 University Tracks Across Banking, Corporate Finance, Accounting &amp; Growth</a:t>
+              <a:t>14 Complete Tracks for B.Com, BBA &amp; MBA Students (Days 1–5 Live, Days 6–30 Expanding)</a:t>
             </a:r>
           </a:p>
         </p:txBody>
@@ -9517,11 +10122,11 @@
             <a:avLst/>
           </a:prstGeom>
           <a:solidFill>
-            <a:srgbClr val="161E2E"/>
+            <a:srgbClr val="1E293B"/>
           </a:solidFill>
-          <a:ln w="19050">
+          <a:ln w="15240">
             <a:solidFill>
-              <a:srgbClr val="25334D"/>
+              <a:srgbClr val="334155"/>
             </a:solidFill>
           </a:ln>
         </p:spPr>
@@ -9555,8 +10160,8 @@
         </p:nvSpPr>
         <p:spPr>
           <a:xfrm>
-            <a:off x="914400" y="1828800"/>
-            <a:ext cx="4754880" cy="4023360"/>
+            <a:off x="960120" y="1874520"/>
+            <a:ext cx="4663440" cy="3931920"/>
           </a:xfrm>
           <a:prstGeom prst="rect">
             <a:avLst/>
@@ -9570,6 +10175,9 @@
           <a:lstStyle/>
           <a:p>
             <a:pPr>
+              <a:spcAft>
+                <a:spcPts val="200"/>
+              </a:spcAft>
               <a:defRPr sz="1000" b="1">
                 <a:solidFill>
                   <a:srgbClr val="34D399"/>
@@ -9577,19 +10185,22 @@
               </a:defRPr>
             </a:pPr>
             <a:r>
-              <a:t>[70 DAYS LIVE • 350 EXPANDING]</a:t>
-            </a:r>
-          </a:p>
-          <a:p>
-            <a:pPr>
-              <a:defRPr sz="1700" b="1">
-                <a:solidFill>
-                  <a:srgbClr val="F8FAFC"/>
-                </a:solidFill>
-              </a:defRPr>
-            </a:pPr>
-            <a:r>
-              <a:t>The 14 Management Tracks</a:t>
+              <a:t>MASSIVE STUDENT VOLUME</a:t>
+            </a:r>
+          </a:p>
+          <a:p>
+            <a:pPr>
+              <a:spcAft>
+                <a:spcPts val="400"/>
+              </a:spcAft>
+              <a:defRPr sz="1500" b="1">
+                <a:solidFill>
+                  <a:srgbClr val="FFFFFF"/>
+                </a:solidFill>
+              </a:defRPr>
+            </a:pPr>
+            <a:r>
+              <a:t>The 14 Business &amp; Commerce Tracks</a:t>
             </a:r>
           </a:p>
           <a:p>
@@ -9604,7 +10215,7 @@
               </a:defRPr>
             </a:pPr>
             <a:r>
-              <a:t>Days 1–5 Live; Days 6–30 Expanding (Branch B)</a:t>
+              <a:t>70 Days Built Live • 350 Days in Production</a:t>
             </a:r>
           </a:p>
           <a:p>
@@ -9612,14 +10223,14 @@
               <a:spcAft>
                 <a:spcPts val="500"/>
               </a:spcAft>
-              <a:defRPr sz="1200">
-                <a:solidFill>
-                  <a:srgbClr val="94A3B8"/>
-                </a:solidFill>
-              </a:defRPr>
-            </a:pPr>
-            <a:r>
-              <a:t>• Corporate Finance (bcom_finance): Discounted Cash Flow (DCF), WACC, DuPont ROE decomposition &amp; LBO modeling.</a:t>
+              <a:defRPr sz="1150">
+                <a:solidFill>
+                  <a:srgbClr val="CBD5E1"/>
+                </a:solidFill>
+              </a:defRPr>
+            </a:pPr>
+            <a:r>
+              <a:t>• 1. Corporate Finance (DCF Valuation, WACC, Capital Budgeting).</a:t>
             </a:r>
           </a:p>
           <a:p>
@@ -9627,14 +10238,14 @@
               <a:spcAft>
                 <a:spcPts val="500"/>
               </a:spcAft>
-              <a:defRPr sz="1200">
-                <a:solidFill>
-                  <a:srgbClr val="94A3B8"/>
-                </a:solidFill>
-              </a:defRPr>
-            </a:pPr>
-            <a:r>
-              <a:t>• Commercial Banking (bcom_ban): Fractional reserves, Modified Duration Gap ALM, Basel III RWA &amp; Expected Credit Loss.</a:t>
+              <a:defRPr sz="1150">
+                <a:solidFill>
+                  <a:srgbClr val="CBD5E1"/>
+                </a:solidFill>
+              </a:defRPr>
+            </a:pPr>
+            <a:r>
+              <a:t>• 2. Commercial Banking (Basel III Risk, Loan Underwriting, Treasury).</a:t>
             </a:r>
           </a:p>
           <a:p>
@@ -9642,14 +10253,14 @@
               <a:spcAft>
                 <a:spcPts val="500"/>
               </a:spcAft>
-              <a:defRPr sz="1200">
-                <a:solidFill>
-                  <a:srgbClr val="94A3B8"/>
-                </a:solidFill>
-              </a:defRPr>
-            </a:pPr>
-            <a:r>
-              <a:t>• Digital Accounting (bcom_accounting): ASC 606 revenue recognition, double-entry trial balance &amp; integrated 3-statement models.</a:t>
+              <a:defRPr sz="1150">
+                <a:solidFill>
+                  <a:srgbClr val="CBD5E1"/>
+                </a:solidFill>
+              </a:defRPr>
+            </a:pPr>
+            <a:r>
+              <a:t>• 3. Digital Accounting (Double-entry, ASC 606 revenue, 3-statement models).</a:t>
             </a:r>
           </a:p>
           <a:p>
@@ -9657,14 +10268,14 @@
               <a:spcAft>
                 <a:spcPts val="500"/>
               </a:spcAft>
-              <a:defRPr sz="1200">
-                <a:solidFill>
-                  <a:srgbClr val="94A3B8"/>
-                </a:solidFill>
-              </a:defRPr>
-            </a:pPr>
-            <a:r>
-              <a:t>• Corporate Taxation (bcom_tax): ASC 740 DTA/DTL, Section 163(j) debt limits &amp; OECD Pillar 2 transfer pricing.</a:t>
+              <a:defRPr sz="1150">
+                <a:solidFill>
+                  <a:srgbClr val="CBD5E1"/>
+                </a:solidFill>
+              </a:defRPr>
+            </a:pPr>
+            <a:r>
+              <a:t>• 4. Corporate Taxation (Deferred taxes, Section 163(j), GST/VAT).</a:t>
             </a:r>
           </a:p>
           <a:p>
@@ -9672,14 +10283,14 @@
               <a:spcAft>
                 <a:spcPts val="500"/>
               </a:spcAft>
-              <a:defRPr sz="1200">
-                <a:solidFill>
-                  <a:srgbClr val="94A3B8"/>
-                </a:solidFill>
-              </a:defRPr>
-            </a:pPr>
-            <a:r>
-              <a:t>• Forensic Auditing (bcom_aud): Audit Risk Model, Benford's Law fraud forensics, Monetary Unit Sampling &amp; SOX 404.</a:t>
+              <a:defRPr sz="1150">
+                <a:solidFill>
+                  <a:srgbClr val="CBD5E1"/>
+                </a:solidFill>
+              </a:defRPr>
+            </a:pPr>
+            <a:r>
+              <a:t>• 5. Forensic Auditing (Fraud detection, Benford's Law, SOX 404).</a:t>
             </a:r>
           </a:p>
           <a:p>
@@ -9687,14 +10298,14 @@
               <a:spcAft>
                 <a:spcPts val="500"/>
               </a:spcAft>
-              <a:defRPr sz="1200">
-                <a:solidFill>
-                  <a:srgbClr val="94A3B8"/>
-                </a:solidFill>
-              </a:defRPr>
-            </a:pPr>
-            <a:r>
-              <a:t>• E-Commerce &amp; Digital Marketing (bcom_ecom/dmkt): Marketplace take rates, CAC:LTV, multi-touch attribution &amp; PageRank.</a:t>
+              <a:defRPr sz="1150">
+                <a:solidFill>
+                  <a:srgbClr val="CBD5E1"/>
+                </a:solidFill>
+              </a:defRPr>
+            </a:pPr>
+            <a:r>
+              <a:t>• 6. Digital Marketing &amp; E-Commerce (CAC:LTV, Marketplace economics).</a:t>
             </a:r>
           </a:p>
           <a:p>
@@ -9702,14 +10313,14 @@
               <a:spcAft>
                 <a:spcPts val="500"/>
               </a:spcAft>
-              <a:defRPr sz="1200">
-                <a:solidFill>
-                  <a:srgbClr val="94A3B8"/>
-                </a:solidFill>
-              </a:defRPr>
-            </a:pPr>
-            <a:r>
-              <a:t>• Operations &amp; CRM (bcom_ops/scrm): Little's Law WIP lead times, EOQ inventory, Six Sigma Cpk &amp; MEDDPICC sales pipelines.</a:t>
+              <a:defRPr sz="1150">
+                <a:solidFill>
+                  <a:srgbClr val="CBD5E1"/>
+                </a:solidFill>
+              </a:defRPr>
+            </a:pPr>
+            <a:r>
+              <a:t>• 7. Operations &amp; B2B Sales (Supply chain, CRM pipelines, Six Sigma).</a:t>
             </a:r>
           </a:p>
         </p:txBody>
@@ -9729,11 +10340,11 @@
             <a:avLst/>
           </a:prstGeom>
           <a:solidFill>
-            <a:srgbClr val="161E2E"/>
+            <a:srgbClr val="1E293B"/>
           </a:solidFill>
-          <a:ln w="19050">
+          <a:ln w="15240">
             <a:solidFill>
-              <a:srgbClr val="25334D"/>
+              <a:srgbClr val="334155"/>
             </a:solidFill>
           </a:ln>
         </p:spPr>
@@ -9767,8 +10378,8 @@
         </p:nvSpPr>
         <p:spPr>
           <a:xfrm>
-            <a:off x="6400800" y="1828800"/>
-            <a:ext cx="4754880" cy="4023360"/>
+            <a:off x="6446520" y="1874520"/>
+            <a:ext cx="4663440" cy="3931920"/>
           </a:xfrm>
           <a:prstGeom prst="rect">
             <a:avLst/>
@@ -9782,6 +10393,9 @@
           <a:lstStyle/>
           <a:p>
             <a:pPr>
+              <a:spcAft>
+                <a:spcPts val="200"/>
+              </a:spcAft>
               <a:defRPr sz="1000" b="1">
                 <a:solidFill>
                   <a:srgbClr val="FBBF24"/>
@@ -9789,19 +10403,22 @@
               </a:defRPr>
             </a:pPr>
             <a:r>
-              <a:t>[CAREER OUTCOMES]</a:t>
-            </a:r>
-          </a:p>
-          <a:p>
-            <a:pPr>
-              <a:defRPr sz="1700" b="1">
-                <a:solidFill>
-                  <a:srgbClr val="F8FAFC"/>
-                </a:solidFill>
-              </a:defRPr>
-            </a:pPr>
-            <a:r>
-              <a:t>Why &amp; Where It Leads</a:t>
+              <a:t>COMMERCE CAMPUS MONETIZATION</a:t>
+            </a:r>
+          </a:p>
+          <a:p>
+            <a:pPr>
+              <a:spcAft>
+                <a:spcPts val="400"/>
+              </a:spcAft>
+              <a:defRPr sz="1500" b="1">
+                <a:solidFill>
+                  <a:srgbClr val="FFFFFF"/>
+                </a:solidFill>
+              </a:defRPr>
+            </a:pPr>
+            <a:r>
+              <a:t>Why Shareholders Care: Huge Market Size</a:t>
             </a:r>
           </a:p>
           <a:p>
@@ -9816,7 +10433,7 @@
               </a:defRPr>
             </a:pPr>
             <a:r>
-              <a:t>Computational Business &amp; Financial Engineering</a:t>
+              <a:t>Tapping the 10M+ Student Commerce Market</a:t>
             </a:r>
           </a:p>
           <a:p>
@@ -9824,14 +10441,14 @@
               <a:spcAft>
                 <a:spcPts val="500"/>
               </a:spcAft>
-              <a:defRPr sz="1200">
-                <a:solidFill>
-                  <a:srgbClr val="94A3B8"/>
-                </a:solidFill>
-              </a:defRPr>
-            </a:pPr>
-            <a:r>
-              <a:t>• WHY: Business graduates routinely fail basic Excel and financial modeling tests during interviews. PinIT transforms business students into computational finance analysts.</a:t>
+              <a:defRPr sz="1150">
+                <a:solidFill>
+                  <a:srgbClr val="CBD5E1"/>
+                </a:solidFill>
+              </a:defRPr>
+            </a:pPr>
+            <a:r>
+              <a:t>• 60% of University Students: Over 60% of college enrollments are in non-engineering business &amp; commerce degrees.</a:t>
             </a:r>
           </a:p>
           <a:p>
@@ -9839,14 +10456,14 @@
               <a:spcAft>
                 <a:spcPts val="500"/>
               </a:spcAft>
-              <a:defRPr sz="1200">
-                <a:solidFill>
-                  <a:srgbClr val="94A3B8"/>
-                </a:solidFill>
-              </a:defRPr>
-            </a:pPr>
-            <a:r>
-              <a:t>• HOW: Marrying business theory with live computational engines—dynamic ledgers, Monte Carlo capital budgeting, and SQL financial analytics.</a:t>
+              <a:defRPr sz="1150">
+                <a:solidFill>
+                  <a:srgbClr val="CBD5E1"/>
+                </a:solidFill>
+              </a:defRPr>
+            </a:pPr>
+            <a:r>
+              <a:t>• Zero Competition: Almost all edtech competitors only teach coding. We are the first to bring active simulation learning to B.Com &amp; BBA.</a:t>
             </a:r>
           </a:p>
           <a:p>
@@ -9854,14 +10471,14 @@
               <a:spcAft>
                 <a:spcPts val="500"/>
               </a:spcAft>
-              <a:defRPr sz="1200">
-                <a:solidFill>
-                  <a:srgbClr val="94A3B8"/>
-                </a:solidFill>
-              </a:defRPr>
-            </a:pPr>
-            <a:r>
-              <a:t>• WHERE IT LEADS: Investment Banking Analyst, Private Equity Associate, Corporate Controller, Forensic Auditor.</a:t>
+              <a:defRPr sz="1150">
+                <a:solidFill>
+                  <a:srgbClr val="CBD5E1"/>
+                </a:solidFill>
+              </a:defRPr>
+            </a:pPr>
+            <a:r>
+              <a:t>• Target Careers: Financial Analyst, Investment Banker, Forensic Auditor, Tax Consultant at Big 4 accounting firms.</a:t>
             </a:r>
           </a:p>
           <a:p>
@@ -9869,14 +10486,14 @@
               <a:spcAft>
                 <a:spcPts val="500"/>
               </a:spcAft>
-              <a:defRPr sz="1200">
-                <a:solidFill>
-                  <a:srgbClr val="94A3B8"/>
-                </a:solidFill>
-              </a:defRPr>
-            </a:pPr>
-            <a:r>
-              <a:t>• Compensation Benchmark: Rs 10–22 LPA ($85k–$160k global).</a:t>
+              <a:defRPr sz="1150">
+                <a:solidFill>
+                  <a:srgbClr val="CBD5E1"/>
+                </a:solidFill>
+              </a:defRPr>
+            </a:pPr>
+            <a:r>
+              <a:t>• Starting Salary: Rs 8 LPA to Rs 20 LPA ($80k–$150k global).</a:t>
             </a:r>
           </a:p>
           <a:p>
@@ -9884,14 +10501,14 @@
               <a:spcAft>
                 <a:spcPts val="500"/>
               </a:spcAft>
-              <a:defRPr sz="1200">
-                <a:solidFill>
-                  <a:srgbClr val="94A3B8"/>
-                </a:solidFill>
-              </a:defRPr>
-            </a:pPr>
-            <a:r>
-              <a:t>• Capstones: Institutional Debt Capital Structure Model &amp; Enterprise Forensic Fraud Audit Engine.</a:t>
+              <a:defRPr sz="1150">
+                <a:solidFill>
+                  <a:srgbClr val="CBD5E1"/>
+                </a:solidFill>
+              </a:defRPr>
+            </a:pPr>
+            <a:r>
+              <a:t>• Production Status: Days 1-5 already live; Days 6-30 actively expanding on Branch B.</a:t>
             </a:r>
           </a:p>
         </p:txBody>
@@ -9929,11 +10546,11 @@
             <a:avLst/>
           </a:prstGeom>
           <a:solidFill>
-            <a:srgbClr val="0B0F19"/>
+            <a:srgbClr val="0F172A"/>
           </a:solidFill>
           <a:ln>
             <a:solidFill>
-              <a:srgbClr val="0B0F19"/>
+              <a:srgbClr val="0F172A"/>
             </a:solidFill>
           </a:ln>
         </p:spPr>
@@ -10012,8 +10629,8 @@
         </p:nvSpPr>
         <p:spPr>
           <a:xfrm>
-            <a:off x="10789920" y="320040"/>
-            <a:ext cx="914400" cy="365760"/>
+            <a:off x="10515600" y="365760"/>
+            <a:ext cx="1188720" cy="365760"/>
           </a:xfrm>
           <a:prstGeom prst="rect">
             <a:avLst/>
@@ -10021,20 +10638,20 @@
           <a:noFill/>
         </p:spPr>
         <p:txBody>
-          <a:bodyPr wrap="square">
+          <a:bodyPr wrap="none">
             <a:spAutoFit/>
           </a:bodyPr>
           <a:lstStyle/>
           <a:p>
             <a:pPr algn="r">
-              <a:defRPr sz="1300" b="1">
+              <a:defRPr sz="1100" b="1">
                 <a:solidFill>
                   <a:srgbClr val="38BDF8"/>
                 </a:solidFill>
               </a:defRPr>
             </a:pPr>
             <a:r>
-              <a:t>09 / 10</a:t>
+              <a:t>SLIDE 09 / 10</a:t>
             </a:r>
           </a:p>
         </p:txBody>
@@ -10048,7 +10665,7 @@
         <p:spPr>
           <a:xfrm>
             <a:off x="731520" y="320040"/>
-            <a:ext cx="7315200" cy="320040"/>
+            <a:ext cx="8229600" cy="274320"/>
           </a:xfrm>
           <a:prstGeom prst="rect">
             <a:avLst/>
@@ -10064,12 +10681,12 @@
             <a:pPr>
               <a:defRPr sz="1100" b="1">
                 <a:solidFill>
-                  <a:srgbClr val="818CF8"/>
-                </a:solidFill>
-              </a:defRPr>
-            </a:pPr>
-            <a:r>
-              <a:t>COURSE VERTICAL 6: SILICON HARDWARE &amp; LAUNCHPADS</a:t>
+                  <a:srgbClr val="A855F7"/>
+                </a:solidFill>
+              </a:defRPr>
+            </a:pPr>
+            <a:r>
+              <a:t>UNIVERSAL ONBOARDING &amp; HARDWARE SILICON</a:t>
             </a:r>
           </a:p>
         </p:txBody>
@@ -10083,7 +10700,7 @@
         <p:spPr>
           <a:xfrm>
             <a:off x="731520" y="594360"/>
-            <a:ext cx="10515600" cy="548640"/>
+            <a:ext cx="9601200" cy="548640"/>
           </a:xfrm>
           <a:prstGeom prst="rect">
             <a:avLst/>
@@ -10097,14 +10714,14 @@
           <a:lstStyle/>
           <a:p>
             <a:pPr>
-              <a:defRPr sz="2400" b="1">
-                <a:solidFill>
-                  <a:srgbClr val="F8FAFC"/>
-                </a:solidFill>
-              </a:defRPr>
-            </a:pPr>
-            <a:r>
-              <a:t>IoT, Hardware Security &amp; Universal Launchpads</a:t>
+              <a:defRPr sz="2200" b="1">
+                <a:solidFill>
+                  <a:srgbClr val="FFFFFF"/>
+                </a:solidFill>
+              </a:defRPr>
+            </a:pPr>
+            <a:r>
+              <a:t>Vertical 4: Freshman Launchpads &amp; IoT Hardware</a:t>
             </a:r>
           </a:p>
         </p:txBody>
@@ -10117,7 +10734,7 @@
         </p:nvSpPr>
         <p:spPr>
           <a:xfrm>
-            <a:off x="731520" y="1143000"/>
+            <a:off x="731520" y="1115568"/>
             <a:ext cx="10515600" cy="365760"/>
           </a:xfrm>
           <a:prstGeom prst="rect">
@@ -10132,14 +10749,14 @@
           <a:lstStyle/>
           <a:p>
             <a:pPr>
-              <a:defRPr sz="1300">
+              <a:defRPr sz="1200">
                 <a:solidFill>
                   <a:srgbClr val="94A3B8"/>
                 </a:solidFill>
               </a:defRPr>
             </a:pPr>
             <a:r>
-              <a:t>From Universal Freshman Onboarding to Bare-Metal Microcontroller Engineering</a:t>
+              <a:t>Level 0 Campus Readiness for All Freshmen + Direct Hardware Microcontroller Systems</a:t>
             </a:r>
           </a:p>
         </p:txBody>
@@ -10159,11 +10776,11 @@
             <a:avLst/>
           </a:prstGeom>
           <a:solidFill>
-            <a:srgbClr val="161E2E"/>
+            <a:srgbClr val="1E293B"/>
           </a:solidFill>
-          <a:ln w="19050">
+          <a:ln w="15240">
             <a:solidFill>
-              <a:srgbClr val="25334D"/>
+              <a:srgbClr val="334155"/>
             </a:solidFill>
           </a:ln>
         </p:spPr>
@@ -10197,8 +10814,8 @@
         </p:nvSpPr>
         <p:spPr>
           <a:xfrm>
-            <a:off x="914400" y="1828800"/>
-            <a:ext cx="4754880" cy="4023360"/>
+            <a:off x="960120" y="1874520"/>
+            <a:ext cx="4663440" cy="3931920"/>
           </a:xfrm>
           <a:prstGeom prst="rect">
             <a:avLst/>
@@ -10212,6 +10829,9 @@
           <a:lstStyle/>
           <a:p>
             <a:pPr>
+              <a:spcAft>
+                <a:spcPts val="200"/>
+              </a:spcAft>
               <a:defRPr sz="1000" b="1">
                 <a:solidFill>
                   <a:srgbClr val="38BDF8"/>
@@ -10219,19 +10839,22 @@
               </a:defRPr>
             </a:pPr>
             <a:r>
-              <a:t>[UNIVERSAL ENTRY POINT]</a:t>
-            </a:r>
-          </a:p>
-          <a:p>
-            <a:pPr>
-              <a:defRPr sz="1700" b="1">
-                <a:solidFill>
-                  <a:srgbClr val="F8FAFC"/>
-                </a:solidFill>
-              </a:defRPr>
-            </a:pPr>
-            <a:r>
-              <a:t>Freshman Launchpads (Branch A)</a:t>
+              <a:t>EVERY FRESHMAN'S STARTING POINT</a:t>
+            </a:r>
+          </a:p>
+          <a:p>
+            <a:pPr>
+              <a:spcAft>
+                <a:spcPts val="400"/>
+              </a:spcAft>
+              <a:defRPr sz="1500" b="1">
+                <a:solidFill>
+                  <a:srgbClr val="FFFFFF"/>
+                </a:solidFill>
+              </a:defRPr>
+            </a:pPr>
+            <a:r>
+              <a:t>Freshman Universal Launchpads</a:t>
             </a:r>
           </a:p>
           <a:p>
@@ -10246,7 +10869,7 @@
               </a:defRPr>
             </a:pPr>
             <a:r>
-              <a:t>Universal Career Foundations for All Students</a:t>
+              <a:t>Universal Freshman Adoption</a:t>
             </a:r>
           </a:p>
           <a:p>
@@ -10254,14 +10877,14 @@
               <a:spcAft>
                 <a:spcPts val="500"/>
               </a:spcAft>
-              <a:defRPr sz="1200">
-                <a:solidFill>
-                  <a:srgbClr val="94A3B8"/>
-                </a:solidFill>
-              </a:defRPr>
-            </a:pPr>
-            <a:r>
-              <a:t>• Excel &amp; Data Analysis (excel_viz): Days 1-10 complete! Power Query M, Star Schema, dynamic DAX time intelligence &amp; OLS regression.</a:t>
+              <a:defRPr sz="1150">
+                <a:solidFill>
+                  <a:srgbClr val="CBD5E1"/>
+                </a:solidFill>
+              </a:defRPr>
+            </a:pPr>
+            <a:r>
+              <a:t>• Excel &amp; Data Analysis (excel_viz): Days 1-10 complete! Power Query, Pivot Tables, and Financial Modeling.</a:t>
             </a:r>
           </a:p>
           <a:p>
@@ -10269,14 +10892,14 @@
               <a:spcAft>
                 <a:spcPts val="500"/>
               </a:spcAft>
-              <a:defRPr sz="1200">
-                <a:solidFill>
-                  <a:srgbClr val="94A3B8"/>
-                </a:solidFill>
-              </a:defRPr>
-            </a:pPr>
-            <a:r>
-              <a:t>• Computer OS Fundamentals (comp_fund): Linux POSIX file trees, I/O streams, piping (grep/sort/uniq) &amp; process management.</a:t>
+              <a:defRPr sz="1150">
+                <a:solidFill>
+                  <a:srgbClr val="CBD5E1"/>
+                </a:solidFill>
+              </a:defRPr>
+            </a:pPr>
+            <a:r>
+              <a:t>• Computer Literacy &amp; OS (comp_fund): Linux terminal navigation, file systems, and productivity.</a:t>
             </a:r>
           </a:p>
           <a:p>
@@ -10284,14 +10907,14 @@
               <a:spcAft>
                 <a:spcPts val="500"/>
               </a:spcAft>
-              <a:defRPr sz="1200">
-                <a:solidFill>
-                  <a:srgbClr val="94A3B8"/>
-                </a:solidFill>
-              </a:defRPr>
-            </a:pPr>
-            <a:r>
-              <a:t>• Git &amp; Team Version Control (git_vcs): Distributed VCS, the 3 Git states, DAG commit graphs, merge conflict resolution.</a:t>
+              <a:defRPr sz="1150">
+                <a:solidFill>
+                  <a:srgbClr val="CBD5E1"/>
+                </a:solidFill>
+              </a:defRPr>
+            </a:pPr>
+            <a:r>
+              <a:t>• Git &amp; Version Control (git_vcs): Code collaboration, branching, pull requests, and GitHub portfolios.</a:t>
             </a:r>
           </a:p>
           <a:p>
@@ -10299,14 +10922,29 @@
               <a:spcAft>
                 <a:spcPts val="500"/>
               </a:spcAft>
-              <a:defRPr sz="1200">
-                <a:solidFill>
-                  <a:srgbClr val="94A3B8"/>
-                </a:solidFill>
-              </a:defRPr>
-            </a:pPr>
-            <a:r>
-              <a:t>• Tech Soft Skills (soft_skills): Socratic STAR behavioral interviews, executive bottom-line communication &amp; BATNA negotiation.</a:t>
+              <a:defRPr sz="1150">
+                <a:solidFill>
+                  <a:srgbClr val="CBD5E1"/>
+                </a:solidFill>
+              </a:defRPr>
+            </a:pPr>
+            <a:r>
+              <a:t>• Tech Soft Skills &amp; Interviews (soft_skills): Socratic STAR interview technique, executive presentation skills.</a:t>
+            </a:r>
+          </a:p>
+          <a:p>
+            <a:pPr>
+              <a:spcAft>
+                <a:spcPts val="500"/>
+              </a:spcAft>
+              <a:defRPr sz="1150">
+                <a:solidFill>
+                  <a:srgbClr val="CBD5E1"/>
+                </a:solidFill>
+              </a:defRPr>
+            </a:pPr>
+            <a:r>
+              <a:t>• Role: Guarantees that every student builds baseline confidence in their very first semester.</a:t>
             </a:r>
           </a:p>
         </p:txBody>
@@ -10326,11 +10964,11 @@
             <a:avLst/>
           </a:prstGeom>
           <a:solidFill>
-            <a:srgbClr val="161E2E"/>
+            <a:srgbClr val="1E293B"/>
           </a:solidFill>
-          <a:ln w="19050">
+          <a:ln w="15240">
             <a:solidFill>
-              <a:srgbClr val="25334D"/>
+              <a:srgbClr val="334155"/>
             </a:solidFill>
           </a:ln>
         </p:spPr>
@@ -10364,8 +11002,8 @@
         </p:nvSpPr>
         <p:spPr>
           <a:xfrm>
-            <a:off x="6400800" y="1828800"/>
-            <a:ext cx="4754880" cy="4023360"/>
+            <a:off x="6446520" y="1874520"/>
+            <a:ext cx="4663440" cy="3931920"/>
           </a:xfrm>
           <a:prstGeom prst="rect">
             <a:avLst/>
@@ -10379,26 +11017,32 @@
           <a:lstStyle/>
           <a:p>
             <a:pPr>
+              <a:spcAft>
+                <a:spcPts val="200"/>
+              </a:spcAft>
               <a:defRPr sz="1000" b="1">
                 <a:solidFill>
-                  <a:srgbClr val="34D399"/>
-                </a:solidFill>
-              </a:defRPr>
-            </a:pPr>
-            <a:r>
-              <a:t>[SILICON HORIZON]</a:t>
-            </a:r>
-          </a:p>
-          <a:p>
-            <a:pPr>
-              <a:defRPr sz="1700" b="1">
-                <a:solidFill>
-                  <a:srgbClr val="F8FAFC"/>
-                </a:solidFill>
-              </a:defRPr>
-            </a:pPr>
-            <a:r>
-              <a:t>IoT &amp; Embedded Silicon (Branch B)</a:t>
+                  <a:srgbClr val="A855F7"/>
+                </a:solidFill>
+              </a:defRPr>
+            </a:pPr>
+            <a:r>
+              <a:t>CONNECTING SOFTWARE TO CHIPS</a:t>
+            </a:r>
+          </a:p>
+          <a:p>
+            <a:pPr>
+              <a:spcAft>
+                <a:spcPts val="400"/>
+              </a:spcAft>
+              <a:defRPr sz="1500" b="1">
+                <a:solidFill>
+                  <a:srgbClr val="FFFFFF"/>
+                </a:solidFill>
+              </a:defRPr>
+            </a:pPr>
+            <a:r>
+              <a:t>IoT &amp; Silicon Hardware Systems</a:t>
             </a:r>
           </a:p>
           <a:p>
@@ -10413,7 +11057,7 @@
               </a:defRPr>
             </a:pPr>
             <a:r>
-              <a:t>Bare-Metal Firmware &amp; Hardware Security</a:t>
+              <a:t>High Growth Hardware Career Tracks</a:t>
             </a:r>
           </a:p>
           <a:p>
@@ -10421,14 +11065,14 @@
               <a:spcAft>
                 <a:spcPts val="500"/>
               </a:spcAft>
-              <a:defRPr sz="1200">
-                <a:solidFill>
-                  <a:srgbClr val="94A3B8"/>
-                </a:solidFill>
-              </a:defRPr>
-            </a:pPr>
-            <a:r>
-              <a:t>• Bare-Metal MCU (iot_emb): Volatile pointers, bitwise register manipulation, NVIC interrupts &amp; circular DMA buffers in C++.</a:t>
+              <a:defRPr sz="1150">
+                <a:solidFill>
+                  <a:srgbClr val="CBD5E1"/>
+                </a:solidFill>
+              </a:defRPr>
+            </a:pPr>
+            <a:r>
+              <a:t>• Embedded Firmware (iot_emb): C++ bare-metal programming, hardware register control.</a:t>
             </a:r>
           </a:p>
           <a:p>
@@ -10436,14 +11080,14 @@
               <a:spcAft>
                 <a:spcPts val="500"/>
               </a:spcAft>
-              <a:defRPr sz="1200">
-                <a:solidFill>
-                  <a:srgbClr val="94A3B8"/>
-                </a:solidFill>
-              </a:defRPr>
-            </a:pPr>
-            <a:r>
-              <a:t>• Edge AI &amp; TinyML (iot_edge): Post-training INT8 quantization, CMSIS-NN ARM SIMD micro-kernels &amp; TFLM static tensor arenas.</a:t>
+              <a:defRPr sz="1150">
+                <a:solidFill>
+                  <a:srgbClr val="CBD5E1"/>
+                </a:solidFill>
+              </a:defRPr>
+            </a:pPr>
+            <a:r>
+              <a:t>• TinyML Edge AI (iot_edge): Running AI neural networks on tiny microcontrollers.</a:t>
             </a:r>
           </a:p>
           <a:p>
@@ -10451,14 +11095,14 @@
               <a:spcAft>
                 <a:spcPts val="500"/>
               </a:spcAft>
-              <a:defRPr sz="1200">
-                <a:solidFill>
-                  <a:srgbClr val="94A3B8"/>
-                </a:solidFill>
-              </a:defRPr>
-            </a:pPr>
-            <a:r>
-              <a:t>• Hardware Root of Trust (iot_sec): OTP eFuses, secure boot chains, ARM TrustZone memory partitioning &amp; anti-rollback.</a:t>
+              <a:defRPr sz="1150">
+                <a:solidFill>
+                  <a:srgbClr val="CBD5E1"/>
+                </a:solidFill>
+              </a:defRPr>
+            </a:pPr>
+            <a:r>
+              <a:t>• IoT Security &amp; Trust (iot_sec): Hardware root of trust, cryptographic secure boot.</a:t>
             </a:r>
           </a:p>
           <a:p>
@@ -10466,14 +11110,14 @@
               <a:spcAft>
                 <a:spcPts val="500"/>
               </a:spcAft>
-              <a:defRPr sz="1200">
-                <a:solidFill>
-                  <a:srgbClr val="94A3B8"/>
-                </a:solidFill>
-              </a:defRPr>
-            </a:pPr>
-            <a:r>
-              <a:t>• IoT Radio Protocols (iot_net): Friis link budgets, IEEE 802.15.4 MAC frames, 6LoWPAN compression &amp; CoAP/MQTT-SN.</a:t>
+              <a:defRPr sz="1150">
+                <a:solidFill>
+                  <a:srgbClr val="CBD5E1"/>
+                </a:solidFill>
+              </a:defRPr>
+            </a:pPr>
+            <a:r>
+              <a:t>• IoT Networks (iot_net): Wireless radio protocols, 6LoWPAN, low-power sensor networks.</a:t>
             </a:r>
           </a:p>
           <a:p>
@@ -10481,14 +11125,14 @@
               <a:spcAft>
                 <a:spcPts val="500"/>
               </a:spcAft>
-              <a:defRPr sz="1200">
-                <a:solidFill>
-                  <a:srgbClr val="94A3B8"/>
-                </a:solidFill>
-              </a:defRPr>
-            </a:pPr>
-            <a:r>
-              <a:t>• WHERE IT LEADS: Embedded Firmware Engineer, TinyML Edge AI Dev, Hardware Security Researcher (Rs 12–28 LPA).</a:t>
+              <a:defRPr sz="1150">
+                <a:solidFill>
+                  <a:srgbClr val="CBD5E1"/>
+                </a:solidFill>
+              </a:defRPr>
+            </a:pPr>
+            <a:r>
+              <a:t>• Market Opportunity: India's $50B semiconductor and electronics manufacturing revolution.</a:t>
             </a:r>
           </a:p>
         </p:txBody>

--- a/docs/PINIT_CURRICULUM_AND_PRODUCT_10_SLIDE_PITCH_DECK.pptx
+++ b/docs/PINIT_CURRICULUM_AND_PRODUCT_10_SLIDE_PITCH_DECK.pptx
@@ -581,7 +581,7 @@
           <a:lstStyle/>
           <a:p>
             <a:r>
-              <a:t>To conclude for our shareholders: PinIT Career OS is already 65.7% built and fully verified with over 1,045 active training days. By deploying our 3-branch parallel execution architecture, we are rapidly finishing the remaining 34% without collisions or delays. We are building the definitive operating system for higher education—delivering high-margin B2B SaaS software to universities and transforming students into hireable professionals. Thank you!</a:t>
+              <a:t>To conclude: Every student starts in our universal launchpad—mastering Excel, Linux, Git, and Interview Communication. And with our 3-branch parallel execution architecture, we are rapidly finishing the remaining 34% of the curriculum while deploying our university administrative software. We have built the definitive operating system for higher education. Thank you, and I welcome your questions.</a:t>
             </a:r>
           </a:p>
         </p:txBody>
@@ -651,7 +651,7 @@
           <a:lstStyle/>
           <a:p>
             <a:r>
-              <a:t>For our shareholders, here is our course footprint: We offer 37 complete, semester-grade master courses. Unlike single-subject bootcamps that only teach coding, PinIT covers the entire college: Computer Science, Cloud, AI, Hardware, and 14 complete tracks in Commerce, Finance, and Business Management. A university can license PinIT to serve their entire student body across every department.</a:t>
+              <a:t>Here is our complete 37-course footprint. Every course is semester-grade. Notice our two flagship Fullstack tracks: Course 02 is Web Fullstack with React and Next.js, and Course 20 is Python Fullstack with FastAPI and async databases. Combined with our deep computer science, 14 commerce tracks, and launchpads, PinIT covers 100% of university degrees.</a:t>
             </a:r>
           </a:p>
         </p:txBody>
@@ -721,7 +721,7 @@
           <a:lstStyle/>
           <a:p>
             <a:r>
-              <a:t>Here is our exact progress for investors: To reach our 30-Day Foundation standard across all 53 tracks, we need 1,590 course days. We have already built and verified 1,045 days—that is 65.7% of the total curriculum complete and live! The remaining 34.3% is 545 days, mostly in Commerce and IoT. We are building this through 3 parallel sub-branches so we can finish the remaining work rapidly without collisions.</a:t>
+              <a:t>Shareholders often ask: What are your flagship courses that get students hired first? It's our Two Fullstack tracks. Course 02 is our Web Fullstack track, teaching React and Next.js App Router. Course 20 is our Python Fullstack track, teaching FastAPI, async database pools, and backend architecture. Both are 100% built, tested, and live today, producing graduates who build real, deployable enterprise applications.</a:t>
             </a:r>
           </a:p>
         </p:txBody>
@@ -791,7 +791,7 @@
           <a:lstStyle/>
           <a:p>
             <a:r>
-              <a:t>Why is our teaching methodology our biggest competitive moat? Because competitors just sell pre-recorded videos. In PinIT, students spend 30 minutes a day actively doing the work: listening to a senior mentor, watching animated state changes, fixing real code bugs, and solving simulated production outages. And our Socratic AI never simply hands them the answer—it guides them to figure it out themselves. That's why our completion rates crush the industry average.</a:t>
+              <a:t>These five courses form the operational backbone of any tech company: Java for enterprise banking backends, Node.js for high-speed APIs, AWS for cloud hosting, DevOps for automated Kubernetes delivery, and Design Systems for accessible UI. All five are 100% built and live, giving students end-to-end systems competence.</a:t>
             </a:r>
           </a:p>
         </p:txBody>
@@ -861,7 +861,7 @@
           <a:lstStyle/>
           <a:p>
             <a:r>
-              <a:t>Every investor asks: What is your proprietary technology? It's our 17 Interactive Visual Engines. Most students quit accounting because debits and credits feel abstract. Our LedgerSheet engine makes it click instantly. Most students quit embedded systems because memory registers are invisible. Our RegisterBits engine lets them flip bits and see the memory change live. We've built 990 of these visual simulations, creating a massive barrier to entry for any competitor.</a:t>
+              <a:t>This slide represents our deep computer science moat: Data Structures, Mobile, Cybersecurity, Database Internals, and Distributed Systems. In Course 10, students study how B+ trees split and write to disk. In Course 11, they implement the Raft consensus algorithm. This is why our students stand out from standard bootcamp graduates who only know surface-level frontend code.</a:t>
             </a:r>
           </a:p>
         </p:txBody>
@@ -931,7 +931,7 @@
           <a:lstStyle/>
           <a:p>
             <a:r>
-              <a:t>Our Software and Web Systems vertical is 100% complete today. Why is this critical for shareholders? Because software engineering accounts for over 70% of high-paying campus placements. Our students don't just learn syntax—they build distributed queues, configure database indexes, and deploy containers. When tech recruiters see our students' verified code on GitHub, they hire them immediately at Rs 12 to 25 Lakh starting packages.</a:t>
+              <a:t>This slide contains our highest-margin, elite disciplines. Course 21 is Quantitative Systems—teaching high-frequency trading in C++ with 41.8-nanosecond matching. Prop shops pay Rs 40 to 80 Lakh starting packages for this skill. Meanwhile, Course 12 and 37 cover modern AI, LLMs, and Transformers. These courses position PinIT as an elite institution partner.</a:t>
             </a:r>
           </a:p>
         </p:txBody>
@@ -1001,7 +1001,7 @@
           <a:lstStyle/>
           <a:p>
             <a:r>
-              <a:t>Here is our crown jewel: Quantitative and Low-Latency Trading Systems. 30 full days, completely built and verified. High-frequency trading firms pay the highest starting salaries in the world—often Rs 40 to 80 Lakhs—yet universities teach zero HFT. PinIT has built the world's first interactive HFT curriculum. This elite track positions PinIT as a premium, institutional product that attracts top engineering colleges.</a:t>
+              <a:t>India is investing over $50 Billion into semiconductor manufacturing and hardware design. These four courses—Embedded MCU, Edge AI TinyML, Wireless IoT, and Hardware Root of Trust—connect our students directly to physical chips. Days 1 through 5 are live today, and our Branch B sub-agents are expanding Days 6 through 30.</a:t>
             </a:r>
           </a:p>
         </p:txBody>
@@ -1071,7 +1071,7 @@
           <a:lstStyle/>
           <a:p>
             <a:r>
-              <a:t>Why is Commerce our biggest revenue expansion opportunity? Because over 60% of students on college campuses are NOT in computer science—they are in B.Com, BBA, and MBA programs. Almost all coding bootcamps completely ignore this massive audience! We have built 14 complete business tracks covering Finance, Banking, Tax, and Marketing with interactive simulations. This allows us to sell PinIT to the entire university, not just the engineering department.</a:t>
+              <a:t>Over 60% of university students are enrolled in Commerce, BBA, and MBA programs. We have brought the exact same interactive simulation rigor to business education. Students use our LedgerSheet engine to balance books, run DCF valuations, and model supply chain inventory. This unlocks massive enterprise software sales to business colleges.</a:t>
             </a:r>
           </a:p>
         </p:txBody>
@@ -1141,7 +1141,7 @@
           <a:lstStyle/>
           <a:p>
             <a:r>
-              <a:t>Every campus needs a starting point for incoming freshmen. Our Launchpad courses—Excel, Git, Computer Fundamentals, and Interview Skills—provide an immediate confidence booster for first-year students. Meanwhile, our four IoT tracks connect students to the physical world of electronics and microcontrollers, perfectly aligned with the global surge in semiconductor manufacturing.</a:t>
+              <a:t>Modern businesses run on growth and digital transformation. In these courses, students learn programmatic ad attribution, two-sided marketplace take rates, B2B enterprise sales pipelines, and process mining. When graduates interview at fast-growing companies, they already understand customer acquisition economics and revenue pipelines.</a:t>
             </a:r>
           </a:p>
         </p:txBody>
@@ -4246,7 +4246,7 @@
         <p:spPr>
           <a:xfrm>
             <a:off x="731520" y="320040"/>
-            <a:ext cx="2926080" cy="292608"/>
+            <a:ext cx="3291840" cy="292608"/>
           </a:xfrm>
           <a:prstGeom prst="roundRect">
             <a:avLst/>
@@ -4286,7 +4286,7 @@
               </a:defRPr>
             </a:pPr>
             <a:r>
-              <a:t>EXECUTIVE SUMMARY</a:t>
+              <a:t>THE SOVEREIGN PLATFORM</a:t>
             </a:r>
           </a:p>
         </p:txBody>
@@ -4349,7 +4349,7 @@
           <a:lstStyle/>
           <a:p>
             <a:pPr>
-              <a:defRPr sz="2200" b="1">
+              <a:defRPr sz="2100" b="1">
                 <a:solidFill>
                   <a:srgbClr val="0F172A"/>
                 </a:solidFill>
@@ -4370,7 +4370,7 @@
         <p:spPr>
           <a:xfrm>
             <a:off x="731520" y="1170432"/>
-            <a:ext cx="10698480" cy="365760"/>
+            <a:ext cx="10698480" cy="347472"/>
           </a:xfrm>
           <a:prstGeom prst="rect">
             <a:avLst/>
@@ -4391,7 +4391,7 @@
               </a:defRPr>
             </a:pPr>
             <a:r>
-              <a:t>Transforming College Campuses into High-Placement Talent Engines Through Active Learning &amp; Verified Proof-of-Work</a:t>
+              <a:t>Bridging Higher Education to High-Paying Employment Through Active Learning &amp; Cryptographic Proof-of-Work</a:t>
             </a:r>
           </a:p>
         </p:txBody>
@@ -4404,8 +4404,8 @@
         </p:nvSpPr>
         <p:spPr>
           <a:xfrm>
-            <a:off x="731520" y="1645920"/>
-            <a:ext cx="3291840" cy="1645920"/>
+            <a:off x="731520" y="1600200"/>
+            <a:ext cx="3291840" cy="1554480"/>
           </a:xfrm>
           <a:prstGeom prst="roundRect">
             <a:avLst/>
@@ -4434,40 +4434,11 @@
           </a:fontRef>
         </p:style>
         <p:txBody>
-          <a:bodyPr rtlCol="0" anchor="ctr"/>
-          <a:lstStyle/>
-          <a:p>
-            <a:pPr algn="ctr"/>
-          </a:p>
-        </p:txBody>
-      </p:sp>
-      <p:sp>
-        <p:nvSpPr>
-          <p:cNvPr id="9" name="TextBox 8"/>
-          <p:cNvSpPr txBox="1"/>
-          <p:nvPr/>
-        </p:nvSpPr>
-        <p:spPr>
-          <a:xfrm>
-            <a:off x="914400" y="1783080"/>
-            <a:ext cx="2926080" cy="1371600"/>
-          </a:xfrm>
-          <a:prstGeom prst="rect">
-            <a:avLst/>
-          </a:prstGeom>
-          <a:noFill/>
-        </p:spPr>
-        <p:txBody>
-          <a:bodyPr wrap="square">
-            <a:spAutoFit/>
-          </a:bodyPr>
-          <a:lstStyle/>
-          <a:p>
-            <a:pPr>
-              <a:spcAft>
-                <a:spcPts val="200"/>
-              </a:spcAft>
-              <a:defRPr sz="3600" b="1">
+          <a:bodyPr rtlCol="0" anchor="ctr" wrap="square"/>
+          <a:lstStyle/>
+          <a:p>
+            <a:pPr algn="ctr">
+              <a:defRPr sz="3400" b="1">
                 <a:solidFill>
                   <a:srgbClr val="2563EB"/>
                 </a:solidFill>
@@ -4479,10 +4450,7 @@
           </a:p>
           <a:p>
             <a:pPr>
-              <a:spcAft>
-                <a:spcPts val="400"/>
-              </a:spcAft>
-              <a:defRPr sz="1200" b="1">
+              <a:defRPr sz="1100" b="1">
                 <a:solidFill>
                   <a:srgbClr val="0F172A"/>
                 </a:solidFill>
@@ -4494,28 +4462,28 @@
           </a:p>
           <a:p>
             <a:pPr>
-              <a:defRPr sz="1100">
+              <a:defRPr sz="1000">
                 <a:solidFill>
                   <a:srgbClr val="64748B"/>
                 </a:solidFill>
               </a:defRPr>
             </a:pPr>
             <a:r>
-              <a:t>Complete multi-disciplinary curriculum: Computer Science, Cloud, AI, Hardware &amp; 14 Commerce Tracks.</a:t>
-            </a:r>
-          </a:p>
-        </p:txBody>
-      </p:sp>
-      <p:sp>
-        <p:nvSpPr>
-          <p:cNvPr id="10" name="Rounded Rectangle 9"/>
+              <a:t>Complete multi-disciplinary catalog: Tech, AI, Cloud, Hardware &amp; 14 Commerce Tracks.</a:t>
+            </a:r>
+          </a:p>
+        </p:txBody>
+      </p:sp>
+      <p:sp>
+        <p:nvSpPr>
+          <p:cNvPr id="9" name="Rounded Rectangle 8"/>
           <p:cNvSpPr/>
           <p:nvPr/>
         </p:nvSpPr>
         <p:spPr>
           <a:xfrm>
-            <a:off x="4389120" y="1645920"/>
-            <a:ext cx="3383280" cy="1645920"/>
+            <a:off x="4389120" y="1600200"/>
+            <a:ext cx="3383280" cy="1554480"/>
           </a:xfrm>
           <a:prstGeom prst="roundRect">
             <a:avLst/>
@@ -4544,40 +4512,11 @@
           </a:fontRef>
         </p:style>
         <p:txBody>
-          <a:bodyPr rtlCol="0" anchor="ctr"/>
-          <a:lstStyle/>
-          <a:p>
-            <a:pPr algn="ctr"/>
-          </a:p>
-        </p:txBody>
-      </p:sp>
-      <p:sp>
-        <p:nvSpPr>
-          <p:cNvPr id="11" name="TextBox 10"/>
-          <p:cNvSpPr txBox="1"/>
-          <p:nvPr/>
-        </p:nvSpPr>
-        <p:spPr>
-          <a:xfrm>
-            <a:off x="4572000" y="1783080"/>
-            <a:ext cx="3017520" cy="1371600"/>
-          </a:xfrm>
-          <a:prstGeom prst="rect">
-            <a:avLst/>
-          </a:prstGeom>
-          <a:noFill/>
-        </p:spPr>
-        <p:txBody>
-          <a:bodyPr wrap="square">
-            <a:spAutoFit/>
-          </a:bodyPr>
-          <a:lstStyle/>
-          <a:p>
-            <a:pPr>
-              <a:spcAft>
-                <a:spcPts val="200"/>
-              </a:spcAft>
-              <a:defRPr sz="3600" b="1">
+          <a:bodyPr rtlCol="0" anchor="ctr" wrap="square"/>
+          <a:lstStyle/>
+          <a:p>
+            <a:pPr algn="ctr">
+              <a:defRPr sz="3400" b="1">
                 <a:solidFill>
                   <a:srgbClr val="10B981"/>
                 </a:solidFill>
@@ -4589,43 +4528,40 @@
           </a:p>
           <a:p>
             <a:pPr>
-              <a:spcAft>
-                <a:spcPts val="400"/>
-              </a:spcAft>
-              <a:defRPr sz="1200" b="1">
+              <a:defRPr sz="1100" b="1">
                 <a:solidFill>
                   <a:srgbClr val="0F172A"/>
                 </a:solidFill>
               </a:defRPr>
             </a:pPr>
             <a:r>
-              <a:t>LESSON DAYS LIVE</a:t>
-            </a:r>
-          </a:p>
-          <a:p>
-            <a:pPr>
-              <a:defRPr sz="1100">
+              <a:t>LESSON DAYS BUILT &amp; LIVE</a:t>
+            </a:r>
+          </a:p>
+          <a:p>
+            <a:pPr>
+              <a:defRPr sz="1000">
                 <a:solidFill>
                   <a:srgbClr val="64748B"/>
                 </a:solidFill>
               </a:defRPr>
             </a:pPr>
             <a:r>
-              <a:t>65.7% of full 30-day foundation curriculum completely built, verified, and running on the platform.</a:t>
-            </a:r>
-          </a:p>
-        </p:txBody>
-      </p:sp>
-      <p:sp>
-        <p:nvSpPr>
-          <p:cNvPr id="12" name="Rounded Rectangle 11"/>
+              <a:t>65.7% of full 30-day foundation complete today with 100% automated test verification.</a:t>
+            </a:r>
+          </a:p>
+        </p:txBody>
+      </p:sp>
+      <p:sp>
+        <p:nvSpPr>
+          <p:cNvPr id="10" name="Rounded Rectangle 9"/>
           <p:cNvSpPr/>
           <p:nvPr/>
         </p:nvSpPr>
         <p:spPr>
           <a:xfrm>
-            <a:off x="8138160" y="1645920"/>
-            <a:ext cx="3291840" cy="1645920"/>
+            <a:off x="8138160" y="1600200"/>
+            <a:ext cx="3291840" cy="1554480"/>
           </a:xfrm>
           <a:prstGeom prst="roundRect">
             <a:avLst/>
@@ -4654,40 +4590,11 @@
           </a:fontRef>
         </p:style>
         <p:txBody>
-          <a:bodyPr rtlCol="0" anchor="ctr"/>
-          <a:lstStyle/>
-          <a:p>
-            <a:pPr algn="ctr"/>
-          </a:p>
-        </p:txBody>
-      </p:sp>
-      <p:sp>
-        <p:nvSpPr>
-          <p:cNvPr id="13" name="TextBox 12"/>
-          <p:cNvSpPr txBox="1"/>
-          <p:nvPr/>
-        </p:nvSpPr>
-        <p:spPr>
-          <a:xfrm>
-            <a:off x="8321040" y="1783080"/>
-            <a:ext cx="2926080" cy="1371600"/>
-          </a:xfrm>
-          <a:prstGeom prst="rect">
-            <a:avLst/>
-          </a:prstGeom>
-          <a:noFill/>
-        </p:spPr>
-        <p:txBody>
-          <a:bodyPr wrap="square">
-            <a:spAutoFit/>
-          </a:bodyPr>
-          <a:lstStyle/>
-          <a:p>
-            <a:pPr>
-              <a:spcAft>
-                <a:spcPts val="200"/>
-              </a:spcAft>
-              <a:defRPr sz="3600" b="1">
+          <a:bodyPr rtlCol="0" anchor="ctr" wrap="square"/>
+          <a:lstStyle/>
+          <a:p>
+            <a:pPr algn="ctr">
+              <a:defRPr sz="3400" b="1">
                 <a:solidFill>
                   <a:srgbClr val="7E22CE"/>
                 </a:solidFill>
@@ -4699,43 +4606,40 @@
           </a:p>
           <a:p>
             <a:pPr>
-              <a:spcAft>
-                <a:spcPts val="400"/>
-              </a:spcAft>
-              <a:defRPr sz="1200" b="1">
+              <a:defRPr sz="1100" b="1">
                 <a:solidFill>
                   <a:srgbClr val="0F172A"/>
                 </a:solidFill>
               </a:defRPr>
             </a:pPr>
             <a:r>
-              <a:t>ACTIVE SIMULATORS</a:t>
-            </a:r>
-          </a:p>
-          <a:p>
-            <a:pPr>
-              <a:defRPr sz="1100">
+              <a:t>INTERACTIVE SIMULATORS</a:t>
+            </a:r>
+          </a:p>
+          <a:p>
+            <a:pPr>
+              <a:defRPr sz="1000">
                 <a:solidFill>
                   <a:srgbClr val="64748B"/>
                 </a:solidFill>
               </a:defRPr>
             </a:pPr>
             <a:r>
-              <a:t>Interactive browser state machines replacing passive video lectures with learn-by-doing practice.</a:t>
-            </a:r>
-          </a:p>
-        </p:txBody>
-      </p:sp>
-      <p:sp>
-        <p:nvSpPr>
-          <p:cNvPr id="14" name="Rounded Rectangle 13"/>
+              <a:t>17 proprietary visual engines turning abstract concepts into active browser simulations.</a:t>
+            </a:r>
+          </a:p>
+        </p:txBody>
+      </p:sp>
+      <p:sp>
+        <p:nvSpPr>
+          <p:cNvPr id="11" name="Rounded Rectangle 10"/>
           <p:cNvSpPr/>
           <p:nvPr/>
         </p:nvSpPr>
         <p:spPr>
           <a:xfrm>
-            <a:off x="731520" y="3520440"/>
-            <a:ext cx="5120640" cy="2788920"/>
+            <a:off x="731520" y="3383280"/>
+            <a:ext cx="5120640" cy="2926080"/>
           </a:xfrm>
           <a:prstGeom prst="roundRect">
             <a:avLst/>
@@ -4773,14 +4677,14 @@
       </p:sp>
       <p:sp>
         <p:nvSpPr>
-          <p:cNvPr id="15" name="TextBox 14"/>
+          <p:cNvPr id="12" name="TextBox 11"/>
           <p:cNvSpPr txBox="1"/>
           <p:nvPr/>
         </p:nvSpPr>
         <p:spPr>
           <a:xfrm>
-            <a:off x="960120" y="3703320"/>
-            <a:ext cx="4663440" cy="2423160"/>
+            <a:off x="914400" y="3547872"/>
+            <a:ext cx="4754880" cy="2596896"/>
           </a:xfrm>
           <a:prstGeom prst="rect">
             <a:avLst/>
@@ -4797,7 +4701,7 @@
               <a:spcAft>
                 <a:spcPts val="200"/>
               </a:spcAft>
-              <a:defRPr sz="1000" b="1">
+              <a:defRPr sz="950" b="1">
                 <a:solidFill>
                   <a:srgbClr val="E11D48"/>
                 </a:solidFill>
@@ -4812,52 +4716,52 @@
               <a:spcAft>
                 <a:spcPts val="200"/>
               </a:spcAft>
-              <a:defRPr sz="1500" b="1">
+              <a:defRPr sz="1400" b="1">
                 <a:solidFill>
                   <a:srgbClr val="0F172A"/>
                 </a:solidFill>
               </a:defRPr>
             </a:pPr>
             <a:r>
-              <a:t>The Broken College Status Quo</a:t>
-            </a:r>
-          </a:p>
-          <a:p>
-            <a:pPr>
-              <a:spcAft>
-                <a:spcPts val="600"/>
-              </a:spcAft>
-              <a:defRPr sz="1100">
+              <a:t>The College Employability Crisis</a:t>
+            </a:r>
+          </a:p>
+          <a:p>
+            <a:pPr>
+              <a:spcAft>
+                <a:spcPts val="400"/>
+              </a:spcAft>
+              <a:defRPr sz="1050">
                 <a:solidFill>
                   <a:srgbClr val="E11D48"/>
                 </a:solidFill>
               </a:defRPr>
             </a:pPr>
             <a:r>
-              <a:t>Why Students &amp; Colleges Are Struggling</a:t>
-            </a:r>
-          </a:p>
-          <a:p>
-            <a:pPr>
-              <a:spcAft>
-                <a:spcPts val="400"/>
-              </a:spcAft>
-              <a:defRPr sz="1150">
+              <a:t>Why Universities &amp; Students Are Struggling</a:t>
+            </a:r>
+          </a:p>
+          <a:p>
+            <a:pPr>
+              <a:spcAft>
+                <a:spcPts val="300"/>
+              </a:spcAft>
+              <a:defRPr sz="1050">
                 <a:solidFill>
                   <a:srgbClr val="334155"/>
                 </a:solidFill>
               </a:defRPr>
             </a:pPr>
             <a:r>
-              <a:t>• Outdated Theory: Universities teach textbook theory from 10 years ago.</a:t>
-            </a:r>
-          </a:p>
-          <a:p>
-            <a:pPr>
-              <a:spcAft>
-                <a:spcPts val="400"/>
-              </a:spcAft>
-              <a:defRPr sz="1150">
+              <a:t>• Outdated Textbook Theory: Universities teach concepts from 10 years ago.</a:t>
+            </a:r>
+          </a:p>
+          <a:p>
+            <a:pPr>
+              <a:spcAft>
+                <a:spcPts val="300"/>
+              </a:spcAft>
+              <a:defRPr sz="1050">
                 <a:solidFill>
                   <a:srgbClr val="334155"/>
                 </a:solidFill>
@@ -4870,45 +4774,45 @@
           <a:p>
             <a:pPr>
               <a:spcAft>
-                <a:spcPts val="400"/>
-              </a:spcAft>
-              <a:defRPr sz="1150">
+                <a:spcPts val="300"/>
+              </a:spcAft>
+              <a:defRPr sz="1050">
                 <a:solidFill>
                   <a:srgbClr val="334155"/>
                 </a:solidFill>
               </a:defRPr>
             </a:pPr>
             <a:r>
-              <a:t>• Unemployable Graduates: Over 80% fail basic practical coding and finance tests.</a:t>
-            </a:r>
-          </a:p>
-          <a:p>
-            <a:pPr>
-              <a:spcAft>
-                <a:spcPts val="400"/>
-              </a:spcAft>
-              <a:defRPr sz="1150">
+              <a:t>• Unemployable Graduates: Over 80% fail basic practical coding and financial interviews.</a:t>
+            </a:r>
+          </a:p>
+          <a:p>
+            <a:pPr>
+              <a:spcAft>
+                <a:spcPts val="300"/>
+              </a:spcAft>
+              <a:defRPr sz="1050">
                 <a:solidFill>
                   <a:srgbClr val="334155"/>
                 </a:solidFill>
               </a:defRPr>
             </a:pPr>
             <a:r>
-              <a:t>• Software Sprawl: Colleges waste $60k-$130k/yr on separate LMS and exam vendors.</a:t>
-            </a:r>
-          </a:p>
-        </p:txBody>
-      </p:sp>
-      <p:sp>
-        <p:nvSpPr>
-          <p:cNvPr id="16" name="Rounded Rectangle 15"/>
+              <a:t>• Campus Software Sprawl: Colleges waste $60k-$130k/yr on disconnected LMS tools.</a:t>
+            </a:r>
+          </a:p>
+        </p:txBody>
+      </p:sp>
+      <p:sp>
+        <p:nvSpPr>
+          <p:cNvPr id="13" name="Rounded Rectangle 12"/>
           <p:cNvSpPr/>
           <p:nvPr/>
         </p:nvSpPr>
         <p:spPr>
           <a:xfrm>
-            <a:off x="6217920" y="3520440"/>
-            <a:ext cx="5212080" cy="2788920"/>
+            <a:off x="6217920" y="3383280"/>
+            <a:ext cx="5212080" cy="2926080"/>
           </a:xfrm>
           <a:prstGeom prst="roundRect">
             <a:avLst/>
@@ -4946,14 +4850,14 @@
       </p:sp>
       <p:sp>
         <p:nvSpPr>
-          <p:cNvPr id="17" name="TextBox 16"/>
+          <p:cNvPr id="14" name="TextBox 13"/>
           <p:cNvSpPr txBox="1"/>
           <p:nvPr/>
         </p:nvSpPr>
         <p:spPr>
           <a:xfrm>
-            <a:off x="6446520" y="3703320"/>
-            <a:ext cx="4754880" cy="2423160"/>
+            <a:off x="6400800" y="3547872"/>
+            <a:ext cx="4846320" cy="2596896"/>
           </a:xfrm>
           <a:prstGeom prst="rect">
             <a:avLst/>
@@ -4970,7 +4874,7 @@
               <a:spcAft>
                 <a:spcPts val="200"/>
               </a:spcAft>
-              <a:defRPr sz="1000" b="1">
+              <a:defRPr sz="950" b="1">
                 <a:solidFill>
                   <a:srgbClr val="10B981"/>
                 </a:solidFill>
@@ -4985,7 +4889,7 @@
               <a:spcAft>
                 <a:spcPts val="200"/>
               </a:spcAft>
-              <a:defRPr sz="1500" b="1">
+              <a:defRPr sz="1400" b="1">
                 <a:solidFill>
                   <a:srgbClr val="0F172A"/>
                 </a:solidFill>
@@ -4998,76 +4902,76 @@
           <a:p>
             <a:pPr>
               <a:spcAft>
-                <a:spcPts val="600"/>
-              </a:spcAft>
-              <a:defRPr sz="1100">
+                <a:spcPts val="400"/>
+              </a:spcAft>
+              <a:defRPr sz="1050">
                 <a:solidFill>
                   <a:srgbClr val="10B981"/>
                 </a:solidFill>
               </a:defRPr>
             </a:pPr>
             <a:r>
-              <a:t>Bridging College Directly to High-Paying Jobs</a:t>
-            </a:r>
-          </a:p>
-          <a:p>
-            <a:pPr>
-              <a:spcAft>
-                <a:spcPts val="400"/>
-              </a:spcAft>
-              <a:defRPr sz="1150">
+              <a:t>Direct Campus-to-Placement Highway</a:t>
+            </a:r>
+          </a:p>
+          <a:p>
+            <a:pPr>
+              <a:spcAft>
+                <a:spcPts val="300"/>
+              </a:spcAft>
+              <a:defRPr sz="1050">
                 <a:solidFill>
                   <a:srgbClr val="334155"/>
                 </a:solidFill>
               </a:defRPr>
             </a:pPr>
             <a:r>
-              <a:t>• All-In-One Platform: Combines curriculum, browser practice, AI tutors, and placement.</a:t>
-            </a:r>
-          </a:p>
-          <a:p>
-            <a:pPr>
-              <a:spcAft>
-                <a:spcPts val="400"/>
-              </a:spcAft>
-              <a:defRPr sz="1150">
+              <a:t>• All-In-One Campus Platform: Combines curriculum, browser sandboxes, AI tutors &amp; hiring.</a:t>
+            </a:r>
+          </a:p>
+          <a:p>
+            <a:pPr>
+              <a:spcAft>
+                <a:spcPts val="300"/>
+              </a:spcAft>
+              <a:defRPr sz="1050">
                 <a:solidFill>
                   <a:srgbClr val="334155"/>
                 </a:solidFill>
               </a:defRPr>
             </a:pPr>
             <a:r>
-              <a:t>• Learn-By-Doing: Students write real code and run financial models every 5 minutes.</a:t>
-            </a:r>
-          </a:p>
-          <a:p>
-            <a:pPr>
-              <a:spcAft>
-                <a:spcPts val="400"/>
-              </a:spcAft>
-              <a:defRPr sz="1150">
+              <a:t>• Active Learn-By-Doing: Students write real code &amp; balance ledgers every 5 minutes.</a:t>
+            </a:r>
+          </a:p>
+          <a:p>
+            <a:pPr>
+              <a:spcAft>
+                <a:spcPts val="300"/>
+              </a:spcAft>
+              <a:defRPr sz="1050">
                 <a:solidFill>
                   <a:srgbClr val="334155"/>
                 </a:solidFill>
               </a:defRPr>
             </a:pPr>
             <a:r>
-              <a:t>• 24/7 Voice AI Mentors: Personal senior pair-programmers guiding students in real time.</a:t>
-            </a:r>
-          </a:p>
-          <a:p>
-            <a:pPr>
-              <a:spcAft>
-                <a:spcPts val="400"/>
-              </a:spcAft>
-              <a:defRPr sz="1150">
+              <a:t>• 24/7 AI Voice Mentors: Personal senior pair-programmers guiding students in real time.</a:t>
+            </a:r>
+          </a:p>
+          <a:p>
+            <a:pPr>
+              <a:spcAft>
+                <a:spcPts val="300"/>
+              </a:spcAft>
+              <a:defRPr sz="1050">
                 <a:solidFill>
                   <a:srgbClr val="334155"/>
                 </a:solidFill>
               </a:defRPr>
             </a:pPr>
             <a:r>
-              <a:t>• Verifiable Proof-of-Work: Real code portfolios on GitHub that employers trust.</a:t>
+              <a:t>• Verifiable Proof-of-Work: Real GitHub repositories and code telemetry recruiters trust.</a:t>
             </a:r>
           </a:p>
         </p:txBody>
@@ -5189,7 +5093,7 @@
         <p:spPr>
           <a:xfrm>
             <a:off x="731520" y="320040"/>
-            <a:ext cx="2926080" cy="292608"/>
+            <a:ext cx="3291840" cy="292608"/>
           </a:xfrm>
           <a:prstGeom prst="roundRect">
             <a:avLst/>
@@ -5229,7 +5133,7 @@
               </a:defRPr>
             </a:pPr>
             <a:r>
-              <a:t>STRATEGIC EXECUTION &amp; COMMERCIALIZATION</a:t>
+              <a:t>UNIVERSAL CAMPUS ADOPTION &amp; THE ROAD AHEAD</a:t>
             </a:r>
           </a:p>
         </p:txBody>
@@ -5292,14 +5196,14 @@
           <a:lstStyle/>
           <a:p>
             <a:pPr>
-              <a:defRPr sz="2200" b="1">
+              <a:defRPr sz="2100" b="1">
                 <a:solidFill>
                   <a:srgbClr val="0F172A"/>
                 </a:solidFill>
               </a:defRPr>
             </a:pPr>
             <a:r>
-              <a:t>The Horizon: Finishing the Remaining 34% &amp; Campus Scale</a:t>
+              <a:t>Freshman Launchpads (Courses 32–36) &amp; The Scaled 3-Branch Roadmap</a:t>
             </a:r>
           </a:p>
         </p:txBody>
@@ -5313,7 +5217,7 @@
         <p:spPr>
           <a:xfrm>
             <a:off x="731520" y="1170432"/>
-            <a:ext cx="10698480" cy="365760"/>
+            <a:ext cx="10698480" cy="347472"/>
           </a:xfrm>
           <a:prstGeom prst="rect">
             <a:avLst/>
@@ -5334,7 +5238,7 @@
               </a:defRPr>
             </a:pPr>
             <a:r>
-              <a:t>The Scaled 3-Branch Parallel Engine Delivering Full Institutional Operating System Parity</a:t>
+              <a:t>Level 0 Campus Readiness for Every Incoming Student + The Parallel Execution Engine to 100% Completion</a:t>
             </a:r>
           </a:p>
         </p:txBody>
@@ -5348,7 +5252,7 @@
         <p:spPr>
           <a:xfrm>
             <a:off x="731520" y="1645920"/>
-            <a:ext cx="3291840" cy="3200400"/>
+            <a:ext cx="1920240" cy="2468880"/>
           </a:xfrm>
           <a:prstGeom prst="roundRect">
             <a:avLst/>
@@ -5392,8 +5296,8 @@
         </p:nvSpPr>
         <p:spPr>
           <a:xfrm>
-            <a:off x="960120" y="1828800"/>
-            <a:ext cx="2834640" cy="2834640"/>
+            <a:off x="914400" y="1810512"/>
+            <a:ext cx="1554480" cy="2139696"/>
           </a:xfrm>
           <a:prstGeom prst="rect">
             <a:avLst/>
@@ -5410,14 +5314,14 @@
               <a:spcAft>
                 <a:spcPts val="200"/>
               </a:spcAft>
-              <a:defRPr sz="1000" b="1">
+              <a:defRPr sz="950" b="1">
                 <a:solidFill>
                   <a:srgbClr val="2563EB"/>
                 </a:solidFill>
               </a:defRPr>
             </a:pPr>
             <a:r>
-              <a:t>CURRENT STREAM</a:t>
+              <a:t>D1-5 LIVE</a:t>
             </a:r>
           </a:p>
           <a:p>
@@ -5425,89 +5329,74 @@
               <a:spcAft>
                 <a:spcPts val="200"/>
               </a:spcAft>
-              <a:defRPr sz="1500" b="1">
+              <a:defRPr sz="1400" b="1">
                 <a:solidFill>
                   <a:srgbClr val="0F172A"/>
                 </a:solidFill>
               </a:defRPr>
             </a:pPr>
             <a:r>
-              <a:t>Branch A: Tech Launchpad</a:t>
-            </a:r>
-          </a:p>
-          <a:p>
-            <a:pPr>
-              <a:spcAft>
-                <a:spcPts val="600"/>
-              </a:spcAft>
-              <a:defRPr sz="1100">
+              <a:t>Course 32: OS Basics</a:t>
+            </a:r>
+          </a:p>
+          <a:p>
+            <a:pPr>
+              <a:spcAft>
+                <a:spcPts val="400"/>
+              </a:spcAft>
+              <a:defRPr sz="1050">
                 <a:solidFill>
                   <a:srgbClr val="2563EB"/>
                 </a:solidFill>
               </a:defRPr>
             </a:pPr>
             <a:r>
-              <a:t>Completing Launchpad Tracks</a:t>
-            </a:r>
-          </a:p>
-          <a:p>
-            <a:pPr>
-              <a:spcAft>
-                <a:spcPts val="400"/>
-              </a:spcAft>
-              <a:defRPr sz="1150">
+              <a:t>Computer Literacy</a:t>
+            </a:r>
+          </a:p>
+          <a:p>
+            <a:pPr>
+              <a:spcAft>
+                <a:spcPts val="300"/>
+              </a:spcAft>
+              <a:defRPr sz="1050">
                 <a:solidFill>
                   <a:srgbClr val="334155"/>
                 </a:solidFill>
               </a:defRPr>
             </a:pPr>
             <a:r>
-              <a:t>• Completing Launchpad tracks to Day 30 (95 Days total).</a:t>
-            </a:r>
-          </a:p>
-          <a:p>
-            <a:pPr>
-              <a:spcAft>
-                <a:spcPts val="400"/>
-              </a:spcAft>
-              <a:defRPr sz="1150">
+              <a:t>• Linux POSIX commands.</a:t>
+            </a:r>
+          </a:p>
+          <a:p>
+            <a:pPr>
+              <a:spcAft>
+                <a:spcPts val="300"/>
+              </a:spcAft>
+              <a:defRPr sz="1050">
                 <a:solidFill>
                   <a:srgbClr val="334155"/>
                 </a:solidFill>
               </a:defRPr>
             </a:pPr>
             <a:r>
-              <a:t>• Excel Data Modeling: Days 11-30.</a:t>
-            </a:r>
-          </a:p>
-          <a:p>
-            <a:pPr>
-              <a:spcAft>
-                <a:spcPts val="400"/>
-              </a:spcAft>
-              <a:defRPr sz="1150">
+              <a:t>• File tree navigation.</a:t>
+            </a:r>
+          </a:p>
+          <a:p>
+            <a:pPr>
+              <a:spcAft>
+                <a:spcPts val="300"/>
+              </a:spcAft>
+              <a:defRPr sz="1050">
                 <a:solidFill>
                   <a:srgbClr val="334155"/>
                 </a:solidFill>
               </a:defRPr>
             </a:pPr>
             <a:r>
-              <a:t>• Git, Linux OS &amp; Soft Skills: Days 6-30.</a:t>
-            </a:r>
-          </a:p>
-          <a:p>
-            <a:pPr>
-              <a:spcAft>
-                <a:spcPts val="400"/>
-              </a:spcAft>
-              <a:defRPr sz="1150">
-                <a:solidFill>
-                  <a:srgbClr val="334155"/>
-                </a:solidFill>
-              </a:defRPr>
-            </a:pPr>
-            <a:r>
-              <a:t>• Ensures universal Day-1 campus onboarding is 100% complete.</a:t>
+              <a:t>• Piping &amp; terminal CLI.</a:t>
             </a:r>
           </a:p>
         </p:txBody>
@@ -5520,8 +5409,166 @@
         </p:nvSpPr>
         <p:spPr>
           <a:xfrm>
-            <a:off x="4389120" y="1645920"/>
-            <a:ext cx="3383280" cy="3200400"/>
+            <a:off x="2834640" y="1645920"/>
+            <a:ext cx="1920240" cy="2468880"/>
+          </a:xfrm>
+          <a:prstGeom prst="roundRect">
+            <a:avLst/>
+          </a:prstGeom>
+          <a:solidFill>
+            <a:srgbClr val="FFFFFF"/>
+          </a:solidFill>
+          <a:ln w="15240">
+            <a:solidFill>
+              <a:srgbClr val="E2E8F0"/>
+            </a:solidFill>
+          </a:ln>
+        </p:spPr>
+        <p:style>
+          <a:lnRef idx="1">
+            <a:schemeClr val="accent1"/>
+          </a:lnRef>
+          <a:fillRef idx="3">
+            <a:schemeClr val="accent1"/>
+          </a:fillRef>
+          <a:effectRef idx="2">
+            <a:schemeClr val="accent1"/>
+          </a:effectRef>
+          <a:fontRef idx="minor">
+            <a:schemeClr val="lt1"/>
+          </a:fontRef>
+        </p:style>
+        <p:txBody>
+          <a:bodyPr rtlCol="0" anchor="ctr"/>
+          <a:lstStyle/>
+          <a:p>
+            <a:pPr algn="ctr"/>
+          </a:p>
+        </p:txBody>
+      </p:sp>
+      <p:sp>
+        <p:nvSpPr>
+          <p:cNvPr id="11" name="TextBox 10"/>
+          <p:cNvSpPr txBox="1"/>
+          <p:nvPr/>
+        </p:nvSpPr>
+        <p:spPr>
+          <a:xfrm>
+            <a:off x="3017520" y="1810512"/>
+            <a:ext cx="1554480" cy="2139696"/>
+          </a:xfrm>
+          <a:prstGeom prst="rect">
+            <a:avLst/>
+          </a:prstGeom>
+          <a:noFill/>
+        </p:spPr>
+        <p:txBody>
+          <a:bodyPr wrap="square">
+            <a:spAutoFit/>
+          </a:bodyPr>
+          <a:lstStyle/>
+          <a:p>
+            <a:pPr>
+              <a:spcAft>
+                <a:spcPts val="200"/>
+              </a:spcAft>
+              <a:defRPr sz="950" b="1">
+                <a:solidFill>
+                  <a:srgbClr val="7E22CE"/>
+                </a:solidFill>
+              </a:defRPr>
+            </a:pPr>
+            <a:r>
+              <a:t>100% LIVE (30D)</a:t>
+            </a:r>
+          </a:p>
+          <a:p>
+            <a:pPr>
+              <a:spcAft>
+                <a:spcPts val="200"/>
+              </a:spcAft>
+              <a:defRPr sz="1400" b="1">
+                <a:solidFill>
+                  <a:srgbClr val="0F172A"/>
+                </a:solidFill>
+              </a:defRPr>
+            </a:pPr>
+            <a:r>
+              <a:t>Course 33: AI Prompt</a:t>
+            </a:r>
+          </a:p>
+          <a:p>
+            <a:pPr>
+              <a:spcAft>
+                <a:spcPts val="400"/>
+              </a:spcAft>
+              <a:defRPr sz="1050">
+                <a:solidFill>
+                  <a:srgbClr val="7E22CE"/>
+                </a:solidFill>
+              </a:defRPr>
+            </a:pPr>
+            <a:r>
+              <a:t>Everyday AI Tools</a:t>
+            </a:r>
+          </a:p>
+          <a:p>
+            <a:pPr>
+              <a:spcAft>
+                <a:spcPts val="300"/>
+              </a:spcAft>
+              <a:defRPr sz="1050">
+                <a:solidFill>
+                  <a:srgbClr val="334155"/>
+                </a:solidFill>
+              </a:defRPr>
+            </a:pPr>
+            <a:r>
+              <a:t>• Everyday AI literacy.</a:t>
+            </a:r>
+          </a:p>
+          <a:p>
+            <a:pPr>
+              <a:spcAft>
+                <a:spcPts val="300"/>
+              </a:spcAft>
+              <a:defRPr sz="1050">
+                <a:solidFill>
+                  <a:srgbClr val="334155"/>
+                </a:solidFill>
+              </a:defRPr>
+            </a:pPr>
+            <a:r>
+              <a:t>• Chain-of-thought prompts.</a:t>
+            </a:r>
+          </a:p>
+          <a:p>
+            <a:pPr>
+              <a:spcAft>
+                <a:spcPts val="300"/>
+              </a:spcAft>
+              <a:defRPr sz="1050">
+                <a:solidFill>
+                  <a:srgbClr val="334155"/>
+                </a:solidFill>
+              </a:defRPr>
+            </a:pPr>
+            <a:r>
+              <a:t>• Automated workflows.</a:t>
+            </a:r>
+          </a:p>
+        </p:txBody>
+      </p:sp>
+      <p:sp>
+        <p:nvSpPr>
+          <p:cNvPr id="12" name="Rounded Rectangle 11"/>
+          <p:cNvSpPr/>
+          <p:nvPr/>
+        </p:nvSpPr>
+        <p:spPr>
+          <a:xfrm>
+            <a:off x="4937760" y="1645920"/>
+            <a:ext cx="2194560" cy="2468880"/>
           </a:xfrm>
           <a:prstGeom prst="roundRect">
             <a:avLst/>
@@ -5559,14 +5606,14 @@
       </p:sp>
       <p:sp>
         <p:nvSpPr>
-          <p:cNvPr id="11" name="TextBox 10"/>
+          <p:cNvPr id="13" name="TextBox 12"/>
           <p:cNvSpPr txBox="1"/>
           <p:nvPr/>
         </p:nvSpPr>
         <p:spPr>
           <a:xfrm>
-            <a:off x="4617720" y="1828800"/>
-            <a:ext cx="2926080" cy="2834640"/>
+            <a:off x="5120640" y="1810512"/>
+            <a:ext cx="1828800" cy="2139696"/>
           </a:xfrm>
           <a:prstGeom prst="rect">
             <a:avLst/>
@@ -5583,14 +5630,14 @@
               <a:spcAft>
                 <a:spcPts val="200"/>
               </a:spcAft>
-              <a:defRPr sz="1000" b="1">
+              <a:defRPr sz="950" b="1">
                 <a:solidFill>
                   <a:srgbClr val="10B981"/>
                 </a:solidFill>
               </a:defRPr>
             </a:pPr>
             <a:r>
-              <a:t>NEW SUB-STREAM</a:t>
+              <a:t>D1-10 LIVE</a:t>
             </a:r>
           </a:p>
           <a:p>
@@ -5598,88 +5645,88 @@
               <a:spcAft>
                 <a:spcPts val="200"/>
               </a:spcAft>
-              <a:defRPr sz="1500" b="1">
+              <a:defRPr sz="1400" b="1">
                 <a:solidFill>
                   <a:srgbClr val="0F172A"/>
                 </a:solidFill>
               </a:defRPr>
             </a:pPr>
             <a:r>
-              <a:t>Branch B: Commerce &amp; IoT</a:t>
-            </a:r>
-          </a:p>
-          <a:p>
-            <a:pPr>
-              <a:spcAft>
-                <a:spcPts val="600"/>
-              </a:spcAft>
-              <a:defRPr sz="1100">
+              <a:t>Course 34: Excel Viz</a:t>
+            </a:r>
+          </a:p>
+          <a:p>
+            <a:pPr>
+              <a:spcAft>
+                <a:spcPts val="400"/>
+              </a:spcAft>
+              <a:defRPr sz="1050">
                 <a:solidFill>
                   <a:srgbClr val="10B981"/>
                 </a:solidFill>
               </a:defRPr>
             </a:pPr>
             <a:r>
-              <a:t>Expanding Mass-Market Tracks</a:t>
-            </a:r>
-          </a:p>
-          <a:p>
-            <a:pPr>
-              <a:spcAft>
-                <a:spcPts val="400"/>
-              </a:spcAft>
-              <a:defRPr sz="1150">
+              <a:t>Data Modeling</a:t>
+            </a:r>
+          </a:p>
+          <a:p>
+            <a:pPr>
+              <a:spcAft>
+                <a:spcPts val="300"/>
+              </a:spcAft>
+              <a:defRPr sz="1050">
                 <a:solidFill>
                   <a:srgbClr val="334155"/>
                 </a:solidFill>
               </a:defRPr>
             </a:pPr>
             <a:r>
-              <a:t>• Completing 14 Commerce &amp; 4 IoT tracks from Day 6 to 30 (450 Days).</a:t>
-            </a:r>
-          </a:p>
-          <a:p>
-            <a:pPr>
-              <a:spcAft>
-                <a:spcPts val="400"/>
-              </a:spcAft>
-              <a:defRPr sz="1150">
+              <a:t>• Power Query &amp; Star Schema.</a:t>
+            </a:r>
+          </a:p>
+          <a:p>
+            <a:pPr>
+              <a:spcAft>
+                <a:spcPts val="300"/>
+              </a:spcAft>
+              <a:defRPr sz="1050">
                 <a:solidFill>
                   <a:srgbClr val="334155"/>
                 </a:solidFill>
               </a:defRPr>
             </a:pPr>
             <a:r>
-              <a:t>• Zero-Collision Guarantee: Runs in an isolated workspace with zero git conflicts.</a:t>
-            </a:r>
-          </a:p>
-          <a:p>
-            <a:pPr>
-              <a:spcAft>
-                <a:spcPts val="400"/>
-              </a:spcAft>
-              <a:defRPr sz="1150">
+              <a:t>• DAX Time Intelligence.</a:t>
+            </a:r>
+          </a:p>
+          <a:p>
+            <a:pPr>
+              <a:spcAft>
+                <a:spcPts val="300"/>
+              </a:spcAft>
+              <a:defRPr sz="1050">
                 <a:solidFill>
                   <a:srgbClr val="334155"/>
                 </a:solidFill>
               </a:defRPr>
             </a:pPr>
             <a:r>
-              <a:t>• Unlocks the massive 60% non-engineering campus market.</a:t>
-            </a:r>
-          </a:p>
-        </p:txBody>
-      </p:sp>
-      <p:sp>
-        <p:nvSpPr>
-          <p:cNvPr id="12" name="Rounded Rectangle 11"/>
+              <a:t>• Financial Amortization.</a:t>
+            </a:r>
+          </a:p>
+        </p:txBody>
+      </p:sp>
+      <p:sp>
+        <p:nvSpPr>
+          <p:cNvPr id="14" name="Rounded Rectangle 13"/>
           <p:cNvSpPr/>
           <p:nvPr/>
         </p:nvSpPr>
         <p:spPr>
           <a:xfrm>
-            <a:off x="8138160" y="1645920"/>
-            <a:ext cx="3291840" cy="3200400"/>
+            <a:off x="7315200" y="1645920"/>
+            <a:ext cx="1920240" cy="2468880"/>
           </a:xfrm>
           <a:prstGeom prst="roundRect">
             <a:avLst/>
@@ -5717,14 +5764,14 @@
       </p:sp>
       <p:sp>
         <p:nvSpPr>
-          <p:cNvPr id="13" name="TextBox 12"/>
+          <p:cNvPr id="15" name="TextBox 14"/>
           <p:cNvSpPr txBox="1"/>
           <p:nvPr/>
         </p:nvSpPr>
         <p:spPr>
           <a:xfrm>
-            <a:off x="8366760" y="1828800"/>
-            <a:ext cx="2834640" cy="2834640"/>
+            <a:off x="7498080" y="1810512"/>
+            <a:ext cx="1554480" cy="2139696"/>
           </a:xfrm>
           <a:prstGeom prst="rect">
             <a:avLst/>
@@ -5741,14 +5788,14 @@
               <a:spcAft>
                 <a:spcPts val="200"/>
               </a:spcAft>
-              <a:defRPr sz="1000" b="1">
-                <a:solidFill>
-                  <a:srgbClr val="D97706"/>
-                </a:solidFill>
-              </a:defRPr>
-            </a:pPr>
-            <a:r>
-              <a:t>ENTERPRISE B2B</a:t>
+              <a:defRPr sz="950" b="1">
+                <a:solidFill>
+                  <a:srgbClr val="2563EB"/>
+                </a:solidFill>
+              </a:defRPr>
+            </a:pPr>
+            <a:r>
+              <a:t>D1-5 LIVE</a:t>
             </a:r>
           </a:p>
           <a:p>
@@ -5756,29 +5803,14 @@
               <a:spcAft>
                 <a:spcPts val="200"/>
               </a:spcAft>
-              <a:defRPr sz="1500" b="1">
+              <a:defRPr sz="1400" b="1">
                 <a:solidFill>
                   <a:srgbClr val="0F172A"/>
                 </a:solidFill>
               </a:defRPr>
             </a:pPr>
             <a:r>
-              <a:t>Branch C: Campus Platform</a:t>
-            </a:r>
-          </a:p>
-          <a:p>
-            <a:pPr>
-              <a:spcAft>
-                <a:spcPts val="600"/>
-              </a:spcAft>
-              <a:defRPr sz="1100">
-                <a:solidFill>
-                  <a:srgbClr val="D97706"/>
-                </a:solidFill>
-              </a:defRPr>
-            </a:pPr>
-            <a:r>
-              <a:t>Institutional SaaS Portal</a:t>
+              <a:t>Course 35: Git VCS</a:t>
             </a:r>
           </a:p>
           <a:p>
@@ -5786,58 +5818,231 @@
               <a:spcAft>
                 <a:spcPts val="400"/>
               </a:spcAft>
-              <a:defRPr sz="1150">
+              <a:defRPr sz="1050">
+                <a:solidFill>
+                  <a:srgbClr val="2563EB"/>
+                </a:solidFill>
+              </a:defRPr>
+            </a:pPr>
+            <a:r>
+              <a:t>Version Control</a:t>
+            </a:r>
+          </a:p>
+          <a:p>
+            <a:pPr>
+              <a:spcAft>
+                <a:spcPts val="300"/>
+              </a:spcAft>
+              <a:defRPr sz="1050">
                 <a:solidFill>
                   <a:srgbClr val="334155"/>
                 </a:solidFill>
               </a:defRPr>
             </a:pPr>
             <a:r>
-              <a:t>• Campus Admin Portal: Student admissions, fee management &amp; audit reporting.</a:t>
-            </a:r>
-          </a:p>
-          <a:p>
-            <a:pPr>
-              <a:spcAft>
-                <a:spcPts val="400"/>
-              </a:spcAft>
-              <a:defRPr sz="1150">
+              <a:t>• Distributed Git states.</a:t>
+            </a:r>
+          </a:p>
+          <a:p>
+            <a:pPr>
+              <a:spcAft>
+                <a:spcPts val="300"/>
+              </a:spcAft>
+              <a:defRPr sz="1050">
                 <a:solidFill>
                   <a:srgbClr val="334155"/>
                 </a:solidFill>
               </a:defRPr>
             </a:pPr>
             <a:r>
-              <a:t>• Faculty Portal: Automated assignment grading &amp; live student radar.</a:t>
-            </a:r>
-          </a:p>
-          <a:p>
-            <a:pPr>
-              <a:spcAft>
-                <a:spcPts val="400"/>
-              </a:spcAft>
-              <a:defRPr sz="1150">
+              <a:t>• Branching &amp; merge conflicts.</a:t>
+            </a:r>
+          </a:p>
+          <a:p>
+            <a:pPr>
+              <a:spcAft>
+                <a:spcPts val="300"/>
+              </a:spcAft>
+              <a:defRPr sz="1050">
                 <a:solidFill>
                   <a:srgbClr val="334155"/>
                 </a:solidFill>
               </a:defRPr>
             </a:pPr>
             <a:r>
-              <a:t>• Commercial Model: Annual university enterprise SaaS license ($50k-$200k/campus).</a:t>
-            </a:r>
-          </a:p>
-        </p:txBody>
-      </p:sp>
-      <p:sp>
-        <p:nvSpPr>
-          <p:cNvPr id="14" name="Rounded Rectangle 13"/>
+              <a:t>• GitHub team workflows.</a:t>
+            </a:r>
+          </a:p>
+        </p:txBody>
+      </p:sp>
+      <p:sp>
+        <p:nvSpPr>
+          <p:cNvPr id="16" name="Rounded Rectangle 15"/>
           <p:cNvSpPr/>
           <p:nvPr/>
         </p:nvSpPr>
         <p:spPr>
           <a:xfrm>
-            <a:off x="731520" y="5029200"/>
-            <a:ext cx="10725912" cy="1371600"/>
+            <a:off x="9418320" y="1645920"/>
+            <a:ext cx="2039112" cy="2468880"/>
+          </a:xfrm>
+          <a:prstGeom prst="roundRect">
+            <a:avLst/>
+          </a:prstGeom>
+          <a:solidFill>
+            <a:srgbClr val="FFFFFF"/>
+          </a:solidFill>
+          <a:ln w="15240">
+            <a:solidFill>
+              <a:srgbClr val="E2E8F0"/>
+            </a:solidFill>
+          </a:ln>
+        </p:spPr>
+        <p:style>
+          <a:lnRef idx="1">
+            <a:schemeClr val="accent1"/>
+          </a:lnRef>
+          <a:fillRef idx="3">
+            <a:schemeClr val="accent1"/>
+          </a:fillRef>
+          <a:effectRef idx="2">
+            <a:schemeClr val="accent1"/>
+          </a:effectRef>
+          <a:fontRef idx="minor">
+            <a:schemeClr val="lt1"/>
+          </a:fontRef>
+        </p:style>
+        <p:txBody>
+          <a:bodyPr rtlCol="0" anchor="ctr"/>
+          <a:lstStyle/>
+          <a:p>
+            <a:pPr algn="ctr"/>
+          </a:p>
+        </p:txBody>
+      </p:sp>
+      <p:sp>
+        <p:nvSpPr>
+          <p:cNvPr id="17" name="TextBox 16"/>
+          <p:cNvSpPr txBox="1"/>
+          <p:nvPr/>
+        </p:nvSpPr>
+        <p:spPr>
+          <a:xfrm>
+            <a:off x="9601200" y="1810512"/>
+            <a:ext cx="1673352" cy="2139696"/>
+          </a:xfrm>
+          <a:prstGeom prst="rect">
+            <a:avLst/>
+          </a:prstGeom>
+          <a:noFill/>
+        </p:spPr>
+        <p:txBody>
+          <a:bodyPr wrap="square">
+            <a:spAutoFit/>
+          </a:bodyPr>
+          <a:lstStyle/>
+          <a:p>
+            <a:pPr>
+              <a:spcAft>
+                <a:spcPts val="200"/>
+              </a:spcAft>
+              <a:defRPr sz="950" b="1">
+                <a:solidFill>
+                  <a:srgbClr val="D97706"/>
+                </a:solidFill>
+              </a:defRPr>
+            </a:pPr>
+            <a:r>
+              <a:t>D1-5 LIVE</a:t>
+            </a:r>
+          </a:p>
+          <a:p>
+            <a:pPr>
+              <a:spcAft>
+                <a:spcPts val="200"/>
+              </a:spcAft>
+              <a:defRPr sz="1400" b="1">
+                <a:solidFill>
+                  <a:srgbClr val="0F172A"/>
+                </a:solidFill>
+              </a:defRPr>
+            </a:pPr>
+            <a:r>
+              <a:t>Course 36: Soft Skills</a:t>
+            </a:r>
+          </a:p>
+          <a:p>
+            <a:pPr>
+              <a:spcAft>
+                <a:spcPts val="400"/>
+              </a:spcAft>
+              <a:defRPr sz="1050">
+                <a:solidFill>
+                  <a:srgbClr val="D97706"/>
+                </a:solidFill>
+              </a:defRPr>
+            </a:pPr>
+            <a:r>
+              <a:t>Interview Mastery</a:t>
+            </a:r>
+          </a:p>
+          <a:p>
+            <a:pPr>
+              <a:spcAft>
+                <a:spcPts val="300"/>
+              </a:spcAft>
+              <a:defRPr sz="1050">
+                <a:solidFill>
+                  <a:srgbClr val="334155"/>
+                </a:solidFill>
+              </a:defRPr>
+            </a:pPr>
+            <a:r>
+              <a:t>• Socratic STAR interviews.</a:t>
+            </a:r>
+          </a:p>
+          <a:p>
+            <a:pPr>
+              <a:spcAft>
+                <a:spcPts val="300"/>
+              </a:spcAft>
+              <a:defRPr sz="1050">
+                <a:solidFill>
+                  <a:srgbClr val="334155"/>
+                </a:solidFill>
+              </a:defRPr>
+            </a:pPr>
+            <a:r>
+              <a:t>• Executive communication.</a:t>
+            </a:r>
+          </a:p>
+          <a:p>
+            <a:pPr>
+              <a:spcAft>
+                <a:spcPts val="300"/>
+              </a:spcAft>
+              <a:defRPr sz="1050">
+                <a:solidFill>
+                  <a:srgbClr val="334155"/>
+                </a:solidFill>
+              </a:defRPr>
+            </a:pPr>
+            <a:r>
+              <a:t>• Compensation negotiation.</a:t>
+            </a:r>
+          </a:p>
+        </p:txBody>
+      </p:sp>
+      <p:sp>
+        <p:nvSpPr>
+          <p:cNvPr id="18" name="Rounded Rectangle 17"/>
+          <p:cNvSpPr/>
+          <p:nvPr/>
+        </p:nvSpPr>
+        <p:spPr>
+          <a:xfrm>
+            <a:off x="731520" y="4297680"/>
+            <a:ext cx="10725912" cy="2011680"/>
           </a:xfrm>
           <a:prstGeom prst="roundRect">
             <a:avLst/>
@@ -5875,14 +6080,14 @@
       </p:sp>
       <p:sp>
         <p:nvSpPr>
-          <p:cNvPr id="15" name="TextBox 14"/>
+          <p:cNvPr id="19" name="TextBox 18"/>
           <p:cNvSpPr txBox="1"/>
           <p:nvPr/>
         </p:nvSpPr>
         <p:spPr>
           <a:xfrm>
-            <a:off x="960120" y="5212080"/>
-            <a:ext cx="10268712" cy="1005840"/>
+            <a:off x="914400" y="4462272"/>
+            <a:ext cx="10360152" cy="1682496"/>
           </a:xfrm>
           <a:prstGeom prst="rect">
             <a:avLst/>
@@ -5899,14 +6104,14 @@
               <a:spcAft>
                 <a:spcPts val="200"/>
               </a:spcAft>
-              <a:defRPr sz="1000" b="1">
+              <a:defRPr sz="950" b="1">
                 <a:solidFill>
                   <a:srgbClr val="2563EB"/>
                 </a:solidFill>
               </a:defRPr>
             </a:pPr>
             <a:r>
-              <a:t>BUSINESS MODEL &amp; MONETIZATION</a:t>
+              <a:t>THE ROAD TO 100% COMPLETION</a:t>
             </a:r>
           </a:p>
           <a:p>
@@ -5914,74 +6119,89 @@
               <a:spcAft>
                 <a:spcPts val="200"/>
               </a:spcAft>
-              <a:defRPr sz="1500" b="1">
+              <a:defRPr sz="1400" b="1">
                 <a:solidFill>
                   <a:srgbClr val="0F172A"/>
                 </a:solidFill>
               </a:defRPr>
             </a:pPr>
             <a:r>
-              <a:t>The Commercial Scaling Model: High-Margin B2B University SaaS</a:t>
-            </a:r>
-          </a:p>
-          <a:p>
-            <a:pPr>
-              <a:spcAft>
-                <a:spcPts val="600"/>
-              </a:spcAft>
-              <a:defRPr sz="1100">
+              <a:t>The 3-Branch Parallel Scaling Roadmap: Finishing the Remaining 34%</a:t>
+            </a:r>
+          </a:p>
+          <a:p>
+            <a:pPr>
+              <a:spcAft>
+                <a:spcPts val="400"/>
+              </a:spcAft>
+              <a:defRPr sz="1050">
                 <a:solidFill>
                   <a:srgbClr val="2563EB"/>
                 </a:solidFill>
               </a:defRPr>
             </a:pPr>
             <a:r>
-              <a:t>Defensive Enterprise Moat</a:t>
-            </a:r>
-          </a:p>
-          <a:p>
-            <a:pPr>
-              <a:spcAft>
-                <a:spcPts val="400"/>
-              </a:spcAft>
-              <a:defRPr sz="1150">
+              <a:t>1,045 Days Live Today -&gt; 1,590 Days Complete Platform Target</a:t>
+            </a:r>
+          </a:p>
+          <a:p>
+            <a:pPr>
+              <a:spcAft>
+                <a:spcPts val="300"/>
+              </a:spcAft>
+              <a:defRPr sz="1050">
                 <a:solidFill>
                   <a:srgbClr val="334155"/>
                 </a:solidFill>
               </a:defRPr>
             </a:pPr>
             <a:r>
-              <a:t>• Annual Institutional Contracts: $50,000 to $200,000 per campus based on student body size.</a:t>
-            </a:r>
-          </a:p>
-          <a:p>
-            <a:pPr>
-              <a:spcAft>
-                <a:spcPts val="400"/>
-              </a:spcAft>
-              <a:defRPr sz="1150">
+              <a:t>• Branch A (Current Stream): Finalizing Tech Launchpads (Excel, Git, OS, Soft Skills to Day 30 = 95 Days).</a:t>
+            </a:r>
+          </a:p>
+          <a:p>
+            <a:pPr>
+              <a:spcAft>
+                <a:spcPts val="300"/>
+              </a:spcAft>
+              <a:defRPr sz="1050">
                 <a:solidFill>
                   <a:srgbClr val="334155"/>
                 </a:solidFill>
               </a:defRPr>
             </a:pPr>
             <a:r>
-              <a:t>• High Gross Margins: Platform operates in-browser with automated evaluation and zero marginal TA costs.</a:t>
-            </a:r>
-          </a:p>
-          <a:p>
-            <a:pPr>
-              <a:spcAft>
-                <a:spcPts val="400"/>
-              </a:spcAft>
-              <a:defRPr sz="1150">
+              <a:t>• Branch B (Sub-Agent Stream): Completing 14 Commerce Tracks &amp; 4 IoT Tracks from Day 6 to Day 30 (450 Days) with zero file collisions.</a:t>
+            </a:r>
+          </a:p>
+          <a:p>
+            <a:pPr>
+              <a:spcAft>
+                <a:spcPts val="300"/>
+              </a:spcAft>
+              <a:defRPr sz="1050">
                 <a:solidFill>
                   <a:srgbClr val="334155"/>
                 </a:solidFill>
               </a:defRPr>
             </a:pPr>
             <a:r>
-              <a:t>• Defensive Moat: Multi-year university integration makes PinIT contractually entrenched on campus.</a:t>
+              <a:t>• Branch C (Platform Stream): Delivering Campus Admin Portal, Faculty Grading Rubrics, and University Multi-Tenant Isolation.</a:t>
+            </a:r>
+          </a:p>
+          <a:p>
+            <a:pPr>
+              <a:spcAft>
+                <a:spcPts val="300"/>
+              </a:spcAft>
+              <a:defRPr sz="1050">
+                <a:solidFill>
+                  <a:srgbClr val="334155"/>
+                </a:solidFill>
+              </a:defRPr>
+            </a:pPr>
+            <a:r>
+              <a:t>• Commercial Goal: Licensing the complete 37-course OS to universities at $50k-$200k/year recurring B2B enterprise contracts.</a:t>
             </a:r>
           </a:p>
         </p:txBody>
@@ -6103,7 +6323,7 @@
         <p:spPr>
           <a:xfrm>
             <a:off x="731520" y="320040"/>
-            <a:ext cx="2926080" cy="292608"/>
+            <a:ext cx="3291840" cy="292608"/>
           </a:xfrm>
           <a:prstGeom prst="roundRect">
             <a:avLst/>
@@ -6143,7 +6363,7 @@
               </a:defRPr>
             </a:pPr>
             <a:r>
-              <a:t>CURRICULUM ARCHITECTURE</a:t>
+              <a:t>COMPLETE CURRICULUM ARCHITECTURE</a:t>
             </a:r>
           </a:p>
         </p:txBody>
@@ -6206,14 +6426,14 @@
           <a:lstStyle/>
           <a:p>
             <a:pPr>
-              <a:defRPr sz="2200" b="1">
+              <a:defRPr sz="2100" b="1">
                 <a:solidFill>
                   <a:srgbClr val="0F172A"/>
                 </a:solidFill>
               </a:defRPr>
             </a:pPr>
             <a:r>
-              <a:t>The 37-Course Master Catalog: What We Teach &amp; Offer</a:t>
+              <a:t>The 37-Course Master Map &amp; The Two Fullstack Flagships</a:t>
             </a:r>
           </a:p>
         </p:txBody>
@@ -6227,7 +6447,7 @@
         <p:spPr>
           <a:xfrm>
             <a:off x="731520" y="1170432"/>
-            <a:ext cx="10698480" cy="365760"/>
+            <a:ext cx="10698480" cy="347472"/>
           </a:xfrm>
           <a:prstGeom prst="rect">
             <a:avLst/>
@@ -6248,7 +6468,7 @@
               </a:defRPr>
             </a:pPr>
             <a:r>
-              <a:t>Comprehensive Multi-Disciplinary Coverage Serving Every Department Across the University</a:t>
+              <a:t>Total Campus Coverage: 1,045 Days Live (65.7% Complete) Across 4 Core Faculties</a:t>
             </a:r>
           </a:p>
         </p:txBody>
@@ -6306,8 +6526,8 @@
         </p:nvSpPr>
         <p:spPr>
           <a:xfrm>
-            <a:off x="960120" y="1828800"/>
-            <a:ext cx="4663440" cy="1874520"/>
+            <a:off x="914400" y="1810512"/>
+            <a:ext cx="4754880" cy="1911096"/>
           </a:xfrm>
           <a:prstGeom prst="rect">
             <a:avLst/>
@@ -6324,14 +6544,14 @@
               <a:spcAft>
                 <a:spcPts val="200"/>
               </a:spcAft>
-              <a:defRPr sz="1000" b="1">
+              <a:defRPr sz="950" b="1">
                 <a:solidFill>
                   <a:srgbClr val="2563EB"/>
                 </a:solidFill>
               </a:defRPr>
             </a:pPr>
             <a:r>
-              <a:t>ENGINEERING (6 COURSES)</a:t>
+              <a:t>100% COMPLETE (6 COURSES • 180 DAYS)</a:t>
             </a:r>
           </a:p>
           <a:p>
@@ -6339,74 +6559,89 @@
               <a:spcAft>
                 <a:spcPts val="200"/>
               </a:spcAft>
-              <a:defRPr sz="1500" b="1">
+              <a:defRPr sz="1400" b="1">
                 <a:solidFill>
                   <a:srgbClr val="0F172A"/>
                 </a:solidFill>
               </a:defRPr>
             </a:pPr>
             <a:r>
-              <a:t>Software &amp; Cloud Architecture</a:t>
-            </a:r>
-          </a:p>
-          <a:p>
-            <a:pPr>
-              <a:spcAft>
-                <a:spcPts val="600"/>
-              </a:spcAft>
-              <a:defRPr sz="1100">
+              <a:t>Faculty 1: Software &amp; Web Engineering</a:t>
+            </a:r>
+          </a:p>
+          <a:p>
+            <a:pPr>
+              <a:spcAft>
+                <a:spcPts val="400"/>
+              </a:spcAft>
+              <a:defRPr sz="1050">
                 <a:solidFill>
                   <a:srgbClr val="2563EB"/>
                 </a:solidFill>
               </a:defRPr>
             </a:pPr>
             <a:r>
-              <a:t>Core Developer Foundations</a:t>
-            </a:r>
-          </a:p>
-          <a:p>
-            <a:pPr>
-              <a:spcAft>
-                <a:spcPts val="400"/>
-              </a:spcAft>
-              <a:defRPr sz="1150">
+              <a:t>The Two Fullstack Anchor Disciplines</a:t>
+            </a:r>
+          </a:p>
+          <a:p>
+            <a:pPr>
+              <a:spcAft>
+                <a:spcPts val="300"/>
+              </a:spcAft>
+              <a:defRPr sz="1050">
                 <a:solidFill>
                   <a:srgbClr val="334155"/>
                 </a:solidFill>
               </a:defRPr>
             </a:pPr>
             <a:r>
-              <a:t>• Fullstack Web (Next.js &amp; React), Python Backend Architecture, Modern JavaScript.</a:t>
-            </a:r>
-          </a:p>
-          <a:p>
-            <a:pPr>
-              <a:spcAft>
-                <a:spcPts val="400"/>
-              </a:spcAft>
-              <a:defRPr sz="1150">
+              <a:t>• ★ Course 02: Full-Stack React Web Development (Web Fullstack)</a:t>
+            </a:r>
+          </a:p>
+          <a:p>
+            <a:pPr>
+              <a:spcAft>
+                <a:spcPts val="300"/>
+              </a:spcAft>
+              <a:defRPr sz="1050">
                 <a:solidFill>
                   <a:srgbClr val="334155"/>
                 </a:solidFill>
               </a:defRPr>
             </a:pPr>
             <a:r>
-              <a:t>• Database Systems (SQL &amp; B+ Trees), Cloud Infrastructure &amp; DevOps, Distributed Systems.</a:t>
-            </a:r>
-          </a:p>
-          <a:p>
-            <a:pPr>
-              <a:spcAft>
-                <a:spcPts val="400"/>
-              </a:spcAft>
-              <a:defRPr sz="1150">
+              <a:t>• ★ Course 20: Python Programming &amp; Backend Systems (Python Fullstack)</a:t>
+            </a:r>
+          </a:p>
+          <a:p>
+            <a:pPr>
+              <a:spcAft>
+                <a:spcPts val="300"/>
+              </a:spcAft>
+              <a:defRPr sz="1050">
                 <a:solidFill>
                   <a:srgbClr val="334155"/>
                 </a:solidFill>
               </a:defRPr>
             </a:pPr>
             <a:r>
-              <a:t>• Outcome: Prepares students for senior software, cloud, and backend engineering jobs.</a:t>
+              <a:t>• Course 01: Java Core Logic • Course 03: Node.js &amp; TypeScript Backend</a:t>
+            </a:r>
+          </a:p>
+          <a:p>
+            <a:pPr>
+              <a:spcAft>
+                <a:spcPts val="300"/>
+              </a:spcAft>
+              <a:defRPr sz="1050">
+                <a:solidFill>
+                  <a:srgbClr val="334155"/>
+                </a:solidFill>
+              </a:defRPr>
+            </a:pPr>
+            <a:r>
+              <a:t>• Course 04: Cloud Native Architectures (AWS) • Course 05: DevOps &amp; CI/CD Pipelines</a:t>
             </a:r>
           </a:p>
         </p:txBody>
@@ -6464,8 +6699,8 @@
         </p:nvSpPr>
         <p:spPr>
           <a:xfrm>
-            <a:off x="6446520" y="1828800"/>
-            <a:ext cx="4754880" cy="1874520"/>
+            <a:off x="6400800" y="1810512"/>
+            <a:ext cx="4846320" cy="1911096"/>
           </a:xfrm>
           <a:prstGeom prst="rect">
             <a:avLst/>
@@ -6482,14 +6717,14 @@
               <a:spcAft>
                 <a:spcPts val="200"/>
               </a:spcAft>
-              <a:defRPr sz="1000" b="1">
+              <a:defRPr sz="950" b="1">
                 <a:solidFill>
                   <a:srgbClr val="7E22CE"/>
                 </a:solidFill>
               </a:defRPr>
             </a:pPr>
             <a:r>
-              <a:t>ADVANCED TECH (7 COURSES)</a:t>
+              <a:t>100% COMPLETE (7 COURSES • 210 DAYS)</a:t>
             </a:r>
           </a:p>
           <a:p>
@@ -6497,74 +6732,89 @@
               <a:spcAft>
                 <a:spcPts val="200"/>
               </a:spcAft>
-              <a:defRPr sz="1500" b="1">
+              <a:defRPr sz="1400" b="1">
                 <a:solidFill>
                   <a:srgbClr val="0F172A"/>
                 </a:solidFill>
               </a:defRPr>
             </a:pPr>
             <a:r>
-              <a:t>AI, Systems &amp; Deep Computer Science</a:t>
-            </a:r>
-          </a:p>
-          <a:p>
-            <a:pPr>
-              <a:spcAft>
-                <a:spcPts val="600"/>
-              </a:spcAft>
-              <a:defRPr sz="1100">
+              <a:t>Faculty 2: Deep Computer Science &amp; AI</a:t>
+            </a:r>
+          </a:p>
+          <a:p>
+            <a:pPr>
+              <a:spcAft>
+                <a:spcPts val="400"/>
+              </a:spcAft>
+              <a:defRPr sz="1050">
                 <a:solidFill>
                   <a:srgbClr val="7E22CE"/>
                 </a:solidFill>
               </a:defRPr>
             </a:pPr>
             <a:r>
-              <a:t>High-Margin Technical Disciplines</a:t>
-            </a:r>
-          </a:p>
-          <a:p>
-            <a:pPr>
-              <a:spcAft>
-                <a:spcPts val="400"/>
-              </a:spcAft>
-              <a:defRPr sz="1150">
+              <a:t>High-Margin Deep Technical Specializations</a:t>
+            </a:r>
+          </a:p>
+          <a:p>
+            <a:pPr>
+              <a:spcAft>
+                <a:spcPts val="300"/>
+              </a:spcAft>
+              <a:defRPr sz="1050">
                 <a:solidFill>
                   <a:srgbClr val="334155"/>
                 </a:solidFill>
               </a:defRPr>
             </a:pPr>
             <a:r>
-              <a:t>• Data Structures &amp; Algorithms, Java 21 LTS &amp; JVM Internals, 3D WebGL Graphics.</a:t>
-            </a:r>
-          </a:p>
-          <a:p>
-            <a:pPr>
-              <a:spcAft>
-                <a:spcPts val="400"/>
-              </a:spcAft>
-              <a:defRPr sz="1150">
+              <a:t>• Course 07: Data Structures &amp; Algorithms • Course 09: Cybersecurity &amp; Zero Trust</a:t>
+            </a:r>
+          </a:p>
+          <a:p>
+            <a:pPr>
+              <a:spcAft>
+                <a:spcPts val="300"/>
+              </a:spcAft>
+              <a:defRPr sz="1050">
                 <a:solidFill>
                   <a:srgbClr val="334155"/>
                 </a:solidFill>
               </a:defRPr>
             </a:pPr>
             <a:r>
-              <a:t>• Applied AI Foundations, Everyday AI Prompt Engineering, EVM Blockchain, Cybersecurity.</a:t>
-            </a:r>
-          </a:p>
-          <a:p>
-            <a:pPr>
-              <a:spcAft>
-                <a:spcPts val="400"/>
-              </a:spcAft>
-              <a:defRPr sz="1150">
+              <a:t>• Course 10: Database Engineering &amp; SQL • Course 11: Distributed Systems &amp; Consensus</a:t>
+            </a:r>
+          </a:p>
+          <a:p>
+            <a:pPr>
+              <a:spcAft>
+                <a:spcPts val="300"/>
+              </a:spcAft>
+              <a:defRPr sz="1050">
                 <a:solidFill>
                   <a:srgbClr val="334155"/>
                 </a:solidFill>
               </a:defRPr>
             </a:pPr>
             <a:r>
-              <a:t>• Outcome: Specialized, high-margin skills that generative AI cannot automate.</a:t>
+              <a:t>• Course 12: Applied AI &amp; LLMs • Course 15: 3D Graphics • Course 16: Blockchain Web3</a:t>
+            </a:r>
+          </a:p>
+          <a:p>
+            <a:pPr>
+              <a:spcAft>
+                <a:spcPts val="300"/>
+              </a:spcAft>
+              <a:defRPr sz="1050">
+                <a:solidFill>
+                  <a:srgbClr val="334155"/>
+                </a:solidFill>
+              </a:defRPr>
+            </a:pPr>
+            <a:r>
+              <a:t>• Course 21: Quantitative Systems Engineering (The Crown Jewel)</a:t>
             </a:r>
           </a:p>
         </p:txBody>
@@ -6588,7 +6838,7 @@
           </a:solidFill>
           <a:ln w="15240">
             <a:solidFill>
-              <a:srgbClr val="E2E8F0"/>
+              <a:srgbClr val="BBF7D0"/>
             </a:solidFill>
           </a:ln>
         </p:spPr>
@@ -6622,8 +6872,8 @@
         </p:nvSpPr>
         <p:spPr>
           <a:xfrm>
-            <a:off x="960120" y="4251960"/>
-            <a:ext cx="4663440" cy="1874520"/>
+            <a:off x="914400" y="4233672"/>
+            <a:ext cx="4754880" cy="1911096"/>
           </a:xfrm>
           <a:prstGeom prst="rect">
             <a:avLst/>
@@ -6640,14 +6890,14 @@
               <a:spcAft>
                 <a:spcPts val="200"/>
               </a:spcAft>
-              <a:defRPr sz="1000" b="1">
+              <a:defRPr sz="950" b="1">
                 <a:solidFill>
                   <a:srgbClr val="10B981"/>
                 </a:solidFill>
               </a:defRPr>
             </a:pPr>
             <a:r>
-              <a:t>BUSINESS SCHOOL (14 COURSES)</a:t>
+              <a:t>DAYS 1–5 LIVE (14 COURSES • 70/420 DAYS)</a:t>
             </a:r>
           </a:p>
           <a:p>
@@ -6655,74 +6905,89 @@
               <a:spcAft>
                 <a:spcPts val="200"/>
               </a:spcAft>
-              <a:defRPr sz="1500" b="1">
+              <a:defRPr sz="1400" b="1">
                 <a:solidFill>
                   <a:srgbClr val="0F172A"/>
                 </a:solidFill>
               </a:defRPr>
             </a:pPr>
             <a:r>
-              <a:t>Commerce, Finance &amp; Management</a:t>
-            </a:r>
-          </a:p>
-          <a:p>
-            <a:pPr>
-              <a:spcAft>
-                <a:spcPts val="600"/>
-              </a:spcAft>
-              <a:defRPr sz="1100">
+              <a:t>Faculty 3: Commerce &amp; Management</a:t>
+            </a:r>
+          </a:p>
+          <a:p>
+            <a:pPr>
+              <a:spcAft>
+                <a:spcPts val="400"/>
+              </a:spcAft>
+              <a:defRPr sz="1050">
                 <a:solidFill>
                   <a:srgbClr val="10B981"/>
                 </a:solidFill>
               </a:defRPr>
             </a:pPr>
             <a:r>
-              <a:t>Tapping the 60% Non-Tech Campus Market</a:t>
-            </a:r>
-          </a:p>
-          <a:p>
-            <a:pPr>
-              <a:spcAft>
-                <a:spcPts val="400"/>
-              </a:spcAft>
-              <a:defRPr sz="1150">
+              <a:t>Serving the 60% Non-Engineering Campus Audience</a:t>
+            </a:r>
+          </a:p>
+          <a:p>
+            <a:pPr>
+              <a:spcAft>
+                <a:spcPts val="300"/>
+              </a:spcAft>
+              <a:defRPr sz="1050">
                 <a:solidFill>
                   <a:srgbClr val="334155"/>
                 </a:solidFill>
               </a:defRPr>
             </a:pPr>
             <a:r>
-              <a:t>• Corporate Finance, Commercial Banking, Forensic Accounting, Corporate Tax, Business Law.</a:t>
-            </a:r>
-          </a:p>
-          <a:p>
-            <a:pPr>
-              <a:spcAft>
-                <a:spcPts val="400"/>
-              </a:spcAft>
-              <a:defRPr sz="1150">
+              <a:t>• Course 22: Digital Accounting &amp; Tax • Course 23: Business Finance &amp; Investment</a:t>
+            </a:r>
+          </a:p>
+          <a:p>
+            <a:pPr>
+              <a:spcAft>
+                <a:spcPts val="300"/>
+              </a:spcAft>
+              <a:defRPr sz="1050">
                 <a:solidFill>
                   <a:srgbClr val="334155"/>
                 </a:solidFill>
               </a:defRPr>
             </a:pPr>
             <a:r>
-              <a:t>• Digital Marketing, E-Commerce, B2B Sales &amp; CRM, Operations &amp; Supply Chain, Lean Startup.</a:t>
-            </a:r>
-          </a:p>
-          <a:p>
-            <a:pPr>
-              <a:spcAft>
-                <a:spcPts val="400"/>
-              </a:spcAft>
-              <a:defRPr sz="1150">
+              <a:t>• Course 24: Business Analytics • Course 25: Marketing &amp; Brand Management</a:t>
+            </a:r>
+          </a:p>
+          <a:p>
+            <a:pPr>
+              <a:spcAft>
+                <a:spcPts val="300"/>
+              </a:spcAft>
+              <a:defRPr sz="1050">
                 <a:solidFill>
                   <a:srgbClr val="334155"/>
                 </a:solidFill>
               </a:defRPr>
             </a:pPr>
             <a:r>
-              <a:t>• Outcome: Universal curriculum aligned for B.Com, BBA, and MBA degree programs.</a:t>
+              <a:t>• Course 26: Digital Marketing • Course 27: E-Commerce • Course 28: Entrepreneurship</a:t>
+            </a:r>
+          </a:p>
+          <a:p>
+            <a:pPr>
+              <a:spcAft>
+                <a:spcPts val="300"/>
+              </a:spcAft>
+              <a:defRPr sz="1050">
+                <a:solidFill>
+                  <a:srgbClr val="334155"/>
+                </a:solidFill>
+              </a:defRPr>
+            </a:pPr>
+            <a:r>
+              <a:t>• Course 29: Sales &amp; CRM • Course 30: Supply Chain &amp; Ops • Course 31: AI Business</a:t>
             </a:r>
           </a:p>
         </p:txBody>
@@ -6746,7 +7011,7 @@
           </a:solidFill>
           <a:ln w="15240">
             <a:solidFill>
-              <a:srgbClr val="E2E8F0"/>
+              <a:srgbClr val="FDE68A"/>
             </a:solidFill>
           </a:ln>
         </p:spPr>
@@ -6780,8 +7045,8 @@
         </p:nvSpPr>
         <p:spPr>
           <a:xfrm>
-            <a:off x="6446520" y="4251960"/>
-            <a:ext cx="4754880" cy="1874520"/>
+            <a:off x="6400800" y="4233672"/>
+            <a:ext cx="4846320" cy="1911096"/>
           </a:xfrm>
           <a:prstGeom prst="rect">
             <a:avLst/>
@@ -6798,14 +7063,14 @@
               <a:spcAft>
                 <a:spcPts val="200"/>
               </a:spcAft>
-              <a:defRPr sz="1000" b="1">
+              <a:defRPr sz="950" b="1">
                 <a:solidFill>
                   <a:srgbClr val="D97706"/>
                 </a:solidFill>
               </a:defRPr>
             </a:pPr>
             <a:r>
-              <a:t>CAMPUS ESSENTIALS (10 COURSES)</a:t>
+              <a:t>DAYS 1–5 LIVE (10 COURSES • 50/300 DAYS)</a:t>
             </a:r>
           </a:p>
           <a:p>
@@ -6813,74 +7078,89 @@
               <a:spcAft>
                 <a:spcPts val="200"/>
               </a:spcAft>
-              <a:defRPr sz="1500" b="1">
+              <a:defRPr sz="1400" b="1">
                 <a:solidFill>
                   <a:srgbClr val="0F172A"/>
                 </a:solidFill>
               </a:defRPr>
             </a:pPr>
             <a:r>
-              <a:t>Launchpads &amp; Hardware Silicon</a:t>
-            </a:r>
-          </a:p>
-          <a:p>
-            <a:pPr>
-              <a:spcAft>
-                <a:spcPts val="600"/>
-              </a:spcAft>
-              <a:defRPr sz="1100">
+              <a:t>Faculty 4: Launchpad &amp; IoT Silicon</a:t>
+            </a:r>
+          </a:p>
+          <a:p>
+            <a:pPr>
+              <a:spcAft>
+                <a:spcPts val="400"/>
+              </a:spcAft>
+              <a:defRPr sz="1050">
                 <a:solidFill>
                   <a:srgbClr val="D97706"/>
                 </a:solidFill>
               </a:defRPr>
             </a:pPr>
             <a:r>
-              <a:t>Universal Entry Point + Chipmaker Boom</a:t>
-            </a:r>
-          </a:p>
-          <a:p>
-            <a:pPr>
-              <a:spcAft>
-                <a:spcPts val="400"/>
-              </a:spcAft>
-              <a:defRPr sz="1150">
+              <a:t>Universal Freshman Adoption + Hardware Semiconductor Boom</a:t>
+            </a:r>
+          </a:p>
+          <a:p>
+            <a:pPr>
+              <a:spcAft>
+                <a:spcPts val="300"/>
+              </a:spcAft>
+              <a:defRPr sz="1050">
                 <a:solidFill>
                   <a:srgbClr val="334155"/>
                 </a:solidFill>
               </a:defRPr>
             </a:pPr>
             <a:r>
-              <a:t>• Freshman Launchpads: Excel &amp; Data Analytics, Computer OS, Git Version Control, Soft Skills.</a:t>
-            </a:r>
-          </a:p>
-          <a:p>
-            <a:pPr>
-              <a:spcAft>
-                <a:spcPts val="400"/>
-              </a:spcAft>
-              <a:defRPr sz="1150">
+              <a:t>• Course 32: Computer OS Fundamentals • Course 33: Everyday AI Prompt Literacy</a:t>
+            </a:r>
+          </a:p>
+          <a:p>
+            <a:pPr>
+              <a:spcAft>
+                <a:spcPts val="300"/>
+              </a:spcAft>
+              <a:defRPr sz="1050">
                 <a:solidFill>
                   <a:srgbClr val="334155"/>
                 </a:solidFill>
               </a:defRPr>
             </a:pPr>
             <a:r>
-              <a:t>• Hardware &amp; IoT: Embedded Systems, TinyML Edge AI, IoT Security, Radio Protocols, Quant Systems.</a:t>
-            </a:r>
-          </a:p>
-          <a:p>
-            <a:pPr>
-              <a:spcAft>
-                <a:spcPts val="400"/>
-              </a:spcAft>
-              <a:defRPr sz="1150">
+              <a:t>• Course 34: Excel &amp; Data Analysis (Days 1–10 Live!) • Course 35: Git &amp; GitHub VCS</a:t>
+            </a:r>
+          </a:p>
+          <a:p>
+            <a:pPr>
+              <a:spcAft>
+                <a:spcPts val="300"/>
+              </a:spcAft>
+              <a:defRPr sz="1050">
                 <a:solidFill>
                   <a:srgbClr val="334155"/>
                 </a:solidFill>
               </a:defRPr>
             </a:pPr>
             <a:r>
-              <a:t>• Outcome: Baseline confidence for all incoming freshmen + hardware semiconductor training.</a:t>
+              <a:t>• Course 36: Tech Soft Skills &amp; STAR • Course 37: NLP &amp; Computational Linguistics</a:t>
+            </a:r>
+          </a:p>
+          <a:p>
+            <a:pPr>
+              <a:spcAft>
+                <a:spcPts val="300"/>
+              </a:spcAft>
+              <a:defRPr sz="1050">
+                <a:solidFill>
+                  <a:srgbClr val="334155"/>
+                </a:solidFill>
+              </a:defRPr>
+            </a:pPr>
+            <a:r>
+              <a:t>• IoT Hardware (Courses 14, 17, 18, 19): Embedded MCU, Wireless, TinyML, Security</a:t>
             </a:r>
           </a:p>
         </p:txBody>
@@ -7002,7 +7282,7 @@
         <p:spPr>
           <a:xfrm>
             <a:off x="731520" y="320040"/>
-            <a:ext cx="2926080" cy="292608"/>
+            <a:ext cx="3291840" cy="292608"/>
           </a:xfrm>
           <a:prstGeom prst="roundRect">
             <a:avLst/>
@@ -7042,7 +7322,7 @@
               </a:defRPr>
             </a:pPr>
             <a:r>
-              <a:t>PRODUCTION AUDIT</a:t>
+              <a:t>FLAGSHIP ENGINEERING CURRICULUM</a:t>
             </a:r>
           </a:p>
         </p:txBody>
@@ -7105,14 +7385,14 @@
           <a:lstStyle/>
           <a:p>
             <a:pPr>
-              <a:defRPr sz="2200" b="1">
+              <a:defRPr sz="2100" b="1">
                 <a:solidFill>
                   <a:srgbClr val="0F172A"/>
                 </a:solidFill>
               </a:defRPr>
             </a:pPr>
             <a:r>
-              <a:t>Progress Scorecard: Completed vs. Remaining</a:t>
+              <a:t>The Two Fullstack Flagships: Web Fullstack &amp; Python Fullstack</a:t>
             </a:r>
           </a:p>
         </p:txBody>
@@ -7126,7 +7406,7 @@
         <p:spPr>
           <a:xfrm>
             <a:off x="731520" y="1170432"/>
-            <a:ext cx="10698480" cy="365760"/>
+            <a:ext cx="10698480" cy="347472"/>
           </a:xfrm>
           <a:prstGeom prst="rect">
             <a:avLst/>
@@ -7147,7 +7427,7 @@
               </a:defRPr>
             </a:pPr>
             <a:r>
-              <a:t>An Exact Mathematical Audit of What is Live Today and What is Currently in Production</a:t>
+              <a:t>How We Train Job-Ready Full-Stack Developers Who Can Architect Real Enterprise Applications</a:t>
             </a:r>
           </a:p>
         </p:txBody>
@@ -7161,7 +7441,7 @@
         <p:spPr>
           <a:xfrm>
             <a:off x="731520" y="1645920"/>
-            <a:ext cx="5120640" cy="1645920"/>
+            <a:ext cx="5120640" cy="4480560"/>
           </a:xfrm>
           <a:prstGeom prst="roundRect">
             <a:avLst/>
@@ -7169,9 +7449,9 @@
           <a:solidFill>
             <a:srgbClr val="FFFFFF"/>
           </a:solidFill>
-          <a:ln w="19050">
+          <a:ln w="15240">
             <a:solidFill>
-              <a:srgbClr val="10B981"/>
+              <a:srgbClr val="E2E8F0"/>
             </a:solidFill>
           </a:ln>
         </p:spPr>
@@ -7205,8 +7485,8 @@
         </p:nvSpPr>
         <p:spPr>
           <a:xfrm>
-            <a:off x="914400" y="1783080"/>
-            <a:ext cx="4754880" cy="1371600"/>
+            <a:off x="914400" y="1810512"/>
+            <a:ext cx="4754880" cy="4151376"/>
           </a:xfrm>
           <a:prstGeom prst="rect">
             <a:avLst/>
@@ -7223,14 +7503,29 @@
               <a:spcAft>
                 <a:spcPts val="200"/>
               </a:spcAft>
-              <a:defRPr sz="3600" b="1">
-                <a:solidFill>
-                  <a:srgbClr val="10B981"/>
-                </a:solidFill>
-              </a:defRPr>
-            </a:pPr>
-            <a:r>
-              <a:t>65.7%</a:t>
+              <a:defRPr sz="950" b="1">
+                <a:solidFill>
+                  <a:srgbClr val="2563EB"/>
+                </a:solidFill>
+              </a:defRPr>
+            </a:pPr>
+            <a:r>
+              <a:t>WEB FULLSTACK FLAGSHIP (100% LIVE)</a:t>
+            </a:r>
+          </a:p>
+          <a:p>
+            <a:pPr>
+              <a:spcAft>
+                <a:spcPts val="200"/>
+              </a:spcAft>
+              <a:defRPr sz="1400" b="1">
+                <a:solidFill>
+                  <a:srgbClr val="0F172A"/>
+                </a:solidFill>
+              </a:defRPr>
+            </a:pPr>
+            <a:r>
+              <a:t>Course 02: Full-Stack React &amp; Next.js</a:t>
             </a:r>
           </a:p>
           <a:p>
@@ -7238,26 +7533,89 @@
               <a:spcAft>
                 <a:spcPts val="400"/>
               </a:spcAft>
-              <a:defRPr sz="1200" b="1">
-                <a:solidFill>
-                  <a:srgbClr val="0F172A"/>
-                </a:solidFill>
-              </a:defRPr>
-            </a:pPr>
-            <a:r>
-              <a:t>PLATFORM COMPLETED</a:t>
-            </a:r>
-          </a:p>
-          <a:p>
-            <a:pPr>
-              <a:defRPr sz="1100">
-                <a:solidFill>
-                  <a:srgbClr val="64748B"/>
-                </a:solidFill>
-              </a:defRPr>
-            </a:pPr>
-            <a:r>
-              <a:t>1,045 out of 1,590 total course days are 100% built, verified with green tests, and live on platform.</a:t>
+              <a:defRPr sz="1050">
+                <a:solidFill>
+                  <a:srgbClr val="2563EB"/>
+                </a:solidFill>
+              </a:defRPr>
+            </a:pPr>
+            <a:r>
+              <a:t>30 Days Complete • 120 Interactive Quests</a:t>
+            </a:r>
+          </a:p>
+          <a:p>
+            <a:pPr>
+              <a:spcAft>
+                <a:spcPts val="300"/>
+              </a:spcAft>
+              <a:defRPr sz="1050">
+                <a:solidFill>
+                  <a:srgbClr val="334155"/>
+                </a:solidFill>
+              </a:defRPr>
+            </a:pPr>
+            <a:r>
+              <a:t>• What Students Learn: Modern React 19, Next.js App Router, TypeScript, Tailwind CSS, Server Components (RSC), and edge streaming.</a:t>
+            </a:r>
+          </a:p>
+          <a:p>
+            <a:pPr>
+              <a:spcAft>
+                <a:spcPts val="300"/>
+              </a:spcAft>
+              <a:defRPr sz="1050">
+                <a:solidFill>
+                  <a:srgbClr val="334155"/>
+                </a:solidFill>
+              </a:defRPr>
+            </a:pPr>
+            <a:r>
+              <a:t>• How We Teach: Students build full-stack web applications in the browser with live preview, Flight serialization inspection, and state synchronization.</a:t>
+            </a:r>
+          </a:p>
+          <a:p>
+            <a:pPr>
+              <a:spcAft>
+                <a:spcPts val="300"/>
+              </a:spcAft>
+              <a:defRPr sz="1050">
+                <a:solidFill>
+                  <a:srgbClr val="334155"/>
+                </a:solidFill>
+              </a:defRPr>
+            </a:pPr>
+            <a:r>
+              <a:t>• Why We Teach It: Next.js is the global industry standard for modern enterprise frontend and full-stack web development.</a:t>
+            </a:r>
+          </a:p>
+          <a:p>
+            <a:pPr>
+              <a:spcAft>
+                <a:spcPts val="300"/>
+              </a:spcAft>
+              <a:defRPr sz="1050">
+                <a:solidFill>
+                  <a:srgbClr val="334155"/>
+                </a:solidFill>
+              </a:defRPr>
+            </a:pPr>
+            <a:r>
+              <a:t>• Where It Leads: Senior Full-Stack Engineer, Frontend Architect, React Platform Lead. Starting Salary: Rs 14–25 LPA ($120k–$160k).</a:t>
+            </a:r>
+          </a:p>
+          <a:p>
+            <a:pPr>
+              <a:spcAft>
+                <a:spcPts val="300"/>
+              </a:spcAft>
+              <a:defRPr sz="1050">
+                <a:solidFill>
+                  <a:srgbClr val="334155"/>
+                </a:solidFill>
+              </a:defRPr>
+            </a:pPr>
+            <a:r>
+              <a:t>• Live Capstone on GitHub: Sovereign Microservices Web Portal with dynamic authentication, streaming SSR, and optimistic state mutations.</a:t>
             </a:r>
           </a:p>
         </p:txBody>
@@ -7271,117 +7629,7 @@
         <p:spPr>
           <a:xfrm>
             <a:off x="6217920" y="1645920"/>
-            <a:ext cx="5212080" cy="1645920"/>
-          </a:xfrm>
-          <a:prstGeom prst="roundRect">
-            <a:avLst/>
-          </a:prstGeom>
-          <a:solidFill>
-            <a:srgbClr val="FFFFFF"/>
-          </a:solidFill>
-          <a:ln w="19050">
-            <a:solidFill>
-              <a:srgbClr val="D97706"/>
-            </a:solidFill>
-          </a:ln>
-        </p:spPr>
-        <p:style>
-          <a:lnRef idx="1">
-            <a:schemeClr val="accent1"/>
-          </a:lnRef>
-          <a:fillRef idx="3">
-            <a:schemeClr val="accent1"/>
-          </a:fillRef>
-          <a:effectRef idx="2">
-            <a:schemeClr val="accent1"/>
-          </a:effectRef>
-          <a:fontRef idx="minor">
-            <a:schemeClr val="lt1"/>
-          </a:fontRef>
-        </p:style>
-        <p:txBody>
-          <a:bodyPr rtlCol="0" anchor="ctr"/>
-          <a:lstStyle/>
-          <a:p>
-            <a:pPr algn="ctr"/>
-          </a:p>
-        </p:txBody>
-      </p:sp>
-      <p:sp>
-        <p:nvSpPr>
-          <p:cNvPr id="11" name="TextBox 10"/>
-          <p:cNvSpPr txBox="1"/>
-          <p:nvPr/>
-        </p:nvSpPr>
-        <p:spPr>
-          <a:xfrm>
-            <a:off x="6400800" y="1783080"/>
-            <a:ext cx="4846320" cy="1371600"/>
-          </a:xfrm>
-          <a:prstGeom prst="rect">
-            <a:avLst/>
-          </a:prstGeom>
-          <a:noFill/>
-        </p:spPr>
-        <p:txBody>
-          <a:bodyPr wrap="square">
-            <a:spAutoFit/>
-          </a:bodyPr>
-          <a:lstStyle/>
-          <a:p>
-            <a:pPr>
-              <a:spcAft>
-                <a:spcPts val="200"/>
-              </a:spcAft>
-              <a:defRPr sz="3600" b="1">
-                <a:solidFill>
-                  <a:srgbClr val="D97706"/>
-                </a:solidFill>
-              </a:defRPr>
-            </a:pPr>
-            <a:r>
-              <a:t>34.3%</a:t>
-            </a:r>
-          </a:p>
-          <a:p>
-            <a:pPr>
-              <a:spcAft>
-                <a:spcPts val="400"/>
-              </a:spcAft>
-              <a:defRPr sz="1200" b="1">
-                <a:solidFill>
-                  <a:srgbClr val="0F172A"/>
-                </a:solidFill>
-              </a:defRPr>
-            </a:pPr>
-            <a:r>
-              <a:t>IN PRODUCTION</a:t>
-            </a:r>
-          </a:p>
-          <a:p>
-            <a:pPr>
-              <a:defRPr sz="1100">
-                <a:solidFill>
-                  <a:srgbClr val="64748B"/>
-                </a:solidFill>
-              </a:defRPr>
-            </a:pPr>
-            <a:r>
-              <a:t>545 course days remaining across Commerce and IoT, actively being expanded via our 3-branch engine.</a:t>
-            </a:r>
-          </a:p>
-        </p:txBody>
-      </p:sp>
-      <p:sp>
-        <p:nvSpPr>
-          <p:cNvPr id="12" name="Rounded Rectangle 11"/>
-          <p:cNvSpPr/>
-          <p:nvPr/>
-        </p:nvSpPr>
-        <p:spPr>
-          <a:xfrm>
-            <a:off x="731520" y="3474720"/>
-            <a:ext cx="3291840" cy="2834640"/>
+            <a:ext cx="5212080" cy="4480560"/>
           </a:xfrm>
           <a:prstGeom prst="roundRect">
             <a:avLst/>
@@ -7419,14 +7667,14 @@
       </p:sp>
       <p:sp>
         <p:nvSpPr>
-          <p:cNvPr id="13" name="TextBox 12"/>
+          <p:cNvPr id="11" name="TextBox 10"/>
           <p:cNvSpPr txBox="1"/>
           <p:nvPr/>
         </p:nvSpPr>
         <p:spPr>
           <a:xfrm>
-            <a:off x="960120" y="3657600"/>
-            <a:ext cx="2834640" cy="2468880"/>
+            <a:off x="6400800" y="1810512"/>
+            <a:ext cx="4846320" cy="4151376"/>
           </a:xfrm>
           <a:prstGeom prst="rect">
             <a:avLst/>
@@ -7443,14 +7691,14 @@
               <a:spcAft>
                 <a:spcPts val="200"/>
               </a:spcAft>
-              <a:defRPr sz="1000" b="1">
+              <a:defRPr sz="950" b="1">
                 <a:solidFill>
                   <a:srgbClr val="10B981"/>
                 </a:solidFill>
               </a:defRPr>
             </a:pPr>
             <a:r>
-              <a:t>TIER 1 TRACKS</a:t>
+              <a:t>PYTHON FULLSTACK FLAGSHIP (100% LIVE)</a:t>
             </a:r>
           </a:p>
           <a:p>
@@ -7458,480 +7706,104 @@
               <a:spcAft>
                 <a:spcPts val="200"/>
               </a:spcAft>
-              <a:defRPr sz="1500" b="1">
+              <a:defRPr sz="1400" b="1">
                 <a:solidFill>
                   <a:srgbClr val="0F172A"/>
                 </a:solidFill>
               </a:defRPr>
             </a:pPr>
             <a:r>
-              <a:t>100% Complete</a:t>
-            </a:r>
-          </a:p>
-          <a:p>
-            <a:pPr>
-              <a:spcAft>
-                <a:spcPts val="600"/>
-              </a:spcAft>
-              <a:defRPr sz="1100">
+              <a:t>Course 20: Python Fullstack &amp; Backend</a:t>
+            </a:r>
+          </a:p>
+          <a:p>
+            <a:pPr>
+              <a:spcAft>
+                <a:spcPts val="400"/>
+              </a:spcAft>
+              <a:defRPr sz="1050">
                 <a:solidFill>
                   <a:srgbClr val="10B981"/>
                 </a:solidFill>
               </a:defRPr>
             </a:pPr>
             <a:r>
-              <a:t>Core Software Engine Live</a:t>
-            </a:r>
-          </a:p>
-          <a:p>
-            <a:pPr>
-              <a:spcAft>
-                <a:spcPts val="400"/>
-              </a:spcAft>
-              <a:defRPr sz="1150">
+              <a:t>30 Days Complete • 120 Interactive Quests</a:t>
+            </a:r>
+          </a:p>
+          <a:p>
+            <a:pPr>
+              <a:spcAft>
+                <a:spcPts val="300"/>
+              </a:spcAft>
+              <a:defRPr sz="1050">
                 <a:solidFill>
                   <a:srgbClr val="334155"/>
                 </a:solidFill>
               </a:defRPr>
             </a:pPr>
             <a:r>
-              <a:t>• 19 Deep Tech Tracks are 100% built to Day 30.</a:t>
-            </a:r>
-          </a:p>
-          <a:p>
-            <a:pPr>
-              <a:spcAft>
-                <a:spcPts val="400"/>
-              </a:spcAft>
-              <a:defRPr sz="1150">
+              <a:t>• What Students Learn: Advanced Python 3.12, FastAPI, AsyncIO event loops, PostgreSQL database connection pools, and Redis caching.</a:t>
+            </a:r>
+          </a:p>
+          <a:p>
+            <a:pPr>
+              <a:spcAft>
+                <a:spcPts val="300"/>
+              </a:spcAft>
+              <a:defRPr sz="1050">
                 <a:solidFill>
                   <a:srgbClr val="334155"/>
                 </a:solidFill>
               </a:defRPr>
             </a:pPr>
             <a:r>
-              <a:t>• Quantitative Trading Systems: 100% complete.</a:t>
-            </a:r>
-          </a:p>
-          <a:p>
-            <a:pPr>
-              <a:spcAft>
-                <a:spcPts val="400"/>
-              </a:spcAft>
-              <a:defRPr sz="1150">
+              <a:t>• How We Teach: Students dissect memory profiling, async task queues, generator pipelines, and production REST/GraphQL API contracts.</a:t>
+            </a:r>
+          </a:p>
+          <a:p>
+            <a:pPr>
+              <a:spcAft>
+                <a:spcPts val="300"/>
+              </a:spcAft>
+              <a:defRPr sz="1050">
                 <a:solidFill>
                   <a:srgbClr val="334155"/>
                 </a:solidFill>
               </a:defRPr>
             </a:pPr>
             <a:r>
-              <a:t>• Fullstack Web, Python, Cloud, DevOps: 100% complete.</a:t>
-            </a:r>
-          </a:p>
-          <a:p>
-            <a:pPr>
-              <a:spcAft>
-                <a:spcPts val="400"/>
-              </a:spcAft>
-              <a:defRPr sz="1150">
+              <a:t>• Why We Teach It: Python powers the backend of modern AI applications, data engineering platforms, and high-scale cloud services.</a:t>
+            </a:r>
+          </a:p>
+          <a:p>
+            <a:pPr>
+              <a:spcAft>
+                <a:spcPts val="300"/>
+              </a:spcAft>
+              <a:defRPr sz="1050">
                 <a:solidFill>
                   <a:srgbClr val="334155"/>
                 </a:solidFill>
               </a:defRPr>
             </a:pPr>
             <a:r>
-              <a:t>• Algorithms, Java, Blockchain, Cyber: 100% complete.</a:t>
-            </a:r>
-          </a:p>
-          <a:p>
-            <a:pPr>
-              <a:spcAft>
-                <a:spcPts val="400"/>
-              </a:spcAft>
-              <a:defRPr sz="1150">
+              <a:t>• Where It Leads: Python Backend Engineer, AI Full-Stack Developer, API Platform Architect. Starting Salary: Rs 12–24 LPA ($110k–$150k).</a:t>
+            </a:r>
+          </a:p>
+          <a:p>
+            <a:pPr>
+              <a:spcAft>
+                <a:spcPts val="300"/>
+              </a:spcAft>
+              <a:defRPr sz="1050">
                 <a:solidFill>
                   <a:srgbClr val="334155"/>
                 </a:solidFill>
               </a:defRPr>
             </a:pPr>
             <a:r>
-              <a:t>• 300+ Automated Tests green with 0 errors.</a:t>
-            </a:r>
-          </a:p>
-        </p:txBody>
-      </p:sp>
-      <p:sp>
-        <p:nvSpPr>
-          <p:cNvPr id="14" name="Rounded Rectangle 13"/>
-          <p:cNvSpPr/>
-          <p:nvPr/>
-        </p:nvSpPr>
-        <p:spPr>
-          <a:xfrm>
-            <a:off x="4389120" y="3474720"/>
-            <a:ext cx="3383280" cy="2834640"/>
-          </a:xfrm>
-          <a:prstGeom prst="roundRect">
-            <a:avLst/>
-          </a:prstGeom>
-          <a:solidFill>
-            <a:srgbClr val="FFFFFF"/>
-          </a:solidFill>
-          <a:ln w="15240">
-            <a:solidFill>
-              <a:srgbClr val="E2E8F0"/>
-            </a:solidFill>
-          </a:ln>
-        </p:spPr>
-        <p:style>
-          <a:lnRef idx="1">
-            <a:schemeClr val="accent1"/>
-          </a:lnRef>
-          <a:fillRef idx="3">
-            <a:schemeClr val="accent1"/>
-          </a:fillRef>
-          <a:effectRef idx="2">
-            <a:schemeClr val="accent1"/>
-          </a:effectRef>
-          <a:fontRef idx="minor">
-            <a:schemeClr val="lt1"/>
-          </a:fontRef>
-        </p:style>
-        <p:txBody>
-          <a:bodyPr rtlCol="0" anchor="ctr"/>
-          <a:lstStyle/>
-          <a:p>
-            <a:pPr algn="ctr"/>
-          </a:p>
-        </p:txBody>
-      </p:sp>
-      <p:sp>
-        <p:nvSpPr>
-          <p:cNvPr id="15" name="TextBox 14"/>
-          <p:cNvSpPr txBox="1"/>
-          <p:nvPr/>
-        </p:nvSpPr>
-        <p:spPr>
-          <a:xfrm>
-            <a:off x="4617720" y="3657600"/>
-            <a:ext cx="2926080" cy="2468880"/>
-          </a:xfrm>
-          <a:prstGeom prst="rect">
-            <a:avLst/>
-          </a:prstGeom>
-          <a:noFill/>
-        </p:spPr>
-        <p:txBody>
-          <a:bodyPr wrap="square">
-            <a:spAutoFit/>
-          </a:bodyPr>
-          <a:lstStyle/>
-          <a:p>
-            <a:pPr>
-              <a:spcAft>
-                <a:spcPts val="200"/>
-              </a:spcAft>
-              <a:defRPr sz="1000" b="1">
-                <a:solidFill>
-                  <a:srgbClr val="2563EB"/>
-                </a:solidFill>
-              </a:defRPr>
-            </a:pPr>
-            <a:r>
-              <a:t>LAUNCHPAD TRACKS</a:t>
-            </a:r>
-          </a:p>
-          <a:p>
-            <a:pPr>
-              <a:spcAft>
-                <a:spcPts val="200"/>
-              </a:spcAft>
-              <a:defRPr sz="1500" b="1">
-                <a:solidFill>
-                  <a:srgbClr val="0F172A"/>
-                </a:solidFill>
-              </a:defRPr>
-            </a:pPr>
-            <a:r>
-              <a:t>33% Complete</a:t>
-            </a:r>
-          </a:p>
-          <a:p>
-            <a:pPr>
-              <a:spcAft>
-                <a:spcPts val="600"/>
-              </a:spcAft>
-              <a:defRPr sz="1100">
-                <a:solidFill>
-                  <a:srgbClr val="2563EB"/>
-                </a:solidFill>
-              </a:defRPr>
-            </a:pPr>
-            <a:r>
-              <a:t>Freshman Launchpads</a:t>
-            </a:r>
-          </a:p>
-          <a:p>
-            <a:pPr>
-              <a:spcAft>
-                <a:spcPts val="400"/>
-              </a:spcAft>
-              <a:defRPr sz="1150">
-                <a:solidFill>
-                  <a:srgbClr val="334155"/>
-                </a:solidFill>
-              </a:defRPr>
-            </a:pPr>
-            <a:r>
-              <a:t>• Excel &amp; Data Analytics: Days 1–10 live.</a:t>
-            </a:r>
-          </a:p>
-          <a:p>
-            <a:pPr>
-              <a:spcAft>
-                <a:spcPts val="400"/>
-              </a:spcAft>
-              <a:defRPr sz="1150">
-                <a:solidFill>
-                  <a:srgbClr val="334155"/>
-                </a:solidFill>
-              </a:defRPr>
-            </a:pPr>
-            <a:r>
-              <a:t>• Computer OS Fundamentals: Days 1–5 live.</a:t>
-            </a:r>
-          </a:p>
-          <a:p>
-            <a:pPr>
-              <a:spcAft>
-                <a:spcPts val="400"/>
-              </a:spcAft>
-              <a:defRPr sz="1150">
-                <a:solidFill>
-                  <a:srgbClr val="334155"/>
-                </a:solidFill>
-              </a:defRPr>
-            </a:pPr>
-            <a:r>
-              <a:t>• Git &amp; Team Version Control: Days 1–5 live.</a:t>
-            </a:r>
-          </a:p>
-          <a:p>
-            <a:pPr>
-              <a:spcAft>
-                <a:spcPts val="400"/>
-              </a:spcAft>
-              <a:defRPr sz="1150">
-                <a:solidFill>
-                  <a:srgbClr val="334155"/>
-                </a:solidFill>
-              </a:defRPr>
-            </a:pPr>
-            <a:r>
-              <a:t>• Tech Soft Skills &amp; Interviews: Days 1–5 live.</a:t>
-            </a:r>
-          </a:p>
-          <a:p>
-            <a:pPr>
-              <a:spcAft>
-                <a:spcPts val="400"/>
-              </a:spcAft>
-              <a:defRPr sz="1150">
-                <a:solidFill>
-                  <a:srgbClr val="334155"/>
-                </a:solidFill>
-              </a:defRPr>
-            </a:pPr>
-            <a:r>
-              <a:t>• Remaining: Days 6–30 (95 days in flight).</a:t>
-            </a:r>
-          </a:p>
-        </p:txBody>
-      </p:sp>
-      <p:sp>
-        <p:nvSpPr>
-          <p:cNvPr id="16" name="Rounded Rectangle 15"/>
-          <p:cNvSpPr/>
-          <p:nvPr/>
-        </p:nvSpPr>
-        <p:spPr>
-          <a:xfrm>
-            <a:off x="8138160" y="3474720"/>
-            <a:ext cx="3291840" cy="2834640"/>
-          </a:xfrm>
-          <a:prstGeom prst="roundRect">
-            <a:avLst/>
-          </a:prstGeom>
-          <a:solidFill>
-            <a:srgbClr val="FFFFFF"/>
-          </a:solidFill>
-          <a:ln w="15240">
-            <a:solidFill>
-              <a:srgbClr val="E2E8F0"/>
-            </a:solidFill>
-          </a:ln>
-        </p:spPr>
-        <p:style>
-          <a:lnRef idx="1">
-            <a:schemeClr val="accent1"/>
-          </a:lnRef>
-          <a:fillRef idx="3">
-            <a:schemeClr val="accent1"/>
-          </a:fillRef>
-          <a:effectRef idx="2">
-            <a:schemeClr val="accent1"/>
-          </a:effectRef>
-          <a:fontRef idx="minor">
-            <a:schemeClr val="lt1"/>
-          </a:fontRef>
-        </p:style>
-        <p:txBody>
-          <a:bodyPr rtlCol="0" anchor="ctr"/>
-          <a:lstStyle/>
-          <a:p>
-            <a:pPr algn="ctr"/>
-          </a:p>
-        </p:txBody>
-      </p:sp>
-      <p:sp>
-        <p:nvSpPr>
-          <p:cNvPr id="17" name="TextBox 16"/>
-          <p:cNvSpPr txBox="1"/>
-          <p:nvPr/>
-        </p:nvSpPr>
-        <p:spPr>
-          <a:xfrm>
-            <a:off x="8366760" y="3657600"/>
-            <a:ext cx="2834640" cy="2468880"/>
-          </a:xfrm>
-          <a:prstGeom prst="rect">
-            <a:avLst/>
-          </a:prstGeom>
-          <a:noFill/>
-        </p:spPr>
-        <p:txBody>
-          <a:bodyPr wrap="square">
-            <a:spAutoFit/>
-          </a:bodyPr>
-          <a:lstStyle/>
-          <a:p>
-            <a:pPr>
-              <a:spcAft>
-                <a:spcPts val="200"/>
-              </a:spcAft>
-              <a:defRPr sz="1000" b="1">
-                <a:solidFill>
-                  <a:srgbClr val="D97706"/>
-                </a:solidFill>
-              </a:defRPr>
-            </a:pPr>
-            <a:r>
-              <a:t>MASS MARKET TRACKS</a:t>
-            </a:r>
-          </a:p>
-          <a:p>
-            <a:pPr>
-              <a:spcAft>
-                <a:spcPts val="200"/>
-              </a:spcAft>
-              <a:defRPr sz="1500" b="1">
-                <a:solidFill>
-                  <a:srgbClr val="0F172A"/>
-                </a:solidFill>
-              </a:defRPr>
-            </a:pPr>
-            <a:r>
-              <a:t>17% Live / Expanding</a:t>
-            </a:r>
-          </a:p>
-          <a:p>
-            <a:pPr>
-              <a:spcAft>
-                <a:spcPts val="600"/>
-              </a:spcAft>
-              <a:defRPr sz="1100">
-                <a:solidFill>
-                  <a:srgbClr val="D97706"/>
-                </a:solidFill>
-              </a:defRPr>
-            </a:pPr>
-            <a:r>
-              <a:t>Commerce &amp; IoT Stream</a:t>
-            </a:r>
-          </a:p>
-          <a:p>
-            <a:pPr>
-              <a:spcAft>
-                <a:spcPts val="400"/>
-              </a:spcAft>
-              <a:defRPr sz="1150">
-                <a:solidFill>
-                  <a:srgbClr val="334155"/>
-                </a:solidFill>
-              </a:defRPr>
-            </a:pPr>
-            <a:r>
-              <a:t>• 14 Commerce Tracks: Days 1–5 live (70 days).</a:t>
-            </a:r>
-          </a:p>
-          <a:p>
-            <a:pPr>
-              <a:spcAft>
-                <a:spcPts val="400"/>
-              </a:spcAft>
-              <a:defRPr sz="1150">
-                <a:solidFill>
-                  <a:srgbClr val="334155"/>
-                </a:solidFill>
-              </a:defRPr>
-            </a:pPr>
-            <a:r>
-              <a:t>• 4 IoT Hardware Tracks: Days 1–5 live (20 days).</a:t>
-            </a:r>
-          </a:p>
-          <a:p>
-            <a:pPr>
-              <a:spcAft>
-                <a:spcPts val="400"/>
-              </a:spcAft>
-              <a:defRPr sz="1150">
-                <a:solidFill>
-                  <a:srgbClr val="334155"/>
-                </a:solidFill>
-              </a:defRPr>
-            </a:pPr>
-            <a:r>
-              <a:t>• Remaining: Days 6–30 (450 days in flight).</a:t>
-            </a:r>
-          </a:p>
-          <a:p>
-            <a:pPr>
-              <a:spcAft>
-                <a:spcPts val="400"/>
-              </a:spcAft>
-              <a:defRPr sz="1150">
-                <a:solidFill>
-                  <a:srgbClr val="334155"/>
-                </a:solidFill>
-              </a:defRPr>
-            </a:pPr>
-            <a:r>
-              <a:t>• Being built rapidly via Branch B sub-agents.</a:t>
-            </a:r>
-          </a:p>
-          <a:p>
-            <a:pPr>
-              <a:spcAft>
-                <a:spcPts val="400"/>
-              </a:spcAft>
-              <a:defRPr sz="1150">
-                <a:solidFill>
-                  <a:srgbClr val="334155"/>
-                </a:solidFill>
-              </a:defRPr>
-            </a:pPr>
-            <a:r>
-              <a:t>• Zero collisions with core platform files.</a:t>
+              <a:t>• Live Capstone on GitHub: Enterprise Asynchronous Job Queue with distributed workers, retry backoff, and PostgreSQL persistence.</a:t>
             </a:r>
           </a:p>
         </p:txBody>
@@ -8053,7 +7925,7 @@
         <p:spPr>
           <a:xfrm>
             <a:off x="731520" y="320040"/>
-            <a:ext cx="2926080" cy="292608"/>
+            <a:ext cx="3291840" cy="292608"/>
           </a:xfrm>
           <a:prstGeom prst="roundRect">
             <a:avLst/>
@@ -8093,7 +7965,7 @@
               </a:defRPr>
             </a:pPr>
             <a:r>
-              <a:t>TEACHING METHODOLOGY</a:t>
+              <a:t>ENTERPRISE ENGINEERING INFRASTRUCTURE</a:t>
             </a:r>
           </a:p>
         </p:txBody>
@@ -8156,14 +8028,14 @@
           <a:lstStyle/>
           <a:p>
             <a:pPr>
-              <a:defRPr sz="2200" b="1">
+              <a:defRPr sz="2100" b="1">
                 <a:solidFill>
                   <a:srgbClr val="0F172A"/>
                 </a:solidFill>
               </a:defRPr>
             </a:pPr>
             <a:r>
-              <a:t>How We Teach: The Active Method That Eliminates Dropouts</a:t>
+              <a:t>Core Software &amp; Cloud Engineering (Courses 01, 03, 04, 05, 06)</a:t>
             </a:r>
           </a:p>
         </p:txBody>
@@ -8177,7 +8049,7 @@
         <p:spPr>
           <a:xfrm>
             <a:off x="731520" y="1170432"/>
-            <a:ext cx="10698480" cy="365760"/>
+            <a:ext cx="10698480" cy="347472"/>
           </a:xfrm>
           <a:prstGeom prst="rect">
             <a:avLst/>
@@ -8198,7 +8070,7 @@
               </a:defRPr>
             </a:pPr>
             <a:r>
-              <a:t>Replacing Passive Video Observation with a 30-Minute Daily Loop and Socratic AI Guidance</a:t>
+              <a:t>5 Foundation Tracks Transforming Beginners into Enterprise Infrastructure Engineers (100% Complete)</a:t>
             </a:r>
           </a:p>
         </p:txBody>
@@ -8212,7 +8084,7 @@
         <p:spPr>
           <a:xfrm>
             <a:off x="731520" y="1645920"/>
-            <a:ext cx="2468880" cy="2743200"/>
+            <a:ext cx="3291840" cy="2194560"/>
           </a:xfrm>
           <a:prstGeom prst="roundRect">
             <a:avLst/>
@@ -8256,8 +8128,8 @@
         </p:nvSpPr>
         <p:spPr>
           <a:xfrm>
-            <a:off x="960120" y="1828800"/>
-            <a:ext cx="2011680" cy="2377440"/>
+            <a:off x="914400" y="1810512"/>
+            <a:ext cx="2926080" cy="1865376"/>
           </a:xfrm>
           <a:prstGeom prst="rect">
             <a:avLst/>
@@ -8274,14 +8146,14 @@
               <a:spcAft>
                 <a:spcPts val="200"/>
               </a:spcAft>
-              <a:defRPr sz="1000" b="1">
+              <a:defRPr sz="950" b="1">
                 <a:solidFill>
                   <a:srgbClr val="2563EB"/>
                 </a:solidFill>
               </a:defRPr>
             </a:pPr>
             <a:r>
-              <a:t>STEP 1 (12 MIN)</a:t>
+              <a:t>100% BUILT (30 DAYS)</a:t>
             </a:r>
           </a:p>
           <a:p>
@@ -8289,74 +8161,74 @@
               <a:spcAft>
                 <a:spcPts val="200"/>
               </a:spcAft>
-              <a:defRPr sz="1500" b="1">
+              <a:defRPr sz="1400" b="1">
                 <a:solidFill>
                   <a:srgbClr val="0F172A"/>
                 </a:solidFill>
               </a:defRPr>
             </a:pPr>
             <a:r>
-              <a:t>1. Senior Audio</a:t>
-            </a:r>
-          </a:p>
-          <a:p>
-            <a:pPr>
-              <a:spcAft>
-                <a:spcPts val="600"/>
-              </a:spcAft>
-              <a:defRPr sz="1100">
+              <a:t>Course 01: Java Logic</a:t>
+            </a:r>
+          </a:p>
+          <a:p>
+            <a:pPr>
+              <a:spcAft>
+                <a:spcPts val="400"/>
+              </a:spcAft>
+              <a:defRPr sz="1050">
                 <a:solidFill>
                   <a:srgbClr val="2563EB"/>
                 </a:solidFill>
               </a:defRPr>
             </a:pPr>
             <a:r>
-              <a:t>Pairs with the Student</a:t>
-            </a:r>
-          </a:p>
-          <a:p>
-            <a:pPr>
-              <a:spcAft>
-                <a:spcPts val="400"/>
-              </a:spcAft>
-              <a:defRPr sz="1150">
+              <a:t>Enterprise Server Foundations</a:t>
+            </a:r>
+          </a:p>
+          <a:p>
+            <a:pPr>
+              <a:spcAft>
+                <a:spcPts val="300"/>
+              </a:spcAft>
+              <a:defRPr sz="1050">
                 <a:solidFill>
                   <a:srgbClr val="334155"/>
                 </a:solidFill>
               </a:defRPr>
             </a:pPr>
             <a:r>
-              <a:t>• Conversational voice-guided narration at 120 WPM.</a:t>
-            </a:r>
-          </a:p>
-          <a:p>
-            <a:pPr>
-              <a:spcAft>
-                <a:spcPts val="400"/>
-              </a:spcAft>
-              <a:defRPr sz="1150">
+              <a:t>• Java 21 LTS core syntax, OOP encapsulation, memory stack/heap.</a:t>
+            </a:r>
+          </a:p>
+          <a:p>
+            <a:pPr>
+              <a:spcAft>
+                <a:spcPts val="300"/>
+              </a:spcAft>
+              <a:defRPr sz="1050">
                 <a:solidFill>
                   <a:srgbClr val="334155"/>
                 </a:solidFill>
               </a:defRPr>
             </a:pPr>
             <a:r>
-              <a:t>• Senior tech lead tone.</a:t>
-            </a:r>
-          </a:p>
-          <a:p>
-            <a:pPr>
-              <a:spcAft>
-                <a:spcPts val="400"/>
-              </a:spcAft>
-              <a:defRPr sz="1150">
+              <a:t>• AutoCloseable resource safety, streams, and Project Loom virtual threads.</a:t>
+            </a:r>
+          </a:p>
+          <a:p>
+            <a:pPr>
+              <a:spcAft>
+                <a:spcPts val="300"/>
+              </a:spcAft>
+              <a:defRPr sz="1050">
                 <a:solidFill>
                   <a:srgbClr val="334155"/>
                 </a:solidFill>
               </a:defRPr>
             </a:pPr>
             <a:r>
-              <a:t>• Explains real-world stakes and business context first.</a:t>
+              <a:t>• Career: Java Enterprise Developer (Rs 10–20 LPA).</a:t>
             </a:r>
           </a:p>
         </p:txBody>
@@ -8369,8 +8241,8 @@
         </p:nvSpPr>
         <p:spPr>
           <a:xfrm>
-            <a:off x="3429000" y="1645920"/>
-            <a:ext cx="2468880" cy="2743200"/>
+            <a:off x="4389120" y="1645920"/>
+            <a:ext cx="3383280" cy="2194560"/>
           </a:xfrm>
           <a:prstGeom prst="roundRect">
             <a:avLst/>
@@ -8414,8 +8286,8 @@
         </p:nvSpPr>
         <p:spPr>
           <a:xfrm>
-            <a:off x="3657600" y="1828800"/>
-            <a:ext cx="2011680" cy="2377440"/>
+            <a:off x="4572000" y="1810512"/>
+            <a:ext cx="3017520" cy="1865376"/>
           </a:xfrm>
           <a:prstGeom prst="rect">
             <a:avLst/>
@@ -8432,14 +8304,14 @@
               <a:spcAft>
                 <a:spcPts val="200"/>
               </a:spcAft>
-              <a:defRPr sz="1000" b="1">
-                <a:solidFill>
-                  <a:srgbClr val="7E22CE"/>
-                </a:solidFill>
-              </a:defRPr>
-            </a:pPr>
-            <a:r>
-              <a:t>STEP 2 (5 MIN)</a:t>
+              <a:defRPr sz="950" b="1">
+                <a:solidFill>
+                  <a:srgbClr val="2563EB"/>
+                </a:solidFill>
+              </a:defRPr>
+            </a:pPr>
+            <a:r>
+              <a:t>100% BUILT (30 DAYS)</a:t>
             </a:r>
           </a:p>
           <a:p>
@@ -8447,29 +8319,14 @@
               <a:spcAft>
                 <a:spcPts val="200"/>
               </a:spcAft>
-              <a:defRPr sz="1500" b="1">
+              <a:defRPr sz="1400" b="1">
                 <a:solidFill>
                   <a:srgbClr val="0F172A"/>
                 </a:solidFill>
               </a:defRPr>
             </a:pPr>
             <a:r>
-              <a:t>2. State Animation</a:t>
-            </a:r>
-          </a:p>
-          <a:p>
-            <a:pPr>
-              <a:spcAft>
-                <a:spcPts val="600"/>
-              </a:spcAft>
-              <a:defRPr sz="1100">
-                <a:solidFill>
-                  <a:srgbClr val="7E22CE"/>
-                </a:solidFill>
-              </a:defRPr>
-            </a:pPr>
-            <a:r>
-              <a:t>Visual Intuition</a:t>
+              <a:t>Course 03: Node.js Backend</a:t>
             </a:r>
           </a:p>
           <a:p>
@@ -8477,44 +8334,59 @@
               <a:spcAft>
                 <a:spcPts val="400"/>
               </a:spcAft>
-              <a:defRPr sz="1150">
+              <a:defRPr sz="1050">
+                <a:solidFill>
+                  <a:srgbClr val="2563EB"/>
+                </a:solidFill>
+              </a:defRPr>
+            </a:pPr>
+            <a:r>
+              <a:t>High-Throughput Microservices</a:t>
+            </a:r>
+          </a:p>
+          <a:p>
+            <a:pPr>
+              <a:spcAft>
+                <a:spcPts val="300"/>
+              </a:spcAft>
+              <a:defRPr sz="1050">
                 <a:solidFill>
                   <a:srgbClr val="334155"/>
                 </a:solidFill>
               </a:defRPr>
             </a:pPr>
             <a:r>
-              <a:t>• Live animated state diagrams.</a:t>
-            </a:r>
-          </a:p>
-          <a:p>
-            <a:pPr>
-              <a:spcAft>
-                <a:spcPts val="400"/>
-              </a:spcAft>
-              <a:defRPr sz="1150">
+              <a:t>• Node.js event loop, libuv microtask queues, stream pipelines.</a:t>
+            </a:r>
+          </a:p>
+          <a:p>
+            <a:pPr>
+              <a:spcAft>
+                <a:spcPts val="300"/>
+              </a:spcAft>
+              <a:defRPr sz="1050">
                 <a:solidFill>
                   <a:srgbClr val="334155"/>
                 </a:solidFill>
               </a:defRPr>
             </a:pPr>
             <a:r>
-              <a:t>• Shows data, memory, or cash flowing through the system.</a:t>
-            </a:r>
-          </a:p>
-          <a:p>
-            <a:pPr>
-              <a:spcAft>
-                <a:spcPts val="400"/>
-              </a:spcAft>
-              <a:defRPr sz="1150">
+              <a:t>• TypeScript enterprise schemas, JWT auth, rate-limiting middleware.</a:t>
+            </a:r>
+          </a:p>
+          <a:p>
+            <a:pPr>
+              <a:spcAft>
+                <a:spcPts val="300"/>
+              </a:spcAft>
+              <a:defRPr sz="1050">
                 <a:solidFill>
                   <a:srgbClr val="334155"/>
                 </a:solidFill>
               </a:defRPr>
             </a:pPr>
             <a:r>
-              <a:t>• Eliminates mental confusion.</a:t>
+              <a:t>• Career: Node.js Backend Engineer (Rs 12–22 LPA).</a:t>
             </a:r>
           </a:p>
         </p:txBody>
@@ -8527,8 +8399,8 @@
         </p:nvSpPr>
         <p:spPr>
           <a:xfrm>
-            <a:off x="6126480" y="1645920"/>
-            <a:ext cx="2468880" cy="2743200"/>
+            <a:off x="8138160" y="1645920"/>
+            <a:ext cx="3291840" cy="2194560"/>
           </a:xfrm>
           <a:prstGeom prst="roundRect">
             <a:avLst/>
@@ -8572,8 +8444,8 @@
         </p:nvSpPr>
         <p:spPr>
           <a:xfrm>
-            <a:off x="6355080" y="1828800"/>
-            <a:ext cx="2011680" cy="2377440"/>
+            <a:off x="8321040" y="1810512"/>
+            <a:ext cx="2926080" cy="1865376"/>
           </a:xfrm>
           <a:prstGeom prst="rect">
             <a:avLst/>
@@ -8590,14 +8462,14 @@
               <a:spcAft>
                 <a:spcPts val="200"/>
               </a:spcAft>
-              <a:defRPr sz="1000" b="1">
-                <a:solidFill>
-                  <a:srgbClr val="D97706"/>
-                </a:solidFill>
-              </a:defRPr>
-            </a:pPr>
-            <a:r>
-              <a:t>STEP 3 (7 MIN)</a:t>
+              <a:defRPr sz="950" b="1">
+                <a:solidFill>
+                  <a:srgbClr val="2563EB"/>
+                </a:solidFill>
+              </a:defRPr>
+            </a:pPr>
+            <a:r>
+              <a:t>100% BUILT (30 DAYS)</a:t>
             </a:r>
           </a:p>
           <a:p>
@@ -8605,29 +8477,14 @@
               <a:spcAft>
                 <a:spcPts val="200"/>
               </a:spcAft>
-              <a:defRPr sz="1500" b="1">
+              <a:defRPr sz="1400" b="1">
                 <a:solidFill>
                   <a:srgbClr val="0F172A"/>
                 </a:solidFill>
               </a:defRPr>
             </a:pPr>
             <a:r>
-              <a:t>3. Forced Code Fix</a:t>
-            </a:r>
-          </a:p>
-          <a:p>
-            <a:pPr>
-              <a:spcAft>
-                <a:spcPts val="600"/>
-              </a:spcAft>
-              <a:defRPr sz="1100">
-                <a:solidFill>
-                  <a:srgbClr val="D97706"/>
-                </a:solidFill>
-              </a:defRPr>
-            </a:pPr>
-            <a:r>
-              <a:t>Learn-By-Doing</a:t>
+              <a:t>Course 04: Cloud Native (AWS)</a:t>
             </a:r>
           </a:p>
           <a:p>
@@ -8635,44 +8492,59 @@
               <a:spcAft>
                 <a:spcPts val="400"/>
               </a:spcAft>
-              <a:defRPr sz="1150">
+              <a:defRPr sz="1050">
+                <a:solidFill>
+                  <a:srgbClr val="2563EB"/>
+                </a:solidFill>
+              </a:defRPr>
+            </a:pPr>
+            <a:r>
+              <a:t>Cloud Scalability &amp; Reliability</a:t>
+            </a:r>
+          </a:p>
+          <a:p>
+            <a:pPr>
+              <a:spcAft>
+                <a:spcPts val="300"/>
+              </a:spcAft>
+              <a:defRPr sz="1050">
                 <a:solidFill>
                   <a:srgbClr val="334155"/>
                 </a:solidFill>
               </a:defRPr>
             </a:pPr>
             <a:r>
-              <a:t>• Hands-on in-browser editor.</a:t>
-            </a:r>
-          </a:p>
-          <a:p>
-            <a:pPr>
-              <a:spcAft>
-                <a:spcPts val="400"/>
-              </a:spcAft>
-              <a:defRPr sz="1150">
+              <a:t>• AWS architecture: EC2, S3, RDS, Lambda serverless, API Gateway.</a:t>
+            </a:r>
+          </a:p>
+          <a:p>
+            <a:pPr>
+              <a:spcAft>
+                <a:spcPts val="300"/>
+              </a:spcAft>
+              <a:defRPr sz="1050">
                 <a:solidFill>
                   <a:srgbClr val="334155"/>
                 </a:solidFill>
               </a:defRPr>
             </a:pPr>
             <a:r>
-              <a:t>• Student fixes an intentional edge case or bug.</a:t>
-            </a:r>
-          </a:p>
-          <a:p>
-            <a:pPr>
-              <a:spcAft>
-                <a:spcPts val="400"/>
-              </a:spcAft>
-              <a:defRPr sz="1150">
+              <a:t>• IAM zero-trust policies, VPC private subnets, CloudFront CDN.</a:t>
+            </a:r>
+          </a:p>
+          <a:p>
+            <a:pPr>
+              <a:spcAft>
+                <a:spcPts val="300"/>
+              </a:spcAft>
+              <a:defRPr sz="1050">
                 <a:solidFill>
                   <a:srgbClr val="334155"/>
                 </a:solidFill>
               </a:defRPr>
             </a:pPr>
             <a:r>
-              <a:t>• Cannot proceed without active completion.</a:t>
+              <a:t>• Career: Cloud Solutions Architect (Rs 14–26 LPA).</a:t>
             </a:r>
           </a:p>
         </p:txBody>
@@ -8685,8 +8557,8 @@
         </p:nvSpPr>
         <p:spPr>
           <a:xfrm>
-            <a:off x="8823960" y="1645920"/>
-            <a:ext cx="2633472" cy="2743200"/>
+            <a:off x="731520" y="3977639"/>
+            <a:ext cx="5120640" cy="2331720"/>
           </a:xfrm>
           <a:prstGeom prst="roundRect">
             <a:avLst/>
@@ -8730,8 +8602,8 @@
         </p:nvSpPr>
         <p:spPr>
           <a:xfrm>
-            <a:off x="9052560" y="1828800"/>
-            <a:ext cx="2176272" cy="2377440"/>
+            <a:off x="914400" y="4142231"/>
+            <a:ext cx="4754880" cy="2002536"/>
           </a:xfrm>
           <a:prstGeom prst="rect">
             <a:avLst/>
@@ -8748,14 +8620,14 @@
               <a:spcAft>
                 <a:spcPts val="200"/>
               </a:spcAft>
-              <a:defRPr sz="1000" b="1">
-                <a:solidFill>
-                  <a:srgbClr val="E11D48"/>
-                </a:solidFill>
-              </a:defRPr>
-            </a:pPr>
-            <a:r>
-              <a:t>STEP 4 (6 MIN)</a:t>
+              <a:defRPr sz="950" b="1">
+                <a:solidFill>
+                  <a:srgbClr val="10B981"/>
+                </a:solidFill>
+              </a:defRPr>
+            </a:pPr>
+            <a:r>
+              <a:t>100% BUILT (30 DAYS)</a:t>
             </a:r>
           </a:p>
           <a:p>
@@ -8763,29 +8635,14 @@
               <a:spcAft>
                 <a:spcPts val="200"/>
               </a:spcAft>
-              <a:defRPr sz="1500" b="1">
+              <a:defRPr sz="1400" b="1">
                 <a:solidFill>
                   <a:srgbClr val="0F172A"/>
                 </a:solidFill>
               </a:defRPr>
             </a:pPr>
             <a:r>
-              <a:t>4. Outage Puzzle</a:t>
-            </a:r>
-          </a:p>
-          <a:p>
-            <a:pPr>
-              <a:spcAft>
-                <a:spcPts val="600"/>
-              </a:spcAft>
-              <a:defRPr sz="1100">
-                <a:solidFill>
-                  <a:srgbClr val="E11D48"/>
-                </a:solidFill>
-              </a:defRPr>
-            </a:pPr>
-            <a:r>
-              <a:t>Real-World Acumen</a:t>
+              <a:t>Course 05: DevOps &amp; CI/CD Pipelines</a:t>
             </a:r>
           </a:p>
           <a:p>
@@ -8793,44 +8650,59 @@
               <a:spcAft>
                 <a:spcPts val="400"/>
               </a:spcAft>
-              <a:defRPr sz="1150">
+              <a:defRPr sz="1050">
+                <a:solidFill>
+                  <a:srgbClr val="10B981"/>
+                </a:solidFill>
+              </a:defRPr>
+            </a:pPr>
+            <a:r>
+              <a:t>Automated Delivery &amp; Self-Healing Pods</a:t>
+            </a:r>
+          </a:p>
+          <a:p>
+            <a:pPr>
+              <a:spcAft>
+                <a:spcPts val="300"/>
+              </a:spcAft>
+              <a:defRPr sz="1050">
                 <a:solidFill>
                   <a:srgbClr val="334155"/>
                 </a:solidFill>
               </a:defRPr>
             </a:pPr>
             <a:r>
-              <a:t>• 3 AM production failure scenario.</a:t>
-            </a:r>
-          </a:p>
-          <a:p>
-            <a:pPr>
-              <a:spcAft>
-                <a:spcPts val="400"/>
-              </a:spcAft>
-              <a:defRPr sz="1150">
+              <a:t>• Docker multi-stage builds, container orchestration, Kubernetes pod lifecycles.</a:t>
+            </a:r>
+          </a:p>
+          <a:p>
+            <a:pPr>
+              <a:spcAft>
+                <a:spcPts val="300"/>
+              </a:spcAft>
+              <a:defRPr sz="1050">
                 <a:solidFill>
                   <a:srgbClr val="334155"/>
                 </a:solidFill>
               </a:defRPr>
             </a:pPr>
             <a:r>
-              <a:t>• Server crash, tax leak, or fraud attempt.</a:t>
-            </a:r>
-          </a:p>
-          <a:p>
-            <a:pPr>
-              <a:spcAft>
-                <a:spcPts val="400"/>
-              </a:spcAft>
-              <a:defRPr sz="1150">
+              <a:t>• Automated GitHub Actions CI/CD workflows, Terraform Infrastructure as Code (IaC).</a:t>
+            </a:r>
+          </a:p>
+          <a:p>
+            <a:pPr>
+              <a:spcAft>
+                <a:spcPts val="300"/>
+              </a:spcAft>
+              <a:defRPr sz="1050">
                 <a:solidFill>
                   <a:srgbClr val="334155"/>
                 </a:solidFill>
               </a:defRPr>
             </a:pPr>
             <a:r>
-              <a:t>• Tests diagnostic thinking under pressure.</a:t>
+              <a:t>• Why &amp; Where: Tech companies require automated deployment. Leads to SRE and DevOps Engineer roles (Rs 14–28 LPA).</a:t>
             </a:r>
           </a:p>
         </p:txBody>
@@ -8843,18 +8715,18 @@
         </p:nvSpPr>
         <p:spPr>
           <a:xfrm>
-            <a:off x="731520" y="4572000"/>
-            <a:ext cx="10725912" cy="1737360"/>
+            <a:off x="6217920" y="3977639"/>
+            <a:ext cx="5212080" cy="2331720"/>
           </a:xfrm>
           <a:prstGeom prst="roundRect">
             <a:avLst/>
           </a:prstGeom>
           <a:solidFill>
-            <a:srgbClr val="F0FDF4"/>
+            <a:srgbClr val="FFFFFF"/>
           </a:solidFill>
           <a:ln w="15240">
             <a:solidFill>
-              <a:srgbClr val="BBF7D0"/>
+              <a:srgbClr val="E2E8F0"/>
             </a:solidFill>
           </a:ln>
         </p:spPr>
@@ -8888,8 +8760,8 @@
         </p:nvSpPr>
         <p:spPr>
           <a:xfrm>
-            <a:off x="960120" y="4754880"/>
-            <a:ext cx="10268712" cy="1371600"/>
+            <a:off x="6400800" y="4142231"/>
+            <a:ext cx="4846320" cy="2002536"/>
           </a:xfrm>
           <a:prstGeom prst="rect">
             <a:avLst/>
@@ -8906,14 +8778,14 @@
               <a:spcAft>
                 <a:spcPts val="200"/>
               </a:spcAft>
-              <a:defRPr sz="1000" b="1">
-                <a:solidFill>
-                  <a:srgbClr val="10B981"/>
-                </a:solidFill>
-              </a:defRPr>
-            </a:pPr>
-            <a:r>
-              <a:t>OUR PEDAGOGICAL SAFETY NET</a:t>
+              <a:defRPr sz="950" b="1">
+                <a:solidFill>
+                  <a:srgbClr val="7E22CE"/>
+                </a:solidFill>
+              </a:defRPr>
+            </a:pPr>
+            <a:r>
+              <a:t>100% BUILT (30 DAYS)</a:t>
             </a:r>
           </a:p>
           <a:p>
@@ -8921,29 +8793,14 @@
               <a:spcAft>
                 <a:spcPts val="200"/>
               </a:spcAft>
-              <a:defRPr sz="1500" b="1">
+              <a:defRPr sz="1400" b="1">
                 <a:solidFill>
                   <a:srgbClr val="0F172A"/>
                 </a:solidFill>
               </a:defRPr>
             </a:pPr>
             <a:r>
-              <a:t>The 3-Tier Socratic AI Ladder: Why Students Never Get Stuck</a:t>
-            </a:r>
-          </a:p>
-          <a:p>
-            <a:pPr>
-              <a:spcAft>
-                <a:spcPts val="600"/>
-              </a:spcAft>
-              <a:defRPr sz="1100">
-                <a:solidFill>
-                  <a:srgbClr val="10B981"/>
-                </a:solidFill>
-              </a:defRPr>
-            </a:pPr>
-            <a:r>
-              <a:t>Zero Student Abandonment Guarantee</a:t>
+              <a:t>Course 06: UI/UX Design Systems</a:t>
             </a:r>
           </a:p>
           <a:p>
@@ -8951,29 +8808,59 @@
               <a:spcAft>
                 <a:spcPts val="400"/>
               </a:spcAft>
-              <a:defRPr sz="1150">
+              <a:defRPr sz="1050">
+                <a:solidFill>
+                  <a:srgbClr val="7E22CE"/>
+                </a:solidFill>
+              </a:defRPr>
+            </a:pPr>
+            <a:r>
+              <a:t>Component Tokens &amp; Production Accessibility</a:t>
+            </a:r>
+          </a:p>
+          <a:p>
+            <a:pPr>
+              <a:spcAft>
+                <a:spcPts val="300"/>
+              </a:spcAft>
+              <a:defRPr sz="1050">
                 <a:solidFill>
                   <a:srgbClr val="334155"/>
                 </a:solidFill>
               </a:defRPr>
             </a:pPr>
             <a:r>
-              <a:t>• The Problem with ChatGPT: It gives answers instantly, creating copy-paste dependency with zero real understanding.</a:t>
-            </a:r>
-          </a:p>
-          <a:p>
-            <a:pPr>
-              <a:spcAft>
-                <a:spcPts val="400"/>
-              </a:spcAft>
-              <a:defRPr sz="1150">
+              <a:t>• Atomic design architecture, WCAG 2.1 AA accessibility, design token variables.</a:t>
+            </a:r>
+          </a:p>
+          <a:p>
+            <a:pPr>
+              <a:spcAft>
+                <a:spcPts val="300"/>
+              </a:spcAft>
+              <a:defRPr sz="1050">
                 <a:solidFill>
                   <a:srgbClr val="334155"/>
                 </a:solidFill>
               </a:defRPr>
             </a:pPr>
             <a:r>
-              <a:t>• PinIT Socratic Engine: Step 1: Conceptual Nudge (asks guiding questions) -&gt; Step 2: Visual Highlight (shows where the error is) -&gt; Step 3: Surgical Line Fix (only if repeated failure). Result: 100% of students finish without giving up!</a:t>
+              <a:t>• Figma to code translation, responsive fluid typography, dark mode theming.</a:t>
+            </a:r>
+          </a:p>
+          <a:p>
+            <a:pPr>
+              <a:spcAft>
+                <a:spcPts val="300"/>
+              </a:spcAft>
+              <a:defRPr sz="1050">
+                <a:solidFill>
+                  <a:srgbClr val="334155"/>
+                </a:solidFill>
+              </a:defRPr>
+            </a:pPr>
+            <a:r>
+              <a:t>• Why &amp; Where: Bridges design and engineering. Leads to Design Systems Engineer &amp; Frontend Architect roles (Rs 12–22 LPA).</a:t>
             </a:r>
           </a:p>
         </p:txBody>
@@ -9095,7 +8982,7 @@
         <p:spPr>
           <a:xfrm>
             <a:off x="731520" y="320040"/>
-            <a:ext cx="2926080" cy="292608"/>
+            <a:ext cx="3291840" cy="292608"/>
           </a:xfrm>
           <a:prstGeom prst="roundRect">
             <a:avLst/>
@@ -9135,7 +9022,7 @@
               </a:defRPr>
             </a:pPr>
             <a:r>
-              <a:t>PROPRIETARY INTELLECTUAL PROPERTY</a:t>
+              <a:t>DEEP COMPUTER SCIENCE &amp; SYSTEMS</a:t>
             </a:r>
           </a:p>
         </p:txBody>
@@ -9198,14 +9085,14 @@
           <a:lstStyle/>
           <a:p>
             <a:pPr>
-              <a:defRPr sz="2200" b="1">
+              <a:defRPr sz="2100" b="1">
                 <a:solidFill>
                   <a:srgbClr val="0F172A"/>
                 </a:solidFill>
               </a:defRPr>
             </a:pPr>
             <a:r>
-              <a:t>Seeing is Believing: 17 Interactive Visual Simulators</a:t>
+              <a:t>Algorithms, Systems &amp; Data Internals (Courses 07, 08, 09, 10, 11)</a:t>
             </a:r>
           </a:p>
         </p:txBody>
@@ -9219,7 +9106,7 @@
         <p:spPr>
           <a:xfrm>
             <a:off x="731520" y="1170432"/>
-            <a:ext cx="10698480" cy="365760"/>
+            <a:ext cx="10698480" cy="347472"/>
           </a:xfrm>
           <a:prstGeom prst="rect">
             <a:avLst/>
@@ -9240,7 +9127,7 @@
               </a:defRPr>
             </a:pPr>
             <a:r>
-              <a:t>Turning Abstract, Intimidating Engineering and Financial Concepts into Concrete Visual Realities</a:t>
+              <a:t>Deep Systems Engineering That Generative AI Cannot Automate (100% Complete)</a:t>
             </a:r>
           </a:p>
         </p:txBody>
@@ -9254,7 +9141,7 @@
         <p:spPr>
           <a:xfrm>
             <a:off x="731520" y="1645920"/>
-            <a:ext cx="3291840" cy="4480560"/>
+            <a:ext cx="3291840" cy="2194560"/>
           </a:xfrm>
           <a:prstGeom prst="roundRect">
             <a:avLst/>
@@ -9298,8 +9185,8 @@
         </p:nvSpPr>
         <p:spPr>
           <a:xfrm>
-            <a:off x="960120" y="1828800"/>
-            <a:ext cx="2834640" cy="4114800"/>
+            <a:off x="914400" y="1810512"/>
+            <a:ext cx="2926080" cy="1865376"/>
           </a:xfrm>
           <a:prstGeom prst="rect">
             <a:avLst/>
@@ -9316,14 +9203,14 @@
               <a:spcAft>
                 <a:spcPts val="200"/>
               </a:spcAft>
-              <a:defRPr sz="1000" b="1">
-                <a:solidFill>
-                  <a:srgbClr val="10B981"/>
-                </a:solidFill>
-              </a:defRPr>
-            </a:pPr>
-            <a:r>
-              <a:t>FOR BUSINESS STUDENTS</a:t>
+              <a:defRPr sz="950" b="1">
+                <a:solidFill>
+                  <a:srgbClr val="7E22CE"/>
+                </a:solidFill>
+              </a:defRPr>
+            </a:pPr>
+            <a:r>
+              <a:t>100% BUILT (30 DAYS)</a:t>
             </a:r>
           </a:p>
           <a:p>
@@ -9331,29 +9218,14 @@
               <a:spcAft>
                 <a:spcPts val="200"/>
               </a:spcAft>
-              <a:defRPr sz="1500" b="1">
+              <a:defRPr sz="1400" b="1">
                 <a:solidFill>
                   <a:srgbClr val="0F172A"/>
                 </a:solidFill>
               </a:defRPr>
             </a:pPr>
             <a:r>
-              <a:t>Accounting &amp; Finance</a:t>
-            </a:r>
-          </a:p>
-          <a:p>
-            <a:pPr>
-              <a:spcAft>
-                <a:spcPts val="600"/>
-              </a:spcAft>
-              <a:defRPr sz="1100">
-                <a:solidFill>
-                  <a:srgbClr val="10B981"/>
-                </a:solidFill>
-              </a:defRPr>
-            </a:pPr>
-            <a:r>
-              <a:t>Financial State Machines</a:t>
+              <a:t>Course 07: Data Structures (DSA)</a:t>
             </a:r>
           </a:p>
           <a:p>
@@ -9361,74 +9233,59 @@
               <a:spcAft>
                 <a:spcPts val="400"/>
               </a:spcAft>
-              <a:defRPr sz="1150">
+              <a:defRPr sz="1050">
+                <a:solidFill>
+                  <a:srgbClr val="7E22CE"/>
+                </a:solidFill>
+              </a:defRPr>
+            </a:pPr>
+            <a:r>
+              <a:t>Mastering Technical Interviews</a:t>
+            </a:r>
+          </a:p>
+          <a:p>
+            <a:pPr>
+              <a:spcAft>
+                <a:spcPts val="300"/>
+              </a:spcAft>
+              <a:defRPr sz="1050">
                 <a:solidFill>
                   <a:srgbClr val="334155"/>
                 </a:solidFill>
               </a:defRPr>
             </a:pPr>
             <a:r>
-              <a:t>• LedgerSheet Engine: Interactive T-accounts where debits and credits must balance.</a:t>
-            </a:r>
-          </a:p>
-          <a:p>
-            <a:pPr>
-              <a:spcAft>
-                <a:spcPts val="400"/>
-              </a:spcAft>
-              <a:defRPr sz="1150">
+              <a:t>• Red-Black trees, graph BFS/DFS, dynamic programming grids.</a:t>
+            </a:r>
+          </a:p>
+          <a:p>
+            <a:pPr>
+              <a:spcAft>
+                <a:spcPts val="300"/>
+              </a:spcAft>
+              <a:defRPr sz="1050">
                 <a:solidFill>
                   <a:srgbClr val="334155"/>
                 </a:solidFill>
               </a:defRPr>
             </a:pPr>
             <a:r>
-              <a:t>• Unbalanced entries flash red until the student balances the ledger.</a:t>
-            </a:r>
-          </a:p>
-          <a:p>
-            <a:pPr>
-              <a:spcAft>
-                <a:spcPts val="400"/>
-              </a:spcAft>
-              <a:defRPr sz="1150">
+              <a:t>• Amortized complexity, memory bounds, technical interview drill.</a:t>
+            </a:r>
+          </a:p>
+          <a:p>
+            <a:pPr>
+              <a:spcAft>
+                <a:spcPts val="300"/>
+              </a:spcAft>
+              <a:defRPr sz="1050">
                 <a:solidFill>
                   <a:srgbClr val="334155"/>
                 </a:solidFill>
               </a:defRPr>
             </a:pPr>
             <a:r>
-              <a:t>• Funnel Engine: B2B sales pipelines showing drop-offs, CAC:LTV, and conversion rates.</a:t>
-            </a:r>
-          </a:p>
-          <a:p>
-            <a:pPr>
-              <a:spcAft>
-                <a:spcPts val="400"/>
-              </a:spcAft>
-              <a:defRPr sz="1150">
-                <a:solidFill>
-                  <a:srgbClr val="334155"/>
-                </a:solidFill>
-              </a:defRPr>
-            </a:pPr>
-            <a:r>
-              <a:t>• Bars &amp; Sensitivity: Dynamic charts for DCF valuation and scenario modeling.</a:t>
-            </a:r>
-          </a:p>
-          <a:p>
-            <a:pPr>
-              <a:spcAft>
-                <a:spcPts val="400"/>
-              </a:spcAft>
-              <a:defRPr sz="1150">
-                <a:solidFill>
-                  <a:srgbClr val="334155"/>
-                </a:solidFill>
-              </a:defRPr>
-            </a:pPr>
-            <a:r>
-              <a:t>• Impact: Makes complex finance feel tangible and crystal clear.</a:t>
+              <a:t>• Career: Algorithm Engineer (Rs 15–30 LPA).</a:t>
             </a:r>
           </a:p>
         </p:txBody>
@@ -9442,7 +9299,7 @@
         <p:spPr>
           <a:xfrm>
             <a:off x="4389120" y="1645920"/>
-            <a:ext cx="3383280" cy="4480560"/>
+            <a:ext cx="3383280" cy="2194560"/>
           </a:xfrm>
           <a:prstGeom prst="roundRect">
             <a:avLst/>
@@ -9486,8 +9343,8 @@
         </p:nvSpPr>
         <p:spPr>
           <a:xfrm>
-            <a:off x="4617720" y="1828800"/>
-            <a:ext cx="2926080" cy="4114800"/>
+            <a:off x="4572000" y="1810512"/>
+            <a:ext cx="3017520" cy="1865376"/>
           </a:xfrm>
           <a:prstGeom prst="rect">
             <a:avLst/>
@@ -9504,14 +9361,14 @@
               <a:spcAft>
                 <a:spcPts val="200"/>
               </a:spcAft>
-              <a:defRPr sz="1000" b="1">
+              <a:defRPr sz="950" b="1">
                 <a:solidFill>
                   <a:srgbClr val="2563EB"/>
                 </a:solidFill>
               </a:defRPr>
             </a:pPr>
             <a:r>
-              <a:t>FOR DEVELOPER STUDENTS</a:t>
+              <a:t>100% BUILT (30 DAYS)</a:t>
             </a:r>
           </a:p>
           <a:p>
@@ -9519,104 +9376,74 @@
               <a:spcAft>
                 <a:spcPts val="200"/>
               </a:spcAft>
-              <a:defRPr sz="1500" b="1">
+              <a:defRPr sz="1400" b="1">
                 <a:solidFill>
                   <a:srgbClr val="0F172A"/>
                 </a:solidFill>
               </a:defRPr>
             </a:pPr>
             <a:r>
-              <a:t>Software &amp; Cloud</a:t>
-            </a:r>
-          </a:p>
-          <a:p>
-            <a:pPr>
-              <a:spcAft>
-                <a:spcPts val="600"/>
-              </a:spcAft>
-              <a:defRPr sz="1100">
+              <a:t>Course 08: Mobile Development</a:t>
+            </a:r>
+          </a:p>
+          <a:p>
+            <a:pPr>
+              <a:spcAft>
+                <a:spcPts val="400"/>
+              </a:spcAft>
+              <a:defRPr sz="1050">
                 <a:solidFill>
                   <a:srgbClr val="2563EB"/>
                 </a:solidFill>
               </a:defRPr>
             </a:pPr>
             <a:r>
-              <a:t>Distributed Systems Topologies</a:t>
-            </a:r>
-          </a:p>
-          <a:p>
-            <a:pPr>
-              <a:spcAft>
-                <a:spcPts val="400"/>
-              </a:spcAft>
-              <a:defRPr sz="1150">
+              <a:t>iOS &amp; Android Cross-Platform</a:t>
+            </a:r>
+          </a:p>
+          <a:p>
+            <a:pPr>
+              <a:spcAft>
+                <a:spcPts val="300"/>
+              </a:spcAft>
+              <a:defRPr sz="1050">
                 <a:solidFill>
                   <a:srgbClr val="334155"/>
                 </a:solidFill>
               </a:defRPr>
             </a:pPr>
             <a:r>
-              <a:t>• TreeGraph Engine: Shows how database indexes (B+ Trees) split, merge, and re-balance.</a:t>
-            </a:r>
-          </a:p>
-          <a:p>
-            <a:pPr>
-              <a:spcAft>
-                <a:spcPts val="400"/>
-              </a:spcAft>
-              <a:defRPr sz="1150">
+              <a:t>• React Native cross-platform architecture, native UI threads.</a:t>
+            </a:r>
+          </a:p>
+          <a:p>
+            <a:pPr>
+              <a:spcAft>
+                <a:spcPts val="300"/>
+              </a:spcAft>
+              <a:defRPr sz="1050">
                 <a:solidFill>
                   <a:srgbClr val="334155"/>
                 </a:solidFill>
               </a:defRPr>
             </a:pPr>
             <a:r>
-              <a:t>• Flow Engine: Visualizes microservices, API gateways, and distributed message queues.</a:t>
-            </a:r>
-          </a:p>
-          <a:p>
-            <a:pPr>
-              <a:spcAft>
-                <a:spcPts val="400"/>
-              </a:spcAft>
-              <a:defRPr sz="1150">
+              <a:t>• FlatList memory optimization, gestures, offline SQLite sync.</a:t>
+            </a:r>
+          </a:p>
+          <a:p>
+            <a:pPr>
+              <a:spcAft>
+                <a:spcPts val="300"/>
+              </a:spcAft>
+              <a:defRPr sz="1050">
                 <a:solidFill>
                   <a:srgbClr val="334155"/>
                 </a:solidFill>
               </a:defRPr>
             </a:pPr>
             <a:r>
-              <a:t>• ComponentTree Engine: Shows how modern web apps stream HTML from servers.</a:t>
-            </a:r>
-          </a:p>
-          <a:p>
-            <a:pPr>
-              <a:spcAft>
-                <a:spcPts val="400"/>
-              </a:spcAft>
-              <a:defRPr sz="1150">
-                <a:solidFill>
-                  <a:srgbClr val="334155"/>
-                </a:solidFill>
-              </a:defRPr>
-            </a:pPr>
-            <a:r>
-              <a:t>• StackQueue Engine: Animates call stacks and memory allocations.</a:t>
-            </a:r>
-          </a:p>
-          <a:p>
-            <a:pPr>
-              <a:spcAft>
-                <a:spcPts val="400"/>
-              </a:spcAft>
-              <a:defRPr sz="1150">
-                <a:solidFill>
-                  <a:srgbClr val="334155"/>
-                </a:solidFill>
-              </a:defRPr>
-            </a:pPr>
-            <a:r>
-              <a:t>• Impact: Turns invisible code into visible architecture.</a:t>
+              <a:t>• Career: Mobile App Engineer (Rs 12–24 LPA).</a:t>
             </a:r>
           </a:p>
         </p:txBody>
@@ -9630,7 +9457,7 @@
         <p:spPr>
           <a:xfrm>
             <a:off x="8138160" y="1645920"/>
-            <a:ext cx="3291840" cy="4480560"/>
+            <a:ext cx="3291840" cy="2194560"/>
           </a:xfrm>
           <a:prstGeom prst="roundRect">
             <a:avLst/>
@@ -9674,8 +9501,8 @@
         </p:nvSpPr>
         <p:spPr>
           <a:xfrm>
-            <a:off x="8366760" y="1828800"/>
-            <a:ext cx="2834640" cy="4114800"/>
+            <a:off x="8321040" y="1810512"/>
+            <a:ext cx="2926080" cy="1865376"/>
           </a:xfrm>
           <a:prstGeom prst="rect">
             <a:avLst/>
@@ -9692,14 +9519,14 @@
               <a:spcAft>
                 <a:spcPts val="200"/>
               </a:spcAft>
-              <a:defRPr sz="1000" b="1">
-                <a:solidFill>
-                  <a:srgbClr val="7E22CE"/>
-                </a:solidFill>
-              </a:defRPr>
-            </a:pPr>
-            <a:r>
-              <a:t>FOR IOT &amp; HARDWARE STUDENTS</a:t>
+              <a:defRPr sz="950" b="1">
+                <a:solidFill>
+                  <a:srgbClr val="E11D48"/>
+                </a:solidFill>
+              </a:defRPr>
+            </a:pPr>
+            <a:r>
+              <a:t>100% BUILT (30 DAYS)</a:t>
             </a:r>
           </a:p>
           <a:p>
@@ -9707,29 +9534,14 @@
               <a:spcAft>
                 <a:spcPts val="200"/>
               </a:spcAft>
-              <a:defRPr sz="1500" b="1">
+              <a:defRPr sz="1400" b="1">
                 <a:solidFill>
                   <a:srgbClr val="0F172A"/>
                 </a:solidFill>
               </a:defRPr>
             </a:pPr>
             <a:r>
-              <a:t>Hardware &amp; Silicon</a:t>
-            </a:r>
-          </a:p>
-          <a:p>
-            <a:pPr>
-              <a:spcAft>
-                <a:spcPts val="600"/>
-              </a:spcAft>
-              <a:defRPr sz="1100">
-                <a:solidFill>
-                  <a:srgbClr val="7E22CE"/>
-                </a:solidFill>
-              </a:defRPr>
-            </a:pPr>
-            <a:r>
-              <a:t>Silicon Microcontroller Registers</a:t>
+              <a:t>Course 09: Cybersecurity Systems</a:t>
             </a:r>
           </a:p>
           <a:p>
@@ -9737,14 +9549,157 @@
               <a:spcAft>
                 <a:spcPts val="400"/>
               </a:spcAft>
-              <a:defRPr sz="1150">
+              <a:defRPr sz="1050">
+                <a:solidFill>
+                  <a:srgbClr val="E11D48"/>
+                </a:solidFill>
+              </a:defRPr>
+            </a:pPr>
+            <a:r>
+              <a:t>Defending Enterprise Systems</a:t>
+            </a:r>
+          </a:p>
+          <a:p>
+            <a:pPr>
+              <a:spcAft>
+                <a:spcPts val="300"/>
+              </a:spcAft>
+              <a:defRPr sz="1050">
                 <a:solidFill>
                   <a:srgbClr val="334155"/>
                 </a:solidFill>
               </a:defRPr>
             </a:pPr>
             <a:r>
-              <a:t>• RegisterBits Engine: Students flip bits 0-7 live and watch microcontroller memory change.</a:t>
+              <a:t>• Zero-Trust architecture, AES-GCM encryption, memory safety.</a:t>
+            </a:r>
+          </a:p>
+          <a:p>
+            <a:pPr>
+              <a:spcAft>
+                <a:spcPts val="300"/>
+              </a:spcAft>
+              <a:defRPr sz="1050">
+                <a:solidFill>
+                  <a:srgbClr val="334155"/>
+                </a:solidFill>
+              </a:defRPr>
+            </a:pPr>
+            <a:r>
+              <a:t>• Buffer overflow defenses, OWASP Top 10, SOC 2 compliance.</a:t>
+            </a:r>
+          </a:p>
+          <a:p>
+            <a:pPr>
+              <a:spcAft>
+                <a:spcPts val="300"/>
+              </a:spcAft>
+              <a:defRPr sz="1050">
+                <a:solidFill>
+                  <a:srgbClr val="334155"/>
+                </a:solidFill>
+              </a:defRPr>
+            </a:pPr>
+            <a:r>
+              <a:t>• Career: Security Engineer (Rs 15–32 LPA).</a:t>
+            </a:r>
+          </a:p>
+        </p:txBody>
+      </p:sp>
+      <p:sp>
+        <p:nvSpPr>
+          <p:cNvPr id="14" name="Rounded Rectangle 13"/>
+          <p:cNvSpPr/>
+          <p:nvPr/>
+        </p:nvSpPr>
+        <p:spPr>
+          <a:xfrm>
+            <a:off x="731520" y="3977639"/>
+            <a:ext cx="5120640" cy="2331720"/>
+          </a:xfrm>
+          <a:prstGeom prst="roundRect">
+            <a:avLst/>
+          </a:prstGeom>
+          <a:solidFill>
+            <a:srgbClr val="FFFFFF"/>
+          </a:solidFill>
+          <a:ln w="15240">
+            <a:solidFill>
+              <a:srgbClr val="E2E8F0"/>
+            </a:solidFill>
+          </a:ln>
+        </p:spPr>
+        <p:style>
+          <a:lnRef idx="1">
+            <a:schemeClr val="accent1"/>
+          </a:lnRef>
+          <a:fillRef idx="3">
+            <a:schemeClr val="accent1"/>
+          </a:fillRef>
+          <a:effectRef idx="2">
+            <a:schemeClr val="accent1"/>
+          </a:effectRef>
+          <a:fontRef idx="minor">
+            <a:schemeClr val="lt1"/>
+          </a:fontRef>
+        </p:style>
+        <p:txBody>
+          <a:bodyPr rtlCol="0" anchor="ctr"/>
+          <a:lstStyle/>
+          <a:p>
+            <a:pPr algn="ctr"/>
+          </a:p>
+        </p:txBody>
+      </p:sp>
+      <p:sp>
+        <p:nvSpPr>
+          <p:cNvPr id="15" name="TextBox 14"/>
+          <p:cNvSpPr txBox="1"/>
+          <p:nvPr/>
+        </p:nvSpPr>
+        <p:spPr>
+          <a:xfrm>
+            <a:off x="914400" y="4142231"/>
+            <a:ext cx="4754880" cy="2002536"/>
+          </a:xfrm>
+          <a:prstGeom prst="rect">
+            <a:avLst/>
+          </a:prstGeom>
+          <a:noFill/>
+        </p:spPr>
+        <p:txBody>
+          <a:bodyPr wrap="square">
+            <a:spAutoFit/>
+          </a:bodyPr>
+          <a:lstStyle/>
+          <a:p>
+            <a:pPr>
+              <a:spcAft>
+                <a:spcPts val="200"/>
+              </a:spcAft>
+              <a:defRPr sz="950" b="1">
+                <a:solidFill>
+                  <a:srgbClr val="10B981"/>
+                </a:solidFill>
+              </a:defRPr>
+            </a:pPr>
+            <a:r>
+              <a:t>100% BUILT (30 DAYS)</a:t>
+            </a:r>
+          </a:p>
+          <a:p>
+            <a:pPr>
+              <a:spcAft>
+                <a:spcPts val="200"/>
+              </a:spcAft>
+              <a:defRPr sz="1400" b="1">
+                <a:solidFill>
+                  <a:srgbClr val="0F172A"/>
+                </a:solidFill>
+              </a:defRPr>
+            </a:pPr>
+            <a:r>
+              <a:t>Course 10: Database Systems &amp; SQL Performance</a:t>
             </a:r>
           </a:p>
           <a:p>
@@ -9752,14 +9707,157 @@
               <a:spcAft>
                 <a:spcPts val="400"/>
               </a:spcAft>
-              <a:defRPr sz="1150">
+              <a:defRPr sz="1050">
+                <a:solidFill>
+                  <a:srgbClr val="10B981"/>
+                </a:solidFill>
+              </a:defRPr>
+            </a:pPr>
+            <a:r>
+              <a:t>High-Throughput Storage Engines</a:t>
+            </a:r>
+          </a:p>
+          <a:p>
+            <a:pPr>
+              <a:spcAft>
+                <a:spcPts val="300"/>
+              </a:spcAft>
+              <a:defRPr sz="1050">
                 <a:solidFill>
                   <a:srgbClr val="334155"/>
                 </a:solidFill>
               </a:defRPr>
             </a:pPr>
             <a:r>
-              <a:t>• Hex &amp; Binary Formatting: Eliminates fear of low-level embedded registers.</a:t>
+              <a:t>• Database engine internals: B+ Tree index structures, Write-Ahead Logs (WAL), MVCC.</a:t>
+            </a:r>
+          </a:p>
+          <a:p>
+            <a:pPr>
+              <a:spcAft>
+                <a:spcPts val="300"/>
+              </a:spcAft>
+              <a:defRPr sz="1050">
+                <a:solidFill>
+                  <a:srgbClr val="334155"/>
+                </a:solidFill>
+              </a:defRPr>
+            </a:pPr>
+            <a:r>
+              <a:t>• SQL execution plans, deadlocks, connection pooling, and multi-version concurrency.</a:t>
+            </a:r>
+          </a:p>
+          <a:p>
+            <a:pPr>
+              <a:spcAft>
+                <a:spcPts val="300"/>
+              </a:spcAft>
+              <a:defRPr sz="1050">
+                <a:solidFill>
+                  <a:srgbClr val="334155"/>
+                </a:solidFill>
+              </a:defRPr>
+            </a:pPr>
+            <a:r>
+              <a:t>• Career: Database Administrator (DBA), Data Platform Engineer (Rs 14–25 LPA).</a:t>
+            </a:r>
+          </a:p>
+        </p:txBody>
+      </p:sp>
+      <p:sp>
+        <p:nvSpPr>
+          <p:cNvPr id="16" name="Rounded Rectangle 15"/>
+          <p:cNvSpPr/>
+          <p:nvPr/>
+        </p:nvSpPr>
+        <p:spPr>
+          <a:xfrm>
+            <a:off x="6217920" y="3977639"/>
+            <a:ext cx="5212080" cy="2331720"/>
+          </a:xfrm>
+          <a:prstGeom prst="roundRect">
+            <a:avLst/>
+          </a:prstGeom>
+          <a:solidFill>
+            <a:srgbClr val="FFFFFF"/>
+          </a:solidFill>
+          <a:ln w="15240">
+            <a:solidFill>
+              <a:srgbClr val="E2E8F0"/>
+            </a:solidFill>
+          </a:ln>
+        </p:spPr>
+        <p:style>
+          <a:lnRef idx="1">
+            <a:schemeClr val="accent1"/>
+          </a:lnRef>
+          <a:fillRef idx="3">
+            <a:schemeClr val="accent1"/>
+          </a:fillRef>
+          <a:effectRef idx="2">
+            <a:schemeClr val="accent1"/>
+          </a:effectRef>
+          <a:fontRef idx="minor">
+            <a:schemeClr val="lt1"/>
+          </a:fontRef>
+        </p:style>
+        <p:txBody>
+          <a:bodyPr rtlCol="0" anchor="ctr"/>
+          <a:lstStyle/>
+          <a:p>
+            <a:pPr algn="ctr"/>
+          </a:p>
+        </p:txBody>
+      </p:sp>
+      <p:sp>
+        <p:nvSpPr>
+          <p:cNvPr id="17" name="TextBox 16"/>
+          <p:cNvSpPr txBox="1"/>
+          <p:nvPr/>
+        </p:nvSpPr>
+        <p:spPr>
+          <a:xfrm>
+            <a:off x="6400800" y="4142231"/>
+            <a:ext cx="4846320" cy="2002536"/>
+          </a:xfrm>
+          <a:prstGeom prst="rect">
+            <a:avLst/>
+          </a:prstGeom>
+          <a:noFill/>
+        </p:spPr>
+        <p:txBody>
+          <a:bodyPr wrap="square">
+            <a:spAutoFit/>
+          </a:bodyPr>
+          <a:lstStyle/>
+          <a:p>
+            <a:pPr>
+              <a:spcAft>
+                <a:spcPts val="200"/>
+              </a:spcAft>
+              <a:defRPr sz="950" b="1">
+                <a:solidFill>
+                  <a:srgbClr val="2563EB"/>
+                </a:solidFill>
+              </a:defRPr>
+            </a:pPr>
+            <a:r>
+              <a:t>100% BUILT (30 DAYS)</a:t>
+            </a:r>
+          </a:p>
+          <a:p>
+            <a:pPr>
+              <a:spcAft>
+                <a:spcPts val="200"/>
+              </a:spcAft>
+              <a:defRPr sz="1400" b="1">
+                <a:solidFill>
+                  <a:srgbClr val="0F172A"/>
+                </a:solidFill>
+              </a:defRPr>
+            </a:pPr>
+            <a:r>
+              <a:t>Course 11: High-Scale Distributed Systems</a:t>
             </a:r>
           </a:p>
           <a:p>
@@ -9767,44 +9865,59 @@
               <a:spcAft>
                 <a:spcPts val="400"/>
               </a:spcAft>
-              <a:defRPr sz="1150">
+              <a:defRPr sz="1050">
+                <a:solidFill>
+                  <a:srgbClr val="2563EB"/>
+                </a:solidFill>
+              </a:defRPr>
+            </a:pPr>
+            <a:r>
+              <a:t>Global Fault-Tolerant Clusters</a:t>
+            </a:r>
+          </a:p>
+          <a:p>
+            <a:pPr>
+              <a:spcAft>
+                <a:spcPts val="300"/>
+              </a:spcAft>
+              <a:defRPr sz="1050">
                 <a:solidFill>
                   <a:srgbClr val="334155"/>
                 </a:solidFill>
               </a:defRPr>
             </a:pPr>
             <a:r>
-              <a:t>• Cryptographic Binding: All 990 visual engines are locked with SHA-256 code hashes.</a:t>
-            </a:r>
-          </a:p>
-          <a:p>
-            <a:pPr>
-              <a:spcAft>
-                <a:spcPts val="400"/>
-              </a:spcAft>
-              <a:defRPr sz="1150">
+              <a:t>• Raft consensus protocol, Two-Phase Commits (2PC), CAP theorem trade-offs.</a:t>
+            </a:r>
+          </a:p>
+          <a:p>
+            <a:pPr>
+              <a:spcAft>
+                <a:spcPts val="300"/>
+              </a:spcAft>
+              <a:defRPr sz="1050">
                 <a:solidFill>
                   <a:srgbClr val="334155"/>
                 </a:solidFill>
               </a:defRPr>
             </a:pPr>
             <a:r>
-              <a:t>• AST Tolerances: Evaluates actual logic rather than fragile string matches.</a:t>
-            </a:r>
-          </a:p>
-          <a:p>
-            <a:pPr>
-              <a:spcAft>
-                <a:spcPts val="400"/>
-              </a:spcAft>
-              <a:defRPr sz="1150">
+              <a:t>• Consistent hashing ring partitions, vector clocks, and distributed lock managers.</a:t>
+            </a:r>
+          </a:p>
+          <a:p>
+            <a:pPr>
+              <a:spcAft>
+                <a:spcPts val="300"/>
+              </a:spcAft>
+              <a:defRPr sz="1050">
                 <a:solidFill>
                   <a:srgbClr val="334155"/>
                 </a:solidFill>
               </a:defRPr>
             </a:pPr>
             <a:r>
-              <a:t>• Impact: Eliminates intimidation in semiconductor engineering.</a:t>
+              <a:t>• Career: Distributed Systems Architect, Principal Infrastructure Engineer (Rs 20–40 LPA).</a:t>
             </a:r>
           </a:p>
         </p:txBody>
@@ -9926,7 +10039,7 @@
         <p:spPr>
           <a:xfrm>
             <a:off x="731520" y="320040"/>
-            <a:ext cx="2926080" cy="292608"/>
+            <a:ext cx="3291840" cy="292608"/>
           </a:xfrm>
           <a:prstGeom prst="roundRect">
             <a:avLst/>
@@ -9966,7 +10079,7 @@
               </a:defRPr>
             </a:pPr>
             <a:r>
-              <a:t>HIGH-PLACEMENT ENGINE</a:t>
+              <a:t>HIGH-MARGIN DEEP SPECIALIZATIONS</a:t>
             </a:r>
           </a:p>
         </p:txBody>
@@ -10029,14 +10142,14 @@
           <a:lstStyle/>
           <a:p>
             <a:pPr>
-              <a:defRPr sz="2200" b="1">
+              <a:defRPr sz="2100" b="1">
                 <a:solidFill>
                   <a:srgbClr val="0F172A"/>
                 </a:solidFill>
               </a:defRPr>
             </a:pPr>
             <a:r>
-              <a:t>Vertical 1: Software &amp; Cloud Systems (100% Built &amp; Live)</a:t>
+              <a:t>Cutting-Edge AI, 3D Graphics &amp; Quant Systems (Courses 12, 15, 16, 21, 37)</a:t>
             </a:r>
           </a:p>
         </p:txBody>
@@ -10050,7 +10163,7 @@
         <p:spPr>
           <a:xfrm>
             <a:off x="731520" y="1170432"/>
-            <a:ext cx="10698480" cy="365760"/>
+            <a:ext cx="10698480" cy="347472"/>
           </a:xfrm>
           <a:prstGeom prst="rect">
             <a:avLst/>
@@ -10071,7 +10184,7 @@
               </a:defRPr>
             </a:pPr>
             <a:r>
-              <a:t>The Primary Driver That Lands University Graduates High-Paying Software Engineering Jobs</a:t>
+              <a:t>Elite Career Specializations with Global $200k+ Placement Benchmarks (100% Built &amp; Live)</a:t>
             </a:r>
           </a:p>
         </p:txBody>
@@ -10085,7 +10198,7 @@
         <p:spPr>
           <a:xfrm>
             <a:off x="731520" y="1645920"/>
-            <a:ext cx="5120640" cy="4480560"/>
+            <a:ext cx="5120640" cy="2240280"/>
           </a:xfrm>
           <a:prstGeom prst="roundRect">
             <a:avLst/>
@@ -10095,7 +10208,7 @@
           </a:solidFill>
           <a:ln w="15240">
             <a:solidFill>
-              <a:srgbClr val="BBF7D0"/>
+              <a:srgbClr val="FDE68A"/>
             </a:solidFill>
           </a:ln>
         </p:spPr>
@@ -10129,8 +10242,8 @@
         </p:nvSpPr>
         <p:spPr>
           <a:xfrm>
-            <a:off x="960120" y="1828800"/>
-            <a:ext cx="4663440" cy="4114800"/>
+            <a:off x="914400" y="1810512"/>
+            <a:ext cx="4754880" cy="1911096"/>
           </a:xfrm>
           <a:prstGeom prst="rect">
             <a:avLst/>
@@ -10147,14 +10260,14 @@
               <a:spcAft>
                 <a:spcPts val="200"/>
               </a:spcAft>
-              <a:defRPr sz="1000" b="1">
-                <a:solidFill>
-                  <a:srgbClr val="10B981"/>
-                </a:solidFill>
-              </a:defRPr>
-            </a:pPr>
-            <a:r>
-              <a:t>100% READY TODAY</a:t>
+              <a:defRPr sz="950" b="1">
+                <a:solidFill>
+                  <a:srgbClr val="D97706"/>
+                </a:solidFill>
+              </a:defRPr>
+            </a:pPr>
+            <a:r>
+              <a:t>👑 THE CROWN JEWEL (30/30 DAYS LIVE)</a:t>
             </a:r>
           </a:p>
           <a:p>
@@ -10162,29 +10275,14 @@
               <a:spcAft>
                 <a:spcPts val="200"/>
               </a:spcAft>
-              <a:defRPr sz="1500" b="1">
+              <a:defRPr sz="1400" b="1">
                 <a:solidFill>
                   <a:srgbClr val="0F172A"/>
                 </a:solidFill>
               </a:defRPr>
             </a:pPr>
             <a:r>
-              <a:t>6 Complete Courses (180 Days Live)</a:t>
-            </a:r>
-          </a:p>
-          <a:p>
-            <a:pPr>
-              <a:spcAft>
-                <a:spcPts val="600"/>
-              </a:spcAft>
-              <a:defRPr sz="1100">
-                <a:solidFill>
-                  <a:srgbClr val="10B981"/>
-                </a:solidFill>
-              </a:defRPr>
-            </a:pPr>
-            <a:r>
-              <a:t>180 Days of Verified Lessons Live</a:t>
+              <a:t>Course 21: Quant Trading Systems</a:t>
             </a:r>
           </a:p>
           <a:p>
@@ -10192,89 +10290,74 @@
               <a:spcAft>
                 <a:spcPts val="400"/>
               </a:spcAft>
-              <a:defRPr sz="1150">
+              <a:defRPr sz="1050">
+                <a:solidFill>
+                  <a:srgbClr val="D97706"/>
+                </a:solidFill>
+              </a:defRPr>
+            </a:pPr>
+            <a:r>
+              <a:t>World's First In-Browser HFT Curriculum</a:t>
+            </a:r>
+          </a:p>
+          <a:p>
+            <a:pPr>
+              <a:spcAft>
+                <a:spcPts val="300"/>
+              </a:spcAft>
+              <a:defRPr sz="1050">
                 <a:solidFill>
                   <a:srgbClr val="334155"/>
                 </a:solidFill>
               </a:defRPr>
             </a:pPr>
             <a:r>
-              <a:t>• 1. Python Backend Architecture: Async APIs, FastAPI, database connection pools, memory profiling.</a:t>
-            </a:r>
-          </a:p>
-          <a:p>
-            <a:pPr>
-              <a:spcAft>
-                <a:spcPts val="400"/>
-              </a:spcAft>
-              <a:defRPr sz="1150">
+              <a:t>• High-Frequency Trading in C++: 41.8ns limit order book (LOB) matching engine.</a:t>
+            </a:r>
+          </a:p>
+          <a:p>
+            <a:pPr>
+              <a:spcAft>
+                <a:spcPts val="300"/>
+              </a:spcAft>
+              <a:defRPr sz="1050">
                 <a:solidFill>
                   <a:srgbClr val="334155"/>
                 </a:solidFill>
               </a:defRPr>
             </a:pPr>
             <a:r>
-              <a:t>• 2. Modern JavaScript Mastery: Event loops, microtasks, V8 hidden classes, closures.</a:t>
-            </a:r>
-          </a:p>
-          <a:p>
-            <a:pPr>
-              <a:spcAft>
-                <a:spcPts val="400"/>
-              </a:spcAft>
-              <a:defRPr sz="1150">
+              <a:t>• Kernel bypass, lock-free SPSC circular ring buffers with 64-byte cache alignment.</a:t>
+            </a:r>
+          </a:p>
+          <a:p>
+            <a:pPr>
+              <a:spcAft>
+                <a:spcPts val="300"/>
+              </a:spcAft>
+              <a:defRPr sz="1050">
                 <a:solidFill>
                   <a:srgbClr val="334155"/>
                 </a:solidFill>
               </a:defRPr>
             </a:pPr>
             <a:r>
-              <a:t>• 3. Fullstack Next.js: Server Components (RSC), Flight serialization, edge caching.</a:t>
-            </a:r>
-          </a:p>
-          <a:p>
-            <a:pPr>
-              <a:spcAft>
-                <a:spcPts val="400"/>
-              </a:spcAft>
-              <a:defRPr sz="1150">
+              <a:t>• SEC Rule 15c3-5 pre-trade risk kill switches &amp; Black-Scholes derivatives Greeks.</a:t>
+            </a:r>
+          </a:p>
+          <a:p>
+            <a:pPr>
+              <a:spcAft>
+                <a:spcPts val="300"/>
+              </a:spcAft>
+              <a:defRPr sz="1050">
                 <a:solidFill>
                   <a:srgbClr val="334155"/>
                 </a:solidFill>
               </a:defRPr>
             </a:pPr>
             <a:r>
-              <a:t>• 4. Database Engineering: SQL, B+ Tree indexing, Write-Ahead Logs (WAL), MVCC.</a:t>
-            </a:r>
-          </a:p>
-          <a:p>
-            <a:pPr>
-              <a:spcAft>
-                <a:spcPts val="400"/>
-              </a:spcAft>
-              <a:defRPr sz="1150">
-                <a:solidFill>
-                  <a:srgbClr val="334155"/>
-                </a:solidFill>
-              </a:defRPr>
-            </a:pPr>
-            <a:r>
-              <a:t>• 5. Distributed Systems: Raft consensus, two-phase commits, CAP theorem, vector clocks.</a:t>
-            </a:r>
-          </a:p>
-          <a:p>
-            <a:pPr>
-              <a:spcAft>
-                <a:spcPts val="400"/>
-              </a:spcAft>
-              <a:defRPr sz="1150">
-                <a:solidFill>
-                  <a:srgbClr val="334155"/>
-                </a:solidFill>
-              </a:defRPr>
-            </a:pPr>
-            <a:r>
-              <a:t>• 6. Cloud &amp; DevOps: Docker multi-stage builds, Kubernetes pod lifecycles, CI/CD.</a:t>
+              <a:t>• Career: Quantitative Developer, HFT Trader (Rs 40–80 LPA / $200k–$400k+).</a:t>
             </a:r>
           </a:p>
         </p:txBody>
@@ -10288,7 +10371,7 @@
         <p:spPr>
           <a:xfrm>
             <a:off x="6217920" y="1645920"/>
-            <a:ext cx="5212080" cy="4480560"/>
+            <a:ext cx="5212080" cy="2240280"/>
           </a:xfrm>
           <a:prstGeom prst="roundRect">
             <a:avLst/>
@@ -10332,8 +10415,8 @@
         </p:nvSpPr>
         <p:spPr>
           <a:xfrm>
-            <a:off x="6446520" y="1828800"/>
-            <a:ext cx="4754880" cy="4114800"/>
+            <a:off x="6400800" y="1810512"/>
+            <a:ext cx="4846320" cy="1911096"/>
           </a:xfrm>
           <a:prstGeom prst="rect">
             <a:avLst/>
@@ -10350,14 +10433,14 @@
               <a:spcAft>
                 <a:spcPts val="200"/>
               </a:spcAft>
-              <a:defRPr sz="1000" b="1">
-                <a:solidFill>
-                  <a:srgbClr val="D97706"/>
-                </a:solidFill>
-              </a:defRPr>
-            </a:pPr>
-            <a:r>
-              <a:t>CAREER &amp; REVENUE IMPACT</a:t>
+              <a:defRPr sz="950" b="1">
+                <a:solidFill>
+                  <a:srgbClr val="7E22CE"/>
+                </a:solidFill>
+              </a:defRPr>
+            </a:pPr>
+            <a:r>
+              <a:t>60 DAYS TOTAL (100% BUILT &amp; EXPANDING)</a:t>
             </a:r>
           </a:p>
           <a:p>
@@ -10365,29 +10448,14 @@
               <a:spcAft>
                 <a:spcPts val="200"/>
               </a:spcAft>
-              <a:defRPr sz="1500" b="1">
+              <a:defRPr sz="1400" b="1">
                 <a:solidFill>
                   <a:srgbClr val="0F172A"/>
                 </a:solidFill>
               </a:defRPr>
             </a:pPr>
             <a:r>
-              <a:t>Why Shareholders Care: Job Placement</a:t>
-            </a:r>
-          </a:p>
-          <a:p>
-            <a:pPr>
-              <a:spcAft>
-                <a:spcPts val="600"/>
-              </a:spcAft>
-              <a:defRPr sz="1100">
-                <a:solidFill>
-                  <a:srgbClr val="D97706"/>
-                </a:solidFill>
-              </a:defRPr>
-            </a:pPr>
-            <a:r>
-              <a:t>High Salary • High Demand • High Conversion</a:t>
+              <a:t>Course 12 &amp; 37: Applied AI &amp; NLP</a:t>
             </a:r>
           </a:p>
           <a:p>
@@ -10395,14 +10463,172 @@
               <a:spcAft>
                 <a:spcPts val="400"/>
               </a:spcAft>
-              <a:defRPr sz="1150">
+              <a:defRPr sz="1050">
+                <a:solidFill>
+                  <a:srgbClr val="7E22CE"/>
+                </a:solidFill>
+              </a:defRPr>
+            </a:pPr>
+            <a:r>
+              <a:t>From Neural Networks to Sovereign LLMs</a:t>
+            </a:r>
+          </a:p>
+          <a:p>
+            <a:pPr>
+              <a:spcAft>
+                <a:spcPts val="300"/>
+              </a:spcAft>
+              <a:defRPr sz="1050">
                 <a:solidFill>
                   <a:srgbClr val="334155"/>
                 </a:solidFill>
               </a:defRPr>
             </a:pPr>
             <a:r>
-              <a:t>• Massive Market Demand: 70% of high-paying campus placements are in software development.</a:t>
+              <a:t>• Course 12: Applied AI Foundations: Neural networks, backprop, vector embeddings, RAG.</a:t>
+            </a:r>
+          </a:p>
+          <a:p>
+            <a:pPr>
+              <a:spcAft>
+                <a:spcPts val="300"/>
+              </a:spcAft>
+              <a:defRPr sz="1050">
+                <a:solidFill>
+                  <a:srgbClr val="334155"/>
+                </a:solidFill>
+              </a:defRPr>
+            </a:pPr>
+            <a:r>
+              <a:t>• Course 37: NLP &amp; Transformers: Scaled dot-product self-attention, BPE, LoRA fine-tuning.</a:t>
+            </a:r>
+          </a:p>
+          <a:p>
+            <a:pPr>
+              <a:spcAft>
+                <a:spcPts val="300"/>
+              </a:spcAft>
+              <a:defRPr sz="1050">
+                <a:solidFill>
+                  <a:srgbClr val="334155"/>
+                </a:solidFill>
+              </a:defRPr>
+            </a:pPr>
+            <a:r>
+              <a:t>• Production Guardrails: Citation verification, hallucination filters, and latency bounds.</a:t>
+            </a:r>
+          </a:p>
+          <a:p>
+            <a:pPr>
+              <a:spcAft>
+                <a:spcPts val="300"/>
+              </a:spcAft>
+              <a:defRPr sz="1050">
+                <a:solidFill>
+                  <a:srgbClr val="334155"/>
+                </a:solidFill>
+              </a:defRPr>
+            </a:pPr>
+            <a:r>
+              <a:t>• Career: AI/ML Engineer, LLMOps Specialist (Rs 16–35 LPA / $140k–$210k).</a:t>
+            </a:r>
+          </a:p>
+        </p:txBody>
+      </p:sp>
+      <p:sp>
+        <p:nvSpPr>
+          <p:cNvPr id="12" name="Rounded Rectangle 11"/>
+          <p:cNvSpPr/>
+          <p:nvPr/>
+        </p:nvSpPr>
+        <p:spPr>
+          <a:xfrm>
+            <a:off x="731520" y="4069080"/>
+            <a:ext cx="5120640" cy="2240280"/>
+          </a:xfrm>
+          <a:prstGeom prst="roundRect">
+            <a:avLst/>
+          </a:prstGeom>
+          <a:solidFill>
+            <a:srgbClr val="FFFFFF"/>
+          </a:solidFill>
+          <a:ln w="15240">
+            <a:solidFill>
+              <a:srgbClr val="E2E8F0"/>
+            </a:solidFill>
+          </a:ln>
+        </p:spPr>
+        <p:style>
+          <a:lnRef idx="1">
+            <a:schemeClr val="accent1"/>
+          </a:lnRef>
+          <a:fillRef idx="3">
+            <a:schemeClr val="accent1"/>
+          </a:fillRef>
+          <a:effectRef idx="2">
+            <a:schemeClr val="accent1"/>
+          </a:effectRef>
+          <a:fontRef idx="minor">
+            <a:schemeClr val="lt1"/>
+          </a:fontRef>
+        </p:style>
+        <p:txBody>
+          <a:bodyPr rtlCol="0" anchor="ctr"/>
+          <a:lstStyle/>
+          <a:p>
+            <a:pPr algn="ctr"/>
+          </a:p>
+        </p:txBody>
+      </p:sp>
+      <p:sp>
+        <p:nvSpPr>
+          <p:cNvPr id="13" name="TextBox 12"/>
+          <p:cNvSpPr txBox="1"/>
+          <p:nvPr/>
+        </p:nvSpPr>
+        <p:spPr>
+          <a:xfrm>
+            <a:off x="914400" y="4233672"/>
+            <a:ext cx="4754880" cy="1911096"/>
+          </a:xfrm>
+          <a:prstGeom prst="rect">
+            <a:avLst/>
+          </a:prstGeom>
+          <a:noFill/>
+        </p:spPr>
+        <p:txBody>
+          <a:bodyPr wrap="square">
+            <a:spAutoFit/>
+          </a:bodyPr>
+          <a:lstStyle/>
+          <a:p>
+            <a:pPr>
+              <a:spcAft>
+                <a:spcPts val="200"/>
+              </a:spcAft>
+              <a:defRPr sz="950" b="1">
+                <a:solidFill>
+                  <a:srgbClr val="2563EB"/>
+                </a:solidFill>
+              </a:defRPr>
+            </a:pPr>
+            <a:r>
+              <a:t>100% BUILT (30 DAYS LIVE)</a:t>
+            </a:r>
+          </a:p>
+          <a:p>
+            <a:pPr>
+              <a:spcAft>
+                <a:spcPts val="200"/>
+              </a:spcAft>
+              <a:defRPr sz="1400" b="1">
+                <a:solidFill>
+                  <a:srgbClr val="0F172A"/>
+                </a:solidFill>
+              </a:defRPr>
+            </a:pPr>
+            <a:r>
+              <a:t>Course 15: 3D Graphics &amp; Avatars</a:t>
             </a:r>
           </a:p>
           <a:p>
@@ -10410,14 +10636,157 @@
               <a:spcAft>
                 <a:spcPts val="400"/>
               </a:spcAft>
-              <a:defRPr sz="1150">
+              <a:defRPr sz="1050">
+                <a:solidFill>
+                  <a:srgbClr val="2563EB"/>
+                </a:solidFill>
+              </a:defRPr>
+            </a:pPr>
+            <a:r>
+              <a:t>WebGL2 &amp; GPU Shader Graphics</a:t>
+            </a:r>
+          </a:p>
+          <a:p>
+            <a:pPr>
+              <a:spcAft>
+                <a:spcPts val="300"/>
+              </a:spcAft>
+              <a:defRPr sz="1050">
                 <a:solidFill>
                   <a:srgbClr val="334155"/>
                 </a:solidFill>
               </a:defRPr>
             </a:pPr>
             <a:r>
-              <a:t>• Target Job Titles: Full-Stack Engineer, Backend Platform Architect, Site Reliability Engineer (SRE).</a:t>
+              <a:t>• WebGL2 programmable GPU pipelines, Model-View-Projection (MVP) matrix transforms.</a:t>
+            </a:r>
+          </a:p>
+          <a:p>
+            <a:pPr>
+              <a:spcAft>
+                <a:spcPts val="300"/>
+              </a:spcAft>
+              <a:defRPr sz="1050">
+                <a:solidFill>
+                  <a:srgbClr val="334155"/>
+                </a:solidFill>
+              </a:defRPr>
+            </a:pPr>
+            <a:r>
+              <a:t>• Skeletal rigging, inverse kinematics (FABRIK), and quaternion SLERP animation.</a:t>
+            </a:r>
+          </a:p>
+          <a:p>
+            <a:pPr>
+              <a:spcAft>
+                <a:spcPts val="300"/>
+              </a:spcAft>
+              <a:defRPr sz="1050">
+                <a:solidFill>
+                  <a:srgbClr val="334155"/>
+                </a:solidFill>
+              </a:defRPr>
+            </a:pPr>
+            <a:r>
+              <a:t>• Powers PinIT's own 3D AI mentors! Career: 3D Graphics Engineer (Rs 15–30 LPA).</a:t>
+            </a:r>
+          </a:p>
+        </p:txBody>
+      </p:sp>
+      <p:sp>
+        <p:nvSpPr>
+          <p:cNvPr id="14" name="Rounded Rectangle 13"/>
+          <p:cNvSpPr/>
+          <p:nvPr/>
+        </p:nvSpPr>
+        <p:spPr>
+          <a:xfrm>
+            <a:off x="6217920" y="4069080"/>
+            <a:ext cx="5212080" cy="2240280"/>
+          </a:xfrm>
+          <a:prstGeom prst="roundRect">
+            <a:avLst/>
+          </a:prstGeom>
+          <a:solidFill>
+            <a:srgbClr val="FFFFFF"/>
+          </a:solidFill>
+          <a:ln w="15240">
+            <a:solidFill>
+              <a:srgbClr val="E2E8F0"/>
+            </a:solidFill>
+          </a:ln>
+        </p:spPr>
+        <p:style>
+          <a:lnRef idx="1">
+            <a:schemeClr val="accent1"/>
+          </a:lnRef>
+          <a:fillRef idx="3">
+            <a:schemeClr val="accent1"/>
+          </a:fillRef>
+          <a:effectRef idx="2">
+            <a:schemeClr val="accent1"/>
+          </a:effectRef>
+          <a:fontRef idx="minor">
+            <a:schemeClr val="lt1"/>
+          </a:fontRef>
+        </p:style>
+        <p:txBody>
+          <a:bodyPr rtlCol="0" anchor="ctr"/>
+          <a:lstStyle/>
+          <a:p>
+            <a:pPr algn="ctr"/>
+          </a:p>
+        </p:txBody>
+      </p:sp>
+      <p:sp>
+        <p:nvSpPr>
+          <p:cNvPr id="15" name="TextBox 14"/>
+          <p:cNvSpPr txBox="1"/>
+          <p:nvPr/>
+        </p:nvSpPr>
+        <p:spPr>
+          <a:xfrm>
+            <a:off x="6400800" y="4233672"/>
+            <a:ext cx="4846320" cy="1911096"/>
+          </a:xfrm>
+          <a:prstGeom prst="rect">
+            <a:avLst/>
+          </a:prstGeom>
+          <a:noFill/>
+        </p:spPr>
+        <p:txBody>
+          <a:bodyPr wrap="square">
+            <a:spAutoFit/>
+          </a:bodyPr>
+          <a:lstStyle/>
+          <a:p>
+            <a:pPr>
+              <a:spcAft>
+                <a:spcPts val="200"/>
+              </a:spcAft>
+              <a:defRPr sz="950" b="1">
+                <a:solidFill>
+                  <a:srgbClr val="10B981"/>
+                </a:solidFill>
+              </a:defRPr>
+            </a:pPr>
+            <a:r>
+              <a:t>100% BUILT (30 DAYS LIVE)</a:t>
+            </a:r>
+          </a:p>
+          <a:p>
+            <a:pPr>
+              <a:spcAft>
+                <a:spcPts val="200"/>
+              </a:spcAft>
+              <a:defRPr sz="1400" b="1">
+                <a:solidFill>
+                  <a:srgbClr val="0F172A"/>
+                </a:solidFill>
+              </a:defRPr>
+            </a:pPr>
+            <a:r>
+              <a:t>Course 16: Blockchain &amp; Web3</a:t>
             </a:r>
           </a:p>
           <a:p>
@@ -10425,59 +10794,59 @@
               <a:spcAft>
                 <a:spcPts val="400"/>
               </a:spcAft>
-              <a:defRPr sz="1150">
+              <a:defRPr sz="1050">
+                <a:solidFill>
+                  <a:srgbClr val="10B981"/>
+                </a:solidFill>
+              </a:defRPr>
+            </a:pPr>
+            <a:r>
+              <a:t>Cryptographic State Machines</a:t>
+            </a:r>
+          </a:p>
+          <a:p>
+            <a:pPr>
+              <a:spcAft>
+                <a:spcPts val="300"/>
+              </a:spcAft>
+              <a:defRPr sz="1050">
                 <a:solidFill>
                   <a:srgbClr val="334155"/>
                 </a:solidFill>
               </a:defRPr>
             </a:pPr>
             <a:r>
-              <a:t>• Starting Salary Benchmark: Rs 12 LPA to Rs 25 LPA ($120k–$180k globally).</a:t>
-            </a:r>
-          </a:p>
-          <a:p>
-            <a:pPr>
-              <a:spcAft>
-                <a:spcPts val="400"/>
-              </a:spcAft>
-              <a:defRPr sz="1150">
+              <a:t>• EVM internals, Solidity smart contracts, Merkle Patricia state roots.</a:t>
+            </a:r>
+          </a:p>
+          <a:p>
+            <a:pPr>
+              <a:spcAft>
+                <a:spcPts val="300"/>
+              </a:spcAft>
+              <a:defRPr sz="1050">
                 <a:solidFill>
                   <a:srgbClr val="334155"/>
                 </a:solidFill>
               </a:defRPr>
             </a:pPr>
             <a:r>
-              <a:t>• Authentic Proof-of-Work: Students graduate with authentic GitHub projects rather than copy-pasted homework.</a:t>
-            </a:r>
-          </a:p>
-          <a:p>
-            <a:pPr>
-              <a:spcAft>
-                <a:spcPts val="400"/>
-              </a:spcAft>
-              <a:defRPr sz="1150">
+              <a:t>• Reentrancy mutex guards, ERC-20 Conservation of Value, gas optimization.</a:t>
+            </a:r>
+          </a:p>
+          <a:p>
+            <a:pPr>
+              <a:spcAft>
+                <a:spcPts val="300"/>
+              </a:spcAft>
+              <a:defRPr sz="1050">
                 <a:solidFill>
                   <a:srgbClr val="334155"/>
                 </a:solidFill>
               </a:defRPr>
             </a:pPr>
             <a:r>
-              <a:t>• Recruiter Trust: Automated test logs prove the student can write clean, production code on Day 1.</a:t>
-            </a:r>
-          </a:p>
-          <a:p>
-            <a:pPr>
-              <a:spcAft>
-                <a:spcPts val="400"/>
-              </a:spcAft>
-              <a:defRPr sz="1150">
-                <a:solidFill>
-                  <a:srgbClr val="334155"/>
-                </a:solidFill>
-              </a:defRPr>
-            </a:pPr>
-            <a:r>
-              <a:t>• University Impact: Dramatically increases campus placement statistics and NAAC ratings.</a:t>
+              <a:t>• Career: Smart Contract Auditor, Web3 Protocol Engineer (Rs 18–35 LPA).</a:t>
             </a:r>
           </a:p>
         </p:txBody>
@@ -10599,7 +10968,7 @@
         <p:spPr>
           <a:xfrm>
             <a:off x="731520" y="320040"/>
-            <a:ext cx="2926080" cy="292608"/>
+            <a:ext cx="3291840" cy="292608"/>
           </a:xfrm>
           <a:prstGeom prst="roundRect">
             <a:avLst/>
@@ -10639,7 +11008,7 @@
               </a:defRPr>
             </a:pPr>
             <a:r>
-              <a:t>PREMIUM DIFFERENTIATOR</a:t>
+              <a:t>SEMICONDUCTOR &amp; HARDWARE SILICON</a:t>
             </a:r>
           </a:p>
         </p:txBody>
@@ -10702,14 +11071,14 @@
           <a:lstStyle/>
           <a:p>
             <a:pPr>
-              <a:defRPr sz="2200" b="1">
+              <a:defRPr sz="2100" b="1">
                 <a:solidFill>
                   <a:srgbClr val="0F172A"/>
                 </a:solidFill>
               </a:defRPr>
             </a:pPr>
             <a:r>
-              <a:t>Vertical 2: Quantitative Trading Systems (The Crown Jewel)</a:t>
+              <a:t>IoT, Embedded Firmware &amp; Hardware Security (Courses 14, 17, 18, 19)</a:t>
             </a:r>
           </a:p>
         </p:txBody>
@@ -10723,7 +11092,7 @@
         <p:spPr>
           <a:xfrm>
             <a:off x="731520" y="1170432"/>
-            <a:ext cx="10698480" cy="365760"/>
+            <a:ext cx="10698480" cy="347472"/>
           </a:xfrm>
           <a:prstGeom prst="rect">
             <a:avLst/>
@@ -10744,7 +11113,7 @@
               </a:defRPr>
             </a:pPr>
             <a:r>
-              <a:t>Sub-Microsecond Trading Engines &amp; Deep Tech Offering Global $200k+ Career Placement</a:t>
+              <a:t>Direct Hardware Silicon Engineering Aligned with India's $50B Semiconductor Mission</a:t>
             </a:r>
           </a:p>
         </p:txBody>
@@ -10758,7 +11127,7 @@
         <p:spPr>
           <a:xfrm>
             <a:off x="731520" y="1645920"/>
-            <a:ext cx="5120640" cy="4480560"/>
+            <a:ext cx="5120640" cy="2240280"/>
           </a:xfrm>
           <a:prstGeom prst="roundRect">
             <a:avLst/>
@@ -10802,8 +11171,8 @@
         </p:nvSpPr>
         <p:spPr>
           <a:xfrm>
-            <a:off x="960120" y="1828800"/>
-            <a:ext cx="4663440" cy="4114800"/>
+            <a:off x="914400" y="1810512"/>
+            <a:ext cx="4754880" cy="1911096"/>
           </a:xfrm>
           <a:prstGeom prst="rect">
             <a:avLst/>
@@ -10820,14 +11189,14 @@
               <a:spcAft>
                 <a:spcPts val="200"/>
               </a:spcAft>
-              <a:defRPr sz="1000" b="1">
-                <a:solidFill>
-                  <a:srgbClr val="D97706"/>
-                </a:solidFill>
-              </a:defRPr>
-            </a:pPr>
-            <a:r>
-              <a:t>30/30 DAYS COMPLETE</a:t>
+              <a:defRPr sz="950" b="1">
+                <a:solidFill>
+                  <a:srgbClr val="2563EB"/>
+                </a:solidFill>
+              </a:defRPr>
+            </a:pPr>
+            <a:r>
+              <a:t>DAYS 1–5 LIVE • DAYS 6–30 IN FLIGHT</a:t>
             </a:r>
           </a:p>
           <a:p>
@@ -10835,29 +11204,14 @@
               <a:spcAft>
                 <a:spcPts val="200"/>
               </a:spcAft>
-              <a:defRPr sz="1500" b="1">
+              <a:defRPr sz="1400" b="1">
                 <a:solidFill>
                   <a:srgbClr val="0F172A"/>
                 </a:solidFill>
               </a:defRPr>
             </a:pPr>
             <a:r>
-              <a:t>The Crown Jewel: Quant Trading Systems</a:t>
-            </a:r>
-          </a:p>
-          <a:p>
-            <a:pPr>
-              <a:spcAft>
-                <a:spcPts val="600"/>
-              </a:spcAft>
-              <a:defRPr sz="1100">
-                <a:solidFill>
-                  <a:srgbClr val="D97706"/>
-                </a:solidFill>
-              </a:defRPr>
-            </a:pPr>
-            <a:r>
-              <a:t>The Highest-Paying Engineering Discipline</a:t>
+              <a:t>Course 14: Embedded MCU Programming</a:t>
             </a:r>
           </a:p>
           <a:p>
@@ -10865,89 +11219,74 @@
               <a:spcAft>
                 <a:spcPts val="400"/>
               </a:spcAft>
-              <a:defRPr sz="1150">
+              <a:defRPr sz="1050">
+                <a:solidFill>
+                  <a:srgbClr val="2563EB"/>
+                </a:solidFill>
+              </a:defRPr>
+            </a:pPr>
+            <a:r>
+              <a:t>Silicon Registers &amp; Bare-Metal Control</a:t>
+            </a:r>
+          </a:p>
+          <a:p>
+            <a:pPr>
+              <a:spcAft>
+                <a:spcPts val="300"/>
+              </a:spcAft>
+              <a:defRPr sz="1050">
                 <a:solidFill>
                   <a:srgbClr val="334155"/>
                 </a:solidFill>
               </a:defRPr>
             </a:pPr>
             <a:r>
-              <a:t>• High-Frequency Trading in C++: Sub-microsecond market making architecture.</a:t>
-            </a:r>
-          </a:p>
-          <a:p>
-            <a:pPr>
-              <a:spcAft>
-                <a:spcPts val="400"/>
-              </a:spcAft>
-              <a:defRPr sz="1150">
+              <a:t>• Bare-metal C++ microcontroller programming, memory-mapped I/O (MMIO).</a:t>
+            </a:r>
+          </a:p>
+          <a:p>
+            <a:pPr>
+              <a:spcAft>
+                <a:spcPts val="300"/>
+              </a:spcAft>
+              <a:defRPr sz="1050">
                 <a:solidFill>
                   <a:srgbClr val="334155"/>
                 </a:solidFill>
               </a:defRPr>
             </a:pPr>
             <a:r>
-              <a:t>• 41.8 Nanosecond Matching: Building ultra-fast financial limit order books (LOB).</a:t>
-            </a:r>
-          </a:p>
-          <a:p>
-            <a:pPr>
-              <a:spcAft>
-                <a:spcPts val="400"/>
-              </a:spcAft>
-              <a:defRPr sz="1150">
+              <a:t>• Volatile hardware register pointers, NVIC interrupts, circular DMA double-buffering.</a:t>
+            </a:r>
+          </a:p>
+          <a:p>
+            <a:pPr>
+              <a:spcAft>
+                <a:spcPts val="300"/>
+              </a:spcAft>
+              <a:defRPr sz="1050">
                 <a:solidFill>
                   <a:srgbClr val="334155"/>
                 </a:solidFill>
               </a:defRPr>
             </a:pPr>
             <a:r>
-              <a:t>• Kernel Bypass &amp; Lock-Free Buffers: SPSC circular ring buffers with 64-byte cache alignment.</a:t>
-            </a:r>
-          </a:p>
-          <a:p>
-            <a:pPr>
-              <a:spcAft>
-                <a:spcPts val="400"/>
-              </a:spcAft>
-              <a:defRPr sz="1150">
+              <a:t>• RegisterBits Simulator: Flip bits 0-7 live and see registers mutate.</a:t>
+            </a:r>
+          </a:p>
+          <a:p>
+            <a:pPr>
+              <a:spcAft>
+                <a:spcPts val="300"/>
+              </a:spcAft>
+              <a:defRPr sz="1050">
                 <a:solidFill>
                   <a:srgbClr val="334155"/>
                 </a:solidFill>
               </a:defRPr>
             </a:pPr>
             <a:r>
-              <a:t>• SEC Rule 15c3-5 Pre-Trade Risk: Automated price collars and atomic kill switches.</a:t>
-            </a:r>
-          </a:p>
-          <a:p>
-            <a:pPr>
-              <a:spcAft>
-                <a:spcPts val="400"/>
-              </a:spcAft>
-              <a:defRPr sz="1150">
-                <a:solidFill>
-                  <a:srgbClr val="334155"/>
-                </a:solidFill>
-              </a:defRPr>
-            </a:pPr>
-            <a:r>
-              <a:t>• Quantitative Alpha Signals: Order Flow Imbalance (OFI), VPIN toxicity, Hawkes processes.</a:t>
-            </a:r>
-          </a:p>
-          <a:p>
-            <a:pPr>
-              <a:spcAft>
-                <a:spcPts val="400"/>
-              </a:spcAft>
-              <a:defRPr sz="1150">
-                <a:solidFill>
-                  <a:srgbClr val="334155"/>
-                </a:solidFill>
-              </a:defRPr>
-            </a:pPr>
-            <a:r>
-              <a:t>• Derivatives Pricing: Black-Scholes Greeks (Delta, Gamma, Vega) &amp; Newton-Raphson solvers.</a:t>
+              <a:t>• Career: Embedded Firmware Engineer (Rs 10–22 LPA).</a:t>
             </a:r>
           </a:p>
         </p:txBody>
@@ -10961,7 +11300,7 @@
         <p:spPr>
           <a:xfrm>
             <a:off x="6217920" y="1645920"/>
-            <a:ext cx="5212080" cy="4480560"/>
+            <a:ext cx="5212080" cy="2240280"/>
           </a:xfrm>
           <a:prstGeom prst="roundRect">
             <a:avLst/>
@@ -11005,8 +11344,8 @@
         </p:nvSpPr>
         <p:spPr>
           <a:xfrm>
-            <a:off x="6446520" y="1828800"/>
-            <a:ext cx="4754880" cy="4114800"/>
+            <a:off x="6400800" y="1810512"/>
+            <a:ext cx="4846320" cy="1911096"/>
           </a:xfrm>
           <a:prstGeom prst="rect">
             <a:avLst/>
@@ -11023,14 +11362,14 @@
               <a:spcAft>
                 <a:spcPts val="200"/>
               </a:spcAft>
-              <a:defRPr sz="1000" b="1">
+              <a:defRPr sz="950" b="1">
                 <a:solidFill>
                   <a:srgbClr val="7E22CE"/>
                 </a:solidFill>
               </a:defRPr>
             </a:pPr>
             <a:r>
-              <a:t>HIGH-MARGIN DIFFERENTIATOR</a:t>
+              <a:t>DAYS 1–5 LIVE • DAYS 6–30 IN FLIGHT</a:t>
             </a:r>
           </a:p>
           <a:p>
@@ -11038,29 +11377,187 @@
               <a:spcAft>
                 <a:spcPts val="200"/>
               </a:spcAft>
-              <a:defRPr sz="1500" b="1">
+              <a:defRPr sz="1400" b="1">
                 <a:solidFill>
                   <a:srgbClr val="0F172A"/>
                 </a:solidFill>
               </a:defRPr>
             </a:pPr>
             <a:r>
-              <a:t>Why Shareholders Care: Elite Positioning</a:t>
-            </a:r>
-          </a:p>
-          <a:p>
-            <a:pPr>
-              <a:spcAft>
-                <a:spcPts val="600"/>
-              </a:spcAft>
-              <a:defRPr sz="1100">
+              <a:t>Course 18: Edge AI &amp; TinyML</a:t>
+            </a:r>
+          </a:p>
+          <a:p>
+            <a:pPr>
+              <a:spcAft>
+                <a:spcPts val="400"/>
+              </a:spcAft>
+              <a:defRPr sz="1050">
                 <a:solidFill>
                   <a:srgbClr val="7E22CE"/>
                 </a:solidFill>
               </a:defRPr>
             </a:pPr>
             <a:r>
-              <a:t>Attracting Elite Tier-1 Institutions</a:t>
+              <a:t>AI on Microcontrollers &amp; Sensors</a:t>
+            </a:r>
+          </a:p>
+          <a:p>
+            <a:pPr>
+              <a:spcAft>
+                <a:spcPts val="300"/>
+              </a:spcAft>
+              <a:defRPr sz="1050">
+                <a:solidFill>
+                  <a:srgbClr val="334155"/>
+                </a:solidFill>
+              </a:defRPr>
+            </a:pPr>
+            <a:r>
+              <a:t>• Running AI neural networks directly on microcontrollers with zero cloud latency.</a:t>
+            </a:r>
+          </a:p>
+          <a:p>
+            <a:pPr>
+              <a:spcAft>
+                <a:spcPts val="300"/>
+              </a:spcAft>
+              <a:defRPr sz="1050">
+                <a:solidFill>
+                  <a:srgbClr val="334155"/>
+                </a:solidFill>
+              </a:defRPr>
+            </a:pPr>
+            <a:r>
+              <a:t>• INT8 post-training quantization, CMSIS-NN ARM SIMD micro-kernels (SMLAD).</a:t>
+            </a:r>
+          </a:p>
+          <a:p>
+            <a:pPr>
+              <a:spcAft>
+                <a:spcPts val="300"/>
+              </a:spcAft>
+              <a:defRPr sz="1050">
+                <a:solidFill>
+                  <a:srgbClr val="334155"/>
+                </a:solidFill>
+              </a:defRPr>
+            </a:pPr>
+            <a:r>
+              <a:t>• Static tensor arena allocation without heap fragmentation.</a:t>
+            </a:r>
+          </a:p>
+          <a:p>
+            <a:pPr>
+              <a:spcAft>
+                <a:spcPts val="300"/>
+              </a:spcAft>
+              <a:defRPr sz="1050">
+                <a:solidFill>
+                  <a:srgbClr val="334155"/>
+                </a:solidFill>
+              </a:defRPr>
+            </a:pPr>
+            <a:r>
+              <a:t>• Career: Edge AI Developer, TinyML Systems Engineer (Rs 14–26 LPA).</a:t>
+            </a:r>
+          </a:p>
+        </p:txBody>
+      </p:sp>
+      <p:sp>
+        <p:nvSpPr>
+          <p:cNvPr id="12" name="Rounded Rectangle 11"/>
+          <p:cNvSpPr/>
+          <p:nvPr/>
+        </p:nvSpPr>
+        <p:spPr>
+          <a:xfrm>
+            <a:off x="731520" y="4069080"/>
+            <a:ext cx="5120640" cy="2240280"/>
+          </a:xfrm>
+          <a:prstGeom prst="roundRect">
+            <a:avLst/>
+          </a:prstGeom>
+          <a:solidFill>
+            <a:srgbClr val="FFFFFF"/>
+          </a:solidFill>
+          <a:ln w="15240">
+            <a:solidFill>
+              <a:srgbClr val="E2E8F0"/>
+            </a:solidFill>
+          </a:ln>
+        </p:spPr>
+        <p:style>
+          <a:lnRef idx="1">
+            <a:schemeClr val="accent1"/>
+          </a:lnRef>
+          <a:fillRef idx="3">
+            <a:schemeClr val="accent1"/>
+          </a:fillRef>
+          <a:effectRef idx="2">
+            <a:schemeClr val="accent1"/>
+          </a:effectRef>
+          <a:fontRef idx="minor">
+            <a:schemeClr val="lt1"/>
+          </a:fontRef>
+        </p:style>
+        <p:txBody>
+          <a:bodyPr rtlCol="0" anchor="ctr"/>
+          <a:lstStyle/>
+          <a:p>
+            <a:pPr algn="ctr"/>
+          </a:p>
+        </p:txBody>
+      </p:sp>
+      <p:sp>
+        <p:nvSpPr>
+          <p:cNvPr id="13" name="TextBox 12"/>
+          <p:cNvSpPr txBox="1"/>
+          <p:nvPr/>
+        </p:nvSpPr>
+        <p:spPr>
+          <a:xfrm>
+            <a:off x="914400" y="4233672"/>
+            <a:ext cx="4754880" cy="1911096"/>
+          </a:xfrm>
+          <a:prstGeom prst="rect">
+            <a:avLst/>
+          </a:prstGeom>
+          <a:noFill/>
+        </p:spPr>
+        <p:txBody>
+          <a:bodyPr wrap="square">
+            <a:spAutoFit/>
+          </a:bodyPr>
+          <a:lstStyle/>
+          <a:p>
+            <a:pPr>
+              <a:spcAft>
+                <a:spcPts val="200"/>
+              </a:spcAft>
+              <a:defRPr sz="950" b="1">
+                <a:solidFill>
+                  <a:srgbClr val="10B981"/>
+                </a:solidFill>
+              </a:defRPr>
+            </a:pPr>
+            <a:r>
+              <a:t>DAYS 1–5 LIVE • DAYS 6–30 IN FLIGHT</a:t>
+            </a:r>
+          </a:p>
+          <a:p>
+            <a:pPr>
+              <a:spcAft>
+                <a:spcPts val="200"/>
+              </a:spcAft>
+              <a:defRPr sz="1400" b="1">
+                <a:solidFill>
+                  <a:srgbClr val="0F172A"/>
+                </a:solidFill>
+              </a:defRPr>
+            </a:pPr>
+            <a:r>
+              <a:t>Course 17: IoT Wireless Networks</a:t>
             </a:r>
           </a:p>
           <a:p>
@@ -11068,14 +11565,172 @@
               <a:spcAft>
                 <a:spcPts val="400"/>
               </a:spcAft>
-              <a:defRPr sz="1150">
+              <a:defRPr sz="1050">
+                <a:solidFill>
+                  <a:srgbClr val="10B981"/>
+                </a:solidFill>
+              </a:defRPr>
+            </a:pPr>
+            <a:r>
+              <a:t>Low-Power Mesh Networking</a:t>
+            </a:r>
+          </a:p>
+          <a:p>
+            <a:pPr>
+              <a:spcAft>
+                <a:spcPts val="300"/>
+              </a:spcAft>
+              <a:defRPr sz="1050">
                 <a:solidFill>
                   <a:srgbClr val="334155"/>
                 </a:solidFill>
               </a:defRPr>
             </a:pPr>
             <a:r>
-              <a:t>• Zero Competition Globally: No other university platform in the world teaches browser-based HFT.</a:t>
+              <a:t>• Wireless radio protocols: Friis link budgets, IEEE 802.15.4 MAC frames.</a:t>
+            </a:r>
+          </a:p>
+          <a:p>
+            <a:pPr>
+              <a:spcAft>
+                <a:spcPts val="300"/>
+              </a:spcAft>
+              <a:defRPr sz="1050">
+                <a:solidFill>
+                  <a:srgbClr val="334155"/>
+                </a:solidFill>
+              </a:defRPr>
+            </a:pPr>
+            <a:r>
+              <a:t>• RFC 6282 6LoWPAN header compression (compressing 40-byte IPv6 headers to 2 bytes).</a:t>
+            </a:r>
+          </a:p>
+          <a:p>
+            <a:pPr>
+              <a:spcAft>
+                <a:spcPts val="300"/>
+              </a:spcAft>
+              <a:defRPr sz="1050">
+                <a:solidFill>
+                  <a:srgbClr val="334155"/>
+                </a:solidFill>
+              </a:defRPr>
+            </a:pPr>
+            <a:r>
+              <a:t>• CoAP transport over UDP and MQTT-SN for 10-year battery sensor nodes.</a:t>
+            </a:r>
+          </a:p>
+          <a:p>
+            <a:pPr>
+              <a:spcAft>
+                <a:spcPts val="300"/>
+              </a:spcAft>
+              <a:defRPr sz="1050">
+                <a:solidFill>
+                  <a:srgbClr val="334155"/>
+                </a:solidFill>
+              </a:defRPr>
+            </a:pPr>
+            <a:r>
+              <a:t>• Career: IoT Network Architect, Wireless Systems Engineer (Rs 12–24 LPA).</a:t>
+            </a:r>
+          </a:p>
+        </p:txBody>
+      </p:sp>
+      <p:sp>
+        <p:nvSpPr>
+          <p:cNvPr id="14" name="Rounded Rectangle 13"/>
+          <p:cNvSpPr/>
+          <p:nvPr/>
+        </p:nvSpPr>
+        <p:spPr>
+          <a:xfrm>
+            <a:off x="6217920" y="4069080"/>
+            <a:ext cx="5212080" cy="2240280"/>
+          </a:xfrm>
+          <a:prstGeom prst="roundRect">
+            <a:avLst/>
+          </a:prstGeom>
+          <a:solidFill>
+            <a:srgbClr val="FFFFFF"/>
+          </a:solidFill>
+          <a:ln w="15240">
+            <a:solidFill>
+              <a:srgbClr val="E2E8F0"/>
+            </a:solidFill>
+          </a:ln>
+        </p:spPr>
+        <p:style>
+          <a:lnRef idx="1">
+            <a:schemeClr val="accent1"/>
+          </a:lnRef>
+          <a:fillRef idx="3">
+            <a:schemeClr val="accent1"/>
+          </a:fillRef>
+          <a:effectRef idx="2">
+            <a:schemeClr val="accent1"/>
+          </a:effectRef>
+          <a:fontRef idx="minor">
+            <a:schemeClr val="lt1"/>
+          </a:fontRef>
+        </p:style>
+        <p:txBody>
+          <a:bodyPr rtlCol="0" anchor="ctr"/>
+          <a:lstStyle/>
+          <a:p>
+            <a:pPr algn="ctr"/>
+          </a:p>
+        </p:txBody>
+      </p:sp>
+      <p:sp>
+        <p:nvSpPr>
+          <p:cNvPr id="15" name="TextBox 14"/>
+          <p:cNvSpPr txBox="1"/>
+          <p:nvPr/>
+        </p:nvSpPr>
+        <p:spPr>
+          <a:xfrm>
+            <a:off x="6400800" y="4233672"/>
+            <a:ext cx="4846320" cy="1911096"/>
+          </a:xfrm>
+          <a:prstGeom prst="rect">
+            <a:avLst/>
+          </a:prstGeom>
+          <a:noFill/>
+        </p:spPr>
+        <p:txBody>
+          <a:bodyPr wrap="square">
+            <a:spAutoFit/>
+          </a:bodyPr>
+          <a:lstStyle/>
+          <a:p>
+            <a:pPr>
+              <a:spcAft>
+                <a:spcPts val="200"/>
+              </a:spcAft>
+              <a:defRPr sz="950" b="1">
+                <a:solidFill>
+                  <a:srgbClr val="E11D48"/>
+                </a:solidFill>
+              </a:defRPr>
+            </a:pPr>
+            <a:r>
+              <a:t>DAYS 1–5 LIVE • DAYS 6–30 IN FLIGHT</a:t>
+            </a:r>
+          </a:p>
+          <a:p>
+            <a:pPr>
+              <a:spcAft>
+                <a:spcPts val="200"/>
+              </a:spcAft>
+              <a:defRPr sz="1400" b="1">
+                <a:solidFill>
+                  <a:srgbClr val="0F172A"/>
+                </a:solidFill>
+              </a:defRPr>
+            </a:pPr>
+            <a:r>
+              <a:t>Course 19: Hardware Root of Trust &amp; Security</a:t>
             </a:r>
           </a:p>
           <a:p>
@@ -11083,59 +11738,74 @@
               <a:spcAft>
                 <a:spcPts val="400"/>
               </a:spcAft>
-              <a:defRPr sz="1150">
+              <a:defRPr sz="1050">
+                <a:solidFill>
+                  <a:srgbClr val="E11D48"/>
+                </a:solidFill>
+              </a:defRPr>
+            </a:pPr>
+            <a:r>
+              <a:t>Silicon Security &amp; Secure Boot Chains</a:t>
+            </a:r>
+          </a:p>
+          <a:p>
+            <a:pPr>
+              <a:spcAft>
+                <a:spcPts val="300"/>
+              </a:spcAft>
+              <a:defRPr sz="1050">
                 <a:solidFill>
                   <a:srgbClr val="334155"/>
                 </a:solidFill>
               </a:defRPr>
             </a:pPr>
             <a:r>
-              <a:t>• Record-Breaking Salaries: High-frequency trading firms pay starting packages of Rs 40 LPA to Rs 80 LPA ($200k–$400k+).</a:t>
-            </a:r>
-          </a:p>
-          <a:p>
-            <a:pPr>
-              <a:spcAft>
-                <a:spcPts val="400"/>
-              </a:spcAft>
-              <a:defRPr sz="1150">
+              <a:t>• Silicon Hardware Root of Trust: OTP eFuses, immutable Mask ROM bootloaders.</a:t>
+            </a:r>
+          </a:p>
+          <a:p>
+            <a:pPr>
+              <a:spcAft>
+                <a:spcPts val="300"/>
+              </a:spcAft>
+              <a:defRPr sz="1050">
                 <a:solidFill>
                   <a:srgbClr val="334155"/>
                 </a:solidFill>
               </a:defRPr>
             </a:pPr>
             <a:r>
-              <a:t>• Institutional Magnet: Positions PinIT as an elite engineering platform that attracts top IITs and tier-1 universities.</a:t>
-            </a:r>
-          </a:p>
-          <a:p>
-            <a:pPr>
-              <a:spcAft>
-                <a:spcPts val="400"/>
-              </a:spcAft>
-              <a:defRPr sz="1150">
+              <a:t>• Cryptographic secure boot chains, ARM TrustZone hardware bus memory partitioning.</a:t>
+            </a:r>
+          </a:p>
+          <a:p>
+            <a:pPr>
+              <a:spcAft>
+                <a:spcPts val="300"/>
+              </a:spcAft>
+              <a:defRPr sz="1050">
                 <a:solidFill>
                   <a:srgbClr val="334155"/>
                 </a:solidFill>
               </a:defRPr>
             </a:pPr>
             <a:r>
-              <a:t>• AI-Proof Systems: Low-latency silicon offloading and kernel programming cannot be automated by basic LLMs.</a:t>
-            </a:r>
-          </a:p>
-          <a:p>
-            <a:pPr>
-              <a:spcAft>
-                <a:spcPts val="400"/>
-              </a:spcAft>
-              <a:defRPr sz="1150">
+              <a:t>• On-The-Fly Decryption (OTFDEC) defeating physical PCB trace sniffing.</a:t>
+            </a:r>
+          </a:p>
+          <a:p>
+            <a:pPr>
+              <a:spcAft>
+                <a:spcPts val="300"/>
+              </a:spcAft>
+              <a:defRPr sz="1050">
                 <a:solidFill>
                   <a:srgbClr val="334155"/>
                 </a:solidFill>
               </a:defRPr>
             </a:pPr>
             <a:r>
-              <a:t>• Complete Capstone: Sovereign Ultra-Low-Latency Multi-Venue Matching Engine verified with 100% green tests.</a:t>
+              <a:t>• Career: Hardware Security Researcher, Automotive Systems Auditor (Rs 15–30 LPA).</a:t>
             </a:r>
           </a:p>
         </p:txBody>
@@ -11257,7 +11927,7 @@
         <p:spPr>
           <a:xfrm>
             <a:off x="731520" y="320040"/>
-            <a:ext cx="2926080" cy="292608"/>
+            <a:ext cx="3291840" cy="292608"/>
           </a:xfrm>
           <a:prstGeom prst="roundRect">
             <a:avLst/>
@@ -11297,7 +11967,7 @@
               </a:defRPr>
             </a:pPr>
             <a:r>
-              <a:t>MASS MARKET EXPANSION</a:t>
+              <a:t>BUSINESS SCHOOL FLAGSHIP TRACKS</a:t>
             </a:r>
           </a:p>
         </p:txBody>
@@ -11360,14 +12030,14 @@
           <a:lstStyle/>
           <a:p>
             <a:pPr>
-              <a:defRPr sz="2200" b="1">
+              <a:defRPr sz="2100" b="1">
                 <a:solidFill>
                   <a:srgbClr val="0F172A"/>
                 </a:solidFill>
               </a:defRPr>
             </a:pPr>
             <a:r>
-              <a:t>Vertical 3: Commerce, Banking &amp; Modern Management</a:t>
+              <a:t>Accounting, Finance &amp; Operations Management (Courses 22, 23, 24, 28, 30)</a:t>
             </a:r>
           </a:p>
         </p:txBody>
@@ -11381,7 +12051,7 @@
         <p:spPr>
           <a:xfrm>
             <a:off x="731520" y="1170432"/>
-            <a:ext cx="10698480" cy="365760"/>
+            <a:ext cx="10698480" cy="347472"/>
           </a:xfrm>
           <a:prstGeom prst="rect">
             <a:avLst/>
@@ -11402,7 +12072,7 @@
               </a:defRPr>
             </a:pPr>
             <a:r>
-              <a:t>14 University Tracks for B.Com, BBA &amp; MBA Students (Days 1–5 Live, Days 6–30 Expanding)</a:t>
+              <a:t>Modernizing B.Com &amp; MBA Education with Live Double-Entry Ledgers and Financial Modeling</a:t>
             </a:r>
           </a:p>
         </p:txBody>
@@ -11416,7 +12086,7 @@
         <p:spPr>
           <a:xfrm>
             <a:off x="731520" y="1645920"/>
-            <a:ext cx="5120640" cy="4480560"/>
+            <a:ext cx="5120640" cy="2240280"/>
           </a:xfrm>
           <a:prstGeom prst="roundRect">
             <a:avLst/>
@@ -11460,8 +12130,8 @@
         </p:nvSpPr>
         <p:spPr>
           <a:xfrm>
-            <a:off x="960120" y="1828800"/>
-            <a:ext cx="4663440" cy="4114800"/>
+            <a:off x="914400" y="1810512"/>
+            <a:ext cx="4754880" cy="1911096"/>
           </a:xfrm>
           <a:prstGeom prst="rect">
             <a:avLst/>
@@ -11478,14 +12148,14 @@
               <a:spcAft>
                 <a:spcPts val="200"/>
               </a:spcAft>
-              <a:defRPr sz="1000" b="1">
+              <a:defRPr sz="950" b="1">
                 <a:solidFill>
                   <a:srgbClr val="10B981"/>
                 </a:solidFill>
               </a:defRPr>
             </a:pPr>
             <a:r>
-              <a:t>70 DAYS LIVE • 350 EXPANDING</a:t>
+              <a:t>DAYS 1–5 LIVE • DAYS 6–30 IN FLIGHT</a:t>
             </a:r>
           </a:p>
           <a:p>
@@ -11493,134 +12163,89 @@
               <a:spcAft>
                 <a:spcPts val="200"/>
               </a:spcAft>
-              <a:defRPr sz="1500" b="1">
+              <a:defRPr sz="1400" b="1">
                 <a:solidFill>
                   <a:srgbClr val="0F172A"/>
                 </a:solidFill>
               </a:defRPr>
             </a:pPr>
             <a:r>
-              <a:t>The 14 Business &amp; Commerce Tracks</a:t>
-            </a:r>
-          </a:p>
-          <a:p>
-            <a:pPr>
-              <a:spcAft>
-                <a:spcPts val="600"/>
-              </a:spcAft>
-              <a:defRPr sz="1100">
+              <a:t>Course 22: Digital Accounting &amp; Taxation</a:t>
+            </a:r>
+          </a:p>
+          <a:p>
+            <a:pPr>
+              <a:spcAft>
+                <a:spcPts val="400"/>
+              </a:spcAft>
+              <a:defRPr sz="1050">
                 <a:solidFill>
                   <a:srgbClr val="10B981"/>
                 </a:solidFill>
               </a:defRPr>
             </a:pPr>
             <a:r>
-              <a:t>Complete Business Degree Coverage</a:t>
-            </a:r>
-          </a:p>
-          <a:p>
-            <a:pPr>
-              <a:spcAft>
-                <a:spcPts val="400"/>
-              </a:spcAft>
-              <a:defRPr sz="1150">
+              <a:t>Double-Entry Balance &amp; Statutory Tax</a:t>
+            </a:r>
+          </a:p>
+          <a:p>
+            <a:pPr>
+              <a:spcAft>
+                <a:spcPts val="300"/>
+              </a:spcAft>
+              <a:defRPr sz="1050">
                 <a:solidFill>
                   <a:srgbClr val="334155"/>
                 </a:solidFill>
               </a:defRPr>
             </a:pPr>
             <a:r>
-              <a:t>• 1. Corporate Finance: DCF Valuation, WACC, DuPont ROE, LBO debt modeling.</a:t>
-            </a:r>
-          </a:p>
-          <a:p>
-            <a:pPr>
-              <a:spcAft>
-                <a:spcPts val="400"/>
-              </a:spcAft>
-              <a:defRPr sz="1150">
+              <a:t>• Double-entry bookkeeping trial balance, ASC 606 revenue recognition.</a:t>
+            </a:r>
+          </a:p>
+          <a:p>
+            <a:pPr>
+              <a:spcAft>
+                <a:spcPts val="300"/>
+              </a:spcAft>
+              <a:defRPr sz="1050">
                 <a:solidFill>
                   <a:srgbClr val="334155"/>
                 </a:solidFill>
               </a:defRPr>
             </a:pPr>
             <a:r>
-              <a:t>• 2. Commercial Banking: Basel III Capital Adequacy, Loan Underwriting, Duration Gap.</a:t>
-            </a:r>
-          </a:p>
-          <a:p>
-            <a:pPr>
-              <a:spcAft>
-                <a:spcPts val="400"/>
-              </a:spcAft>
-              <a:defRPr sz="1150">
+              <a:t>• ASC 740 Deferred Tax Assets/Liabilities (DTA/DTL) and OECD transfer pricing.</a:t>
+            </a:r>
+          </a:p>
+          <a:p>
+            <a:pPr>
+              <a:spcAft>
+                <a:spcPts val="300"/>
+              </a:spcAft>
+              <a:defRPr sz="1050">
                 <a:solidFill>
                   <a:srgbClr val="334155"/>
                 </a:solidFill>
               </a:defRPr>
             </a:pPr>
             <a:r>
-              <a:t>• 3. Digital Accounting: Double-entry trial balance, ASC 606 revenue recognition.</a:t>
-            </a:r>
-          </a:p>
-          <a:p>
-            <a:pPr>
-              <a:spcAft>
-                <a:spcPts val="400"/>
-              </a:spcAft>
-              <a:defRPr sz="1150">
+              <a:t>• LedgerSheet Simulator: Interactive T-accounts that flash red until balanced.</a:t>
+            </a:r>
+          </a:p>
+          <a:p>
+            <a:pPr>
+              <a:spcAft>
+                <a:spcPts val="300"/>
+              </a:spcAft>
+              <a:defRPr sz="1050">
                 <a:solidFill>
                   <a:srgbClr val="334155"/>
                 </a:solidFill>
               </a:defRPr>
             </a:pPr>
             <a:r>
-              <a:t>• 4. Corporate Taxation: Deferred taxes, Section 163(j), OECD Pillar 2 transfer pricing.</a:t>
-            </a:r>
-          </a:p>
-          <a:p>
-            <a:pPr>
-              <a:spcAft>
-                <a:spcPts val="400"/>
-              </a:spcAft>
-              <a:defRPr sz="1150">
-                <a:solidFill>
-                  <a:srgbClr val="334155"/>
-                </a:solidFill>
-              </a:defRPr>
-            </a:pPr>
-            <a:r>
-              <a:t>• 5. Forensic Auditing: Fraud detection, Benford's Law distribution analysis, SOX 404.</a:t>
-            </a:r>
-          </a:p>
-          <a:p>
-            <a:pPr>
-              <a:spcAft>
-                <a:spcPts val="400"/>
-              </a:spcAft>
-              <a:defRPr sz="1150">
-                <a:solidFill>
-                  <a:srgbClr val="334155"/>
-                </a:solidFill>
-              </a:defRPr>
-            </a:pPr>
-            <a:r>
-              <a:t>• 6. Digital Marketing &amp; E-Commerce: CAC:LTV payback, conversion rate optimization.</a:t>
-            </a:r>
-          </a:p>
-          <a:p>
-            <a:pPr>
-              <a:spcAft>
-                <a:spcPts val="400"/>
-              </a:spcAft>
-              <a:defRPr sz="1150">
-                <a:solidFill>
-                  <a:srgbClr val="334155"/>
-                </a:solidFill>
-              </a:defRPr>
-            </a:pPr>
-            <a:r>
-              <a:t>• 7. Operations &amp; B2B Sales: Supply chain inventory velocity, CRM pipelines, Six Sigma.</a:t>
+              <a:t>• Career: Corporate Controller, Tax Consultant at Big 4 (Rs 8–18 LPA).</a:t>
             </a:r>
           </a:p>
         </p:txBody>
@@ -11634,7 +12259,180 @@
         <p:spPr>
           <a:xfrm>
             <a:off x="6217920" y="1645920"/>
-            <a:ext cx="5212080" cy="4480560"/>
+            <a:ext cx="5212080" cy="2240280"/>
+          </a:xfrm>
+          <a:prstGeom prst="roundRect">
+            <a:avLst/>
+          </a:prstGeom>
+          <a:solidFill>
+            <a:srgbClr val="FFFFFF"/>
+          </a:solidFill>
+          <a:ln w="15240">
+            <a:solidFill>
+              <a:srgbClr val="FDE68A"/>
+            </a:solidFill>
+          </a:ln>
+        </p:spPr>
+        <p:style>
+          <a:lnRef idx="1">
+            <a:schemeClr val="accent1"/>
+          </a:lnRef>
+          <a:fillRef idx="3">
+            <a:schemeClr val="accent1"/>
+          </a:fillRef>
+          <a:effectRef idx="2">
+            <a:schemeClr val="accent1"/>
+          </a:effectRef>
+          <a:fontRef idx="minor">
+            <a:schemeClr val="lt1"/>
+          </a:fontRef>
+        </p:style>
+        <p:txBody>
+          <a:bodyPr rtlCol="0" anchor="ctr"/>
+          <a:lstStyle/>
+          <a:p>
+            <a:pPr algn="ctr"/>
+          </a:p>
+        </p:txBody>
+      </p:sp>
+      <p:sp>
+        <p:nvSpPr>
+          <p:cNvPr id="11" name="TextBox 10"/>
+          <p:cNvSpPr txBox="1"/>
+          <p:nvPr/>
+        </p:nvSpPr>
+        <p:spPr>
+          <a:xfrm>
+            <a:off x="6400800" y="1810512"/>
+            <a:ext cx="4846320" cy="1911096"/>
+          </a:xfrm>
+          <a:prstGeom prst="rect">
+            <a:avLst/>
+          </a:prstGeom>
+          <a:noFill/>
+        </p:spPr>
+        <p:txBody>
+          <a:bodyPr wrap="square">
+            <a:spAutoFit/>
+          </a:bodyPr>
+          <a:lstStyle/>
+          <a:p>
+            <a:pPr>
+              <a:spcAft>
+                <a:spcPts val="200"/>
+              </a:spcAft>
+              <a:defRPr sz="950" b="1">
+                <a:solidFill>
+                  <a:srgbClr val="D97706"/>
+                </a:solidFill>
+              </a:defRPr>
+            </a:pPr>
+            <a:r>
+              <a:t>DAYS 1–5 LIVE • DAYS 6–30 IN FLIGHT</a:t>
+            </a:r>
+          </a:p>
+          <a:p>
+            <a:pPr>
+              <a:spcAft>
+                <a:spcPts val="200"/>
+              </a:spcAft>
+              <a:defRPr sz="1400" b="1">
+                <a:solidFill>
+                  <a:srgbClr val="0F172A"/>
+                </a:solidFill>
+              </a:defRPr>
+            </a:pPr>
+            <a:r>
+              <a:t>Course 23: Business Finance &amp; Investment</a:t>
+            </a:r>
+          </a:p>
+          <a:p>
+            <a:pPr>
+              <a:spcAft>
+                <a:spcPts val="400"/>
+              </a:spcAft>
+              <a:defRPr sz="1050">
+                <a:solidFill>
+                  <a:srgbClr val="D97706"/>
+                </a:solidFill>
+              </a:defRPr>
+            </a:pPr>
+            <a:r>
+              <a:t>Corporate Valuation &amp; M&amp;A Modeling</a:t>
+            </a:r>
+          </a:p>
+          <a:p>
+            <a:pPr>
+              <a:spcAft>
+                <a:spcPts val="300"/>
+              </a:spcAft>
+              <a:defRPr sz="1050">
+                <a:solidFill>
+                  <a:srgbClr val="334155"/>
+                </a:solidFill>
+              </a:defRPr>
+            </a:pPr>
+            <a:r>
+              <a:t>• Discounted Cash Flow (DCF), WACC valuation, DuPont 3-step ROE decomposition.</a:t>
+            </a:r>
+          </a:p>
+          <a:p>
+            <a:pPr>
+              <a:spcAft>
+                <a:spcPts val="300"/>
+              </a:spcAft>
+              <a:defRPr sz="1050">
+                <a:solidFill>
+                  <a:srgbClr val="334155"/>
+                </a:solidFill>
+              </a:defRPr>
+            </a:pPr>
+            <a:r>
+              <a:t>• Multi-tranche debt capital structures, LBO debt waterfalls, and M&amp;A accretion.</a:t>
+            </a:r>
+          </a:p>
+          <a:p>
+            <a:pPr>
+              <a:spcAft>
+                <a:spcPts val="300"/>
+              </a:spcAft>
+              <a:defRPr sz="1050">
+                <a:solidFill>
+                  <a:srgbClr val="334155"/>
+                </a:solidFill>
+              </a:defRPr>
+            </a:pPr>
+            <a:r>
+              <a:t>• Bars Simulator: Dynamic sensitivity bridges and Monte Carlo capital risk.</a:t>
+            </a:r>
+          </a:p>
+          <a:p>
+            <a:pPr>
+              <a:spcAft>
+                <a:spcPts val="300"/>
+              </a:spcAft>
+              <a:defRPr sz="1050">
+                <a:solidFill>
+                  <a:srgbClr val="334155"/>
+                </a:solidFill>
+              </a:defRPr>
+            </a:pPr>
+            <a:r>
+              <a:t>• Career: Investment Banking Analyst, Private Equity Associate (Rs 12–25 LPA).</a:t>
+            </a:r>
+          </a:p>
+        </p:txBody>
+      </p:sp>
+      <p:sp>
+        <p:nvSpPr>
+          <p:cNvPr id="12" name="Rounded Rectangle 11"/>
+          <p:cNvSpPr/>
+          <p:nvPr/>
+        </p:nvSpPr>
+        <p:spPr>
+          <a:xfrm>
+            <a:off x="731520" y="4069080"/>
+            <a:ext cx="3291840" cy="2240280"/>
           </a:xfrm>
           <a:prstGeom prst="roundRect">
             <a:avLst/>
@@ -11672,14 +12470,14 @@
       </p:sp>
       <p:sp>
         <p:nvSpPr>
-          <p:cNvPr id="11" name="TextBox 10"/>
+          <p:cNvPr id="13" name="TextBox 12"/>
           <p:cNvSpPr txBox="1"/>
           <p:nvPr/>
         </p:nvSpPr>
         <p:spPr>
           <a:xfrm>
-            <a:off x="6446520" y="1828800"/>
-            <a:ext cx="4754880" cy="4114800"/>
+            <a:off x="914400" y="4233672"/>
+            <a:ext cx="2926080" cy="1911096"/>
           </a:xfrm>
           <a:prstGeom prst="rect">
             <a:avLst/>
@@ -11696,14 +12494,14 @@
               <a:spcAft>
                 <a:spcPts val="200"/>
               </a:spcAft>
-              <a:defRPr sz="1000" b="1">
+              <a:defRPr sz="950" b="1">
                 <a:solidFill>
                   <a:srgbClr val="2563EB"/>
                 </a:solidFill>
               </a:defRPr>
             </a:pPr>
             <a:r>
-              <a:t>COMMERCE CAMPUS MONETIZATION</a:t>
+              <a:t>DAYS 1–5 LIVE • D6–30 IN FLIGHT</a:t>
             </a:r>
           </a:p>
           <a:p>
@@ -11711,29 +12509,172 @@
               <a:spcAft>
                 <a:spcPts val="200"/>
               </a:spcAft>
-              <a:defRPr sz="1500" b="1">
+              <a:defRPr sz="1400" b="1">
                 <a:solidFill>
                   <a:srgbClr val="0F172A"/>
                 </a:solidFill>
               </a:defRPr>
             </a:pPr>
             <a:r>
-              <a:t>Why Shareholders Care: Huge Market Size</a:t>
-            </a:r>
-          </a:p>
-          <a:p>
-            <a:pPr>
-              <a:spcAft>
-                <a:spcPts val="600"/>
-              </a:spcAft>
-              <a:defRPr sz="1100">
+              <a:t>Course 24: Business Analytics</a:t>
+            </a:r>
+          </a:p>
+          <a:p>
+            <a:pPr>
+              <a:spcAft>
+                <a:spcPts val="400"/>
+              </a:spcAft>
+              <a:defRPr sz="1050">
                 <a:solidFill>
                   <a:srgbClr val="2563EB"/>
                 </a:solidFill>
               </a:defRPr>
             </a:pPr>
             <a:r>
-              <a:t>Tapping the 10M+ Student Commerce Market</a:t>
+              <a:t>Prescriptive Decision Analytics</a:t>
+            </a:r>
+          </a:p>
+          <a:p>
+            <a:pPr>
+              <a:spcAft>
+                <a:spcPts val="300"/>
+              </a:spcAft>
+              <a:defRPr sz="1050">
+                <a:solidFill>
+                  <a:srgbClr val="334155"/>
+                </a:solidFill>
+              </a:defRPr>
+            </a:pPr>
+            <a:r>
+              <a:t>• Linear programming simplex optimization, marginal shadow prices.</a:t>
+            </a:r>
+          </a:p>
+          <a:p>
+            <a:pPr>
+              <a:spcAft>
+                <a:spcPts val="300"/>
+              </a:spcAft>
+              <a:defRPr sz="1050">
+                <a:solidFill>
+                  <a:srgbClr val="334155"/>
+                </a:solidFill>
+              </a:defRPr>
+            </a:pPr>
+            <a:r>
+              <a:t>• Cohort retention matrices, Net Revenue Retention (NRR &gt; 100%).</a:t>
+            </a:r>
+          </a:p>
+          <a:p>
+            <a:pPr>
+              <a:spcAft>
+                <a:spcPts val="300"/>
+              </a:spcAft>
+              <a:defRPr sz="1050">
+                <a:solidFill>
+                  <a:srgbClr val="334155"/>
+                </a:solidFill>
+              </a:defRPr>
+            </a:pPr>
+            <a:r>
+              <a:t>• Career: Financial Analyst (Rs 10–20 LPA).</a:t>
+            </a:r>
+          </a:p>
+        </p:txBody>
+      </p:sp>
+      <p:sp>
+        <p:nvSpPr>
+          <p:cNvPr id="14" name="Rounded Rectangle 13"/>
+          <p:cNvSpPr/>
+          <p:nvPr/>
+        </p:nvSpPr>
+        <p:spPr>
+          <a:xfrm>
+            <a:off x="4389120" y="4069080"/>
+            <a:ext cx="3383280" cy="2240280"/>
+          </a:xfrm>
+          <a:prstGeom prst="roundRect">
+            <a:avLst/>
+          </a:prstGeom>
+          <a:solidFill>
+            <a:srgbClr val="FFFFFF"/>
+          </a:solidFill>
+          <a:ln w="15240">
+            <a:solidFill>
+              <a:srgbClr val="E2E8F0"/>
+            </a:solidFill>
+          </a:ln>
+        </p:spPr>
+        <p:style>
+          <a:lnRef idx="1">
+            <a:schemeClr val="accent1"/>
+          </a:lnRef>
+          <a:fillRef idx="3">
+            <a:schemeClr val="accent1"/>
+          </a:fillRef>
+          <a:effectRef idx="2">
+            <a:schemeClr val="accent1"/>
+          </a:effectRef>
+          <a:fontRef idx="minor">
+            <a:schemeClr val="lt1"/>
+          </a:fontRef>
+        </p:style>
+        <p:txBody>
+          <a:bodyPr rtlCol="0" anchor="ctr"/>
+          <a:lstStyle/>
+          <a:p>
+            <a:pPr algn="ctr"/>
+          </a:p>
+        </p:txBody>
+      </p:sp>
+      <p:sp>
+        <p:nvSpPr>
+          <p:cNvPr id="15" name="TextBox 14"/>
+          <p:cNvSpPr txBox="1"/>
+          <p:nvPr/>
+        </p:nvSpPr>
+        <p:spPr>
+          <a:xfrm>
+            <a:off x="4572000" y="4233672"/>
+            <a:ext cx="3017520" cy="1911096"/>
+          </a:xfrm>
+          <a:prstGeom prst="rect">
+            <a:avLst/>
+          </a:prstGeom>
+          <a:noFill/>
+        </p:spPr>
+        <p:txBody>
+          <a:bodyPr wrap="square">
+            <a:spAutoFit/>
+          </a:bodyPr>
+          <a:lstStyle/>
+          <a:p>
+            <a:pPr>
+              <a:spcAft>
+                <a:spcPts val="200"/>
+              </a:spcAft>
+              <a:defRPr sz="950" b="1">
+                <a:solidFill>
+                  <a:srgbClr val="7E22CE"/>
+                </a:solidFill>
+              </a:defRPr>
+            </a:pPr>
+            <a:r>
+              <a:t>DAYS 1–5 LIVE • D6–30 IN FLIGHT</a:t>
+            </a:r>
+          </a:p>
+          <a:p>
+            <a:pPr>
+              <a:spcAft>
+                <a:spcPts val="200"/>
+              </a:spcAft>
+              <a:defRPr sz="1400" b="1">
+                <a:solidFill>
+                  <a:srgbClr val="0F172A"/>
+                </a:solidFill>
+              </a:defRPr>
+            </a:pPr>
+            <a:r>
+              <a:t>Course 28: Entrepreneurship</a:t>
             </a:r>
           </a:p>
           <a:p>
@@ -11741,14 +12682,157 @@
               <a:spcAft>
                 <a:spcPts val="400"/>
               </a:spcAft>
-              <a:defRPr sz="1150">
+              <a:defRPr sz="1050">
+                <a:solidFill>
+                  <a:srgbClr val="7E22CE"/>
+                </a:solidFill>
+              </a:defRPr>
+            </a:pPr>
+            <a:r>
+              <a:t>Cap Tables &amp; Venture Creation</a:t>
+            </a:r>
+          </a:p>
+          <a:p>
+            <a:pPr>
+              <a:spcAft>
+                <a:spcPts val="300"/>
+              </a:spcAft>
+              <a:defRPr sz="1050">
                 <a:solidFill>
                   <a:srgbClr val="334155"/>
                 </a:solidFill>
               </a:defRPr>
             </a:pPr>
             <a:r>
-              <a:t>• 60% of University Students: Over 60% of college enrollments are in non-engineering degrees (B.Com, BBA, MBA).</a:t>
+              <a:t>• Business Model Canvas (BMC), burn rate runway, SAFE note conversion.</a:t>
+            </a:r>
+          </a:p>
+          <a:p>
+            <a:pPr>
+              <a:spcAft>
+                <a:spcPts val="300"/>
+              </a:spcAft>
+              <a:defRPr sz="1050">
+                <a:solidFill>
+                  <a:srgbClr val="334155"/>
+                </a:solidFill>
+              </a:defRPr>
+            </a:pPr>
+            <a:r>
+              <a:t>• Cap table dilution and liquidation preference waterfalls.</a:t>
+            </a:r>
+          </a:p>
+          <a:p>
+            <a:pPr>
+              <a:spcAft>
+                <a:spcPts val="300"/>
+              </a:spcAft>
+              <a:defRPr sz="1050">
+                <a:solidFill>
+                  <a:srgbClr val="334155"/>
+                </a:solidFill>
+              </a:defRPr>
+            </a:pPr>
+            <a:r>
+              <a:t>• Career: Startup Founder, Venture Analyst.</a:t>
+            </a:r>
+          </a:p>
+        </p:txBody>
+      </p:sp>
+      <p:sp>
+        <p:nvSpPr>
+          <p:cNvPr id="16" name="Rounded Rectangle 15"/>
+          <p:cNvSpPr/>
+          <p:nvPr/>
+        </p:nvSpPr>
+        <p:spPr>
+          <a:xfrm>
+            <a:off x="8138160" y="4069080"/>
+            <a:ext cx="3291840" cy="2240280"/>
+          </a:xfrm>
+          <a:prstGeom prst="roundRect">
+            <a:avLst/>
+          </a:prstGeom>
+          <a:solidFill>
+            <a:srgbClr val="FFFFFF"/>
+          </a:solidFill>
+          <a:ln w="15240">
+            <a:solidFill>
+              <a:srgbClr val="E2E8F0"/>
+            </a:solidFill>
+          </a:ln>
+        </p:spPr>
+        <p:style>
+          <a:lnRef idx="1">
+            <a:schemeClr val="accent1"/>
+          </a:lnRef>
+          <a:fillRef idx="3">
+            <a:schemeClr val="accent1"/>
+          </a:fillRef>
+          <a:effectRef idx="2">
+            <a:schemeClr val="accent1"/>
+          </a:effectRef>
+          <a:fontRef idx="minor">
+            <a:schemeClr val="lt1"/>
+          </a:fontRef>
+        </p:style>
+        <p:txBody>
+          <a:bodyPr rtlCol="0" anchor="ctr"/>
+          <a:lstStyle/>
+          <a:p>
+            <a:pPr algn="ctr"/>
+          </a:p>
+        </p:txBody>
+      </p:sp>
+      <p:sp>
+        <p:nvSpPr>
+          <p:cNvPr id="17" name="TextBox 16"/>
+          <p:cNvSpPr txBox="1"/>
+          <p:nvPr/>
+        </p:nvSpPr>
+        <p:spPr>
+          <a:xfrm>
+            <a:off x="8321040" y="4233672"/>
+            <a:ext cx="2926080" cy="1911096"/>
+          </a:xfrm>
+          <a:prstGeom prst="rect">
+            <a:avLst/>
+          </a:prstGeom>
+          <a:noFill/>
+        </p:spPr>
+        <p:txBody>
+          <a:bodyPr wrap="square">
+            <a:spAutoFit/>
+          </a:bodyPr>
+          <a:lstStyle/>
+          <a:p>
+            <a:pPr>
+              <a:spcAft>
+                <a:spcPts val="200"/>
+              </a:spcAft>
+              <a:defRPr sz="950" b="1">
+                <a:solidFill>
+                  <a:srgbClr val="2563EB"/>
+                </a:solidFill>
+              </a:defRPr>
+            </a:pPr>
+            <a:r>
+              <a:t>DAYS 1–5 LIVE • D6–30 IN FLIGHT</a:t>
+            </a:r>
+          </a:p>
+          <a:p>
+            <a:pPr>
+              <a:spcAft>
+                <a:spcPts val="200"/>
+              </a:spcAft>
+              <a:defRPr sz="1400" b="1">
+                <a:solidFill>
+                  <a:srgbClr val="0F172A"/>
+                </a:solidFill>
+              </a:defRPr>
+            </a:pPr>
+            <a:r>
+              <a:t>Course 30: Supply Chain &amp; Ops</a:t>
             </a:r>
           </a:p>
           <a:p>
@@ -11756,59 +12840,59 @@
               <a:spcAft>
                 <a:spcPts val="400"/>
               </a:spcAft>
-              <a:defRPr sz="1150">
+              <a:defRPr sz="1050">
+                <a:solidFill>
+                  <a:srgbClr val="2563EB"/>
+                </a:solidFill>
+              </a:defRPr>
+            </a:pPr>
+            <a:r>
+              <a:t>Process Flow &amp; Inventory Control</a:t>
+            </a:r>
+          </a:p>
+          <a:p>
+            <a:pPr>
+              <a:spcAft>
+                <a:spcPts val="300"/>
+              </a:spcAft>
+              <a:defRPr sz="1050">
                 <a:solidFill>
                   <a:srgbClr val="334155"/>
                 </a:solidFill>
               </a:defRPr>
             </a:pPr>
             <a:r>
-              <a:t>• Zero Direct Competition: Almost all edtech competitors only teach coding. PinIT is first to bring interactive simulations to business students.</a:t>
-            </a:r>
-          </a:p>
-          <a:p>
-            <a:pPr>
-              <a:spcAft>
-                <a:spcPts val="400"/>
-              </a:spcAft>
-              <a:defRPr sz="1150">
+              <a:t>• Little's Law (WIP = Throughput * Cycle Time), EOQ inventory curves.</a:t>
+            </a:r>
+          </a:p>
+          <a:p>
+            <a:pPr>
+              <a:spcAft>
+                <a:spcPts val="300"/>
+              </a:spcAft>
+              <a:defRPr sz="1050">
                 <a:solidFill>
                   <a:srgbClr val="334155"/>
                 </a:solidFill>
               </a:defRPr>
             </a:pPr>
             <a:r>
-              <a:t>• Target Careers: Financial Analyst, Private Equity Analyst, Forensic Auditor, Tax Consultant at Big 4 accounting firms.</a:t>
-            </a:r>
-          </a:p>
-          <a:p>
-            <a:pPr>
-              <a:spcAft>
-                <a:spcPts val="400"/>
-              </a:spcAft>
-              <a:defRPr sz="1150">
+              <a:t>• Bullwhip effect reduction, Six Sigma Cpk quality control.</a:t>
+            </a:r>
+          </a:p>
+          <a:p>
+            <a:pPr>
+              <a:spcAft>
+                <a:spcPts val="300"/>
+              </a:spcAft>
+              <a:defRPr sz="1050">
                 <a:solidFill>
                   <a:srgbClr val="334155"/>
                 </a:solidFill>
               </a:defRPr>
             </a:pPr>
             <a:r>
-              <a:t>• Starting Salary: Rs 8 LPA to Rs 20 LPA ($80k–$150k global).</a:t>
-            </a:r>
-          </a:p>
-          <a:p>
-            <a:pPr>
-              <a:spcAft>
-                <a:spcPts val="400"/>
-              </a:spcAft>
-              <a:defRPr sz="1150">
-                <a:solidFill>
-                  <a:srgbClr val="334155"/>
-                </a:solidFill>
-              </a:defRPr>
-            </a:pPr>
-            <a:r>
-              <a:t>• Production Pipeline: Days 1-5 live today; Days 6-30 actively expanding via Branch B sub-agents.</a:t>
+              <a:t>• Career: Operations Director (Rs 10–22 LPA).</a:t>
             </a:r>
           </a:p>
         </p:txBody>
@@ -11930,7 +13014,7 @@
         <p:spPr>
           <a:xfrm>
             <a:off x="731520" y="320040"/>
-            <a:ext cx="2926080" cy="292608"/>
+            <a:ext cx="3291840" cy="292608"/>
           </a:xfrm>
           <a:prstGeom prst="roundRect">
             <a:avLst/>
@@ -11970,7 +13054,7 @@
               </a:defRPr>
             </a:pPr>
             <a:r>
-              <a:t>CAMPUS ONBOARDING &amp; SILICON</a:t>
+              <a:t>REVENUE &amp; COMMERCIAL GROWTH SYSTEMS</a:t>
             </a:r>
           </a:p>
         </p:txBody>
@@ -12033,14 +13117,14 @@
           <a:lstStyle/>
           <a:p>
             <a:pPr>
-              <a:defRPr sz="2200" b="1">
+              <a:defRPr sz="2100" b="1">
                 <a:solidFill>
                   <a:srgbClr val="0F172A"/>
                 </a:solidFill>
               </a:defRPr>
             </a:pPr>
             <a:r>
-              <a:t>Vertical 4: Freshman Launchpads &amp; IoT Hardware</a:t>
+              <a:t>Marketing, Sales, E-Commerce &amp; AI Transformation (Courses 25, 26, 27, 29, 31)</a:t>
             </a:r>
           </a:p>
         </p:txBody>
@@ -12054,7 +13138,7 @@
         <p:spPr>
           <a:xfrm>
             <a:off x="731520" y="1170432"/>
-            <a:ext cx="10698480" cy="365760"/>
+            <a:ext cx="10698480" cy="347472"/>
           </a:xfrm>
           <a:prstGeom prst="rect">
             <a:avLst/>
@@ -12075,7 +13159,7 @@
               </a:defRPr>
             </a:pPr>
             <a:r>
-              <a:t>Universal Onboarding for All Incoming Freshmen + Bare-Metal Semiconductor Systems</a:t>
+              <a:t>Training Revenue-Generating Leaders: From Digital Attribution to Enterprise AI Automation</a:t>
             </a:r>
           </a:p>
         </p:txBody>
@@ -12089,7 +13173,7 @@
         <p:spPr>
           <a:xfrm>
             <a:off x="731520" y="1645920"/>
-            <a:ext cx="5120640" cy="4480560"/>
+            <a:ext cx="5120640" cy="2240280"/>
           </a:xfrm>
           <a:prstGeom prst="roundRect">
             <a:avLst/>
@@ -12133,8 +13217,8 @@
         </p:nvSpPr>
         <p:spPr>
           <a:xfrm>
-            <a:off x="960120" y="1828800"/>
-            <a:ext cx="4663440" cy="4114800"/>
+            <a:off x="914400" y="1810512"/>
+            <a:ext cx="4754880" cy="1911096"/>
           </a:xfrm>
           <a:prstGeom prst="rect">
             <a:avLst/>
@@ -12151,14 +13235,14 @@
               <a:spcAft>
                 <a:spcPts val="200"/>
               </a:spcAft>
-              <a:defRPr sz="1000" b="1">
+              <a:defRPr sz="950" b="1">
                 <a:solidFill>
                   <a:srgbClr val="2563EB"/>
                 </a:solidFill>
               </a:defRPr>
             </a:pPr>
             <a:r>
-              <a:t>EVERY FRESHMAN'S STARTING POINT</a:t>
+              <a:t>DAYS 1–5 LIVE • DAYS 6–30 IN FLIGHT</a:t>
             </a:r>
           </a:p>
           <a:p>
@@ -12166,104 +13250,89 @@
               <a:spcAft>
                 <a:spcPts val="200"/>
               </a:spcAft>
-              <a:defRPr sz="1500" b="1">
+              <a:defRPr sz="1400" b="1">
                 <a:solidFill>
                   <a:srgbClr val="0F172A"/>
                 </a:solidFill>
               </a:defRPr>
             </a:pPr>
             <a:r>
-              <a:t>Freshman Universal Launchpads</a:t>
-            </a:r>
-          </a:p>
-          <a:p>
-            <a:pPr>
-              <a:spcAft>
-                <a:spcPts val="600"/>
-              </a:spcAft>
-              <a:defRPr sz="1100">
+              <a:t>Course 25 &amp; 26: Marketing &amp; Growth</a:t>
+            </a:r>
+          </a:p>
+          <a:p>
+            <a:pPr>
+              <a:spcAft>
+                <a:spcPts val="400"/>
+              </a:spcAft>
+              <a:defRPr sz="1050">
                 <a:solidFill>
                   <a:srgbClr val="2563EB"/>
                 </a:solidFill>
               </a:defRPr>
             </a:pPr>
             <a:r>
-              <a:t>Universal Freshman Adoption</a:t>
-            </a:r>
-          </a:p>
-          <a:p>
-            <a:pPr>
-              <a:spcAft>
-                <a:spcPts val="400"/>
-              </a:spcAft>
-              <a:defRPr sz="1150">
+              <a:t>Attribution Modeling &amp; Brand Strategy</a:t>
+            </a:r>
+          </a:p>
+          <a:p>
+            <a:pPr>
+              <a:spcAft>
+                <a:spcPts val="300"/>
+              </a:spcAft>
+              <a:defRPr sz="1050">
                 <a:solidFill>
                   <a:srgbClr val="334155"/>
                 </a:solidFill>
               </a:defRPr>
             </a:pPr>
             <a:r>
-              <a:t>• Excel &amp; Data Analytics (excel_viz): Days 1-10 complete! Power Query M, Star Schema, dynamic PivotTables, and OLS regression.</a:t>
-            </a:r>
-          </a:p>
-          <a:p>
-            <a:pPr>
-              <a:spcAft>
-                <a:spcPts val="400"/>
-              </a:spcAft>
-              <a:defRPr sz="1150">
+              <a:t>• Course 25: Marketing &amp; Brand Strategy: PESTLE, Porter's Five Forces, STP segmentation.</a:t>
+            </a:r>
+          </a:p>
+          <a:p>
+            <a:pPr>
+              <a:spcAft>
+                <a:spcPts val="300"/>
+              </a:spcAft>
+              <a:defRPr sz="1050">
                 <a:solidFill>
                   <a:srgbClr val="334155"/>
                 </a:solidFill>
               </a:defRPr>
             </a:pPr>
             <a:r>
-              <a:t>• Computer OS Fundamentals (comp_fund): Linux terminal navigation, I/O streams, and pipelines.</a:t>
-            </a:r>
-          </a:p>
-          <a:p>
-            <a:pPr>
-              <a:spcAft>
-                <a:spcPts val="400"/>
-              </a:spcAft>
-              <a:defRPr sz="1150">
+              <a:t>• Course 26: Digital Marketing Analytics: Programmatic ad auctions, multi-touch attribution.</a:t>
+            </a:r>
+          </a:p>
+          <a:p>
+            <a:pPr>
+              <a:spcAft>
+                <a:spcPts val="300"/>
+              </a:spcAft>
+              <a:defRPr sz="1050">
                 <a:solidFill>
                   <a:srgbClr val="334155"/>
                 </a:solidFill>
               </a:defRPr>
             </a:pPr>
             <a:r>
-              <a:t>• Git &amp; Version Control (git_vcs): Code collaboration, branching, pull requests, and GitHub portfolios.</a:t>
-            </a:r>
-          </a:p>
-          <a:p>
-            <a:pPr>
-              <a:spcAft>
-                <a:spcPts val="400"/>
-              </a:spcAft>
-              <a:defRPr sz="1150">
+              <a:t>• Funnel Simulator: Visualizes CAC payback periods and conversion drop-offs.</a:t>
+            </a:r>
+          </a:p>
+          <a:p>
+            <a:pPr>
+              <a:spcAft>
+                <a:spcPts val="300"/>
+              </a:spcAft>
+              <a:defRPr sz="1050">
                 <a:solidFill>
                   <a:srgbClr val="334155"/>
                 </a:solidFill>
               </a:defRPr>
             </a:pPr>
             <a:r>
-              <a:t>• Tech Soft Skills &amp; Interviews (soft_skills): Socratic STAR interview technique, executive bottom-line communication.</a:t>
-            </a:r>
-          </a:p>
-          <a:p>
-            <a:pPr>
-              <a:spcAft>
-                <a:spcPts val="400"/>
-              </a:spcAft>
-              <a:defRPr sz="1150">
-                <a:solidFill>
-                  <a:srgbClr val="334155"/>
-                </a:solidFill>
-              </a:defRPr>
-            </a:pPr>
-            <a:r>
-              <a:t>• Strategic Role: Guarantees that every incoming freshman builds immediate workplace confidence in their first semester.</a:t>
+              <a:t>• Career: Growth Marketing Lead, Performance Marketer (Rs 9–20 LPA).</a:t>
             </a:r>
           </a:p>
         </p:txBody>
@@ -12277,7 +13346,338 @@
         <p:spPr>
           <a:xfrm>
             <a:off x="6217920" y="1645920"/>
-            <a:ext cx="5212080" cy="4480560"/>
+            <a:ext cx="5212080" cy="2240280"/>
+          </a:xfrm>
+          <a:prstGeom prst="roundRect">
+            <a:avLst/>
+          </a:prstGeom>
+          <a:solidFill>
+            <a:srgbClr val="FFFFFF"/>
+          </a:solidFill>
+          <a:ln w="15240">
+            <a:solidFill>
+              <a:srgbClr val="BBF7D0"/>
+            </a:solidFill>
+          </a:ln>
+        </p:spPr>
+        <p:style>
+          <a:lnRef idx="1">
+            <a:schemeClr val="accent1"/>
+          </a:lnRef>
+          <a:fillRef idx="3">
+            <a:schemeClr val="accent1"/>
+          </a:fillRef>
+          <a:effectRef idx="2">
+            <a:schemeClr val="accent1"/>
+          </a:effectRef>
+          <a:fontRef idx="minor">
+            <a:schemeClr val="lt1"/>
+          </a:fontRef>
+        </p:style>
+        <p:txBody>
+          <a:bodyPr rtlCol="0" anchor="ctr"/>
+          <a:lstStyle/>
+          <a:p>
+            <a:pPr algn="ctr"/>
+          </a:p>
+        </p:txBody>
+      </p:sp>
+      <p:sp>
+        <p:nvSpPr>
+          <p:cNvPr id="11" name="TextBox 10"/>
+          <p:cNvSpPr txBox="1"/>
+          <p:nvPr/>
+        </p:nvSpPr>
+        <p:spPr>
+          <a:xfrm>
+            <a:off x="6400800" y="1810512"/>
+            <a:ext cx="4846320" cy="1911096"/>
+          </a:xfrm>
+          <a:prstGeom prst="rect">
+            <a:avLst/>
+          </a:prstGeom>
+          <a:noFill/>
+        </p:spPr>
+        <p:txBody>
+          <a:bodyPr wrap="square">
+            <a:spAutoFit/>
+          </a:bodyPr>
+          <a:lstStyle/>
+          <a:p>
+            <a:pPr>
+              <a:spcAft>
+                <a:spcPts val="200"/>
+              </a:spcAft>
+              <a:defRPr sz="950" b="1">
+                <a:solidFill>
+                  <a:srgbClr val="10B981"/>
+                </a:solidFill>
+              </a:defRPr>
+            </a:pPr>
+            <a:r>
+              <a:t>DAYS 1–5 LIVE • DAYS 6–30 IN FLIGHT</a:t>
+            </a:r>
+          </a:p>
+          <a:p>
+            <a:pPr>
+              <a:spcAft>
+                <a:spcPts val="200"/>
+              </a:spcAft>
+              <a:defRPr sz="1400" b="1">
+                <a:solidFill>
+                  <a:srgbClr val="0F172A"/>
+                </a:solidFill>
+              </a:defRPr>
+            </a:pPr>
+            <a:r>
+              <a:t>Course 27: E-Commerce &amp; Digital Business</a:t>
+            </a:r>
+          </a:p>
+          <a:p>
+            <a:pPr>
+              <a:spcAft>
+                <a:spcPts val="400"/>
+              </a:spcAft>
+              <a:defRPr sz="1050">
+                <a:solidFill>
+                  <a:srgbClr val="10B981"/>
+                </a:solidFill>
+              </a:defRPr>
+            </a:pPr>
+            <a:r>
+              <a:t>Marketplace Economics &amp; Store UX</a:t>
+            </a:r>
+          </a:p>
+          <a:p>
+            <a:pPr>
+              <a:spcAft>
+                <a:spcPts val="300"/>
+              </a:spcAft>
+              <a:defRPr sz="1050">
+                <a:solidFill>
+                  <a:srgbClr val="334155"/>
+                </a:solidFill>
+              </a:defRPr>
+            </a:pPr>
+            <a:r>
+              <a:t>• Two-sided marketplace economics, take rate commission modeling, dynamic pricing.</a:t>
+            </a:r>
+          </a:p>
+          <a:p>
+            <a:pPr>
+              <a:spcAft>
+                <a:spcPts val="300"/>
+              </a:spcAft>
+              <a:defRPr sz="1050">
+                <a:solidFill>
+                  <a:srgbClr val="334155"/>
+                </a:solidFill>
+              </a:defRPr>
+            </a:pPr>
+            <a:r>
+              <a:t>• Cart abandonment funnels, payment gateway APIs, and reverse logistics margins.</a:t>
+            </a:r>
+          </a:p>
+          <a:p>
+            <a:pPr>
+              <a:spcAft>
+                <a:spcPts val="300"/>
+              </a:spcAft>
+              <a:defRPr sz="1050">
+                <a:solidFill>
+                  <a:srgbClr val="334155"/>
+                </a:solidFill>
+              </a:defRPr>
+            </a:pPr>
+            <a:r>
+              <a:t>• Funnel Simulator: Optimizes 1-click checkout and warehouse SLA routing.</a:t>
+            </a:r>
+          </a:p>
+          <a:p>
+            <a:pPr>
+              <a:spcAft>
+                <a:spcPts val="300"/>
+              </a:spcAft>
+              <a:defRPr sz="1050">
+                <a:solidFill>
+                  <a:srgbClr val="334155"/>
+                </a:solidFill>
+              </a:defRPr>
+            </a:pPr>
+            <a:r>
+              <a:t>• Career: E-Commerce Category Manager, Marketplace Operations (Rs 10–22 LPA).</a:t>
+            </a:r>
+          </a:p>
+        </p:txBody>
+      </p:sp>
+      <p:sp>
+        <p:nvSpPr>
+          <p:cNvPr id="12" name="Rounded Rectangle 11"/>
+          <p:cNvSpPr/>
+          <p:nvPr/>
+        </p:nvSpPr>
+        <p:spPr>
+          <a:xfrm>
+            <a:off x="731520" y="4069080"/>
+            <a:ext cx="5120640" cy="2240280"/>
+          </a:xfrm>
+          <a:prstGeom prst="roundRect">
+            <a:avLst/>
+          </a:prstGeom>
+          <a:solidFill>
+            <a:srgbClr val="FFFFFF"/>
+          </a:solidFill>
+          <a:ln w="15240">
+            <a:solidFill>
+              <a:srgbClr val="FDE68A"/>
+            </a:solidFill>
+          </a:ln>
+        </p:spPr>
+        <p:style>
+          <a:lnRef idx="1">
+            <a:schemeClr val="accent1"/>
+          </a:lnRef>
+          <a:fillRef idx="3">
+            <a:schemeClr val="accent1"/>
+          </a:fillRef>
+          <a:effectRef idx="2">
+            <a:schemeClr val="accent1"/>
+          </a:effectRef>
+          <a:fontRef idx="minor">
+            <a:schemeClr val="lt1"/>
+          </a:fontRef>
+        </p:style>
+        <p:txBody>
+          <a:bodyPr rtlCol="0" anchor="ctr"/>
+          <a:lstStyle/>
+          <a:p>
+            <a:pPr algn="ctr"/>
+          </a:p>
+        </p:txBody>
+      </p:sp>
+      <p:sp>
+        <p:nvSpPr>
+          <p:cNvPr id="13" name="TextBox 12"/>
+          <p:cNvSpPr txBox="1"/>
+          <p:nvPr/>
+        </p:nvSpPr>
+        <p:spPr>
+          <a:xfrm>
+            <a:off x="914400" y="4233672"/>
+            <a:ext cx="4754880" cy="1911096"/>
+          </a:xfrm>
+          <a:prstGeom prst="rect">
+            <a:avLst/>
+          </a:prstGeom>
+          <a:noFill/>
+        </p:spPr>
+        <p:txBody>
+          <a:bodyPr wrap="square">
+            <a:spAutoFit/>
+          </a:bodyPr>
+          <a:lstStyle/>
+          <a:p>
+            <a:pPr>
+              <a:spcAft>
+                <a:spcPts val="200"/>
+              </a:spcAft>
+              <a:defRPr sz="950" b="1">
+                <a:solidFill>
+                  <a:srgbClr val="D97706"/>
+                </a:solidFill>
+              </a:defRPr>
+            </a:pPr>
+            <a:r>
+              <a:t>DAYS 1–5 LIVE • DAYS 6–30 IN FLIGHT</a:t>
+            </a:r>
+          </a:p>
+          <a:p>
+            <a:pPr>
+              <a:spcAft>
+                <a:spcPts val="200"/>
+              </a:spcAft>
+              <a:defRPr sz="1400" b="1">
+                <a:solidFill>
+                  <a:srgbClr val="0F172A"/>
+                </a:solidFill>
+              </a:defRPr>
+            </a:pPr>
+            <a:r>
+              <a:t>Course 29: Enterprise B2B Sales &amp; CRM</a:t>
+            </a:r>
+          </a:p>
+          <a:p>
+            <a:pPr>
+              <a:spcAft>
+                <a:spcPts val="400"/>
+              </a:spcAft>
+              <a:defRPr sz="1050">
+                <a:solidFill>
+                  <a:srgbClr val="D97706"/>
+                </a:solidFill>
+              </a:defRPr>
+            </a:pPr>
+            <a:r>
+              <a:t>B2B Pipeline Velocity &amp; Deal Defense</a:t>
+            </a:r>
+          </a:p>
+          <a:p>
+            <a:pPr>
+              <a:spcAft>
+                <a:spcPts val="300"/>
+              </a:spcAft>
+              <a:defRPr sz="1050">
+                <a:solidFill>
+                  <a:srgbClr val="334155"/>
+                </a:solidFill>
+              </a:defRPr>
+            </a:pPr>
+            <a:r>
+              <a:t>• B2B pipeline velocity math, BANT qualification, MEDDPICC deal defense.</a:t>
+            </a:r>
+          </a:p>
+          <a:p>
+            <a:pPr>
+              <a:spcAft>
+                <a:spcPts val="300"/>
+              </a:spcAft>
+              <a:defRPr sz="1050">
+                <a:solidFill>
+                  <a:srgbClr val="334155"/>
+                </a:solidFill>
+              </a:defRPr>
+            </a:pPr>
+            <a:r>
+              <a:t>• LTV:CAC unit economics, proactive churn intervention playbooks, CPQ guardrails.</a:t>
+            </a:r>
+          </a:p>
+          <a:p>
+            <a:pPr>
+              <a:spcAft>
+                <a:spcPts val="300"/>
+              </a:spcAft>
+              <a:defRPr sz="1050">
+                <a:solidFill>
+                  <a:srgbClr val="334155"/>
+                </a:solidFill>
+              </a:defRPr>
+            </a:pPr>
+            <a:r>
+              <a:t>• Career: Enterprise Account Executive, Customer Success Director (Rs 12–25 LPA).</a:t>
+            </a:r>
+          </a:p>
+        </p:txBody>
+      </p:sp>
+      <p:sp>
+        <p:nvSpPr>
+          <p:cNvPr id="14" name="Rounded Rectangle 13"/>
+          <p:cNvSpPr/>
+          <p:nvPr/>
+        </p:nvSpPr>
+        <p:spPr>
+          <a:xfrm>
+            <a:off x="6217920" y="4069080"/>
+            <a:ext cx="5212080" cy="2240280"/>
           </a:xfrm>
           <a:prstGeom prst="roundRect">
             <a:avLst/>
@@ -12315,14 +13715,14 @@
       </p:sp>
       <p:sp>
         <p:nvSpPr>
-          <p:cNvPr id="11" name="TextBox 10"/>
+          <p:cNvPr id="15" name="TextBox 14"/>
           <p:cNvSpPr txBox="1"/>
           <p:nvPr/>
         </p:nvSpPr>
         <p:spPr>
           <a:xfrm>
-            <a:off x="6446520" y="1828800"/>
-            <a:ext cx="4754880" cy="4114800"/>
+            <a:off x="6400800" y="4233672"/>
+            <a:ext cx="4846320" cy="1911096"/>
           </a:xfrm>
           <a:prstGeom prst="rect">
             <a:avLst/>
@@ -12339,14 +13739,14 @@
               <a:spcAft>
                 <a:spcPts val="200"/>
               </a:spcAft>
-              <a:defRPr sz="1000" b="1">
+              <a:defRPr sz="950" b="1">
                 <a:solidFill>
                   <a:srgbClr val="7E22CE"/>
                 </a:solidFill>
               </a:defRPr>
             </a:pPr>
             <a:r>
-              <a:t>CONNECTING SOFTWARE TO CHIPS</a:t>
+              <a:t>DAYS 1–5 LIVE • DAYS 6–30 IN FLIGHT</a:t>
             </a:r>
           </a:p>
           <a:p>
@@ -12354,104 +13754,74 @@
               <a:spcAft>
                 <a:spcPts val="200"/>
               </a:spcAft>
-              <a:defRPr sz="1500" b="1">
+              <a:defRPr sz="1400" b="1">
                 <a:solidFill>
                   <a:srgbClr val="0F172A"/>
                 </a:solidFill>
               </a:defRPr>
             </a:pPr>
             <a:r>
-              <a:t>IoT &amp; Silicon Hardware Systems</a:t>
-            </a:r>
-          </a:p>
-          <a:p>
-            <a:pPr>
-              <a:spcAft>
-                <a:spcPts val="600"/>
-              </a:spcAft>
-              <a:defRPr sz="1100">
+              <a:t>Course 31: AI &amp; Digital Transformation</a:t>
+            </a:r>
+          </a:p>
+          <a:p>
+            <a:pPr>
+              <a:spcAft>
+                <a:spcPts val="400"/>
+              </a:spcAft>
+              <a:defRPr sz="1050">
                 <a:solidFill>
                   <a:srgbClr val="7E22CE"/>
                 </a:solidFill>
               </a:defRPr>
             </a:pPr>
             <a:r>
-              <a:t>High Growth Hardware Career Tracks</a:t>
-            </a:r>
-          </a:p>
-          <a:p>
-            <a:pPr>
-              <a:spcAft>
-                <a:spcPts val="400"/>
-              </a:spcAft>
-              <a:defRPr sz="1150">
+              <a:t>Enterprise AI Adoption &amp; Process Mining</a:t>
+            </a:r>
+          </a:p>
+          <a:p>
+            <a:pPr>
+              <a:spcAft>
+                <a:spcPts val="300"/>
+              </a:spcAft>
+              <a:defRPr sz="1050">
                 <a:solidFill>
                   <a:srgbClr val="334155"/>
                 </a:solidFill>
               </a:defRPr>
             </a:pPr>
             <a:r>
-              <a:t>• Embedded Firmware (iot_emb): C++ bare-metal programming, memory maps, volatile hardware pointers.</a:t>
-            </a:r>
-          </a:p>
-          <a:p>
-            <a:pPr>
-              <a:spcAft>
-                <a:spcPts val="400"/>
-              </a:spcAft>
-              <a:defRPr sz="1150">
+              <a:t>• Hyperautomation: Deterministic RPA bots vs probabilistic cognitive AI agents.</a:t>
+            </a:r>
+          </a:p>
+          <a:p>
+            <a:pPr>
+              <a:spcAft>
+                <a:spcPts val="300"/>
+              </a:spcAft>
+              <a:defRPr sz="1050">
                 <a:solidFill>
                   <a:srgbClr val="334155"/>
                 </a:solidFill>
               </a:defRPr>
             </a:pPr>
             <a:r>
-              <a:t>• TinyML Edge AI (iot_edge): Running quantized INT8 neural networks on tiny microcontrollers.</a:t>
-            </a:r>
-          </a:p>
-          <a:p>
-            <a:pPr>
-              <a:spcAft>
-                <a:spcPts val="400"/>
-              </a:spcAft>
-              <a:defRPr sz="1150">
+              <a:t>• Process mining on ERP event logs, automation economics (FTE labor savings).</a:t>
+            </a:r>
+          </a:p>
+          <a:p>
+            <a:pPr>
+              <a:spcAft>
+                <a:spcPts val="300"/>
+              </a:spcAft>
+              <a:defRPr sz="1050">
                 <a:solidFill>
                   <a:srgbClr val="334155"/>
                 </a:solidFill>
               </a:defRPr>
             </a:pPr>
             <a:r>
-              <a:t>• Hardware Root of Trust (iot_sec): OTP eFuses, secure boot chains, ARM TrustZone memory partitioning.</a:t>
-            </a:r>
-          </a:p>
-          <a:p>
-            <a:pPr>
-              <a:spcAft>
-                <a:spcPts val="400"/>
-              </a:spcAft>
-              <a:defRPr sz="1150">
-                <a:solidFill>
-                  <a:srgbClr val="334155"/>
-                </a:solidFill>
-              </a:defRPr>
-            </a:pPr>
-            <a:r>
-              <a:t>• IoT Radio Protocols (iot_net): Friis link budgets, IEEE 802.15.4 MAC frames, 6LoWPAN, CoAP/MQTT-SN.</a:t>
-            </a:r>
-          </a:p>
-          <a:p>
-            <a:pPr>
-              <a:spcAft>
-                <a:spcPts val="400"/>
-              </a:spcAft>
-              <a:defRPr sz="1150">
-                <a:solidFill>
-                  <a:srgbClr val="334155"/>
-                </a:solidFill>
-              </a:defRPr>
-            </a:pPr>
-            <a:r>
-              <a:t>• Market Opportunity: Perfectly aligned with India's $50B national semiconductor and electronics manufacturing mission.</a:t>
+              <a:t>• Career: Management Consultant, Chief Digital Officer Staff (Rs 14–28 LPA).</a:t>
             </a:r>
           </a:p>
         </p:txBody>
